--- a/Presentacion.pptx
+++ b/Presentacion.pptx
@@ -5,21 +5,19 @@
     <p:sldMasterId id="2147483648" r:id="rId1"/>
   </p:sldMasterIdLst>
   <p:notesMasterIdLst>
-    <p:notesMasterId r:id="rId14"/>
+    <p:notesMasterId r:id="rId12"/>
   </p:notesMasterIdLst>
   <p:sldIdLst>
     <p:sldId id="256" r:id="rId2"/>
     <p:sldId id="257" r:id="rId3"/>
     <p:sldId id="258" r:id="rId4"/>
-    <p:sldId id="259" r:id="rId5"/>
-    <p:sldId id="260" r:id="rId6"/>
-    <p:sldId id="267" r:id="rId7"/>
-    <p:sldId id="261" r:id="rId8"/>
-    <p:sldId id="262" r:id="rId9"/>
-    <p:sldId id="263" r:id="rId10"/>
-    <p:sldId id="264" r:id="rId11"/>
-    <p:sldId id="265" r:id="rId12"/>
-    <p:sldId id="266" r:id="rId13"/>
+    <p:sldId id="267" r:id="rId5"/>
+    <p:sldId id="261" r:id="rId6"/>
+    <p:sldId id="262" r:id="rId7"/>
+    <p:sldId id="263" r:id="rId8"/>
+    <p:sldId id="264" r:id="rId9"/>
+    <p:sldId id="265" r:id="rId10"/>
+    <p:sldId id="266" r:id="rId11"/>
   </p:sldIdLst>
   <p:sldSz cx="9144000" cy="5143500" type="screen16x9"/>
   <p:notesSz cx="5143500" cy="9144000"/>
@@ -337,198 +335,6 @@
   <p:cSld>
     <p:spTree>
       <p:nvGrpSpPr>
-        <p:cNvPr id="1" name=""/>
-        <p:cNvGrpSpPr/>
-        <p:nvPr/>
-      </p:nvGrpSpPr>
-      <p:grpSpPr>
-        <a:xfrm>
-          <a:off x="0" y="0"/>
-          <a:ext cx="0" cy="0"/>
-          <a:chOff x="0" y="0"/>
-          <a:chExt cx="0" cy="0"/>
-        </a:xfrm>
-      </p:grpSpPr>
-      <p:sp>
-        <p:nvSpPr>
-          <p:cNvPr id="2" name="Slide Image Placeholder 1"/>
-          <p:cNvSpPr>
-            <a:spLocks noGrp="1" noRot="1" noChangeAspect="1"/>
-          </p:cNvSpPr>
-          <p:nvPr>
-            <p:ph type="sldImg"/>
-          </p:nvPr>
-        </p:nvSpPr>
-        <p:spPr/>
-      </p:sp>
-      <p:sp>
-        <p:nvSpPr>
-          <p:cNvPr id="3" name="Notes Placeholder 2"/>
-          <p:cNvSpPr>
-            <a:spLocks noGrp="1"/>
-          </p:cNvSpPr>
-          <p:nvPr>
-            <p:ph type="body" idx="1"/>
-          </p:nvPr>
-        </p:nvSpPr>
-        <p:spPr/>
-        <p:txBody>
-          <a:bodyPr/>
-          <a:lstStyle/>
-          <a:p>
-            <a:endParaRPr lang="en-US" dirty="0"/>
-          </a:p>
-        </p:txBody>
-      </p:sp>
-      <p:sp>
-        <p:nvSpPr>
-          <p:cNvPr id="4" name="Slide Number Placeholder 3"/>
-          <p:cNvSpPr>
-            <a:spLocks noGrp="1"/>
-          </p:cNvSpPr>
-          <p:nvPr>
-            <p:ph type="sldNum" sz="quarter" idx="10"/>
-          </p:nvPr>
-        </p:nvSpPr>
-        <p:spPr/>
-        <p:txBody>
-          <a:bodyPr/>
-          <a:lstStyle/>
-          <a:p>
-            <a:fld id="{F7021451-1387-4CA6-816F-3879F97B5CBC}" type="slidenum">
-              <a:rPr lang="en-US"/>
-              <a:t>10</a:t>
-            </a:fld>
-            <a:endParaRPr lang="en-US"/>
-          </a:p>
-        </p:txBody>
-      </p:sp>
-    </p:spTree>
-    <p:extLst>
-      <p:ext uri="{BB962C8B-B14F-4D97-AF65-F5344CB8AC3E}">
-        <p14:creationId xmlns:p14="http://schemas.microsoft.com/office/powerpoint/2010/main" val="1024086991"/>
-      </p:ext>
-    </p:extLst>
-  </p:cSld>
-  <p:clrMapOvr>
-    <a:masterClrMapping/>
-  </p:clrMapOvr>
-</p:notes>
-</file>
-
-<file path=ppt/notesSlides/notesSlide11.xml><?xml version="1.0" encoding="utf-8"?>
-<p:notes xmlns:a="http://schemas.openxmlformats.org/drawingml/2006/main" xmlns:r="http://schemas.openxmlformats.org/officeDocument/2006/relationships" xmlns:p="http://schemas.openxmlformats.org/presentationml/2006/main">
-  <p:cSld>
-    <p:spTree>
-      <p:nvGrpSpPr>
-        <p:cNvPr id="1" name="">
-          <a:extLst>
-            <a:ext uri="{FF2B5EF4-FFF2-40B4-BE49-F238E27FC236}">
-              <a16:creationId xmlns:a16="http://schemas.microsoft.com/office/drawing/2014/main" id="{752C500F-F2C9-D3F1-1E15-D35E74A18BDA}"/>
-            </a:ext>
-          </a:extLst>
-        </p:cNvPr>
-        <p:cNvGrpSpPr/>
-        <p:nvPr/>
-      </p:nvGrpSpPr>
-      <p:grpSpPr>
-        <a:xfrm>
-          <a:off x="0" y="0"/>
-          <a:ext cx="0" cy="0"/>
-          <a:chOff x="0" y="0"/>
-          <a:chExt cx="0" cy="0"/>
-        </a:xfrm>
-      </p:grpSpPr>
-      <p:sp>
-        <p:nvSpPr>
-          <p:cNvPr id="2" name="Slide Image Placeholder 1">
-            <a:extLst>
-              <a:ext uri="{FF2B5EF4-FFF2-40B4-BE49-F238E27FC236}">
-                <a16:creationId xmlns:a16="http://schemas.microsoft.com/office/drawing/2014/main" id="{2AE5A70A-56CC-6947-C626-F26753C26AC0}"/>
-              </a:ext>
-            </a:extLst>
-          </p:cNvPr>
-          <p:cNvSpPr>
-            <a:spLocks noGrp="1" noRot="1" noChangeAspect="1"/>
-          </p:cNvSpPr>
-          <p:nvPr>
-            <p:ph type="sldImg"/>
-          </p:nvPr>
-        </p:nvSpPr>
-        <p:spPr/>
-      </p:sp>
-      <p:sp>
-        <p:nvSpPr>
-          <p:cNvPr id="3" name="Notes Placeholder 2">
-            <a:extLst>
-              <a:ext uri="{FF2B5EF4-FFF2-40B4-BE49-F238E27FC236}">
-                <a16:creationId xmlns:a16="http://schemas.microsoft.com/office/drawing/2014/main" id="{FD6925A2-4D7C-57B6-EC3D-0EB88931BC06}"/>
-              </a:ext>
-            </a:extLst>
-          </p:cNvPr>
-          <p:cNvSpPr>
-            <a:spLocks noGrp="1"/>
-          </p:cNvSpPr>
-          <p:nvPr>
-            <p:ph type="body" idx="1"/>
-          </p:nvPr>
-        </p:nvSpPr>
-        <p:spPr/>
-        <p:txBody>
-          <a:bodyPr/>
-          <a:lstStyle/>
-          <a:p>
-            <a:endParaRPr lang="en-US" dirty="0"/>
-          </a:p>
-        </p:txBody>
-      </p:sp>
-      <p:sp>
-        <p:nvSpPr>
-          <p:cNvPr id="4" name="Slide Number Placeholder 3">
-            <a:extLst>
-              <a:ext uri="{FF2B5EF4-FFF2-40B4-BE49-F238E27FC236}">
-                <a16:creationId xmlns:a16="http://schemas.microsoft.com/office/drawing/2014/main" id="{4C8E3DA0-FB91-0801-09EF-8AE9C0310448}"/>
-              </a:ext>
-            </a:extLst>
-          </p:cNvPr>
-          <p:cNvSpPr>
-            <a:spLocks noGrp="1"/>
-          </p:cNvSpPr>
-          <p:nvPr>
-            <p:ph type="sldNum" sz="quarter" idx="10"/>
-          </p:nvPr>
-        </p:nvSpPr>
-        <p:spPr/>
-        <p:txBody>
-          <a:bodyPr/>
-          <a:lstStyle/>
-          <a:p>
-            <a:fld id="{F7021451-1387-4CA6-816F-3879F97B5CBC}" type="slidenum">
-              <a:rPr lang="en-US"/>
-              <a:t>11</a:t>
-            </a:fld>
-            <a:endParaRPr lang="en-US"/>
-          </a:p>
-        </p:txBody>
-      </p:sp>
-    </p:spTree>
-    <p:extLst>
-      <p:ext uri="{BB962C8B-B14F-4D97-AF65-F5344CB8AC3E}">
-        <p14:creationId xmlns:p14="http://schemas.microsoft.com/office/powerpoint/2010/main" val="3227629683"/>
-      </p:ext>
-    </p:extLst>
-  </p:cSld>
-  <p:clrMapOvr>
-    <a:masterClrMapping/>
-  </p:clrMapOvr>
-</p:notes>
-</file>
-
-<file path=ppt/notesSlides/notesSlide12.xml><?xml version="1.0" encoding="utf-8"?>
-<p:notes xmlns:a="http://schemas.openxmlformats.org/drawingml/2006/main" xmlns:r="http://schemas.openxmlformats.org/officeDocument/2006/relationships" xmlns:p="http://schemas.openxmlformats.org/presentationml/2006/main">
-  <p:cSld>
-    <p:spTree>
-      <p:nvGrpSpPr>
         <p:cNvPr id="1" name="">
           <a:extLst>
             <a:ext uri="{FF2B5EF4-FFF2-40B4-BE49-F238E27FC236}">
@@ -613,7 +419,7 @@
           <a:p>
             <a:fld id="{F7021451-1387-4CA6-816F-3879F97B5CBC}" type="slidenum">
               <a:rPr lang="en-US"/>
-              <a:t>12</a:t>
+              <a:t>10</a:t>
             </a:fld>
             <a:endParaRPr lang="en-US"/>
           </a:p>
@@ -805,7 +611,13 @@
   <p:cSld>
     <p:spTree>
       <p:nvGrpSpPr>
-        <p:cNvPr id="1" name=""/>
+        <p:cNvPr id="1" name="">
+          <a:extLst>
+            <a:ext uri="{FF2B5EF4-FFF2-40B4-BE49-F238E27FC236}">
+              <a16:creationId xmlns:a16="http://schemas.microsoft.com/office/drawing/2014/main" id="{E06932CE-3878-AAB4-0893-BEA4EEB63137}"/>
+            </a:ext>
+          </a:extLst>
+        </p:cNvPr>
         <p:cNvGrpSpPr/>
         <p:nvPr/>
       </p:nvGrpSpPr>
@@ -819,7 +631,13 @@
       </p:grpSpPr>
       <p:sp>
         <p:nvSpPr>
-          <p:cNvPr id="2" name="Slide Image Placeholder 1"/>
+          <p:cNvPr id="2" name="Slide Image Placeholder 1">
+            <a:extLst>
+              <a:ext uri="{FF2B5EF4-FFF2-40B4-BE49-F238E27FC236}">
+                <a16:creationId xmlns:a16="http://schemas.microsoft.com/office/drawing/2014/main" id="{61CACB51-DCB7-3411-0539-A6908AC5781E}"/>
+              </a:ext>
+            </a:extLst>
+          </p:cNvPr>
           <p:cNvSpPr>
             <a:spLocks noGrp="1" noRot="1" noChangeAspect="1"/>
           </p:cNvSpPr>
@@ -831,7 +649,13 @@
       </p:sp>
       <p:sp>
         <p:nvSpPr>
-          <p:cNvPr id="3" name="Notes Placeholder 2"/>
+          <p:cNvPr id="3" name="Notes Placeholder 2">
+            <a:extLst>
+              <a:ext uri="{FF2B5EF4-FFF2-40B4-BE49-F238E27FC236}">
+                <a16:creationId xmlns:a16="http://schemas.microsoft.com/office/drawing/2014/main" id="{B725AEC7-959C-C478-4EEB-866CE60E8EEC}"/>
+              </a:ext>
+            </a:extLst>
+          </p:cNvPr>
           <p:cNvSpPr>
             <a:spLocks noGrp="1"/>
           </p:cNvSpPr>
@@ -850,7 +674,13 @@
       </p:sp>
       <p:sp>
         <p:nvSpPr>
-          <p:cNvPr id="4" name="Slide Number Placeholder 3"/>
+          <p:cNvPr id="4" name="Slide Number Placeholder 3">
+            <a:extLst>
+              <a:ext uri="{FF2B5EF4-FFF2-40B4-BE49-F238E27FC236}">
+                <a16:creationId xmlns:a16="http://schemas.microsoft.com/office/drawing/2014/main" id="{FF7AA3CD-673D-53B5-8E93-FA1114FAAEF3}"/>
+              </a:ext>
+            </a:extLst>
+          </p:cNvPr>
           <p:cNvSpPr>
             <a:spLocks noGrp="1"/>
           </p:cNvSpPr>
@@ -874,7 +704,7 @@
     </p:spTree>
     <p:extLst>
       <p:ext uri="{BB962C8B-B14F-4D97-AF65-F5344CB8AC3E}">
-        <p14:creationId xmlns:p14="http://schemas.microsoft.com/office/powerpoint/2010/main" val="1024086991"/>
+        <p14:creationId xmlns:p14="http://schemas.microsoft.com/office/powerpoint/2010/main" val="2850681273"/>
       </p:ext>
     </p:extLst>
   </p:cSld>
@@ -973,13 +803,7 @@
   <p:cSld>
     <p:spTree>
       <p:nvGrpSpPr>
-        <p:cNvPr id="1" name="">
-          <a:extLst>
-            <a:ext uri="{FF2B5EF4-FFF2-40B4-BE49-F238E27FC236}">
-              <a16:creationId xmlns:a16="http://schemas.microsoft.com/office/drawing/2014/main" id="{E06932CE-3878-AAB4-0893-BEA4EEB63137}"/>
-            </a:ext>
-          </a:extLst>
-        </p:cNvPr>
+        <p:cNvPr id="1" name=""/>
         <p:cNvGrpSpPr/>
         <p:nvPr/>
       </p:nvGrpSpPr>
@@ -993,13 +817,7 @@
       </p:grpSpPr>
       <p:sp>
         <p:nvSpPr>
-          <p:cNvPr id="2" name="Slide Image Placeholder 1">
-            <a:extLst>
-              <a:ext uri="{FF2B5EF4-FFF2-40B4-BE49-F238E27FC236}">
-                <a16:creationId xmlns:a16="http://schemas.microsoft.com/office/drawing/2014/main" id="{61CACB51-DCB7-3411-0539-A6908AC5781E}"/>
-              </a:ext>
-            </a:extLst>
-          </p:cNvPr>
+          <p:cNvPr id="2" name="Slide Image Placeholder 1"/>
           <p:cNvSpPr>
             <a:spLocks noGrp="1" noRot="1" noChangeAspect="1"/>
           </p:cNvSpPr>
@@ -1011,13 +829,7 @@
       </p:sp>
       <p:sp>
         <p:nvSpPr>
-          <p:cNvPr id="3" name="Notes Placeholder 2">
-            <a:extLst>
-              <a:ext uri="{FF2B5EF4-FFF2-40B4-BE49-F238E27FC236}">
-                <a16:creationId xmlns:a16="http://schemas.microsoft.com/office/drawing/2014/main" id="{B725AEC7-959C-C478-4EEB-866CE60E8EEC}"/>
-              </a:ext>
-            </a:extLst>
-          </p:cNvPr>
+          <p:cNvPr id="3" name="Notes Placeholder 2"/>
           <p:cNvSpPr>
             <a:spLocks noGrp="1"/>
           </p:cNvSpPr>
@@ -1036,13 +848,7 @@
       </p:sp>
       <p:sp>
         <p:nvSpPr>
-          <p:cNvPr id="4" name="Slide Number Placeholder 3">
-            <a:extLst>
-              <a:ext uri="{FF2B5EF4-FFF2-40B4-BE49-F238E27FC236}">
-                <a16:creationId xmlns:a16="http://schemas.microsoft.com/office/drawing/2014/main" id="{FF7AA3CD-673D-53B5-8E93-FA1114FAAEF3}"/>
-              </a:ext>
-            </a:extLst>
-          </p:cNvPr>
+          <p:cNvPr id="4" name="Slide Number Placeholder 3"/>
           <p:cNvSpPr>
             <a:spLocks noGrp="1"/>
           </p:cNvSpPr>
@@ -1066,7 +872,7 @@
     </p:spTree>
     <p:extLst>
       <p:ext uri="{BB962C8B-B14F-4D97-AF65-F5344CB8AC3E}">
-        <p14:creationId xmlns:p14="http://schemas.microsoft.com/office/powerpoint/2010/main" val="2850681273"/>
+        <p14:creationId xmlns:p14="http://schemas.microsoft.com/office/powerpoint/2010/main" val="1024086991"/>
       </p:ext>
     </p:extLst>
   </p:cSld>
@@ -1249,7 +1055,13 @@
   <p:cSld>
     <p:spTree>
       <p:nvGrpSpPr>
-        <p:cNvPr id="1" name=""/>
+        <p:cNvPr id="1" name="">
+          <a:extLst>
+            <a:ext uri="{FF2B5EF4-FFF2-40B4-BE49-F238E27FC236}">
+              <a16:creationId xmlns:a16="http://schemas.microsoft.com/office/drawing/2014/main" id="{752C500F-F2C9-D3F1-1E15-D35E74A18BDA}"/>
+            </a:ext>
+          </a:extLst>
+        </p:cNvPr>
         <p:cNvGrpSpPr/>
         <p:nvPr/>
       </p:nvGrpSpPr>
@@ -1263,7 +1075,13 @@
       </p:grpSpPr>
       <p:sp>
         <p:nvSpPr>
-          <p:cNvPr id="2" name="Slide Image Placeholder 1"/>
+          <p:cNvPr id="2" name="Slide Image Placeholder 1">
+            <a:extLst>
+              <a:ext uri="{FF2B5EF4-FFF2-40B4-BE49-F238E27FC236}">
+                <a16:creationId xmlns:a16="http://schemas.microsoft.com/office/drawing/2014/main" id="{2AE5A70A-56CC-6947-C626-F26753C26AC0}"/>
+              </a:ext>
+            </a:extLst>
+          </p:cNvPr>
           <p:cNvSpPr>
             <a:spLocks noGrp="1" noRot="1" noChangeAspect="1"/>
           </p:cNvSpPr>
@@ -1275,7 +1093,13 @@
       </p:sp>
       <p:sp>
         <p:nvSpPr>
-          <p:cNvPr id="3" name="Notes Placeholder 2"/>
+          <p:cNvPr id="3" name="Notes Placeholder 2">
+            <a:extLst>
+              <a:ext uri="{FF2B5EF4-FFF2-40B4-BE49-F238E27FC236}">
+                <a16:creationId xmlns:a16="http://schemas.microsoft.com/office/drawing/2014/main" id="{FD6925A2-4D7C-57B6-EC3D-0EB88931BC06}"/>
+              </a:ext>
+            </a:extLst>
+          </p:cNvPr>
           <p:cNvSpPr>
             <a:spLocks noGrp="1"/>
           </p:cNvSpPr>
@@ -1294,7 +1118,13 @@
       </p:sp>
       <p:sp>
         <p:nvSpPr>
-          <p:cNvPr id="4" name="Slide Number Placeholder 3"/>
+          <p:cNvPr id="4" name="Slide Number Placeholder 3">
+            <a:extLst>
+              <a:ext uri="{FF2B5EF4-FFF2-40B4-BE49-F238E27FC236}">
+                <a16:creationId xmlns:a16="http://schemas.microsoft.com/office/drawing/2014/main" id="{4C8E3DA0-FB91-0801-09EF-8AE9C0310448}"/>
+              </a:ext>
+            </a:extLst>
+          </p:cNvPr>
           <p:cNvSpPr>
             <a:spLocks noGrp="1"/>
           </p:cNvSpPr>
@@ -1318,7 +1148,7 @@
     </p:spTree>
     <p:extLst>
       <p:ext uri="{BB962C8B-B14F-4D97-AF65-F5344CB8AC3E}">
-        <p14:creationId xmlns:p14="http://schemas.microsoft.com/office/powerpoint/2010/main" val="1024086991"/>
+        <p14:creationId xmlns:p14="http://schemas.microsoft.com/office/powerpoint/2010/main" val="3227629683"/>
       </p:ext>
     </p:extLst>
   </p:cSld>
@@ -2225,551 +2055,6 @@
 
 <file path=ppt/slides/slide10.xml><?xml version="1.0" encoding="utf-8"?>
 <p:sld xmlns:a="http://schemas.openxmlformats.org/drawingml/2006/main" xmlns:r="http://schemas.openxmlformats.org/officeDocument/2006/relationships" xmlns:p="http://schemas.openxmlformats.org/presentationml/2006/main">
-  <p:cSld name="Slide 9">
-    <p:bg>
-      <p:bgPr>
-        <a:solidFill>
-          <a:srgbClr val="0D7377"/>
-        </a:solidFill>
-        <a:effectLst/>
-      </p:bgPr>
-    </p:bg>
-    <p:spTree>
-      <p:nvGrpSpPr>
-        <p:cNvPr id="1" name=""/>
-        <p:cNvGrpSpPr/>
-        <p:nvPr/>
-      </p:nvGrpSpPr>
-      <p:grpSpPr>
-        <a:xfrm>
-          <a:off x="0" y="0"/>
-          <a:ext cx="0" cy="0"/>
-          <a:chOff x="0" y="0"/>
-          <a:chExt cx="0" cy="0"/>
-        </a:xfrm>
-      </p:grpSpPr>
-      <p:sp>
-        <p:nvSpPr>
-          <p:cNvPr id="2" name="Shape 0"/>
-          <p:cNvSpPr/>
-          <p:nvPr/>
-        </p:nvSpPr>
-        <p:spPr>
-          <a:xfrm>
-            <a:off x="0" y="0"/>
-            <a:ext cx="9144000" cy="5143500"/>
-          </a:xfrm>
-          <a:prstGeom prst="rect">
-            <a:avLst/>
-          </a:prstGeom>
-          <a:solidFill>
-            <a:srgbClr val="0D7377"/>
-          </a:solidFill>
-          <a:ln w="12700">
-            <a:solidFill>
-              <a:srgbClr val="0D7377"/>
-            </a:solidFill>
-            <a:prstDash val="solid"/>
-          </a:ln>
-        </p:spPr>
-        <p:txBody>
-          <a:bodyPr/>
-          <a:lstStyle/>
-          <a:p>
-            <a:endParaRPr lang="es-ES"/>
-          </a:p>
-        </p:txBody>
-      </p:sp>
-      <p:sp>
-        <p:nvSpPr>
-          <p:cNvPr id="3" name="Shape 1"/>
-          <p:cNvSpPr/>
-          <p:nvPr/>
-        </p:nvSpPr>
-        <p:spPr>
-          <a:xfrm>
-            <a:off x="0" y="3840480"/>
-            <a:ext cx="9144000" cy="1303020"/>
-          </a:xfrm>
-          <a:prstGeom prst="rect">
-            <a:avLst/>
-          </a:prstGeom>
-          <a:solidFill>
-            <a:srgbClr val="1A2744"/>
-          </a:solidFill>
-          <a:ln w="12700">
-            <a:solidFill>
-              <a:srgbClr val="1A2744"/>
-            </a:solidFill>
-            <a:prstDash val="solid"/>
-          </a:ln>
-        </p:spPr>
-        <p:txBody>
-          <a:bodyPr/>
-          <a:lstStyle/>
-          <a:p>
-            <a:endParaRPr lang="es-ES"/>
-          </a:p>
-        </p:txBody>
-      </p:sp>
-      <p:sp>
-        <p:nvSpPr>
-          <p:cNvPr id="4" name="Text 2"/>
-          <p:cNvSpPr/>
-          <p:nvPr/>
-        </p:nvSpPr>
-        <p:spPr>
-          <a:xfrm>
-            <a:off x="457200" y="1005840"/>
-            <a:ext cx="8229600" cy="1097280"/>
-          </a:xfrm>
-          <a:prstGeom prst="rect">
-            <a:avLst/>
-          </a:prstGeom>
-          <a:noFill/>
-          <a:ln/>
-        </p:spPr>
-        <p:txBody>
-          <a:bodyPr wrap="square" rtlCol="0" anchor="ctr"/>
-          <a:lstStyle/>
-          <a:p>
-            <a:pPr marL="0" indent="0" algn="ctr">
-              <a:buNone/>
-            </a:pPr>
-            <a:r>
-              <a:rPr lang="en-US" sz="5600" b="1" dirty="0">
-                <a:solidFill>
-                  <a:srgbClr val="FFFFFF"/>
-                </a:solidFill>
-                <a:latin typeface="Calibri" pitchFamily="34" charset="0"/>
-                <a:ea typeface="Calibri" pitchFamily="34" charset="-122"/>
-                <a:cs typeface="Calibri" pitchFamily="34" charset="-120"/>
-              </a:rPr>
-              <a:t>¡Gracias!</a:t>
-            </a:r>
-            <a:endParaRPr lang="en-US" sz="5600" dirty="0"/>
-          </a:p>
-        </p:txBody>
-      </p:sp>
-      <p:sp>
-        <p:nvSpPr>
-          <p:cNvPr id="5" name="Text 3"/>
-          <p:cNvSpPr/>
-          <p:nvPr/>
-        </p:nvSpPr>
-        <p:spPr>
-          <a:xfrm>
-            <a:off x="457200" y="2286000"/>
-            <a:ext cx="8229600" cy="457200"/>
-          </a:xfrm>
-          <a:prstGeom prst="rect">
-            <a:avLst/>
-          </a:prstGeom>
-          <a:noFill/>
-          <a:ln/>
-        </p:spPr>
-        <p:txBody>
-          <a:bodyPr wrap="square" rtlCol="0" anchor="ctr"/>
-          <a:lstStyle/>
-          <a:p>
-            <a:pPr marL="0" indent="0" algn="ctr">
-              <a:buNone/>
-            </a:pPr>
-            <a:r>
-              <a:rPr lang="en-US" sz="1800" dirty="0">
-                <a:solidFill>
-                  <a:srgbClr val="C8EFEF"/>
-                </a:solidFill>
-                <a:latin typeface="Calibri" pitchFamily="34" charset="0"/>
-                <a:ea typeface="Calibri" pitchFamily="34" charset="-122"/>
-                <a:cs typeface="Calibri" pitchFamily="34" charset="-120"/>
-              </a:rPr>
-              <a:t>Análisis del Mercado Inmobiliario en Valencia</a:t>
-            </a:r>
-            <a:endParaRPr lang="en-US" sz="1800" dirty="0"/>
-          </a:p>
-        </p:txBody>
-      </p:sp>
-      <p:sp>
-        <p:nvSpPr>
-          <p:cNvPr id="6" name="Text 4"/>
-          <p:cNvSpPr/>
-          <p:nvPr/>
-        </p:nvSpPr>
-        <p:spPr>
-          <a:xfrm>
-            <a:off x="457200" y="2834640"/>
-            <a:ext cx="8229600" cy="365760"/>
-          </a:xfrm>
-          <a:prstGeom prst="rect">
-            <a:avLst/>
-          </a:prstGeom>
-          <a:noFill/>
-          <a:ln/>
-        </p:spPr>
-        <p:txBody>
-          <a:bodyPr wrap="square" rtlCol="0" anchor="ctr"/>
-          <a:lstStyle/>
-          <a:p>
-            <a:pPr marL="0" indent="0" algn="ctr">
-              <a:buNone/>
-            </a:pPr>
-            <a:r>
-              <a:rPr lang="en-US" sz="1300" dirty="0">
-                <a:solidFill>
-                  <a:srgbClr val="90D0D0"/>
-                </a:solidFill>
-                <a:latin typeface="Calibri" pitchFamily="34" charset="0"/>
-                <a:ea typeface="Calibri" pitchFamily="34" charset="-122"/>
-                <a:cs typeface="Calibri" pitchFamily="34" charset="-120"/>
-              </a:rPr>
-              <a:t>EDA · Feature Engineering · Random Forest · Valencia 2025</a:t>
-            </a:r>
-            <a:endParaRPr lang="en-US" sz="1300" dirty="0"/>
-          </a:p>
-        </p:txBody>
-      </p:sp>
-      <p:sp>
-        <p:nvSpPr>
-          <p:cNvPr id="7" name="Text 5"/>
-          <p:cNvSpPr/>
-          <p:nvPr/>
-        </p:nvSpPr>
-        <p:spPr>
-          <a:xfrm>
-            <a:off x="457200" y="3931920"/>
-            <a:ext cx="8229600" cy="457200"/>
-          </a:xfrm>
-          <a:prstGeom prst="rect">
-            <a:avLst/>
-          </a:prstGeom>
-          <a:noFill/>
-          <a:ln/>
-        </p:spPr>
-        <p:txBody>
-          <a:bodyPr wrap="square" rtlCol="0" anchor="ctr"/>
-          <a:lstStyle/>
-          <a:p>
-            <a:pPr marL="0" indent="0" algn="ctr">
-              <a:buNone/>
-            </a:pPr>
-            <a:r>
-              <a:rPr lang="en-US" sz="1300" dirty="0">
-                <a:solidFill>
-                  <a:srgbClr val="14A5A9"/>
-                </a:solidFill>
-                <a:latin typeface="Calibri" pitchFamily="34" charset="0"/>
-                <a:ea typeface="Calibri" pitchFamily="34" charset="-122"/>
-                <a:cs typeface="Calibri" pitchFamily="34" charset="-120"/>
-              </a:rPr>
-              <a:t>github.com/Apriroca/ML_Prediccion_Vivienda_Valencia</a:t>
-            </a:r>
-            <a:endParaRPr lang="en-US" sz="1300" dirty="0"/>
-          </a:p>
-        </p:txBody>
-      </p:sp>
-    </p:spTree>
-  </p:cSld>
-  <p:clrMapOvr>
-    <a:masterClrMapping/>
-  </p:clrMapOvr>
-</p:sld>
-</file>
-
-<file path=ppt/slides/slide11.xml><?xml version="1.0" encoding="utf-8"?>
-<p:sld xmlns:a="http://schemas.openxmlformats.org/drawingml/2006/main" xmlns:r="http://schemas.openxmlformats.org/officeDocument/2006/relationships" xmlns:p="http://schemas.openxmlformats.org/presentationml/2006/main">
-  <p:cSld>
-    <p:spTree>
-      <p:nvGrpSpPr>
-        <p:cNvPr id="1" name="">
-          <a:extLst>
-            <a:ext uri="{FF2B5EF4-FFF2-40B4-BE49-F238E27FC236}">
-              <a16:creationId xmlns:a16="http://schemas.microsoft.com/office/drawing/2014/main" id="{1B969C4B-AC3E-4562-31CD-C84F255D7638}"/>
-            </a:ext>
-          </a:extLst>
-        </p:cNvPr>
-        <p:cNvGrpSpPr/>
-        <p:nvPr/>
-      </p:nvGrpSpPr>
-      <p:grpSpPr>
-        <a:xfrm>
-          <a:off x="0" y="0"/>
-          <a:ext cx="0" cy="0"/>
-          <a:chOff x="0" y="0"/>
-          <a:chExt cx="0" cy="0"/>
-        </a:xfrm>
-      </p:grpSpPr>
-      <p:sp>
-        <p:nvSpPr>
-          <p:cNvPr id="2" name="Shape 0">
-            <a:extLst>
-              <a:ext uri="{FF2B5EF4-FFF2-40B4-BE49-F238E27FC236}">
-                <a16:creationId xmlns:a16="http://schemas.microsoft.com/office/drawing/2014/main" id="{51495F34-905F-E0A1-697A-5D666402577B}"/>
-              </a:ext>
-            </a:extLst>
-          </p:cNvPr>
-          <p:cNvSpPr/>
-          <p:nvPr/>
-        </p:nvSpPr>
-        <p:spPr>
-          <a:xfrm>
-            <a:off x="0" y="0"/>
-            <a:ext cx="9144000" cy="5143500"/>
-          </a:xfrm>
-          <a:prstGeom prst="rect">
-            <a:avLst/>
-          </a:prstGeom>
-          <a:solidFill>
-            <a:srgbClr val="0D7377"/>
-          </a:solidFill>
-          <a:ln w="12700">
-            <a:solidFill>
-              <a:srgbClr val="0D7377"/>
-            </a:solidFill>
-            <a:prstDash val="solid"/>
-          </a:ln>
-        </p:spPr>
-        <p:txBody>
-          <a:bodyPr/>
-          <a:lstStyle/>
-          <a:p>
-            <a:endParaRPr lang="es-ES"/>
-          </a:p>
-        </p:txBody>
-      </p:sp>
-      <p:sp>
-        <p:nvSpPr>
-          <p:cNvPr id="3" name="Shape 1">
-            <a:extLst>
-              <a:ext uri="{FF2B5EF4-FFF2-40B4-BE49-F238E27FC236}">
-                <a16:creationId xmlns:a16="http://schemas.microsoft.com/office/drawing/2014/main" id="{E2EB8050-8E9D-E431-F2E4-ED36DA6454BA}"/>
-              </a:ext>
-            </a:extLst>
-          </p:cNvPr>
-          <p:cNvSpPr/>
-          <p:nvPr/>
-        </p:nvSpPr>
-        <p:spPr>
-          <a:xfrm>
-            <a:off x="0" y="3840480"/>
-            <a:ext cx="9144000" cy="1303020"/>
-          </a:xfrm>
-          <a:prstGeom prst="rect">
-            <a:avLst/>
-          </a:prstGeom>
-          <a:solidFill>
-            <a:srgbClr val="1A2744"/>
-          </a:solidFill>
-          <a:ln w="12700">
-            <a:solidFill>
-              <a:srgbClr val="1A2744"/>
-            </a:solidFill>
-            <a:prstDash val="solid"/>
-          </a:ln>
-        </p:spPr>
-        <p:txBody>
-          <a:bodyPr/>
-          <a:lstStyle/>
-          <a:p>
-            <a:endParaRPr lang="es-ES"/>
-          </a:p>
-        </p:txBody>
-      </p:sp>
-      <p:sp>
-        <p:nvSpPr>
-          <p:cNvPr id="4" name="Text 2">
-            <a:extLst>
-              <a:ext uri="{FF2B5EF4-FFF2-40B4-BE49-F238E27FC236}">
-                <a16:creationId xmlns:a16="http://schemas.microsoft.com/office/drawing/2014/main" id="{6E8F6756-D8D2-1260-6E41-7042566611DB}"/>
-              </a:ext>
-            </a:extLst>
-          </p:cNvPr>
-          <p:cNvSpPr/>
-          <p:nvPr/>
-        </p:nvSpPr>
-        <p:spPr>
-          <a:xfrm>
-            <a:off x="457200" y="1005840"/>
-            <a:ext cx="8229600" cy="1097280"/>
-          </a:xfrm>
-          <a:prstGeom prst="rect">
-            <a:avLst/>
-          </a:prstGeom>
-          <a:noFill/>
-          <a:ln/>
-        </p:spPr>
-        <p:txBody>
-          <a:bodyPr wrap="square" rtlCol="0" anchor="ctr"/>
-          <a:lstStyle/>
-          <a:p>
-            <a:pPr marL="0" indent="0" algn="ctr">
-              <a:buNone/>
-            </a:pPr>
-            <a:r>
-              <a:rPr lang="en-US" sz="5600" b="1" dirty="0">
-                <a:solidFill>
-                  <a:srgbClr val="FFFFFF"/>
-                </a:solidFill>
-                <a:latin typeface="Calibri" pitchFamily="34" charset="0"/>
-                <a:ea typeface="Calibri" pitchFamily="34" charset="-122"/>
-                <a:cs typeface="Calibri" pitchFamily="34" charset="-120"/>
-              </a:rPr>
-              <a:t>ANEXOS</a:t>
-            </a:r>
-            <a:endParaRPr lang="en-US" sz="5600" dirty="0"/>
-          </a:p>
-        </p:txBody>
-      </p:sp>
-      <p:sp>
-        <p:nvSpPr>
-          <p:cNvPr id="5" name="Text 3">
-            <a:extLst>
-              <a:ext uri="{FF2B5EF4-FFF2-40B4-BE49-F238E27FC236}">
-                <a16:creationId xmlns:a16="http://schemas.microsoft.com/office/drawing/2014/main" id="{40355A41-8D7D-21D2-3E69-F4A2EBD323F6}"/>
-              </a:ext>
-            </a:extLst>
-          </p:cNvPr>
-          <p:cNvSpPr/>
-          <p:nvPr/>
-        </p:nvSpPr>
-        <p:spPr>
-          <a:xfrm>
-            <a:off x="457200" y="2286000"/>
-            <a:ext cx="8229600" cy="457200"/>
-          </a:xfrm>
-          <a:prstGeom prst="rect">
-            <a:avLst/>
-          </a:prstGeom>
-          <a:noFill/>
-          <a:ln/>
-        </p:spPr>
-        <p:txBody>
-          <a:bodyPr wrap="square" rtlCol="0" anchor="ctr"/>
-          <a:lstStyle/>
-          <a:p>
-            <a:pPr marL="0" indent="0" algn="ctr">
-              <a:buNone/>
-            </a:pPr>
-            <a:r>
-              <a:rPr lang="en-US" sz="1800" dirty="0">
-                <a:solidFill>
-                  <a:srgbClr val="C8EFEF"/>
-                </a:solidFill>
-                <a:latin typeface="Calibri" pitchFamily="34" charset="0"/>
-                <a:ea typeface="Calibri" pitchFamily="34" charset="-122"/>
-                <a:cs typeface="Calibri" pitchFamily="34" charset="-120"/>
-              </a:rPr>
-              <a:t>Análisis del Mercado Inmobiliario en Valencia</a:t>
-            </a:r>
-            <a:endParaRPr lang="en-US" sz="1800" dirty="0"/>
-          </a:p>
-        </p:txBody>
-      </p:sp>
-      <p:sp>
-        <p:nvSpPr>
-          <p:cNvPr id="6" name="Text 4">
-            <a:extLst>
-              <a:ext uri="{FF2B5EF4-FFF2-40B4-BE49-F238E27FC236}">
-                <a16:creationId xmlns:a16="http://schemas.microsoft.com/office/drawing/2014/main" id="{F59EEF4D-AAD4-8F0C-67F7-85780AA78A25}"/>
-              </a:ext>
-            </a:extLst>
-          </p:cNvPr>
-          <p:cNvSpPr/>
-          <p:nvPr/>
-        </p:nvSpPr>
-        <p:spPr>
-          <a:xfrm>
-            <a:off x="457200" y="2834640"/>
-            <a:ext cx="8229600" cy="365760"/>
-          </a:xfrm>
-          <a:prstGeom prst="rect">
-            <a:avLst/>
-          </a:prstGeom>
-          <a:noFill/>
-          <a:ln/>
-        </p:spPr>
-        <p:txBody>
-          <a:bodyPr wrap="square" rtlCol="0" anchor="ctr"/>
-          <a:lstStyle/>
-          <a:p>
-            <a:pPr marL="0" indent="0" algn="ctr">
-              <a:buNone/>
-            </a:pPr>
-            <a:r>
-              <a:rPr lang="en-US" sz="1300" dirty="0">
-                <a:solidFill>
-                  <a:srgbClr val="90D0D0"/>
-                </a:solidFill>
-                <a:latin typeface="Calibri" pitchFamily="34" charset="0"/>
-                <a:ea typeface="Calibri" pitchFamily="34" charset="-122"/>
-                <a:cs typeface="Calibri" pitchFamily="34" charset="-120"/>
-              </a:rPr>
-              <a:t>EDA · Feature Engineering · Random Forest · Valencia 2025</a:t>
-            </a:r>
-            <a:endParaRPr lang="en-US" sz="1300" dirty="0"/>
-          </a:p>
-        </p:txBody>
-      </p:sp>
-      <p:sp>
-        <p:nvSpPr>
-          <p:cNvPr id="7" name="Text 5">
-            <a:extLst>
-              <a:ext uri="{FF2B5EF4-FFF2-40B4-BE49-F238E27FC236}">
-                <a16:creationId xmlns:a16="http://schemas.microsoft.com/office/drawing/2014/main" id="{881CE660-43BA-421D-4588-0B94E53CD780}"/>
-              </a:ext>
-            </a:extLst>
-          </p:cNvPr>
-          <p:cNvSpPr/>
-          <p:nvPr/>
-        </p:nvSpPr>
-        <p:spPr>
-          <a:xfrm>
-            <a:off x="457200" y="3931920"/>
-            <a:ext cx="8229600" cy="457200"/>
-          </a:xfrm>
-          <a:prstGeom prst="rect">
-            <a:avLst/>
-          </a:prstGeom>
-          <a:noFill/>
-          <a:ln/>
-        </p:spPr>
-        <p:txBody>
-          <a:bodyPr wrap="square" rtlCol="0" anchor="ctr"/>
-          <a:lstStyle/>
-          <a:p>
-            <a:pPr marL="0" indent="0" algn="ctr">
-              <a:buNone/>
-            </a:pPr>
-            <a:r>
-              <a:rPr lang="en-US" sz="1300" dirty="0">
-                <a:solidFill>
-                  <a:srgbClr val="14A5A9"/>
-                </a:solidFill>
-                <a:latin typeface="Calibri" pitchFamily="34" charset="0"/>
-                <a:ea typeface="Calibri" pitchFamily="34" charset="-122"/>
-                <a:cs typeface="Calibri" pitchFamily="34" charset="-120"/>
-              </a:rPr>
-              <a:t>github.com/Apriroca/ML_Prediccion_Vivienda_Valencia</a:t>
-            </a:r>
-            <a:endParaRPr lang="en-US" sz="1300" dirty="0"/>
-          </a:p>
-        </p:txBody>
-      </p:sp>
-    </p:spTree>
-    <p:extLst>
-      <p:ext uri="{BB962C8B-B14F-4D97-AF65-F5344CB8AC3E}">
-        <p14:creationId xmlns:p14="http://schemas.microsoft.com/office/powerpoint/2010/main" val="1169360617"/>
-      </p:ext>
-    </p:extLst>
-  </p:cSld>
-  <p:clrMapOvr>
-    <a:masterClrMapping/>
-  </p:clrMapOvr>
-</p:sld>
-</file>
-
-<file path=ppt/slides/slide12.xml><?xml version="1.0" encoding="utf-8"?>
-<p:sld xmlns:a="http://schemas.openxmlformats.org/drawingml/2006/main" xmlns:r="http://schemas.openxmlformats.org/officeDocument/2006/relationships" xmlns:p="http://schemas.openxmlformats.org/presentationml/2006/main">
   <p:cSld>
     <p:spTree>
       <p:nvGrpSpPr>
@@ -6966,2830 +6251,6 @@
 
 <file path=ppt/slides/slide4.xml><?xml version="1.0" encoding="utf-8"?>
 <p:sld xmlns:a="http://schemas.openxmlformats.org/drawingml/2006/main" xmlns:r="http://schemas.openxmlformats.org/officeDocument/2006/relationships" xmlns:p="http://schemas.openxmlformats.org/presentationml/2006/main">
-  <p:cSld name="Slide 4">
-    <p:bg>
-      <p:bgPr>
-        <a:solidFill>
-          <a:srgbClr val="FFFFFF"/>
-        </a:solidFill>
-        <a:effectLst/>
-      </p:bgPr>
-    </p:bg>
-    <p:spTree>
-      <p:nvGrpSpPr>
-        <p:cNvPr id="1" name=""/>
-        <p:cNvGrpSpPr/>
-        <p:nvPr/>
-      </p:nvGrpSpPr>
-      <p:grpSpPr>
-        <a:xfrm>
-          <a:off x="0" y="0"/>
-          <a:ext cx="0" cy="0"/>
-          <a:chOff x="0" y="0"/>
-          <a:chExt cx="0" cy="0"/>
-        </a:xfrm>
-      </p:grpSpPr>
-      <p:sp>
-        <p:nvSpPr>
-          <p:cNvPr id="2" name="Shape 0"/>
-          <p:cNvSpPr/>
-          <p:nvPr/>
-        </p:nvSpPr>
-        <p:spPr>
-          <a:xfrm>
-            <a:off x="0" y="0"/>
-            <a:ext cx="9144000" cy="914400"/>
-          </a:xfrm>
-          <a:prstGeom prst="rect">
-            <a:avLst/>
-          </a:prstGeom>
-          <a:solidFill>
-            <a:srgbClr val="1A2744"/>
-          </a:solidFill>
-          <a:ln w="12700">
-            <a:solidFill>
-              <a:srgbClr val="1A2744"/>
-            </a:solidFill>
-            <a:prstDash val="solid"/>
-          </a:ln>
-        </p:spPr>
-        <p:txBody>
-          <a:bodyPr/>
-          <a:lstStyle/>
-          <a:p>
-            <a:endParaRPr lang="es-ES"/>
-          </a:p>
-        </p:txBody>
-      </p:sp>
-      <p:sp>
-        <p:nvSpPr>
-          <p:cNvPr id="3" name="Text 1"/>
-          <p:cNvSpPr/>
-          <p:nvPr/>
-        </p:nvSpPr>
-        <p:spPr>
-          <a:xfrm>
-            <a:off x="457200" y="0"/>
-            <a:ext cx="8229600" cy="914400"/>
-          </a:xfrm>
-          <a:prstGeom prst="rect">
-            <a:avLst/>
-          </a:prstGeom>
-          <a:noFill/>
-          <a:ln/>
-        </p:spPr>
-        <p:txBody>
-          <a:bodyPr wrap="square" rtlCol="0" anchor="ctr"/>
-          <a:lstStyle/>
-          <a:p>
-            <a:pPr marL="0" indent="0" algn="l">
-              <a:buNone/>
-            </a:pPr>
-            <a:r>
-              <a:rPr lang="en-US" sz="2400" b="1" dirty="0">
-                <a:solidFill>
-                  <a:srgbClr val="FFFFFF"/>
-                </a:solidFill>
-                <a:latin typeface="Calibri" pitchFamily="34" charset="0"/>
-                <a:ea typeface="Calibri" pitchFamily="34" charset="-122"/>
-                <a:cs typeface="Calibri" pitchFamily="34" charset="-120"/>
-              </a:rPr>
-              <a:t>Los Datos</a:t>
-            </a:r>
-            <a:endParaRPr lang="en-US" sz="2400" dirty="0"/>
-          </a:p>
-        </p:txBody>
-      </p:sp>
-      <p:sp>
-        <p:nvSpPr>
-          <p:cNvPr id="4" name="Shape 2"/>
-          <p:cNvSpPr/>
-          <p:nvPr/>
-        </p:nvSpPr>
-        <p:spPr>
-          <a:xfrm>
-            <a:off x="274320" y="1051560"/>
-            <a:ext cx="1920240" cy="1371600"/>
-          </a:xfrm>
-          <a:prstGeom prst="rect">
-            <a:avLst/>
-          </a:prstGeom>
-          <a:solidFill>
-            <a:srgbClr val="0D7377"/>
-          </a:solidFill>
-          <a:ln w="12700">
-            <a:solidFill>
-              <a:srgbClr val="0D7377"/>
-            </a:solidFill>
-            <a:prstDash val="solid"/>
-          </a:ln>
-          <a:effectLst>
-            <a:outerShdw blurRad="101600" dist="38100" dir="8100000" algn="bl" rotWithShape="0">
-              <a:srgbClr val="000000">
-                <a:alpha val="12000"/>
-              </a:srgbClr>
-            </a:outerShdw>
-          </a:effectLst>
-        </p:spPr>
-        <p:txBody>
-          <a:bodyPr/>
-          <a:lstStyle/>
-          <a:p>
-            <a:endParaRPr lang="es-ES"/>
-          </a:p>
-        </p:txBody>
-      </p:sp>
-      <p:sp>
-        <p:nvSpPr>
-          <p:cNvPr id="5" name="Text 3"/>
-          <p:cNvSpPr/>
-          <p:nvPr/>
-        </p:nvSpPr>
-        <p:spPr>
-          <a:xfrm>
-            <a:off x="274320" y="1097280"/>
-            <a:ext cx="1920240" cy="685800"/>
-          </a:xfrm>
-          <a:prstGeom prst="rect">
-            <a:avLst/>
-          </a:prstGeom>
-          <a:noFill/>
-          <a:ln/>
-        </p:spPr>
-        <p:txBody>
-          <a:bodyPr wrap="square" rtlCol="0" anchor="b"/>
-          <a:lstStyle/>
-          <a:p>
-            <a:pPr marL="0" indent="0" algn="ctr">
-              <a:buNone/>
-            </a:pPr>
-            <a:r>
-              <a:rPr lang="en-US" sz="3000" b="1" dirty="0">
-                <a:solidFill>
-                  <a:srgbClr val="FFFFFF"/>
-                </a:solidFill>
-                <a:latin typeface="Calibri" pitchFamily="34" charset="0"/>
-                <a:ea typeface="Calibri" pitchFamily="34" charset="-122"/>
-                <a:cs typeface="Calibri" pitchFamily="34" charset="-120"/>
-              </a:rPr>
-              <a:t>24.000</a:t>
-            </a:r>
-            <a:endParaRPr lang="en-US" sz="3000" dirty="0"/>
-          </a:p>
-        </p:txBody>
-      </p:sp>
-      <p:sp>
-        <p:nvSpPr>
-          <p:cNvPr id="6" name="Text 4"/>
-          <p:cNvSpPr/>
-          <p:nvPr/>
-        </p:nvSpPr>
-        <p:spPr>
-          <a:xfrm>
-            <a:off x="274320" y="1783080"/>
-            <a:ext cx="1920240" cy="566928"/>
-          </a:xfrm>
-          <a:prstGeom prst="rect">
-            <a:avLst/>
-          </a:prstGeom>
-          <a:noFill/>
-          <a:ln/>
-        </p:spPr>
-        <p:txBody>
-          <a:bodyPr wrap="square" rtlCol="0" anchor="t"/>
-          <a:lstStyle/>
-          <a:p>
-            <a:pPr marL="0" indent="0" algn="ctr">
-              <a:buNone/>
-            </a:pPr>
-            <a:r>
-              <a:rPr lang="en-US" sz="1000" dirty="0">
-                <a:solidFill>
-                  <a:srgbClr val="FFFFFF"/>
-                </a:solidFill>
-                <a:latin typeface="Calibri" pitchFamily="34" charset="0"/>
-                <a:ea typeface="Calibri" pitchFamily="34" charset="-122"/>
-                <a:cs typeface="Calibri" pitchFamily="34" charset="-120"/>
-              </a:rPr>
-              <a:t>Registros totales</a:t>
-            </a:r>
-            <a:endParaRPr lang="en-US" sz="1000" dirty="0"/>
-          </a:p>
-        </p:txBody>
-      </p:sp>
-      <p:sp>
-        <p:nvSpPr>
-          <p:cNvPr id="7" name="Shape 5"/>
-          <p:cNvSpPr/>
-          <p:nvPr/>
-        </p:nvSpPr>
-        <p:spPr>
-          <a:xfrm>
-            <a:off x="2450592" y="1051560"/>
-            <a:ext cx="1920240" cy="1371600"/>
-          </a:xfrm>
-          <a:prstGeom prst="rect">
-            <a:avLst/>
-          </a:prstGeom>
-          <a:solidFill>
-            <a:srgbClr val="1A2744"/>
-          </a:solidFill>
-          <a:ln w="12700">
-            <a:solidFill>
-              <a:srgbClr val="1A2744"/>
-            </a:solidFill>
-            <a:prstDash val="solid"/>
-          </a:ln>
-          <a:effectLst>
-            <a:outerShdw blurRad="101600" dist="38100" dir="8100000" algn="bl" rotWithShape="0">
-              <a:srgbClr val="000000">
-                <a:alpha val="12000"/>
-              </a:srgbClr>
-            </a:outerShdw>
-          </a:effectLst>
-        </p:spPr>
-        <p:txBody>
-          <a:bodyPr/>
-          <a:lstStyle/>
-          <a:p>
-            <a:endParaRPr lang="es-ES"/>
-          </a:p>
-        </p:txBody>
-      </p:sp>
-      <p:sp>
-        <p:nvSpPr>
-          <p:cNvPr id="8" name="Text 6"/>
-          <p:cNvSpPr/>
-          <p:nvPr/>
-        </p:nvSpPr>
-        <p:spPr>
-          <a:xfrm>
-            <a:off x="2450592" y="1097280"/>
-            <a:ext cx="1920240" cy="685800"/>
-          </a:xfrm>
-          <a:prstGeom prst="rect">
-            <a:avLst/>
-          </a:prstGeom>
-          <a:noFill/>
-          <a:ln/>
-        </p:spPr>
-        <p:txBody>
-          <a:bodyPr wrap="square" rtlCol="0" anchor="b"/>
-          <a:lstStyle/>
-          <a:p>
-            <a:pPr marL="0" indent="0" algn="ctr">
-              <a:buNone/>
-            </a:pPr>
-            <a:r>
-              <a:rPr lang="en-US" sz="3000" b="1" dirty="0">
-                <a:solidFill>
-                  <a:srgbClr val="FFFFFF"/>
-                </a:solidFill>
-                <a:latin typeface="Calibri" pitchFamily="34" charset="0"/>
-                <a:ea typeface="Calibri" pitchFamily="34" charset="-122"/>
-                <a:cs typeface="Calibri" pitchFamily="34" charset="-120"/>
-              </a:rPr>
-              <a:t>12</a:t>
-            </a:r>
-            <a:endParaRPr lang="en-US" sz="3000" dirty="0"/>
-          </a:p>
-        </p:txBody>
-      </p:sp>
-      <p:sp>
-        <p:nvSpPr>
-          <p:cNvPr id="9" name="Text 7"/>
-          <p:cNvSpPr/>
-          <p:nvPr/>
-        </p:nvSpPr>
-        <p:spPr>
-          <a:xfrm>
-            <a:off x="2450592" y="1783080"/>
-            <a:ext cx="1920240" cy="566928"/>
-          </a:xfrm>
-          <a:prstGeom prst="rect">
-            <a:avLst/>
-          </a:prstGeom>
-          <a:noFill/>
-          <a:ln/>
-        </p:spPr>
-        <p:txBody>
-          <a:bodyPr wrap="square" rtlCol="0" anchor="t"/>
-          <a:lstStyle/>
-          <a:p>
-            <a:pPr marL="0" indent="0" algn="ctr">
-              <a:buNone/>
-            </a:pPr>
-            <a:r>
-              <a:rPr lang="en-US" sz="1000" dirty="0">
-                <a:solidFill>
-                  <a:srgbClr val="FFFFFF"/>
-                </a:solidFill>
-                <a:latin typeface="Calibri" pitchFamily="34" charset="0"/>
-                <a:ea typeface="Calibri" pitchFamily="34" charset="-122"/>
-                <a:cs typeface="Calibri" pitchFamily="34" charset="-120"/>
-              </a:rPr>
-              <a:t>Meses de datos</a:t>
-            </a:r>
-            <a:endParaRPr lang="en-US" sz="1000" dirty="0"/>
-          </a:p>
-          <a:p>
-            <a:pPr marL="0" indent="0" algn="ctr">
-              <a:buNone/>
-            </a:pPr>
-            <a:r>
-              <a:rPr lang="en-US" sz="1000" dirty="0">
-                <a:solidFill>
-                  <a:srgbClr val="FFFFFF"/>
-                </a:solidFill>
-                <a:latin typeface="Calibri" pitchFamily="34" charset="0"/>
-                <a:ea typeface="Calibri" pitchFamily="34" charset="-122"/>
-                <a:cs typeface="Calibri" pitchFamily="34" charset="-120"/>
-              </a:rPr>
-              <a:t>(2025)</a:t>
-            </a:r>
-            <a:endParaRPr lang="en-US" sz="1000" dirty="0"/>
-          </a:p>
-        </p:txBody>
-      </p:sp>
-      <p:sp>
-        <p:nvSpPr>
-          <p:cNvPr id="10" name="Shape 8"/>
-          <p:cNvSpPr/>
-          <p:nvPr/>
-        </p:nvSpPr>
-        <p:spPr>
-          <a:xfrm>
-            <a:off x="4626864" y="1051560"/>
-            <a:ext cx="1920240" cy="1371600"/>
-          </a:xfrm>
-          <a:prstGeom prst="rect">
-            <a:avLst/>
-          </a:prstGeom>
-          <a:solidFill>
-            <a:srgbClr val="E07B39"/>
-          </a:solidFill>
-          <a:ln w="12700">
-            <a:solidFill>
-              <a:srgbClr val="E07B39"/>
-            </a:solidFill>
-            <a:prstDash val="solid"/>
-          </a:ln>
-          <a:effectLst>
-            <a:outerShdw blurRad="101600" dist="38100" dir="8100000" algn="bl" rotWithShape="0">
-              <a:srgbClr val="000000">
-                <a:alpha val="12000"/>
-              </a:srgbClr>
-            </a:outerShdw>
-          </a:effectLst>
-        </p:spPr>
-        <p:txBody>
-          <a:bodyPr/>
-          <a:lstStyle/>
-          <a:p>
-            <a:endParaRPr lang="es-ES"/>
-          </a:p>
-        </p:txBody>
-      </p:sp>
-      <p:sp>
-        <p:nvSpPr>
-          <p:cNvPr id="11" name="Text 9"/>
-          <p:cNvSpPr/>
-          <p:nvPr/>
-        </p:nvSpPr>
-        <p:spPr>
-          <a:xfrm>
-            <a:off x="4626864" y="1097280"/>
-            <a:ext cx="1920240" cy="685800"/>
-          </a:xfrm>
-          <a:prstGeom prst="rect">
-            <a:avLst/>
-          </a:prstGeom>
-          <a:noFill/>
-          <a:ln/>
-        </p:spPr>
-        <p:txBody>
-          <a:bodyPr wrap="square" rtlCol="0" anchor="b"/>
-          <a:lstStyle/>
-          <a:p>
-            <a:pPr marL="0" indent="0" algn="ctr">
-              <a:buNone/>
-            </a:pPr>
-            <a:r>
-              <a:rPr lang="en-US" sz="3000" b="1" dirty="0">
-                <a:solidFill>
-                  <a:srgbClr val="FFFFFF"/>
-                </a:solidFill>
-                <a:latin typeface="Calibri" pitchFamily="34" charset="0"/>
-                <a:ea typeface="Calibri" pitchFamily="34" charset="-122"/>
-                <a:cs typeface="Calibri" pitchFamily="34" charset="-120"/>
-              </a:rPr>
-              <a:t>3</a:t>
-            </a:r>
-            <a:endParaRPr lang="en-US" sz="3000" dirty="0"/>
-          </a:p>
-        </p:txBody>
-      </p:sp>
-      <p:sp>
-        <p:nvSpPr>
-          <p:cNvPr id="12" name="Text 10"/>
-          <p:cNvSpPr/>
-          <p:nvPr/>
-        </p:nvSpPr>
-        <p:spPr>
-          <a:xfrm>
-            <a:off x="4626864" y="1783080"/>
-            <a:ext cx="1920240" cy="566928"/>
-          </a:xfrm>
-          <a:prstGeom prst="rect">
-            <a:avLst/>
-          </a:prstGeom>
-          <a:noFill/>
-          <a:ln/>
-        </p:spPr>
-        <p:txBody>
-          <a:bodyPr wrap="square" rtlCol="0" anchor="t"/>
-          <a:lstStyle/>
-          <a:p>
-            <a:pPr marL="0" indent="0" algn="ctr">
-              <a:buNone/>
-            </a:pPr>
-            <a:r>
-              <a:rPr lang="en-US" sz="1000" dirty="0">
-                <a:solidFill>
-                  <a:srgbClr val="FFFFFF"/>
-                </a:solidFill>
-                <a:latin typeface="Calibri" pitchFamily="34" charset="0"/>
-                <a:ea typeface="Calibri" pitchFamily="34" charset="-122"/>
-                <a:cs typeface="Calibri" pitchFamily="34" charset="-120"/>
-              </a:rPr>
-              <a:t>Portales inmobiliarios</a:t>
-            </a:r>
-            <a:endParaRPr lang="en-US" sz="1000" dirty="0"/>
-          </a:p>
-          <a:p>
-            <a:pPr marL="0" indent="0" algn="ctr">
-              <a:buNone/>
-            </a:pPr>
-            <a:r>
-              <a:rPr lang="en-US" sz="1000" dirty="0">
-                <a:solidFill>
-                  <a:srgbClr val="FFFFFF"/>
-                </a:solidFill>
-                <a:latin typeface="Calibri" pitchFamily="34" charset="0"/>
-                <a:ea typeface="Calibri" pitchFamily="34" charset="-122"/>
-                <a:cs typeface="Calibri" pitchFamily="34" charset="-120"/>
-              </a:rPr>
-              <a:t>Fotocasa · Habitaclia · Milanuncios</a:t>
-            </a:r>
-            <a:endParaRPr lang="en-US" sz="1000" dirty="0"/>
-          </a:p>
-        </p:txBody>
-      </p:sp>
-      <p:sp>
-        <p:nvSpPr>
-          <p:cNvPr id="13" name="Shape 11"/>
-          <p:cNvSpPr/>
-          <p:nvPr/>
-        </p:nvSpPr>
-        <p:spPr>
-          <a:xfrm>
-            <a:off x="6803136" y="1051560"/>
-            <a:ext cx="1920240" cy="1371600"/>
-          </a:xfrm>
-          <a:prstGeom prst="rect">
-            <a:avLst/>
-          </a:prstGeom>
-          <a:solidFill>
-            <a:srgbClr val="0D7377"/>
-          </a:solidFill>
-          <a:ln w="12700">
-            <a:solidFill>
-              <a:srgbClr val="0D7377"/>
-            </a:solidFill>
-            <a:prstDash val="solid"/>
-          </a:ln>
-          <a:effectLst>
-            <a:outerShdw blurRad="101600" dist="38100" dir="8100000" algn="bl" rotWithShape="0">
-              <a:srgbClr val="000000">
-                <a:alpha val="12000"/>
-              </a:srgbClr>
-            </a:outerShdw>
-          </a:effectLst>
-        </p:spPr>
-        <p:txBody>
-          <a:bodyPr/>
-          <a:lstStyle/>
-          <a:p>
-            <a:endParaRPr lang="es-ES"/>
-          </a:p>
-        </p:txBody>
-      </p:sp>
-      <p:sp>
-        <p:nvSpPr>
-          <p:cNvPr id="14" name="Text 12"/>
-          <p:cNvSpPr/>
-          <p:nvPr/>
-        </p:nvSpPr>
-        <p:spPr>
-          <a:xfrm>
-            <a:off x="6803136" y="1097280"/>
-            <a:ext cx="1920240" cy="685800"/>
-          </a:xfrm>
-          <a:prstGeom prst="rect">
-            <a:avLst/>
-          </a:prstGeom>
-          <a:noFill/>
-          <a:ln/>
-        </p:spPr>
-        <p:txBody>
-          <a:bodyPr wrap="square" rtlCol="0" anchor="b"/>
-          <a:lstStyle/>
-          <a:p>
-            <a:pPr marL="0" indent="0" algn="ctr">
-              <a:buNone/>
-            </a:pPr>
-            <a:r>
-              <a:rPr lang="en-US" sz="3000" b="1" dirty="0">
-                <a:solidFill>
-                  <a:srgbClr val="FFFFFF"/>
-                </a:solidFill>
-                <a:latin typeface="Calibri" pitchFamily="34" charset="0"/>
-                <a:cs typeface="Calibri" pitchFamily="34" charset="-120"/>
-              </a:rPr>
-              <a:t>16</a:t>
-            </a:r>
-            <a:endParaRPr lang="en-US" sz="3000" dirty="0"/>
-          </a:p>
-        </p:txBody>
-      </p:sp>
-      <p:sp>
-        <p:nvSpPr>
-          <p:cNvPr id="15" name="Text 13"/>
-          <p:cNvSpPr/>
-          <p:nvPr/>
-        </p:nvSpPr>
-        <p:spPr>
-          <a:xfrm>
-            <a:off x="6803136" y="1783080"/>
-            <a:ext cx="1920240" cy="566928"/>
-          </a:xfrm>
-          <a:prstGeom prst="rect">
-            <a:avLst/>
-          </a:prstGeom>
-          <a:noFill/>
-          <a:ln/>
-        </p:spPr>
-        <p:txBody>
-          <a:bodyPr wrap="square" rtlCol="0" anchor="t"/>
-          <a:lstStyle/>
-          <a:p>
-            <a:pPr marL="0" indent="0" algn="ctr">
-              <a:buNone/>
-            </a:pPr>
-            <a:r>
-              <a:rPr lang="en-US" sz="1000" dirty="0">
-                <a:solidFill>
-                  <a:srgbClr val="FFFFFF"/>
-                </a:solidFill>
-                <a:latin typeface="Calibri" pitchFamily="34" charset="0"/>
-                <a:ea typeface="Calibri" pitchFamily="34" charset="-122"/>
-                <a:cs typeface="Calibri" pitchFamily="34" charset="-120"/>
-              </a:rPr>
-              <a:t>Variables por</a:t>
-            </a:r>
-            <a:endParaRPr lang="en-US" sz="1000" dirty="0"/>
-          </a:p>
-          <a:p>
-            <a:pPr marL="0" indent="0" algn="ctr">
-              <a:buNone/>
-            </a:pPr>
-            <a:r>
-              <a:rPr lang="en-US" sz="1000" dirty="0">
-                <a:solidFill>
-                  <a:srgbClr val="FFFFFF"/>
-                </a:solidFill>
-                <a:latin typeface="Calibri" pitchFamily="34" charset="0"/>
-                <a:ea typeface="Calibri" pitchFamily="34" charset="-122"/>
-                <a:cs typeface="Calibri" pitchFamily="34" charset="-120"/>
-              </a:rPr>
-              <a:t>propiedad</a:t>
-            </a:r>
-            <a:endParaRPr lang="en-US" sz="1000" dirty="0"/>
-          </a:p>
-        </p:txBody>
-      </p:sp>
-      <p:sp>
-        <p:nvSpPr>
-          <p:cNvPr id="16" name="Text 14"/>
-          <p:cNvSpPr/>
-          <p:nvPr/>
-        </p:nvSpPr>
-        <p:spPr>
-          <a:xfrm>
-            <a:off x="365760" y="2606040"/>
-            <a:ext cx="8229600" cy="365760"/>
-          </a:xfrm>
-          <a:prstGeom prst="rect">
-            <a:avLst/>
-          </a:prstGeom>
-          <a:noFill/>
-          <a:ln/>
-        </p:spPr>
-        <p:txBody>
-          <a:bodyPr wrap="square" rtlCol="0" anchor="ctr"/>
-          <a:lstStyle/>
-          <a:p>
-            <a:pPr marL="0" indent="0">
-              <a:buNone/>
-            </a:pPr>
-            <a:r>
-              <a:rPr lang="en-US" sz="1400" b="1" dirty="0">
-                <a:solidFill>
-                  <a:srgbClr val="1A2744"/>
-                </a:solidFill>
-                <a:latin typeface="Calibri" pitchFamily="34" charset="0"/>
-                <a:ea typeface="Calibri" pitchFamily="34" charset="-122"/>
-                <a:cs typeface="Calibri" pitchFamily="34" charset="-120"/>
-              </a:rPr>
-              <a:t>Variables clave del dataset</a:t>
-            </a:r>
-            <a:endParaRPr lang="en-US" sz="1400" dirty="0"/>
-          </a:p>
-        </p:txBody>
-      </p:sp>
-      <p:graphicFrame>
-        <p:nvGraphicFramePr>
-          <p:cNvPr id="17" name="Table 0"/>
-          <p:cNvGraphicFramePr>
-            <a:graphicFrameLocks noGrp="1"/>
-          </p:cNvGraphicFramePr>
-          <p:nvPr>
-            <p:extLst>
-              <p:ext uri="{D42A27DB-BD31-4B8C-83A1-F6EECF244321}">
-                <p14:modId xmlns:p14="http://schemas.microsoft.com/office/powerpoint/2010/main" val="1579011935"/>
-              </p:ext>
-            </p:extLst>
-          </p:nvPr>
-        </p:nvGraphicFramePr>
-        <p:xfrm>
-          <a:off x="365760" y="3017520"/>
-          <a:ext cx="8412480" cy="1920240"/>
-        </p:xfrm>
-        <a:graphic>
-          <a:graphicData uri="http://schemas.openxmlformats.org/drawingml/2006/table">
-            <a:tbl>
-              <a:tblPr/>
-              <a:tblGrid>
-                <a:gridCol w="1828800">
-                  <a:extLst>
-                    <a:ext uri="{9D8B030D-6E8A-4147-A177-3AD203B41FA5}">
-                      <a16:colId xmlns:a16="http://schemas.microsoft.com/office/drawing/2014/main" val="20000"/>
-                    </a:ext>
-                  </a:extLst>
-                </a:gridCol>
-                <a:gridCol w="3291840">
-                  <a:extLst>
-                    <a:ext uri="{9D8B030D-6E8A-4147-A177-3AD203B41FA5}">
-                      <a16:colId xmlns:a16="http://schemas.microsoft.com/office/drawing/2014/main" val="20001"/>
-                    </a:ext>
-                  </a:extLst>
-                </a:gridCol>
-                <a:gridCol w="3291840">
-                  <a:extLst>
-                    <a:ext uri="{9D8B030D-6E8A-4147-A177-3AD203B41FA5}">
-                      <a16:colId xmlns:a16="http://schemas.microsoft.com/office/drawing/2014/main" val="20002"/>
-                    </a:ext>
-                  </a:extLst>
-                </a:gridCol>
-              </a:tblGrid>
-              <a:tr h="274320">
-                <a:tc>
-                  <a:txBody>
-                    <a:bodyPr/>
-                    <a:lstStyle/>
-                    <a:p>
-                      <a:pPr marL="0" indent="0">
-                        <a:buNone/>
-                      </a:pPr>
-                      <a:r>
-                        <a:rPr lang="en-US" sz="1000" dirty="0">
-                          <a:solidFill>
-                            <a:srgbClr val="000000"/>
-                          </a:solidFill>
-                          <a:latin typeface="Calibri" pitchFamily="34" charset="0"/>
-                          <a:ea typeface="Calibri" pitchFamily="34" charset="-122"/>
-                          <a:cs typeface="Calibri" pitchFamily="34" charset="-120"/>
-                        </a:rPr>
-                        <a:t>Variable</a:t>
-                      </a:r>
-                      <a:endParaRPr lang="en-US" sz="1000" dirty="0">
-                        <a:latin typeface="Calibri" charset="0"/>
-                        <a:ea typeface="Calibri" charset="0"/>
-                        <a:cs typeface="Calibri" charset="0"/>
-                      </a:endParaRPr>
-                    </a:p>
-                  </a:txBody>
-                  <a:tcPr>
-                    <a:lnL w="6350" cap="flat" cmpd="sng" algn="ctr">
-                      <a:solidFill>
-                        <a:srgbClr val="D1D9E0"/>
-                      </a:solidFill>
-                      <a:prstDash val="solid"/>
-                      <a:round/>
-                      <a:headEnd type="none" w="med" len="med"/>
-                      <a:tailEnd type="none" w="med" len="med"/>
-                    </a:lnL>
-                    <a:lnR w="6350" cap="flat" cmpd="sng" algn="ctr">
-                      <a:solidFill>
-                        <a:srgbClr val="D1D9E0"/>
-                      </a:solidFill>
-                      <a:prstDash val="solid"/>
-                      <a:round/>
-                      <a:headEnd type="none" w="med" len="med"/>
-                      <a:tailEnd type="none" w="med" len="med"/>
-                    </a:lnR>
-                    <a:lnT w="6350" cap="flat" cmpd="sng" algn="ctr">
-                      <a:solidFill>
-                        <a:srgbClr val="D1D9E0"/>
-                      </a:solidFill>
-                      <a:prstDash val="solid"/>
-                      <a:round/>
-                      <a:headEnd type="none" w="med" len="med"/>
-                      <a:tailEnd type="none" w="med" len="med"/>
-                    </a:lnT>
-                    <a:lnB w="6350" cap="flat" cmpd="sng" algn="ctr">
-                      <a:solidFill>
-                        <a:srgbClr val="D1D9E0"/>
-                      </a:solidFill>
-                      <a:prstDash val="solid"/>
-                      <a:round/>
-                      <a:headEnd type="none" w="med" len="med"/>
-                      <a:tailEnd type="none" w="med" len="med"/>
-                    </a:lnB>
-                  </a:tcPr>
-                </a:tc>
-                <a:tc>
-                  <a:txBody>
-                    <a:bodyPr/>
-                    <a:lstStyle/>
-                    <a:p>
-                      <a:pPr marL="0" indent="0">
-                        <a:buNone/>
-                      </a:pPr>
-                      <a:r>
-                        <a:rPr lang="en-US" sz="1000" dirty="0">
-                          <a:solidFill>
-                            <a:srgbClr val="000000"/>
-                          </a:solidFill>
-                          <a:latin typeface="Calibri" pitchFamily="34" charset="0"/>
-                          <a:ea typeface="Calibri" pitchFamily="34" charset="-122"/>
-                          <a:cs typeface="Calibri" pitchFamily="34" charset="-120"/>
-                        </a:rPr>
-                        <a:t>Descripción</a:t>
-                      </a:r>
-                      <a:endParaRPr lang="en-US" sz="1000" dirty="0">
-                        <a:latin typeface="Calibri" charset="0"/>
-                        <a:ea typeface="Calibri" charset="0"/>
-                        <a:cs typeface="Calibri" charset="0"/>
-                      </a:endParaRPr>
-                    </a:p>
-                  </a:txBody>
-                  <a:tcPr>
-                    <a:lnL w="6350" cap="flat" cmpd="sng" algn="ctr">
-                      <a:solidFill>
-                        <a:srgbClr val="D1D9E0"/>
-                      </a:solidFill>
-                      <a:prstDash val="solid"/>
-                      <a:round/>
-                      <a:headEnd type="none" w="med" len="med"/>
-                      <a:tailEnd type="none" w="med" len="med"/>
-                    </a:lnL>
-                    <a:lnR w="6350" cap="flat" cmpd="sng" algn="ctr">
-                      <a:solidFill>
-                        <a:srgbClr val="D1D9E0"/>
-                      </a:solidFill>
-                      <a:prstDash val="solid"/>
-                      <a:round/>
-                      <a:headEnd type="none" w="med" len="med"/>
-                      <a:tailEnd type="none" w="med" len="med"/>
-                    </a:lnR>
-                    <a:lnT w="6350" cap="flat" cmpd="sng" algn="ctr">
-                      <a:solidFill>
-                        <a:srgbClr val="D1D9E0"/>
-                      </a:solidFill>
-                      <a:prstDash val="solid"/>
-                      <a:round/>
-                      <a:headEnd type="none" w="med" len="med"/>
-                      <a:tailEnd type="none" w="med" len="med"/>
-                    </a:lnT>
-                    <a:lnB w="6350" cap="flat" cmpd="sng" algn="ctr">
-                      <a:solidFill>
-                        <a:srgbClr val="D1D9E0"/>
-                      </a:solidFill>
-                      <a:prstDash val="solid"/>
-                      <a:round/>
-                      <a:headEnd type="none" w="med" len="med"/>
-                      <a:tailEnd type="none" w="med" len="med"/>
-                    </a:lnB>
-                  </a:tcPr>
-                </a:tc>
-                <a:tc>
-                  <a:txBody>
-                    <a:bodyPr/>
-                    <a:lstStyle/>
-                    <a:p>
-                      <a:pPr marL="0" indent="0">
-                        <a:buNone/>
-                      </a:pPr>
-                      <a:r>
-                        <a:rPr lang="en-US" sz="1000" dirty="0">
-                          <a:solidFill>
-                            <a:srgbClr val="000000"/>
-                          </a:solidFill>
-                          <a:latin typeface="Calibri" pitchFamily="34" charset="0"/>
-                          <a:ea typeface="Calibri" pitchFamily="34" charset="-122"/>
-                          <a:cs typeface="Calibri" pitchFamily="34" charset="-120"/>
-                        </a:rPr>
-                        <a:t>Uso en el modelo</a:t>
-                      </a:r>
-                      <a:endParaRPr lang="en-US" sz="1000" dirty="0">
-                        <a:latin typeface="Calibri" charset="0"/>
-                        <a:ea typeface="Calibri" charset="0"/>
-                        <a:cs typeface="Calibri" charset="0"/>
-                      </a:endParaRPr>
-                    </a:p>
-                  </a:txBody>
-                  <a:tcPr>
-                    <a:lnL w="6350" cap="flat" cmpd="sng" algn="ctr">
-                      <a:solidFill>
-                        <a:srgbClr val="D1D9E0"/>
-                      </a:solidFill>
-                      <a:prstDash val="solid"/>
-                      <a:round/>
-                      <a:headEnd type="none" w="med" len="med"/>
-                      <a:tailEnd type="none" w="med" len="med"/>
-                    </a:lnL>
-                    <a:lnR w="6350" cap="flat" cmpd="sng" algn="ctr">
-                      <a:solidFill>
-                        <a:srgbClr val="D1D9E0"/>
-                      </a:solidFill>
-                      <a:prstDash val="solid"/>
-                      <a:round/>
-                      <a:headEnd type="none" w="med" len="med"/>
-                      <a:tailEnd type="none" w="med" len="med"/>
-                    </a:lnR>
-                    <a:lnT w="6350" cap="flat" cmpd="sng" algn="ctr">
-                      <a:solidFill>
-                        <a:srgbClr val="D1D9E0"/>
-                      </a:solidFill>
-                      <a:prstDash val="solid"/>
-                      <a:round/>
-                      <a:headEnd type="none" w="med" len="med"/>
-                      <a:tailEnd type="none" w="med" len="med"/>
-                    </a:lnT>
-                    <a:lnB w="6350" cap="flat" cmpd="sng" algn="ctr">
-                      <a:solidFill>
-                        <a:srgbClr val="D1D9E0"/>
-                      </a:solidFill>
-                      <a:prstDash val="solid"/>
-                      <a:round/>
-                      <a:headEnd type="none" w="med" len="med"/>
-                      <a:tailEnd type="none" w="med" len="med"/>
-                    </a:lnB>
-                  </a:tcPr>
-                </a:tc>
-                <a:extLst>
-                  <a:ext uri="{0D108BD9-81ED-4DB2-BD59-A6C34878D82A}">
-                    <a16:rowId xmlns:a16="http://schemas.microsoft.com/office/drawing/2014/main" val="10000"/>
-                  </a:ext>
-                </a:extLst>
-              </a:tr>
-              <a:tr h="274320">
-                <a:tc>
-                  <a:txBody>
-                    <a:bodyPr/>
-                    <a:lstStyle/>
-                    <a:p>
-                      <a:pPr marL="0" indent="0">
-                        <a:buNone/>
-                      </a:pPr>
-                      <a:r>
-                        <a:rPr lang="en-US" sz="1000" dirty="0">
-                          <a:solidFill>
-                            <a:srgbClr val="000000"/>
-                          </a:solidFill>
-                          <a:latin typeface="Calibri" pitchFamily="34" charset="0"/>
-                          <a:ea typeface="Calibri" pitchFamily="34" charset="-122"/>
-                          <a:cs typeface="Calibri" pitchFamily="34" charset="-120"/>
-                        </a:rPr>
-                        <a:t>Precio unitario</a:t>
-                      </a:r>
-                      <a:endParaRPr lang="en-US" sz="1000" dirty="0">
-                        <a:latin typeface="Calibri" charset="0"/>
-                        <a:ea typeface="Calibri" charset="0"/>
-                        <a:cs typeface="Calibri" charset="0"/>
-                      </a:endParaRPr>
-                    </a:p>
-                  </a:txBody>
-                  <a:tcPr>
-                    <a:lnL w="6350" cap="flat" cmpd="sng" algn="ctr">
-                      <a:solidFill>
-                        <a:srgbClr val="D1D9E0"/>
-                      </a:solidFill>
-                      <a:prstDash val="solid"/>
-                      <a:round/>
-                      <a:headEnd type="none" w="med" len="med"/>
-                      <a:tailEnd type="none" w="med" len="med"/>
-                    </a:lnL>
-                    <a:lnR w="6350" cap="flat" cmpd="sng" algn="ctr">
-                      <a:solidFill>
-                        <a:srgbClr val="D1D9E0"/>
-                      </a:solidFill>
-                      <a:prstDash val="solid"/>
-                      <a:round/>
-                      <a:headEnd type="none" w="med" len="med"/>
-                      <a:tailEnd type="none" w="med" len="med"/>
-                    </a:lnR>
-                    <a:lnT w="6350" cap="flat" cmpd="sng" algn="ctr">
-                      <a:solidFill>
-                        <a:srgbClr val="D1D9E0"/>
-                      </a:solidFill>
-                      <a:prstDash val="solid"/>
-                      <a:round/>
-                      <a:headEnd type="none" w="med" len="med"/>
-                      <a:tailEnd type="none" w="med" len="med"/>
-                    </a:lnT>
-                    <a:lnB w="6350" cap="flat" cmpd="sng" algn="ctr">
-                      <a:solidFill>
-                        <a:srgbClr val="D1D9E0"/>
-                      </a:solidFill>
-                      <a:prstDash val="solid"/>
-                      <a:round/>
-                      <a:headEnd type="none" w="med" len="med"/>
-                      <a:tailEnd type="none" w="med" len="med"/>
-                    </a:lnB>
-                  </a:tcPr>
-                </a:tc>
-                <a:tc>
-                  <a:txBody>
-                    <a:bodyPr/>
-                    <a:lstStyle/>
-                    <a:p>
-                      <a:pPr marL="0" indent="0">
-                        <a:buNone/>
-                      </a:pPr>
-                      <a:r>
-                        <a:rPr lang="en-US" sz="1000" dirty="0">
-                          <a:solidFill>
-                            <a:srgbClr val="000000"/>
-                          </a:solidFill>
-                          <a:latin typeface="Calibri" pitchFamily="34" charset="0"/>
-                          <a:ea typeface="Calibri" pitchFamily="34" charset="-122"/>
-                          <a:cs typeface="Calibri" pitchFamily="34" charset="-120"/>
-                        </a:rPr>
-                        <a:t>€/m² — variable objetivo</a:t>
-                      </a:r>
-                      <a:endParaRPr lang="en-US" sz="1000" dirty="0">
-                        <a:latin typeface="Calibri" charset="0"/>
-                        <a:ea typeface="Calibri" charset="0"/>
-                        <a:cs typeface="Calibri" charset="0"/>
-                      </a:endParaRPr>
-                    </a:p>
-                  </a:txBody>
-                  <a:tcPr>
-                    <a:lnL w="6350" cap="flat" cmpd="sng" algn="ctr">
-                      <a:solidFill>
-                        <a:srgbClr val="D1D9E0"/>
-                      </a:solidFill>
-                      <a:prstDash val="solid"/>
-                      <a:round/>
-                      <a:headEnd type="none" w="med" len="med"/>
-                      <a:tailEnd type="none" w="med" len="med"/>
-                    </a:lnL>
-                    <a:lnR w="6350" cap="flat" cmpd="sng" algn="ctr">
-                      <a:solidFill>
-                        <a:srgbClr val="D1D9E0"/>
-                      </a:solidFill>
-                      <a:prstDash val="solid"/>
-                      <a:round/>
-                      <a:headEnd type="none" w="med" len="med"/>
-                      <a:tailEnd type="none" w="med" len="med"/>
-                    </a:lnR>
-                    <a:lnT w="6350" cap="flat" cmpd="sng" algn="ctr">
-                      <a:solidFill>
-                        <a:srgbClr val="D1D9E0"/>
-                      </a:solidFill>
-                      <a:prstDash val="solid"/>
-                      <a:round/>
-                      <a:headEnd type="none" w="med" len="med"/>
-                      <a:tailEnd type="none" w="med" len="med"/>
-                    </a:lnT>
-                    <a:lnB w="6350" cap="flat" cmpd="sng" algn="ctr">
-                      <a:solidFill>
-                        <a:srgbClr val="D1D9E0"/>
-                      </a:solidFill>
-                      <a:prstDash val="solid"/>
-                      <a:round/>
-                      <a:headEnd type="none" w="med" len="med"/>
-                      <a:tailEnd type="none" w="med" len="med"/>
-                    </a:lnB>
-                  </a:tcPr>
-                </a:tc>
-                <a:tc>
-                  <a:txBody>
-                    <a:bodyPr/>
-                    <a:lstStyle/>
-                    <a:p>
-                      <a:pPr marL="0" indent="0">
-                        <a:buNone/>
-                      </a:pPr>
-                      <a:r>
-                        <a:rPr lang="en-US" sz="1000" dirty="0">
-                          <a:solidFill>
-                            <a:srgbClr val="000000"/>
-                          </a:solidFill>
-                          <a:latin typeface="Calibri" pitchFamily="34" charset="0"/>
-                          <a:ea typeface="Calibri" pitchFamily="34" charset="-122"/>
-                          <a:cs typeface="Calibri" pitchFamily="34" charset="-120"/>
-                        </a:rPr>
-                        <a:t>🎯 Target</a:t>
-                      </a:r>
-                      <a:endParaRPr lang="en-US" sz="1000" dirty="0">
-                        <a:latin typeface="Calibri" charset="0"/>
-                        <a:ea typeface="Calibri" charset="0"/>
-                        <a:cs typeface="Calibri" charset="0"/>
-                      </a:endParaRPr>
-                    </a:p>
-                  </a:txBody>
-                  <a:tcPr>
-                    <a:lnL w="6350" cap="flat" cmpd="sng" algn="ctr">
-                      <a:solidFill>
-                        <a:srgbClr val="D1D9E0"/>
-                      </a:solidFill>
-                      <a:prstDash val="solid"/>
-                      <a:round/>
-                      <a:headEnd type="none" w="med" len="med"/>
-                      <a:tailEnd type="none" w="med" len="med"/>
-                    </a:lnL>
-                    <a:lnR w="6350" cap="flat" cmpd="sng" algn="ctr">
-                      <a:solidFill>
-                        <a:srgbClr val="D1D9E0"/>
-                      </a:solidFill>
-                      <a:prstDash val="solid"/>
-                      <a:round/>
-                      <a:headEnd type="none" w="med" len="med"/>
-                      <a:tailEnd type="none" w="med" len="med"/>
-                    </a:lnR>
-                    <a:lnT w="6350" cap="flat" cmpd="sng" algn="ctr">
-                      <a:solidFill>
-                        <a:srgbClr val="D1D9E0"/>
-                      </a:solidFill>
-                      <a:prstDash val="solid"/>
-                      <a:round/>
-                      <a:headEnd type="none" w="med" len="med"/>
-                      <a:tailEnd type="none" w="med" len="med"/>
-                    </a:lnT>
-                    <a:lnB w="6350" cap="flat" cmpd="sng" algn="ctr">
-                      <a:solidFill>
-                        <a:srgbClr val="D1D9E0"/>
-                      </a:solidFill>
-                      <a:prstDash val="solid"/>
-                      <a:round/>
-                      <a:headEnd type="none" w="med" len="med"/>
-                      <a:tailEnd type="none" w="med" len="med"/>
-                    </a:lnB>
-                  </a:tcPr>
-                </a:tc>
-                <a:extLst>
-                  <a:ext uri="{0D108BD9-81ED-4DB2-BD59-A6C34878D82A}">
-                    <a16:rowId xmlns:a16="http://schemas.microsoft.com/office/drawing/2014/main" val="10001"/>
-                  </a:ext>
-                </a:extLst>
-              </a:tr>
-              <a:tr h="274320">
-                <a:tc>
-                  <a:txBody>
-                    <a:bodyPr/>
-                    <a:lstStyle/>
-                    <a:p>
-                      <a:pPr marL="0" indent="0">
-                        <a:buNone/>
-                      </a:pPr>
-                      <a:r>
-                        <a:rPr lang="en-US" sz="1000" dirty="0">
-                          <a:solidFill>
-                            <a:srgbClr val="000000"/>
-                          </a:solidFill>
-                          <a:latin typeface="Calibri" pitchFamily="34" charset="0"/>
-                          <a:ea typeface="Calibri" pitchFamily="34" charset="-122"/>
-                          <a:cs typeface="Calibri" pitchFamily="34" charset="-120"/>
-                        </a:rPr>
-                        <a:t>Latitud / Longitud</a:t>
-                      </a:r>
-                      <a:endParaRPr lang="en-US" sz="1000" dirty="0">
-                        <a:latin typeface="Calibri" charset="0"/>
-                        <a:ea typeface="Calibri" charset="0"/>
-                        <a:cs typeface="Calibri" charset="0"/>
-                      </a:endParaRPr>
-                    </a:p>
-                  </a:txBody>
-                  <a:tcPr>
-                    <a:lnL w="6350" cap="flat" cmpd="sng" algn="ctr">
-                      <a:solidFill>
-                        <a:srgbClr val="D1D9E0"/>
-                      </a:solidFill>
-                      <a:prstDash val="solid"/>
-                      <a:round/>
-                      <a:headEnd type="none" w="med" len="med"/>
-                      <a:tailEnd type="none" w="med" len="med"/>
-                    </a:lnL>
-                    <a:lnR w="6350" cap="flat" cmpd="sng" algn="ctr">
-                      <a:solidFill>
-                        <a:srgbClr val="D1D9E0"/>
-                      </a:solidFill>
-                      <a:prstDash val="solid"/>
-                      <a:round/>
-                      <a:headEnd type="none" w="med" len="med"/>
-                      <a:tailEnd type="none" w="med" len="med"/>
-                    </a:lnR>
-                    <a:lnT w="6350" cap="flat" cmpd="sng" algn="ctr">
-                      <a:solidFill>
-                        <a:srgbClr val="D1D9E0"/>
-                      </a:solidFill>
-                      <a:prstDash val="solid"/>
-                      <a:round/>
-                      <a:headEnd type="none" w="med" len="med"/>
-                      <a:tailEnd type="none" w="med" len="med"/>
-                    </a:lnT>
-                    <a:lnB w="6350" cap="flat" cmpd="sng" algn="ctr">
-                      <a:solidFill>
-                        <a:srgbClr val="D1D9E0"/>
-                      </a:solidFill>
-                      <a:prstDash val="solid"/>
-                      <a:round/>
-                      <a:headEnd type="none" w="med" len="med"/>
-                      <a:tailEnd type="none" w="med" len="med"/>
-                    </a:lnB>
-                  </a:tcPr>
-                </a:tc>
-                <a:tc>
-                  <a:txBody>
-                    <a:bodyPr/>
-                    <a:lstStyle/>
-                    <a:p>
-                      <a:pPr marL="0" indent="0">
-                        <a:buNone/>
-                      </a:pPr>
-                      <a:r>
-                        <a:rPr lang="en-US" sz="1000" dirty="0">
-                          <a:solidFill>
-                            <a:srgbClr val="000000"/>
-                          </a:solidFill>
-                          <a:latin typeface="Calibri" pitchFamily="34" charset="0"/>
-                          <a:ea typeface="Calibri" pitchFamily="34" charset="-122"/>
-                          <a:cs typeface="Calibri" pitchFamily="34" charset="-120"/>
-                        </a:rPr>
-                        <a:t>Coordenadas geográficas</a:t>
-                      </a:r>
-                      <a:endParaRPr lang="en-US" sz="1000" dirty="0">
-                        <a:latin typeface="Calibri" charset="0"/>
-                        <a:ea typeface="Calibri" charset="0"/>
-                        <a:cs typeface="Calibri" charset="0"/>
-                      </a:endParaRPr>
-                    </a:p>
-                  </a:txBody>
-                  <a:tcPr>
-                    <a:lnL w="6350" cap="flat" cmpd="sng" algn="ctr">
-                      <a:solidFill>
-                        <a:srgbClr val="D1D9E0"/>
-                      </a:solidFill>
-                      <a:prstDash val="solid"/>
-                      <a:round/>
-                      <a:headEnd type="none" w="med" len="med"/>
-                      <a:tailEnd type="none" w="med" len="med"/>
-                    </a:lnL>
-                    <a:lnR w="6350" cap="flat" cmpd="sng" algn="ctr">
-                      <a:solidFill>
-                        <a:srgbClr val="D1D9E0"/>
-                      </a:solidFill>
-                      <a:prstDash val="solid"/>
-                      <a:round/>
-                      <a:headEnd type="none" w="med" len="med"/>
-                      <a:tailEnd type="none" w="med" len="med"/>
-                    </a:lnR>
-                    <a:lnT w="6350" cap="flat" cmpd="sng" algn="ctr">
-                      <a:solidFill>
-                        <a:srgbClr val="D1D9E0"/>
-                      </a:solidFill>
-                      <a:prstDash val="solid"/>
-                      <a:round/>
-                      <a:headEnd type="none" w="med" len="med"/>
-                      <a:tailEnd type="none" w="med" len="med"/>
-                    </a:lnT>
-                    <a:lnB w="6350" cap="flat" cmpd="sng" algn="ctr">
-                      <a:solidFill>
-                        <a:srgbClr val="D1D9E0"/>
-                      </a:solidFill>
-                      <a:prstDash val="solid"/>
-                      <a:round/>
-                      <a:headEnd type="none" w="med" len="med"/>
-                      <a:tailEnd type="none" w="med" len="med"/>
-                    </a:lnB>
-                  </a:tcPr>
-                </a:tc>
-                <a:tc>
-                  <a:txBody>
-                    <a:bodyPr/>
-                    <a:lstStyle/>
-                    <a:p>
-                      <a:pPr marL="0" indent="0">
-                        <a:buNone/>
-                      </a:pPr>
-                      <a:r>
-                        <a:rPr lang="en-US" sz="1000" dirty="0">
-                          <a:solidFill>
-                            <a:srgbClr val="000000"/>
-                          </a:solidFill>
-                          <a:latin typeface="Calibri" pitchFamily="34" charset="0"/>
-                          <a:ea typeface="Calibri" pitchFamily="34" charset="-122"/>
-                          <a:cs typeface="Calibri" pitchFamily="34" charset="-120"/>
-                        </a:rPr>
-                        <a:t>✅ Feature</a:t>
-                      </a:r>
-                      <a:endParaRPr lang="en-US" sz="1000" dirty="0">
-                        <a:latin typeface="Calibri" charset="0"/>
-                        <a:ea typeface="Calibri" charset="0"/>
-                        <a:cs typeface="Calibri" charset="0"/>
-                      </a:endParaRPr>
-                    </a:p>
-                  </a:txBody>
-                  <a:tcPr>
-                    <a:lnL w="6350" cap="flat" cmpd="sng" algn="ctr">
-                      <a:solidFill>
-                        <a:srgbClr val="D1D9E0"/>
-                      </a:solidFill>
-                      <a:prstDash val="solid"/>
-                      <a:round/>
-                      <a:headEnd type="none" w="med" len="med"/>
-                      <a:tailEnd type="none" w="med" len="med"/>
-                    </a:lnL>
-                    <a:lnR w="6350" cap="flat" cmpd="sng" algn="ctr">
-                      <a:solidFill>
-                        <a:srgbClr val="D1D9E0"/>
-                      </a:solidFill>
-                      <a:prstDash val="solid"/>
-                      <a:round/>
-                      <a:headEnd type="none" w="med" len="med"/>
-                      <a:tailEnd type="none" w="med" len="med"/>
-                    </a:lnR>
-                    <a:lnT w="6350" cap="flat" cmpd="sng" algn="ctr">
-                      <a:solidFill>
-                        <a:srgbClr val="D1D9E0"/>
-                      </a:solidFill>
-                      <a:prstDash val="solid"/>
-                      <a:round/>
-                      <a:headEnd type="none" w="med" len="med"/>
-                      <a:tailEnd type="none" w="med" len="med"/>
-                    </a:lnT>
-                    <a:lnB w="6350" cap="flat" cmpd="sng" algn="ctr">
-                      <a:solidFill>
-                        <a:srgbClr val="D1D9E0"/>
-                      </a:solidFill>
-                      <a:prstDash val="solid"/>
-                      <a:round/>
-                      <a:headEnd type="none" w="med" len="med"/>
-                      <a:tailEnd type="none" w="med" len="med"/>
-                    </a:lnB>
-                  </a:tcPr>
-                </a:tc>
-                <a:extLst>
-                  <a:ext uri="{0D108BD9-81ED-4DB2-BD59-A6C34878D82A}">
-                    <a16:rowId xmlns:a16="http://schemas.microsoft.com/office/drawing/2014/main" val="10002"/>
-                  </a:ext>
-                </a:extLst>
-              </a:tr>
-              <a:tr h="274320">
-                <a:tc>
-                  <a:txBody>
-                    <a:bodyPr/>
-                    <a:lstStyle/>
-                    <a:p>
-                      <a:pPr marL="0" indent="0">
-                        <a:buNone/>
-                      </a:pPr>
-                      <a:r>
-                        <a:rPr lang="en-US" sz="1000" dirty="0">
-                          <a:solidFill>
-                            <a:srgbClr val="000000"/>
-                          </a:solidFill>
-                          <a:latin typeface="Calibri" pitchFamily="34" charset="0"/>
-                          <a:ea typeface="Calibri" pitchFamily="34" charset="-122"/>
-                          <a:cs typeface="Calibri" pitchFamily="34" charset="-120"/>
-                        </a:rPr>
-                        <a:t>Superficie</a:t>
-                      </a:r>
-                      <a:endParaRPr lang="en-US" sz="1000" dirty="0">
-                        <a:latin typeface="Calibri" charset="0"/>
-                        <a:ea typeface="Calibri" charset="0"/>
-                        <a:cs typeface="Calibri" charset="0"/>
-                      </a:endParaRPr>
-                    </a:p>
-                  </a:txBody>
-                  <a:tcPr>
-                    <a:lnL w="6350" cap="flat" cmpd="sng" algn="ctr">
-                      <a:solidFill>
-                        <a:srgbClr val="D1D9E0"/>
-                      </a:solidFill>
-                      <a:prstDash val="solid"/>
-                      <a:round/>
-                      <a:headEnd type="none" w="med" len="med"/>
-                      <a:tailEnd type="none" w="med" len="med"/>
-                    </a:lnL>
-                    <a:lnR w="6350" cap="flat" cmpd="sng" algn="ctr">
-                      <a:solidFill>
-                        <a:srgbClr val="D1D9E0"/>
-                      </a:solidFill>
-                      <a:prstDash val="solid"/>
-                      <a:round/>
-                      <a:headEnd type="none" w="med" len="med"/>
-                      <a:tailEnd type="none" w="med" len="med"/>
-                    </a:lnR>
-                    <a:lnT w="6350" cap="flat" cmpd="sng" algn="ctr">
-                      <a:solidFill>
-                        <a:srgbClr val="D1D9E0"/>
-                      </a:solidFill>
-                      <a:prstDash val="solid"/>
-                      <a:round/>
-                      <a:headEnd type="none" w="med" len="med"/>
-                      <a:tailEnd type="none" w="med" len="med"/>
-                    </a:lnT>
-                    <a:lnB w="6350" cap="flat" cmpd="sng" algn="ctr">
-                      <a:solidFill>
-                        <a:srgbClr val="D1D9E0"/>
-                      </a:solidFill>
-                      <a:prstDash val="solid"/>
-                      <a:round/>
-                      <a:headEnd type="none" w="med" len="med"/>
-                      <a:tailEnd type="none" w="med" len="med"/>
-                    </a:lnB>
-                  </a:tcPr>
-                </a:tc>
-                <a:tc>
-                  <a:txBody>
-                    <a:bodyPr/>
-                    <a:lstStyle/>
-                    <a:p>
-                      <a:pPr marL="0" indent="0">
-                        <a:buNone/>
-                      </a:pPr>
-                      <a:r>
-                        <a:rPr lang="en-US" sz="1000" dirty="0">
-                          <a:solidFill>
-                            <a:srgbClr val="000000"/>
-                          </a:solidFill>
-                          <a:latin typeface="Calibri" pitchFamily="34" charset="0"/>
-                          <a:ea typeface="Calibri" pitchFamily="34" charset="-122"/>
-                          <a:cs typeface="Calibri" pitchFamily="34" charset="-120"/>
-                        </a:rPr>
-                        <a:t>Metros cuadrados construidos</a:t>
-                      </a:r>
-                      <a:endParaRPr lang="en-US" sz="1000" dirty="0">
-                        <a:latin typeface="Calibri" charset="0"/>
-                        <a:ea typeface="Calibri" charset="0"/>
-                        <a:cs typeface="Calibri" charset="0"/>
-                      </a:endParaRPr>
-                    </a:p>
-                  </a:txBody>
-                  <a:tcPr>
-                    <a:lnL w="6350" cap="flat" cmpd="sng" algn="ctr">
-                      <a:solidFill>
-                        <a:srgbClr val="D1D9E0"/>
-                      </a:solidFill>
-                      <a:prstDash val="solid"/>
-                      <a:round/>
-                      <a:headEnd type="none" w="med" len="med"/>
-                      <a:tailEnd type="none" w="med" len="med"/>
-                    </a:lnL>
-                    <a:lnR w="6350" cap="flat" cmpd="sng" algn="ctr">
-                      <a:solidFill>
-                        <a:srgbClr val="D1D9E0"/>
-                      </a:solidFill>
-                      <a:prstDash val="solid"/>
-                      <a:round/>
-                      <a:headEnd type="none" w="med" len="med"/>
-                      <a:tailEnd type="none" w="med" len="med"/>
-                    </a:lnR>
-                    <a:lnT w="6350" cap="flat" cmpd="sng" algn="ctr">
-                      <a:solidFill>
-                        <a:srgbClr val="D1D9E0"/>
-                      </a:solidFill>
-                      <a:prstDash val="solid"/>
-                      <a:round/>
-                      <a:headEnd type="none" w="med" len="med"/>
-                      <a:tailEnd type="none" w="med" len="med"/>
-                    </a:lnT>
-                    <a:lnB w="6350" cap="flat" cmpd="sng" algn="ctr">
-                      <a:solidFill>
-                        <a:srgbClr val="D1D9E0"/>
-                      </a:solidFill>
-                      <a:prstDash val="solid"/>
-                      <a:round/>
-                      <a:headEnd type="none" w="med" len="med"/>
-                      <a:tailEnd type="none" w="med" len="med"/>
-                    </a:lnB>
-                  </a:tcPr>
-                </a:tc>
-                <a:tc>
-                  <a:txBody>
-                    <a:bodyPr/>
-                    <a:lstStyle/>
-                    <a:p>
-                      <a:pPr marL="0" indent="0">
-                        <a:buNone/>
-                      </a:pPr>
-                      <a:r>
-                        <a:rPr lang="en-US" sz="1000" dirty="0">
-                          <a:solidFill>
-                            <a:srgbClr val="000000"/>
-                          </a:solidFill>
-                          <a:latin typeface="Calibri" pitchFamily="34" charset="0"/>
-                          <a:ea typeface="Calibri" pitchFamily="34" charset="-122"/>
-                          <a:cs typeface="Calibri" pitchFamily="34" charset="-120"/>
-                        </a:rPr>
-                        <a:t>✅ Feature</a:t>
-                      </a:r>
-                      <a:endParaRPr lang="en-US" sz="1000" dirty="0">
-                        <a:latin typeface="Calibri" charset="0"/>
-                        <a:ea typeface="Calibri" charset="0"/>
-                        <a:cs typeface="Calibri" charset="0"/>
-                      </a:endParaRPr>
-                    </a:p>
-                  </a:txBody>
-                  <a:tcPr>
-                    <a:lnL w="6350" cap="flat" cmpd="sng" algn="ctr">
-                      <a:solidFill>
-                        <a:srgbClr val="D1D9E0"/>
-                      </a:solidFill>
-                      <a:prstDash val="solid"/>
-                      <a:round/>
-                      <a:headEnd type="none" w="med" len="med"/>
-                      <a:tailEnd type="none" w="med" len="med"/>
-                    </a:lnL>
-                    <a:lnR w="6350" cap="flat" cmpd="sng" algn="ctr">
-                      <a:solidFill>
-                        <a:srgbClr val="D1D9E0"/>
-                      </a:solidFill>
-                      <a:prstDash val="solid"/>
-                      <a:round/>
-                      <a:headEnd type="none" w="med" len="med"/>
-                      <a:tailEnd type="none" w="med" len="med"/>
-                    </a:lnR>
-                    <a:lnT w="6350" cap="flat" cmpd="sng" algn="ctr">
-                      <a:solidFill>
-                        <a:srgbClr val="D1D9E0"/>
-                      </a:solidFill>
-                      <a:prstDash val="solid"/>
-                      <a:round/>
-                      <a:headEnd type="none" w="med" len="med"/>
-                      <a:tailEnd type="none" w="med" len="med"/>
-                    </a:lnT>
-                    <a:lnB w="6350" cap="flat" cmpd="sng" algn="ctr">
-                      <a:solidFill>
-                        <a:srgbClr val="D1D9E0"/>
-                      </a:solidFill>
-                      <a:prstDash val="solid"/>
-                      <a:round/>
-                      <a:headEnd type="none" w="med" len="med"/>
-                      <a:tailEnd type="none" w="med" len="med"/>
-                    </a:lnB>
-                  </a:tcPr>
-                </a:tc>
-                <a:extLst>
-                  <a:ext uri="{0D108BD9-81ED-4DB2-BD59-A6C34878D82A}">
-                    <a16:rowId xmlns:a16="http://schemas.microsoft.com/office/drawing/2014/main" val="10003"/>
-                  </a:ext>
-                </a:extLst>
-              </a:tr>
-              <a:tr h="274320">
-                <a:tc>
-                  <a:txBody>
-                    <a:bodyPr/>
-                    <a:lstStyle/>
-                    <a:p>
-                      <a:pPr marL="0" indent="0">
-                        <a:buNone/>
-                      </a:pPr>
-                      <a:r>
-                        <a:rPr lang="en-US" sz="1000" dirty="0">
-                          <a:solidFill>
-                            <a:srgbClr val="000000"/>
-                          </a:solidFill>
-                          <a:latin typeface="Calibri" pitchFamily="34" charset="0"/>
-                          <a:ea typeface="Calibri" pitchFamily="34" charset="-122"/>
-                          <a:cs typeface="Calibri" pitchFamily="34" charset="-120"/>
-                        </a:rPr>
-                        <a:t>Dormitorios / Baños</a:t>
-                      </a:r>
-                      <a:endParaRPr lang="en-US" sz="1000" dirty="0">
-                        <a:latin typeface="Calibri" charset="0"/>
-                        <a:ea typeface="Calibri" charset="0"/>
-                        <a:cs typeface="Calibri" charset="0"/>
-                      </a:endParaRPr>
-                    </a:p>
-                  </a:txBody>
-                  <a:tcPr>
-                    <a:lnL w="6350" cap="flat" cmpd="sng" algn="ctr">
-                      <a:solidFill>
-                        <a:srgbClr val="D1D9E0"/>
-                      </a:solidFill>
-                      <a:prstDash val="solid"/>
-                      <a:round/>
-                      <a:headEnd type="none" w="med" len="med"/>
-                      <a:tailEnd type="none" w="med" len="med"/>
-                    </a:lnL>
-                    <a:lnR w="6350" cap="flat" cmpd="sng" algn="ctr">
-                      <a:solidFill>
-                        <a:srgbClr val="D1D9E0"/>
-                      </a:solidFill>
-                      <a:prstDash val="solid"/>
-                      <a:round/>
-                      <a:headEnd type="none" w="med" len="med"/>
-                      <a:tailEnd type="none" w="med" len="med"/>
-                    </a:lnR>
-                    <a:lnT w="6350" cap="flat" cmpd="sng" algn="ctr">
-                      <a:solidFill>
-                        <a:srgbClr val="D1D9E0"/>
-                      </a:solidFill>
-                      <a:prstDash val="solid"/>
-                      <a:round/>
-                      <a:headEnd type="none" w="med" len="med"/>
-                      <a:tailEnd type="none" w="med" len="med"/>
-                    </a:lnT>
-                    <a:lnB w="6350" cap="flat" cmpd="sng" algn="ctr">
-                      <a:solidFill>
-                        <a:srgbClr val="D1D9E0"/>
-                      </a:solidFill>
-                      <a:prstDash val="solid"/>
-                      <a:round/>
-                      <a:headEnd type="none" w="med" len="med"/>
-                      <a:tailEnd type="none" w="med" len="med"/>
-                    </a:lnB>
-                  </a:tcPr>
-                </a:tc>
-                <a:tc>
-                  <a:txBody>
-                    <a:bodyPr/>
-                    <a:lstStyle/>
-                    <a:p>
-                      <a:pPr marL="0" indent="0">
-                        <a:buNone/>
-                      </a:pPr>
-                      <a:r>
-                        <a:rPr lang="en-US" sz="1000" dirty="0">
-                          <a:solidFill>
-                            <a:srgbClr val="000000"/>
-                          </a:solidFill>
-                          <a:latin typeface="Calibri" pitchFamily="34" charset="0"/>
-                          <a:ea typeface="Calibri" pitchFamily="34" charset="-122"/>
-                          <a:cs typeface="Calibri" pitchFamily="34" charset="-120"/>
-                        </a:rPr>
-                        <a:t>Número de estancias</a:t>
-                      </a:r>
-                      <a:endParaRPr lang="en-US" sz="1000" dirty="0">
-                        <a:latin typeface="Calibri" charset="0"/>
-                        <a:ea typeface="Calibri" charset="0"/>
-                        <a:cs typeface="Calibri" charset="0"/>
-                      </a:endParaRPr>
-                    </a:p>
-                  </a:txBody>
-                  <a:tcPr>
-                    <a:lnL w="6350" cap="flat" cmpd="sng" algn="ctr">
-                      <a:solidFill>
-                        <a:srgbClr val="D1D9E0"/>
-                      </a:solidFill>
-                      <a:prstDash val="solid"/>
-                      <a:round/>
-                      <a:headEnd type="none" w="med" len="med"/>
-                      <a:tailEnd type="none" w="med" len="med"/>
-                    </a:lnL>
-                    <a:lnR w="6350" cap="flat" cmpd="sng" algn="ctr">
-                      <a:solidFill>
-                        <a:srgbClr val="D1D9E0"/>
-                      </a:solidFill>
-                      <a:prstDash val="solid"/>
-                      <a:round/>
-                      <a:headEnd type="none" w="med" len="med"/>
-                      <a:tailEnd type="none" w="med" len="med"/>
-                    </a:lnR>
-                    <a:lnT w="6350" cap="flat" cmpd="sng" algn="ctr">
-                      <a:solidFill>
-                        <a:srgbClr val="D1D9E0"/>
-                      </a:solidFill>
-                      <a:prstDash val="solid"/>
-                      <a:round/>
-                      <a:headEnd type="none" w="med" len="med"/>
-                      <a:tailEnd type="none" w="med" len="med"/>
-                    </a:lnT>
-                    <a:lnB w="6350" cap="flat" cmpd="sng" algn="ctr">
-                      <a:solidFill>
-                        <a:srgbClr val="D1D9E0"/>
-                      </a:solidFill>
-                      <a:prstDash val="solid"/>
-                      <a:round/>
-                      <a:headEnd type="none" w="med" len="med"/>
-                      <a:tailEnd type="none" w="med" len="med"/>
-                    </a:lnB>
-                  </a:tcPr>
-                </a:tc>
-                <a:tc>
-                  <a:txBody>
-                    <a:bodyPr/>
-                    <a:lstStyle/>
-                    <a:p>
-                      <a:pPr marL="0" indent="0">
-                        <a:buNone/>
-                      </a:pPr>
-                      <a:r>
-                        <a:rPr lang="en-US" sz="1000" dirty="0">
-                          <a:solidFill>
-                            <a:srgbClr val="000000"/>
-                          </a:solidFill>
-                          <a:latin typeface="Calibri" pitchFamily="34" charset="0"/>
-                          <a:ea typeface="Calibri" pitchFamily="34" charset="-122"/>
-                          <a:cs typeface="Calibri" pitchFamily="34" charset="-120"/>
-                        </a:rPr>
-                        <a:t>✅ Feature</a:t>
-                      </a:r>
-                      <a:endParaRPr lang="en-US" sz="1000" dirty="0">
-                        <a:latin typeface="Calibri" charset="0"/>
-                        <a:ea typeface="Calibri" charset="0"/>
-                        <a:cs typeface="Calibri" charset="0"/>
-                      </a:endParaRPr>
-                    </a:p>
-                  </a:txBody>
-                  <a:tcPr>
-                    <a:lnL w="6350" cap="flat" cmpd="sng" algn="ctr">
-                      <a:solidFill>
-                        <a:srgbClr val="D1D9E0"/>
-                      </a:solidFill>
-                      <a:prstDash val="solid"/>
-                      <a:round/>
-                      <a:headEnd type="none" w="med" len="med"/>
-                      <a:tailEnd type="none" w="med" len="med"/>
-                    </a:lnL>
-                    <a:lnR w="6350" cap="flat" cmpd="sng" algn="ctr">
-                      <a:solidFill>
-                        <a:srgbClr val="D1D9E0"/>
-                      </a:solidFill>
-                      <a:prstDash val="solid"/>
-                      <a:round/>
-                      <a:headEnd type="none" w="med" len="med"/>
-                      <a:tailEnd type="none" w="med" len="med"/>
-                    </a:lnR>
-                    <a:lnT w="6350" cap="flat" cmpd="sng" algn="ctr">
-                      <a:solidFill>
-                        <a:srgbClr val="D1D9E0"/>
-                      </a:solidFill>
-                      <a:prstDash val="solid"/>
-                      <a:round/>
-                      <a:headEnd type="none" w="med" len="med"/>
-                      <a:tailEnd type="none" w="med" len="med"/>
-                    </a:lnT>
-                    <a:lnB w="6350" cap="flat" cmpd="sng" algn="ctr">
-                      <a:solidFill>
-                        <a:srgbClr val="D1D9E0"/>
-                      </a:solidFill>
-                      <a:prstDash val="solid"/>
-                      <a:round/>
-                      <a:headEnd type="none" w="med" len="med"/>
-                      <a:tailEnd type="none" w="med" len="med"/>
-                    </a:lnB>
-                  </a:tcPr>
-                </a:tc>
-                <a:extLst>
-                  <a:ext uri="{0D108BD9-81ED-4DB2-BD59-A6C34878D82A}">
-                    <a16:rowId xmlns:a16="http://schemas.microsoft.com/office/drawing/2014/main" val="10004"/>
-                  </a:ext>
-                </a:extLst>
-              </a:tr>
-              <a:tr h="274320">
-                <a:tc>
-                  <a:txBody>
-                    <a:bodyPr/>
-                    <a:lstStyle/>
-                    <a:p>
-                      <a:pPr marL="0" indent="0">
-                        <a:buNone/>
-                      </a:pPr>
-                      <a:r>
-                        <a:rPr lang="en-US" sz="1000" dirty="0">
-                          <a:solidFill>
-                            <a:srgbClr val="000000"/>
-                          </a:solidFill>
-                          <a:latin typeface="Calibri" pitchFamily="34" charset="0"/>
-                          <a:ea typeface="Calibri" pitchFamily="34" charset="-122"/>
-                          <a:cs typeface="Calibri" pitchFamily="34" charset="-120"/>
-                        </a:rPr>
-                        <a:t>Distrito / Barrio</a:t>
-                      </a:r>
-                      <a:endParaRPr lang="en-US" sz="1000" dirty="0">
-                        <a:latin typeface="Calibri" charset="0"/>
-                        <a:ea typeface="Calibri" charset="0"/>
-                        <a:cs typeface="Calibri" charset="0"/>
-                      </a:endParaRPr>
-                    </a:p>
-                  </a:txBody>
-                  <a:tcPr>
-                    <a:lnL w="6350" cap="flat" cmpd="sng" algn="ctr">
-                      <a:solidFill>
-                        <a:srgbClr val="D1D9E0"/>
-                      </a:solidFill>
-                      <a:prstDash val="solid"/>
-                      <a:round/>
-                      <a:headEnd type="none" w="med" len="med"/>
-                      <a:tailEnd type="none" w="med" len="med"/>
-                    </a:lnL>
-                    <a:lnR w="6350" cap="flat" cmpd="sng" algn="ctr">
-                      <a:solidFill>
-                        <a:srgbClr val="D1D9E0"/>
-                      </a:solidFill>
-                      <a:prstDash val="solid"/>
-                      <a:round/>
-                      <a:headEnd type="none" w="med" len="med"/>
-                      <a:tailEnd type="none" w="med" len="med"/>
-                    </a:lnR>
-                    <a:lnT w="6350" cap="flat" cmpd="sng" algn="ctr">
-                      <a:solidFill>
-                        <a:srgbClr val="D1D9E0"/>
-                      </a:solidFill>
-                      <a:prstDash val="solid"/>
-                      <a:round/>
-                      <a:headEnd type="none" w="med" len="med"/>
-                      <a:tailEnd type="none" w="med" len="med"/>
-                    </a:lnT>
-                    <a:lnB w="6350" cap="flat" cmpd="sng" algn="ctr">
-                      <a:solidFill>
-                        <a:srgbClr val="D1D9E0"/>
-                      </a:solidFill>
-                      <a:prstDash val="solid"/>
-                      <a:round/>
-                      <a:headEnd type="none" w="med" len="med"/>
-                      <a:tailEnd type="none" w="med" len="med"/>
-                    </a:lnB>
-                  </a:tcPr>
-                </a:tc>
-                <a:tc>
-                  <a:txBody>
-                    <a:bodyPr/>
-                    <a:lstStyle/>
-                    <a:p>
-                      <a:pPr marL="0" indent="0">
-                        <a:buNone/>
-                      </a:pPr>
-                      <a:r>
-                        <a:rPr lang="en-US" sz="1000" dirty="0">
-                          <a:solidFill>
-                            <a:srgbClr val="000000"/>
-                          </a:solidFill>
-                          <a:latin typeface="Calibri" pitchFamily="34" charset="0"/>
-                          <a:ea typeface="Calibri" pitchFamily="34" charset="-122"/>
-                          <a:cs typeface="Calibri" pitchFamily="34" charset="-120"/>
-                        </a:rPr>
-                        <a:t>Zona administrativa (OHE)</a:t>
-                      </a:r>
-                      <a:endParaRPr lang="en-US" sz="1000" dirty="0">
-                        <a:latin typeface="Calibri" charset="0"/>
-                        <a:ea typeface="Calibri" charset="0"/>
-                        <a:cs typeface="Calibri" charset="0"/>
-                      </a:endParaRPr>
-                    </a:p>
-                  </a:txBody>
-                  <a:tcPr>
-                    <a:lnL w="6350" cap="flat" cmpd="sng" algn="ctr">
-                      <a:solidFill>
-                        <a:srgbClr val="D1D9E0"/>
-                      </a:solidFill>
-                      <a:prstDash val="solid"/>
-                      <a:round/>
-                      <a:headEnd type="none" w="med" len="med"/>
-                      <a:tailEnd type="none" w="med" len="med"/>
-                    </a:lnL>
-                    <a:lnR w="6350" cap="flat" cmpd="sng" algn="ctr">
-                      <a:solidFill>
-                        <a:srgbClr val="D1D9E0"/>
-                      </a:solidFill>
-                      <a:prstDash val="solid"/>
-                      <a:round/>
-                      <a:headEnd type="none" w="med" len="med"/>
-                      <a:tailEnd type="none" w="med" len="med"/>
-                    </a:lnR>
-                    <a:lnT w="6350" cap="flat" cmpd="sng" algn="ctr">
-                      <a:solidFill>
-                        <a:srgbClr val="D1D9E0"/>
-                      </a:solidFill>
-                      <a:prstDash val="solid"/>
-                      <a:round/>
-                      <a:headEnd type="none" w="med" len="med"/>
-                      <a:tailEnd type="none" w="med" len="med"/>
-                    </a:lnT>
-                    <a:lnB w="6350" cap="flat" cmpd="sng" algn="ctr">
-                      <a:solidFill>
-                        <a:srgbClr val="D1D9E0"/>
-                      </a:solidFill>
-                      <a:prstDash val="solid"/>
-                      <a:round/>
-                      <a:headEnd type="none" w="med" len="med"/>
-                      <a:tailEnd type="none" w="med" len="med"/>
-                    </a:lnB>
-                  </a:tcPr>
-                </a:tc>
-                <a:tc>
-                  <a:txBody>
-                    <a:bodyPr/>
-                    <a:lstStyle/>
-                    <a:p>
-                      <a:pPr marL="0" indent="0">
-                        <a:buNone/>
-                      </a:pPr>
-                      <a:r>
-                        <a:rPr lang="en-US" sz="1000" dirty="0">
-                          <a:solidFill>
-                            <a:srgbClr val="000000"/>
-                          </a:solidFill>
-                          <a:latin typeface="Calibri" pitchFamily="34" charset="0"/>
-                          <a:ea typeface="Calibri" pitchFamily="34" charset="-122"/>
-                          <a:cs typeface="Calibri" pitchFamily="34" charset="-120"/>
-                        </a:rPr>
-                        <a:t>✅ Feature</a:t>
-                      </a:r>
-                      <a:endParaRPr lang="en-US" sz="1000" dirty="0">
-                        <a:latin typeface="Calibri" charset="0"/>
-                        <a:ea typeface="Calibri" charset="0"/>
-                        <a:cs typeface="Calibri" charset="0"/>
-                      </a:endParaRPr>
-                    </a:p>
-                  </a:txBody>
-                  <a:tcPr>
-                    <a:lnL w="6350" cap="flat" cmpd="sng" algn="ctr">
-                      <a:solidFill>
-                        <a:srgbClr val="D1D9E0"/>
-                      </a:solidFill>
-                      <a:prstDash val="solid"/>
-                      <a:round/>
-                      <a:headEnd type="none" w="med" len="med"/>
-                      <a:tailEnd type="none" w="med" len="med"/>
-                    </a:lnL>
-                    <a:lnR w="6350" cap="flat" cmpd="sng" algn="ctr">
-                      <a:solidFill>
-                        <a:srgbClr val="D1D9E0"/>
-                      </a:solidFill>
-                      <a:prstDash val="solid"/>
-                      <a:round/>
-                      <a:headEnd type="none" w="med" len="med"/>
-                      <a:tailEnd type="none" w="med" len="med"/>
-                    </a:lnR>
-                    <a:lnT w="6350" cap="flat" cmpd="sng" algn="ctr">
-                      <a:solidFill>
-                        <a:srgbClr val="D1D9E0"/>
-                      </a:solidFill>
-                      <a:prstDash val="solid"/>
-                      <a:round/>
-                      <a:headEnd type="none" w="med" len="med"/>
-                      <a:tailEnd type="none" w="med" len="med"/>
-                    </a:lnT>
-                    <a:lnB w="6350" cap="flat" cmpd="sng" algn="ctr">
-                      <a:solidFill>
-                        <a:srgbClr val="D1D9E0"/>
-                      </a:solidFill>
-                      <a:prstDash val="solid"/>
-                      <a:round/>
-                      <a:headEnd type="none" w="med" len="med"/>
-                      <a:tailEnd type="none" w="med" len="med"/>
-                    </a:lnB>
-                  </a:tcPr>
-                </a:tc>
-                <a:extLst>
-                  <a:ext uri="{0D108BD9-81ED-4DB2-BD59-A6C34878D82A}">
-                    <a16:rowId xmlns:a16="http://schemas.microsoft.com/office/drawing/2014/main" val="10005"/>
-                  </a:ext>
-                </a:extLst>
-              </a:tr>
-              <a:tr h="274320">
-                <a:tc>
-                  <a:txBody>
-                    <a:bodyPr/>
-                    <a:lstStyle/>
-                    <a:p>
-                      <a:pPr marL="0" indent="0">
-                        <a:buNone/>
-                      </a:pPr>
-                      <a:r>
-                        <a:rPr lang="en-US" sz="1000" dirty="0">
-                          <a:solidFill>
-                            <a:srgbClr val="000000"/>
-                          </a:solidFill>
-                          <a:latin typeface="Calibri" pitchFamily="34" charset="0"/>
-                          <a:ea typeface="Calibri" pitchFamily="34" charset="-122"/>
-                          <a:cs typeface="Calibri" pitchFamily="34" charset="-120"/>
-                        </a:rPr>
-                        <a:t>Amenidades</a:t>
-                      </a:r>
-                      <a:endParaRPr lang="en-US" sz="1000" dirty="0">
-                        <a:latin typeface="Calibri" charset="0"/>
-                        <a:ea typeface="Calibri" charset="0"/>
-                        <a:cs typeface="Calibri" charset="0"/>
-                      </a:endParaRPr>
-                    </a:p>
-                  </a:txBody>
-                  <a:tcPr>
-                    <a:lnL w="6350" cap="flat" cmpd="sng" algn="ctr">
-                      <a:solidFill>
-                        <a:srgbClr val="D1D9E0"/>
-                      </a:solidFill>
-                      <a:prstDash val="solid"/>
-                      <a:round/>
-                      <a:headEnd type="none" w="med" len="med"/>
-                      <a:tailEnd type="none" w="med" len="med"/>
-                    </a:lnL>
-                    <a:lnR w="6350" cap="flat" cmpd="sng" algn="ctr">
-                      <a:solidFill>
-                        <a:srgbClr val="D1D9E0"/>
-                      </a:solidFill>
-                      <a:prstDash val="solid"/>
-                      <a:round/>
-                      <a:headEnd type="none" w="med" len="med"/>
-                      <a:tailEnd type="none" w="med" len="med"/>
-                    </a:lnR>
-                    <a:lnT w="6350" cap="flat" cmpd="sng" algn="ctr">
-                      <a:solidFill>
-                        <a:srgbClr val="D1D9E0"/>
-                      </a:solidFill>
-                      <a:prstDash val="solid"/>
-                      <a:round/>
-                      <a:headEnd type="none" w="med" len="med"/>
-                      <a:tailEnd type="none" w="med" len="med"/>
-                    </a:lnT>
-                    <a:lnB w="6350" cap="flat" cmpd="sng" algn="ctr">
-                      <a:solidFill>
-                        <a:srgbClr val="D1D9E0"/>
-                      </a:solidFill>
-                      <a:prstDash val="solid"/>
-                      <a:round/>
-                      <a:headEnd type="none" w="med" len="med"/>
-                      <a:tailEnd type="none" w="med" len="med"/>
-                    </a:lnB>
-                  </a:tcPr>
-                </a:tc>
-                <a:tc>
-                  <a:txBody>
-                    <a:bodyPr/>
-                    <a:lstStyle/>
-                    <a:p>
-                      <a:pPr marL="0" indent="0">
-                        <a:buNone/>
-                      </a:pPr>
-                      <a:r>
-                        <a:rPr lang="en-US" sz="1000" dirty="0">
-                          <a:solidFill>
-                            <a:srgbClr val="000000"/>
-                          </a:solidFill>
-                          <a:latin typeface="Calibri" pitchFamily="34" charset="0"/>
-                          <a:ea typeface="Calibri" pitchFamily="34" charset="-122"/>
-                          <a:cs typeface="Calibri" pitchFamily="34" charset="-120"/>
-                        </a:rPr>
-                        <a:t>Garaje, terraza, piscina...</a:t>
-                      </a:r>
-                      <a:endParaRPr lang="en-US" sz="1000" dirty="0">
-                        <a:latin typeface="Calibri" charset="0"/>
-                        <a:ea typeface="Calibri" charset="0"/>
-                        <a:cs typeface="Calibri" charset="0"/>
-                      </a:endParaRPr>
-                    </a:p>
-                  </a:txBody>
-                  <a:tcPr>
-                    <a:lnL w="6350" cap="flat" cmpd="sng" algn="ctr">
-                      <a:solidFill>
-                        <a:srgbClr val="D1D9E0"/>
-                      </a:solidFill>
-                      <a:prstDash val="solid"/>
-                      <a:round/>
-                      <a:headEnd type="none" w="med" len="med"/>
-                      <a:tailEnd type="none" w="med" len="med"/>
-                    </a:lnL>
-                    <a:lnR w="6350" cap="flat" cmpd="sng" algn="ctr">
-                      <a:solidFill>
-                        <a:srgbClr val="D1D9E0"/>
-                      </a:solidFill>
-                      <a:prstDash val="solid"/>
-                      <a:round/>
-                      <a:headEnd type="none" w="med" len="med"/>
-                      <a:tailEnd type="none" w="med" len="med"/>
-                    </a:lnR>
-                    <a:lnT w="6350" cap="flat" cmpd="sng" algn="ctr">
-                      <a:solidFill>
-                        <a:srgbClr val="D1D9E0"/>
-                      </a:solidFill>
-                      <a:prstDash val="solid"/>
-                      <a:round/>
-                      <a:headEnd type="none" w="med" len="med"/>
-                      <a:tailEnd type="none" w="med" len="med"/>
-                    </a:lnT>
-                    <a:lnB w="6350" cap="flat" cmpd="sng" algn="ctr">
-                      <a:solidFill>
-                        <a:srgbClr val="D1D9E0"/>
-                      </a:solidFill>
-                      <a:prstDash val="solid"/>
-                      <a:round/>
-                      <a:headEnd type="none" w="med" len="med"/>
-                      <a:tailEnd type="none" w="med" len="med"/>
-                    </a:lnB>
-                  </a:tcPr>
-                </a:tc>
-                <a:tc>
-                  <a:txBody>
-                    <a:bodyPr/>
-                    <a:lstStyle/>
-                    <a:p>
-                      <a:pPr marL="0" indent="0">
-                        <a:buNone/>
-                      </a:pPr>
-                      <a:r>
-                        <a:rPr lang="en-US" sz="1000" dirty="0">
-                          <a:solidFill>
-                            <a:srgbClr val="000000"/>
-                          </a:solidFill>
-                          <a:latin typeface="Calibri" pitchFamily="34" charset="0"/>
-                          <a:ea typeface="Calibri" pitchFamily="34" charset="-122"/>
-                          <a:cs typeface="Calibri" pitchFamily="34" charset="-120"/>
-                        </a:rPr>
-                        <a:t>✅ Feature</a:t>
-                      </a:r>
-                      <a:endParaRPr lang="en-US" sz="1000" dirty="0">
-                        <a:latin typeface="Calibri" charset="0"/>
-                        <a:ea typeface="Calibri" charset="0"/>
-                        <a:cs typeface="Calibri" charset="0"/>
-                      </a:endParaRPr>
-                    </a:p>
-                  </a:txBody>
-                  <a:tcPr>
-                    <a:lnL w="6350" cap="flat" cmpd="sng" algn="ctr">
-                      <a:solidFill>
-                        <a:srgbClr val="D1D9E0"/>
-                      </a:solidFill>
-                      <a:prstDash val="solid"/>
-                      <a:round/>
-                      <a:headEnd type="none" w="med" len="med"/>
-                      <a:tailEnd type="none" w="med" len="med"/>
-                    </a:lnL>
-                    <a:lnR w="6350" cap="flat" cmpd="sng" algn="ctr">
-                      <a:solidFill>
-                        <a:srgbClr val="D1D9E0"/>
-                      </a:solidFill>
-                      <a:prstDash val="solid"/>
-                      <a:round/>
-                      <a:headEnd type="none" w="med" len="med"/>
-                      <a:tailEnd type="none" w="med" len="med"/>
-                    </a:lnR>
-                    <a:lnT w="6350" cap="flat" cmpd="sng" algn="ctr">
-                      <a:solidFill>
-                        <a:srgbClr val="D1D9E0"/>
-                      </a:solidFill>
-                      <a:prstDash val="solid"/>
-                      <a:round/>
-                      <a:headEnd type="none" w="med" len="med"/>
-                      <a:tailEnd type="none" w="med" len="med"/>
-                    </a:lnT>
-                    <a:lnB w="6350" cap="flat" cmpd="sng" algn="ctr">
-                      <a:solidFill>
-                        <a:srgbClr val="D1D9E0"/>
-                      </a:solidFill>
-                      <a:prstDash val="solid"/>
-                      <a:round/>
-                      <a:headEnd type="none" w="med" len="med"/>
-                      <a:tailEnd type="none" w="med" len="med"/>
-                    </a:lnB>
-                  </a:tcPr>
-                </a:tc>
-                <a:extLst>
-                  <a:ext uri="{0D108BD9-81ED-4DB2-BD59-A6C34878D82A}">
-                    <a16:rowId xmlns:a16="http://schemas.microsoft.com/office/drawing/2014/main" val="10006"/>
-                  </a:ext>
-                </a:extLst>
-              </a:tr>
-            </a:tbl>
-          </a:graphicData>
-        </a:graphic>
-      </p:graphicFrame>
-    </p:spTree>
-  </p:cSld>
-  <p:clrMapOvr>
-    <a:masterClrMapping/>
-  </p:clrMapOvr>
-</p:sld>
-</file>
-
-<file path=ppt/slides/slide5.xml><?xml version="1.0" encoding="utf-8"?>
-<p:sld xmlns:a="http://schemas.openxmlformats.org/drawingml/2006/main" xmlns:r="http://schemas.openxmlformats.org/officeDocument/2006/relationships" xmlns:p="http://schemas.openxmlformats.org/presentationml/2006/main">
-  <p:cSld name="Slide 5">
-    <p:bg>
-      <p:bgPr>
-        <a:solidFill>
-          <a:srgbClr val="FFFFFF"/>
-        </a:solidFill>
-        <a:effectLst/>
-      </p:bgPr>
-    </p:bg>
-    <p:spTree>
-      <p:nvGrpSpPr>
-        <p:cNvPr id="1" name=""/>
-        <p:cNvGrpSpPr/>
-        <p:nvPr/>
-      </p:nvGrpSpPr>
-      <p:grpSpPr>
-        <a:xfrm>
-          <a:off x="0" y="0"/>
-          <a:ext cx="0" cy="0"/>
-          <a:chOff x="0" y="0"/>
-          <a:chExt cx="0" cy="0"/>
-        </a:xfrm>
-      </p:grpSpPr>
-      <p:sp>
-        <p:nvSpPr>
-          <p:cNvPr id="2" name="Shape 0"/>
-          <p:cNvSpPr/>
-          <p:nvPr/>
-        </p:nvSpPr>
-        <p:spPr>
-          <a:xfrm>
-            <a:off x="0" y="0"/>
-            <a:ext cx="9144000" cy="914400"/>
-          </a:xfrm>
-          <a:prstGeom prst="rect">
-            <a:avLst/>
-          </a:prstGeom>
-          <a:solidFill>
-            <a:srgbClr val="1A2744"/>
-          </a:solidFill>
-          <a:ln w="12700">
-            <a:solidFill>
-              <a:srgbClr val="1A2744"/>
-            </a:solidFill>
-            <a:prstDash val="solid"/>
-          </a:ln>
-        </p:spPr>
-        <p:txBody>
-          <a:bodyPr/>
-          <a:lstStyle/>
-          <a:p>
-            <a:endParaRPr lang="es-ES"/>
-          </a:p>
-        </p:txBody>
-      </p:sp>
-      <p:sp>
-        <p:nvSpPr>
-          <p:cNvPr id="3" name="Text 1"/>
-          <p:cNvSpPr/>
-          <p:nvPr/>
-        </p:nvSpPr>
-        <p:spPr>
-          <a:xfrm>
-            <a:off x="457200" y="0"/>
-            <a:ext cx="8229600" cy="914400"/>
-          </a:xfrm>
-          <a:prstGeom prst="rect">
-            <a:avLst/>
-          </a:prstGeom>
-          <a:noFill/>
-          <a:ln/>
-        </p:spPr>
-        <p:txBody>
-          <a:bodyPr wrap="square" rtlCol="0" anchor="ctr"/>
-          <a:lstStyle/>
-          <a:p>
-            <a:pPr marL="0" indent="0" algn="l">
-              <a:buNone/>
-            </a:pPr>
-            <a:r>
-              <a:rPr lang="en-US" sz="2400" b="1" dirty="0">
-                <a:solidFill>
-                  <a:srgbClr val="FFFFFF"/>
-                </a:solidFill>
-                <a:latin typeface="Calibri" pitchFamily="34" charset="0"/>
-                <a:ea typeface="Calibri" pitchFamily="34" charset="-122"/>
-                <a:cs typeface="Calibri" pitchFamily="34" charset="-120"/>
-              </a:rPr>
-              <a:t>EDA — Análisis Exploratorio de Datos</a:t>
-            </a:r>
-            <a:endParaRPr lang="en-US" sz="2400" dirty="0"/>
-          </a:p>
-        </p:txBody>
-      </p:sp>
-      <p:sp>
-        <p:nvSpPr>
-          <p:cNvPr id="4" name="Shape 2"/>
-          <p:cNvSpPr/>
-          <p:nvPr/>
-        </p:nvSpPr>
-        <p:spPr>
-          <a:xfrm>
-            <a:off x="320040" y="1097280"/>
-            <a:ext cx="4114800" cy="1737360"/>
-          </a:xfrm>
-          <a:prstGeom prst="rect">
-            <a:avLst/>
-          </a:prstGeom>
-          <a:solidFill>
-            <a:srgbClr val="F5F0E8"/>
-          </a:solidFill>
-          <a:ln w="12700">
-            <a:solidFill>
-              <a:srgbClr val="D8D0C4"/>
-            </a:solidFill>
-            <a:prstDash val="solid"/>
-          </a:ln>
-          <a:effectLst>
-            <a:outerShdw blurRad="101600" dist="38100" dir="8100000" algn="bl" rotWithShape="0">
-              <a:srgbClr val="000000">
-                <a:alpha val="12000"/>
-              </a:srgbClr>
-            </a:outerShdw>
-          </a:effectLst>
-        </p:spPr>
-        <p:txBody>
-          <a:bodyPr/>
-          <a:lstStyle/>
-          <a:p>
-            <a:endParaRPr lang="es-ES"/>
-          </a:p>
-        </p:txBody>
-      </p:sp>
-      <p:sp>
-        <p:nvSpPr>
-          <p:cNvPr id="5" name="Shape 3"/>
-          <p:cNvSpPr/>
-          <p:nvPr/>
-        </p:nvSpPr>
-        <p:spPr>
-          <a:xfrm>
-            <a:off x="320040" y="1097280"/>
-            <a:ext cx="4114800" cy="384048"/>
-          </a:xfrm>
-          <a:prstGeom prst="rect">
-            <a:avLst/>
-          </a:prstGeom>
-          <a:solidFill>
-            <a:srgbClr val="0D7377"/>
-          </a:solidFill>
-          <a:ln w="12700">
-            <a:solidFill>
-              <a:srgbClr val="0D7377"/>
-            </a:solidFill>
-            <a:prstDash val="solid"/>
-          </a:ln>
-        </p:spPr>
-        <p:txBody>
-          <a:bodyPr/>
-          <a:lstStyle/>
-          <a:p>
-            <a:endParaRPr lang="es-ES"/>
-          </a:p>
-        </p:txBody>
-      </p:sp>
-      <p:sp>
-        <p:nvSpPr>
-          <p:cNvPr id="6" name="Text 4"/>
-          <p:cNvSpPr/>
-          <p:nvPr/>
-        </p:nvSpPr>
-        <p:spPr>
-          <a:xfrm>
-            <a:off x="457200" y="1143000"/>
-            <a:ext cx="3840480" cy="292608"/>
-          </a:xfrm>
-          <a:prstGeom prst="rect">
-            <a:avLst/>
-          </a:prstGeom>
-          <a:noFill/>
-          <a:ln/>
-        </p:spPr>
-        <p:txBody>
-          <a:bodyPr wrap="square" rtlCol="0" anchor="ctr"/>
-          <a:lstStyle/>
-          <a:p>
-            <a:pPr marL="0" indent="0">
-              <a:buNone/>
-            </a:pPr>
-            <a:r>
-              <a:rPr lang="en-US" sz="1200" b="1" dirty="0">
-                <a:solidFill>
-                  <a:srgbClr val="FFFFFF"/>
-                </a:solidFill>
-                <a:latin typeface="Calibri" pitchFamily="34" charset="0"/>
-                <a:ea typeface="Calibri" pitchFamily="34" charset="-122"/>
-                <a:cs typeface="Calibri" pitchFamily="34" charset="-120"/>
-              </a:rPr>
-              <a:t>📍 Distribución Geográfica</a:t>
-            </a:r>
-            <a:endParaRPr lang="en-US" sz="1200" dirty="0"/>
-          </a:p>
-        </p:txBody>
-      </p:sp>
-      <p:sp>
-        <p:nvSpPr>
-          <p:cNvPr id="7" name="Text 5"/>
-          <p:cNvSpPr/>
-          <p:nvPr/>
-        </p:nvSpPr>
-        <p:spPr>
-          <a:xfrm>
-            <a:off x="457200" y="1554480"/>
-            <a:ext cx="3840480" cy="1188720"/>
-          </a:xfrm>
-          <a:prstGeom prst="rect">
-            <a:avLst/>
-          </a:prstGeom>
-          <a:noFill/>
-          <a:ln/>
-        </p:spPr>
-        <p:txBody>
-          <a:bodyPr wrap="square" rtlCol="0" anchor="ctr"/>
-          <a:lstStyle/>
-          <a:p>
-            <a:pPr marL="0" indent="0">
-              <a:buNone/>
-            </a:pPr>
-            <a:r>
-              <a:rPr lang="en-US" sz="1050" dirty="0">
-                <a:solidFill>
-                  <a:srgbClr val="1E293B"/>
-                </a:solidFill>
-                <a:latin typeface="Calibri" pitchFamily="34" charset="0"/>
-                <a:ea typeface="Calibri" pitchFamily="34" charset="-122"/>
-                <a:cs typeface="Calibri" pitchFamily="34" charset="-120"/>
-              </a:rPr>
-              <a:t>El precio/m² varía notablemente por zona. Los distritos costeros (Poblats Marítims) y el centro histórico concentran los valores más altos, superando 4.000 €/m².</a:t>
-            </a:r>
-            <a:endParaRPr lang="en-US" sz="1050" dirty="0"/>
-          </a:p>
-        </p:txBody>
-      </p:sp>
-      <p:sp>
-        <p:nvSpPr>
-          <p:cNvPr id="8" name="Shape 6"/>
-          <p:cNvSpPr/>
-          <p:nvPr/>
-        </p:nvSpPr>
-        <p:spPr>
-          <a:xfrm>
-            <a:off x="4709160" y="1097280"/>
-            <a:ext cx="4114800" cy="1737360"/>
-          </a:xfrm>
-          <a:prstGeom prst="rect">
-            <a:avLst/>
-          </a:prstGeom>
-          <a:solidFill>
-            <a:srgbClr val="F5F0E8"/>
-          </a:solidFill>
-          <a:ln w="12700">
-            <a:solidFill>
-              <a:srgbClr val="D8D0C4"/>
-            </a:solidFill>
-            <a:prstDash val="solid"/>
-          </a:ln>
-          <a:effectLst>
-            <a:outerShdw blurRad="101600" dist="38100" dir="8100000" algn="bl" rotWithShape="0">
-              <a:srgbClr val="000000">
-                <a:alpha val="12000"/>
-              </a:srgbClr>
-            </a:outerShdw>
-          </a:effectLst>
-        </p:spPr>
-        <p:txBody>
-          <a:bodyPr/>
-          <a:lstStyle/>
-          <a:p>
-            <a:endParaRPr lang="es-ES"/>
-          </a:p>
-        </p:txBody>
-      </p:sp>
-      <p:sp>
-        <p:nvSpPr>
-          <p:cNvPr id="9" name="Shape 7"/>
-          <p:cNvSpPr/>
-          <p:nvPr/>
-        </p:nvSpPr>
-        <p:spPr>
-          <a:xfrm>
-            <a:off x="4709160" y="1097280"/>
-            <a:ext cx="4114800" cy="384048"/>
-          </a:xfrm>
-          <a:prstGeom prst="rect">
-            <a:avLst/>
-          </a:prstGeom>
-          <a:solidFill>
-            <a:srgbClr val="E07B39"/>
-          </a:solidFill>
-          <a:ln w="12700">
-            <a:solidFill>
-              <a:srgbClr val="E07B39"/>
-            </a:solidFill>
-            <a:prstDash val="solid"/>
-          </a:ln>
-        </p:spPr>
-        <p:txBody>
-          <a:bodyPr/>
-          <a:lstStyle/>
-          <a:p>
-            <a:endParaRPr lang="es-ES"/>
-          </a:p>
-        </p:txBody>
-      </p:sp>
-      <p:sp>
-        <p:nvSpPr>
-          <p:cNvPr id="10" name="Text 8"/>
-          <p:cNvSpPr/>
-          <p:nvPr/>
-        </p:nvSpPr>
-        <p:spPr>
-          <a:xfrm>
-            <a:off x="4846320" y="1143000"/>
-            <a:ext cx="3840480" cy="292608"/>
-          </a:xfrm>
-          <a:prstGeom prst="rect">
-            <a:avLst/>
-          </a:prstGeom>
-          <a:noFill/>
-          <a:ln/>
-        </p:spPr>
-        <p:txBody>
-          <a:bodyPr wrap="square" rtlCol="0" anchor="ctr"/>
-          <a:lstStyle/>
-          <a:p>
-            <a:pPr marL="0" indent="0">
-              <a:buNone/>
-            </a:pPr>
-            <a:r>
-              <a:rPr lang="en-US" sz="1200" b="1" dirty="0">
-                <a:solidFill>
-                  <a:srgbClr val="FFFFFF"/>
-                </a:solidFill>
-                <a:latin typeface="Calibri" pitchFamily="34" charset="0"/>
-                <a:ea typeface="Calibri" pitchFamily="34" charset="-122"/>
-                <a:cs typeface="Calibri" pitchFamily="34" charset="-120"/>
-              </a:rPr>
-              <a:t>📊 Outliers de Precio</a:t>
-            </a:r>
-            <a:endParaRPr lang="en-US" sz="1200" dirty="0"/>
-          </a:p>
-        </p:txBody>
-      </p:sp>
-      <p:sp>
-        <p:nvSpPr>
-          <p:cNvPr id="11" name="Text 9"/>
-          <p:cNvSpPr/>
-          <p:nvPr/>
-        </p:nvSpPr>
-        <p:spPr>
-          <a:xfrm>
-            <a:off x="4846320" y="1554480"/>
-            <a:ext cx="3840480" cy="1188720"/>
-          </a:xfrm>
-          <a:prstGeom prst="rect">
-            <a:avLst/>
-          </a:prstGeom>
-          <a:noFill/>
-          <a:ln/>
-        </p:spPr>
-        <p:txBody>
-          <a:bodyPr wrap="square" rtlCol="0" anchor="ctr"/>
-          <a:lstStyle/>
-          <a:p>
-            <a:pPr marL="0" indent="0">
-              <a:buNone/>
-            </a:pPr>
-            <a:r>
-              <a:rPr lang="en-US" sz="1050" dirty="0">
-                <a:solidFill>
-                  <a:srgbClr val="1E293B"/>
-                </a:solidFill>
-                <a:latin typeface="Calibri" pitchFamily="34" charset="0"/>
-                <a:ea typeface="Calibri" pitchFamily="34" charset="-122"/>
-                <a:cs typeface="Calibri" pitchFamily="34" charset="-120"/>
-              </a:rPr>
-              <a:t>Se detectaron propiedades con precios unitarios fuera del rango razonable. Filtro aplicado: 500 – 15.000 €/m². Eliminando sesgo extremo del dataset.</a:t>
-            </a:r>
-            <a:endParaRPr lang="en-US" sz="1050" dirty="0"/>
-          </a:p>
-        </p:txBody>
-      </p:sp>
-      <p:sp>
-        <p:nvSpPr>
-          <p:cNvPr id="12" name="Shape 10"/>
-          <p:cNvSpPr/>
-          <p:nvPr/>
-        </p:nvSpPr>
-        <p:spPr>
-          <a:xfrm>
-            <a:off x="320040" y="3017520"/>
-            <a:ext cx="4114800" cy="1737360"/>
-          </a:xfrm>
-          <a:prstGeom prst="rect">
-            <a:avLst/>
-          </a:prstGeom>
-          <a:solidFill>
-            <a:srgbClr val="F5F0E8"/>
-          </a:solidFill>
-          <a:ln w="12700">
-            <a:solidFill>
-              <a:srgbClr val="D8D0C4"/>
-            </a:solidFill>
-            <a:prstDash val="solid"/>
-          </a:ln>
-          <a:effectLst>
-            <a:outerShdw blurRad="101600" dist="38100" dir="8100000" algn="bl" rotWithShape="0">
-              <a:srgbClr val="000000">
-                <a:alpha val="12000"/>
-              </a:srgbClr>
-            </a:outerShdw>
-          </a:effectLst>
-        </p:spPr>
-        <p:txBody>
-          <a:bodyPr/>
-          <a:lstStyle/>
-          <a:p>
-            <a:endParaRPr lang="es-ES"/>
-          </a:p>
-        </p:txBody>
-      </p:sp>
-      <p:sp>
-        <p:nvSpPr>
-          <p:cNvPr id="13" name="Shape 11"/>
-          <p:cNvSpPr/>
-          <p:nvPr/>
-        </p:nvSpPr>
-        <p:spPr>
-          <a:xfrm>
-            <a:off x="320040" y="3017520"/>
-            <a:ext cx="4114800" cy="384048"/>
-          </a:xfrm>
-          <a:prstGeom prst="rect">
-            <a:avLst/>
-          </a:prstGeom>
-          <a:solidFill>
-            <a:srgbClr val="1A2744"/>
-          </a:solidFill>
-          <a:ln w="12700">
-            <a:solidFill>
-              <a:srgbClr val="1A2744"/>
-            </a:solidFill>
-            <a:prstDash val="solid"/>
-          </a:ln>
-        </p:spPr>
-        <p:txBody>
-          <a:bodyPr/>
-          <a:lstStyle/>
-          <a:p>
-            <a:endParaRPr lang="es-ES"/>
-          </a:p>
-        </p:txBody>
-      </p:sp>
-      <p:sp>
-        <p:nvSpPr>
-          <p:cNvPr id="14" name="Text 12"/>
-          <p:cNvSpPr/>
-          <p:nvPr/>
-        </p:nvSpPr>
-        <p:spPr>
-          <a:xfrm>
-            <a:off x="457200" y="3063240"/>
-            <a:ext cx="3840480" cy="292608"/>
-          </a:xfrm>
-          <a:prstGeom prst="rect">
-            <a:avLst/>
-          </a:prstGeom>
-          <a:noFill/>
-          <a:ln/>
-        </p:spPr>
-        <p:txBody>
-          <a:bodyPr wrap="square" rtlCol="0" anchor="ctr"/>
-          <a:lstStyle/>
-          <a:p>
-            <a:pPr marL="0" indent="0">
-              <a:buNone/>
-            </a:pPr>
-            <a:r>
-              <a:rPr lang="en-US" sz="1200" b="1" dirty="0">
-                <a:solidFill>
-                  <a:srgbClr val="FFFFFF"/>
-                </a:solidFill>
-                <a:latin typeface="Calibri" pitchFamily="34" charset="0"/>
-                <a:ea typeface="Calibri" pitchFamily="34" charset="-122"/>
-                <a:cs typeface="Calibri" pitchFamily="34" charset="-120"/>
-              </a:rPr>
-              <a:t>🔗 Correlaciones Clave</a:t>
-            </a:r>
-            <a:endParaRPr lang="en-US" sz="1200" dirty="0"/>
-          </a:p>
-        </p:txBody>
-      </p:sp>
-      <p:sp>
-        <p:nvSpPr>
-          <p:cNvPr id="15" name="Text 13"/>
-          <p:cNvSpPr/>
-          <p:nvPr/>
-        </p:nvSpPr>
-        <p:spPr>
-          <a:xfrm>
-            <a:off x="457200" y="3474720"/>
-            <a:ext cx="3840480" cy="1188720"/>
-          </a:xfrm>
-          <a:prstGeom prst="rect">
-            <a:avLst/>
-          </a:prstGeom>
-          <a:noFill/>
-          <a:ln/>
-        </p:spPr>
-        <p:txBody>
-          <a:bodyPr wrap="square" rtlCol="0" anchor="ctr"/>
-          <a:lstStyle/>
-          <a:p>
-            <a:pPr marL="0" indent="0">
-              <a:buNone/>
-            </a:pPr>
-            <a:r>
-              <a:rPr lang="en-US" sz="1050" dirty="0">
-                <a:solidFill>
-                  <a:srgbClr val="1E293B"/>
-                </a:solidFill>
-                <a:latin typeface="Calibri" pitchFamily="34" charset="0"/>
-                <a:ea typeface="Calibri" pitchFamily="34" charset="-122"/>
-                <a:cs typeface="Calibri" pitchFamily="34" charset="-120"/>
-              </a:rPr>
-              <a:t>Superficie y número de baños muestran la mayor correlación con el precio. La ubicación (Latitud/Longitud) añade valor predictivo significativo al modelo.</a:t>
-            </a:r>
-            <a:endParaRPr lang="en-US" sz="1050" dirty="0"/>
-          </a:p>
-        </p:txBody>
-      </p:sp>
-      <p:sp>
-        <p:nvSpPr>
-          <p:cNvPr id="16" name="Shape 14"/>
-          <p:cNvSpPr/>
-          <p:nvPr/>
-        </p:nvSpPr>
-        <p:spPr>
-          <a:xfrm>
-            <a:off x="4709160" y="3017520"/>
-            <a:ext cx="4114800" cy="1737360"/>
-          </a:xfrm>
-          <a:prstGeom prst="rect">
-            <a:avLst/>
-          </a:prstGeom>
-          <a:solidFill>
-            <a:srgbClr val="F5F0E8"/>
-          </a:solidFill>
-          <a:ln w="12700">
-            <a:solidFill>
-              <a:srgbClr val="D8D0C4"/>
-            </a:solidFill>
-            <a:prstDash val="solid"/>
-          </a:ln>
-          <a:effectLst>
-            <a:outerShdw blurRad="101600" dist="38100" dir="8100000" algn="bl" rotWithShape="0">
-              <a:srgbClr val="000000">
-                <a:alpha val="12000"/>
-              </a:srgbClr>
-            </a:outerShdw>
-          </a:effectLst>
-        </p:spPr>
-        <p:txBody>
-          <a:bodyPr/>
-          <a:lstStyle/>
-          <a:p>
-            <a:endParaRPr lang="es-ES"/>
-          </a:p>
-        </p:txBody>
-      </p:sp>
-      <p:sp>
-        <p:nvSpPr>
-          <p:cNvPr id="17" name="Shape 15"/>
-          <p:cNvSpPr/>
-          <p:nvPr/>
-        </p:nvSpPr>
-        <p:spPr>
-          <a:xfrm>
-            <a:off x="4709160" y="3017520"/>
-            <a:ext cx="4114800" cy="384048"/>
-          </a:xfrm>
-          <a:prstGeom prst="rect">
-            <a:avLst/>
-          </a:prstGeom>
-          <a:solidFill>
-            <a:srgbClr val="0D7377"/>
-          </a:solidFill>
-          <a:ln w="12700">
-            <a:solidFill>
-              <a:srgbClr val="0D7377"/>
-            </a:solidFill>
-            <a:prstDash val="solid"/>
-          </a:ln>
-        </p:spPr>
-        <p:txBody>
-          <a:bodyPr/>
-          <a:lstStyle/>
-          <a:p>
-            <a:endParaRPr lang="es-ES"/>
-          </a:p>
-        </p:txBody>
-      </p:sp>
-      <p:sp>
-        <p:nvSpPr>
-          <p:cNvPr id="18" name="Text 16"/>
-          <p:cNvSpPr/>
-          <p:nvPr/>
-        </p:nvSpPr>
-        <p:spPr>
-          <a:xfrm>
-            <a:off x="4846320" y="3063240"/>
-            <a:ext cx="3840480" cy="292608"/>
-          </a:xfrm>
-          <a:prstGeom prst="rect">
-            <a:avLst/>
-          </a:prstGeom>
-          <a:noFill/>
-          <a:ln/>
-        </p:spPr>
-        <p:txBody>
-          <a:bodyPr wrap="square" rtlCol="0" anchor="ctr"/>
-          <a:lstStyle/>
-          <a:p>
-            <a:pPr marL="0" indent="0">
-              <a:buNone/>
-            </a:pPr>
-            <a:r>
-              <a:rPr lang="en-US" sz="1200" b="1" dirty="0">
-                <a:solidFill>
-                  <a:srgbClr val="FFFFFF"/>
-                </a:solidFill>
-                <a:latin typeface="Calibri" pitchFamily="34" charset="0"/>
-                <a:ea typeface="Calibri" pitchFamily="34" charset="-122"/>
-                <a:cs typeface="Calibri" pitchFamily="34" charset="-120"/>
-              </a:rPr>
-              <a:t>🏘️ Variables Categóricas</a:t>
-            </a:r>
-            <a:endParaRPr lang="en-US" sz="1200" dirty="0"/>
-          </a:p>
-        </p:txBody>
-      </p:sp>
-      <p:sp>
-        <p:nvSpPr>
-          <p:cNvPr id="19" name="Text 17"/>
-          <p:cNvSpPr/>
-          <p:nvPr/>
-        </p:nvSpPr>
-        <p:spPr>
-          <a:xfrm>
-            <a:off x="4846320" y="3474720"/>
-            <a:ext cx="3840480" cy="1188720"/>
-          </a:xfrm>
-          <a:prstGeom prst="rect">
-            <a:avLst/>
-          </a:prstGeom>
-          <a:noFill/>
-          <a:ln/>
-        </p:spPr>
-        <p:txBody>
-          <a:bodyPr wrap="square" rtlCol="0" anchor="ctr"/>
-          <a:lstStyle/>
-          <a:p>
-            <a:pPr marL="0" indent="0">
-              <a:buNone/>
-            </a:pPr>
-            <a:r>
-              <a:rPr lang="en-US" sz="1050" dirty="0">
-                <a:solidFill>
-                  <a:srgbClr val="1E293B"/>
-                </a:solidFill>
-                <a:latin typeface="Calibri" pitchFamily="34" charset="0"/>
-                <a:ea typeface="Calibri" pitchFamily="34" charset="-122"/>
-                <a:cs typeface="Calibri" pitchFamily="34" charset="-120"/>
-              </a:rPr>
-              <a:t>Distrito y Barrio son muy informativos. Se aplico One-Hot Encoding (OHE) sobre 13 variables categoricas, resultando en mas de 150 features adicionales.</a:t>
-            </a:r>
-            <a:endParaRPr lang="en-US" sz="1050" dirty="0"/>
-          </a:p>
-        </p:txBody>
-      </p:sp>
-    </p:spTree>
-  </p:cSld>
-  <p:clrMapOvr>
-    <a:masterClrMapping/>
-  </p:clrMapOvr>
-</p:sld>
-</file>
-
-<file path=ppt/slides/slide6.xml><?xml version="1.0" encoding="utf-8"?>
-<p:sld xmlns:a="http://schemas.openxmlformats.org/drawingml/2006/main" xmlns:r="http://schemas.openxmlformats.org/officeDocument/2006/relationships" xmlns:p="http://schemas.openxmlformats.org/presentationml/2006/main">
   <p:cSld>
     <p:spTree>
       <p:nvGrpSpPr>
@@ -10260,7 +6721,7 @@
                   <a:latin typeface="Arial" panose="020B0604020202020204" pitchFamily="34" charset="0"/>
                   <a:cs typeface="Arial" panose="020B0604020202020204" pitchFamily="34" charset="0"/>
                 </a:rPr>
-                <a:t> Tenemos una variable objetivo: Precio unitario (€/m²)</a:t>
+                <a:t> Tenemos una variable objetivo: Precio unitario (€/m²) TARGET</a:t>
               </a:r>
               <a:endParaRPr lang="es-ES" sz="1000" noProof="0" dirty="0">
                 <a:latin typeface="Arial" panose="020B0604020202020204" pitchFamily="34" charset="0"/>
@@ -12259,8 +8720,8 @@
         </p:nvSpPr>
         <p:spPr>
           <a:xfrm>
-            <a:off x="7216521" y="2383855"/>
-            <a:ext cx="1927479" cy="2468880"/>
+            <a:off x="6330295" y="2431542"/>
+            <a:ext cx="2616794" cy="2427177"/>
           </a:xfrm>
           <a:prstGeom prst="rect">
             <a:avLst/>
@@ -13051,7 +9512,7 @@
 </p:sld>
 </file>
 
-<file path=ppt/slides/slide7.xml><?xml version="1.0" encoding="utf-8"?>
+<file path=ppt/slides/slide5.xml><?xml version="1.0" encoding="utf-8"?>
 <p:sld xmlns:a="http://schemas.openxmlformats.org/drawingml/2006/main" xmlns:r="http://schemas.openxmlformats.org/officeDocument/2006/relationships" xmlns:p="http://schemas.openxmlformats.org/presentationml/2006/main">
   <p:cSld name="Slide 6">
     <p:bg>
@@ -14296,7 +10757,7 @@
 </p:sld>
 </file>
 
-<file path=ppt/slides/slide8.xml><?xml version="1.0" encoding="utf-8"?>
+<file path=ppt/slides/slide6.xml><?xml version="1.0" encoding="utf-8"?>
 <p:sld xmlns:a="http://schemas.openxmlformats.org/drawingml/2006/main" xmlns:r="http://schemas.openxmlformats.org/officeDocument/2006/relationships" xmlns:p="http://schemas.openxmlformats.org/presentationml/2006/main">
   <p:cSld name="Slide 7">
     <p:bg>
@@ -16876,7 +13337,7 @@
 </p:sld>
 </file>
 
-<file path=ppt/slides/slide9.xml><?xml version="1.0" encoding="utf-8"?>
+<file path=ppt/slides/slide7.xml><?xml version="1.0" encoding="utf-8"?>
 <p:sld xmlns:a="http://schemas.openxmlformats.org/drawingml/2006/main" xmlns:r="http://schemas.openxmlformats.org/officeDocument/2006/relationships" xmlns:p="http://schemas.openxmlformats.org/presentationml/2006/main">
   <p:cSld name="Slide 8">
     <p:bg>
@@ -17750,6 +14211,551 @@
         </p:txBody>
       </p:sp>
     </p:spTree>
+  </p:cSld>
+  <p:clrMapOvr>
+    <a:masterClrMapping/>
+  </p:clrMapOvr>
+</p:sld>
+</file>
+
+<file path=ppt/slides/slide8.xml><?xml version="1.0" encoding="utf-8"?>
+<p:sld xmlns:a="http://schemas.openxmlformats.org/drawingml/2006/main" xmlns:r="http://schemas.openxmlformats.org/officeDocument/2006/relationships" xmlns:p="http://schemas.openxmlformats.org/presentationml/2006/main">
+  <p:cSld name="Slide 9">
+    <p:bg>
+      <p:bgPr>
+        <a:solidFill>
+          <a:srgbClr val="0D7377"/>
+        </a:solidFill>
+        <a:effectLst/>
+      </p:bgPr>
+    </p:bg>
+    <p:spTree>
+      <p:nvGrpSpPr>
+        <p:cNvPr id="1" name=""/>
+        <p:cNvGrpSpPr/>
+        <p:nvPr/>
+      </p:nvGrpSpPr>
+      <p:grpSpPr>
+        <a:xfrm>
+          <a:off x="0" y="0"/>
+          <a:ext cx="0" cy="0"/>
+          <a:chOff x="0" y="0"/>
+          <a:chExt cx="0" cy="0"/>
+        </a:xfrm>
+      </p:grpSpPr>
+      <p:sp>
+        <p:nvSpPr>
+          <p:cNvPr id="2" name="Shape 0"/>
+          <p:cNvSpPr/>
+          <p:nvPr/>
+        </p:nvSpPr>
+        <p:spPr>
+          <a:xfrm>
+            <a:off x="0" y="0"/>
+            <a:ext cx="9144000" cy="5143500"/>
+          </a:xfrm>
+          <a:prstGeom prst="rect">
+            <a:avLst/>
+          </a:prstGeom>
+          <a:solidFill>
+            <a:srgbClr val="0D7377"/>
+          </a:solidFill>
+          <a:ln w="12700">
+            <a:solidFill>
+              <a:srgbClr val="0D7377"/>
+            </a:solidFill>
+            <a:prstDash val="solid"/>
+          </a:ln>
+        </p:spPr>
+        <p:txBody>
+          <a:bodyPr/>
+          <a:lstStyle/>
+          <a:p>
+            <a:endParaRPr lang="es-ES"/>
+          </a:p>
+        </p:txBody>
+      </p:sp>
+      <p:sp>
+        <p:nvSpPr>
+          <p:cNvPr id="3" name="Shape 1"/>
+          <p:cNvSpPr/>
+          <p:nvPr/>
+        </p:nvSpPr>
+        <p:spPr>
+          <a:xfrm>
+            <a:off x="0" y="3840480"/>
+            <a:ext cx="9144000" cy="1303020"/>
+          </a:xfrm>
+          <a:prstGeom prst="rect">
+            <a:avLst/>
+          </a:prstGeom>
+          <a:solidFill>
+            <a:srgbClr val="1A2744"/>
+          </a:solidFill>
+          <a:ln w="12700">
+            <a:solidFill>
+              <a:srgbClr val="1A2744"/>
+            </a:solidFill>
+            <a:prstDash val="solid"/>
+          </a:ln>
+        </p:spPr>
+        <p:txBody>
+          <a:bodyPr/>
+          <a:lstStyle/>
+          <a:p>
+            <a:endParaRPr lang="es-ES"/>
+          </a:p>
+        </p:txBody>
+      </p:sp>
+      <p:sp>
+        <p:nvSpPr>
+          <p:cNvPr id="4" name="Text 2"/>
+          <p:cNvSpPr/>
+          <p:nvPr/>
+        </p:nvSpPr>
+        <p:spPr>
+          <a:xfrm>
+            <a:off x="457200" y="1005840"/>
+            <a:ext cx="8229600" cy="1097280"/>
+          </a:xfrm>
+          <a:prstGeom prst="rect">
+            <a:avLst/>
+          </a:prstGeom>
+          <a:noFill/>
+          <a:ln/>
+        </p:spPr>
+        <p:txBody>
+          <a:bodyPr wrap="square" rtlCol="0" anchor="ctr"/>
+          <a:lstStyle/>
+          <a:p>
+            <a:pPr marL="0" indent="0" algn="ctr">
+              <a:buNone/>
+            </a:pPr>
+            <a:r>
+              <a:rPr lang="en-US" sz="5600" b="1" dirty="0">
+                <a:solidFill>
+                  <a:srgbClr val="FFFFFF"/>
+                </a:solidFill>
+                <a:latin typeface="Calibri" pitchFamily="34" charset="0"/>
+                <a:ea typeface="Calibri" pitchFamily="34" charset="-122"/>
+                <a:cs typeface="Calibri" pitchFamily="34" charset="-120"/>
+              </a:rPr>
+              <a:t>¡Gracias!</a:t>
+            </a:r>
+            <a:endParaRPr lang="en-US" sz="5600" dirty="0"/>
+          </a:p>
+        </p:txBody>
+      </p:sp>
+      <p:sp>
+        <p:nvSpPr>
+          <p:cNvPr id="5" name="Text 3"/>
+          <p:cNvSpPr/>
+          <p:nvPr/>
+        </p:nvSpPr>
+        <p:spPr>
+          <a:xfrm>
+            <a:off x="457200" y="2286000"/>
+            <a:ext cx="8229600" cy="457200"/>
+          </a:xfrm>
+          <a:prstGeom prst="rect">
+            <a:avLst/>
+          </a:prstGeom>
+          <a:noFill/>
+          <a:ln/>
+        </p:spPr>
+        <p:txBody>
+          <a:bodyPr wrap="square" rtlCol="0" anchor="ctr"/>
+          <a:lstStyle/>
+          <a:p>
+            <a:pPr marL="0" indent="0" algn="ctr">
+              <a:buNone/>
+            </a:pPr>
+            <a:r>
+              <a:rPr lang="en-US" sz="1800" dirty="0">
+                <a:solidFill>
+                  <a:srgbClr val="C8EFEF"/>
+                </a:solidFill>
+                <a:latin typeface="Calibri" pitchFamily="34" charset="0"/>
+                <a:ea typeface="Calibri" pitchFamily="34" charset="-122"/>
+                <a:cs typeface="Calibri" pitchFamily="34" charset="-120"/>
+              </a:rPr>
+              <a:t>Análisis del Mercado Inmobiliario en Valencia</a:t>
+            </a:r>
+            <a:endParaRPr lang="en-US" sz="1800" dirty="0"/>
+          </a:p>
+        </p:txBody>
+      </p:sp>
+      <p:sp>
+        <p:nvSpPr>
+          <p:cNvPr id="6" name="Text 4"/>
+          <p:cNvSpPr/>
+          <p:nvPr/>
+        </p:nvSpPr>
+        <p:spPr>
+          <a:xfrm>
+            <a:off x="457200" y="2834640"/>
+            <a:ext cx="8229600" cy="365760"/>
+          </a:xfrm>
+          <a:prstGeom prst="rect">
+            <a:avLst/>
+          </a:prstGeom>
+          <a:noFill/>
+          <a:ln/>
+        </p:spPr>
+        <p:txBody>
+          <a:bodyPr wrap="square" rtlCol="0" anchor="ctr"/>
+          <a:lstStyle/>
+          <a:p>
+            <a:pPr marL="0" indent="0" algn="ctr">
+              <a:buNone/>
+            </a:pPr>
+            <a:r>
+              <a:rPr lang="en-US" sz="1300" dirty="0">
+                <a:solidFill>
+                  <a:srgbClr val="90D0D0"/>
+                </a:solidFill>
+                <a:latin typeface="Calibri" pitchFamily="34" charset="0"/>
+                <a:ea typeface="Calibri" pitchFamily="34" charset="-122"/>
+                <a:cs typeface="Calibri" pitchFamily="34" charset="-120"/>
+              </a:rPr>
+              <a:t>EDA · Feature Engineering · Random Forest · Valencia 2025</a:t>
+            </a:r>
+            <a:endParaRPr lang="en-US" sz="1300" dirty="0"/>
+          </a:p>
+        </p:txBody>
+      </p:sp>
+      <p:sp>
+        <p:nvSpPr>
+          <p:cNvPr id="7" name="Text 5"/>
+          <p:cNvSpPr/>
+          <p:nvPr/>
+        </p:nvSpPr>
+        <p:spPr>
+          <a:xfrm>
+            <a:off x="457200" y="3931920"/>
+            <a:ext cx="8229600" cy="457200"/>
+          </a:xfrm>
+          <a:prstGeom prst="rect">
+            <a:avLst/>
+          </a:prstGeom>
+          <a:noFill/>
+          <a:ln/>
+        </p:spPr>
+        <p:txBody>
+          <a:bodyPr wrap="square" rtlCol="0" anchor="ctr"/>
+          <a:lstStyle/>
+          <a:p>
+            <a:pPr marL="0" indent="0" algn="ctr">
+              <a:buNone/>
+            </a:pPr>
+            <a:r>
+              <a:rPr lang="en-US" sz="1300" dirty="0">
+                <a:solidFill>
+                  <a:srgbClr val="14A5A9"/>
+                </a:solidFill>
+                <a:latin typeface="Calibri" pitchFamily="34" charset="0"/>
+                <a:ea typeface="Calibri" pitchFamily="34" charset="-122"/>
+                <a:cs typeface="Calibri" pitchFamily="34" charset="-120"/>
+              </a:rPr>
+              <a:t>github.com/Apriroca/ML_Prediccion_Vivienda_Valencia</a:t>
+            </a:r>
+            <a:endParaRPr lang="en-US" sz="1300" dirty="0"/>
+          </a:p>
+        </p:txBody>
+      </p:sp>
+    </p:spTree>
+  </p:cSld>
+  <p:clrMapOvr>
+    <a:masterClrMapping/>
+  </p:clrMapOvr>
+</p:sld>
+</file>
+
+<file path=ppt/slides/slide9.xml><?xml version="1.0" encoding="utf-8"?>
+<p:sld xmlns:a="http://schemas.openxmlformats.org/drawingml/2006/main" xmlns:r="http://schemas.openxmlformats.org/officeDocument/2006/relationships" xmlns:p="http://schemas.openxmlformats.org/presentationml/2006/main">
+  <p:cSld>
+    <p:spTree>
+      <p:nvGrpSpPr>
+        <p:cNvPr id="1" name="">
+          <a:extLst>
+            <a:ext uri="{FF2B5EF4-FFF2-40B4-BE49-F238E27FC236}">
+              <a16:creationId xmlns:a16="http://schemas.microsoft.com/office/drawing/2014/main" id="{1B969C4B-AC3E-4562-31CD-C84F255D7638}"/>
+            </a:ext>
+          </a:extLst>
+        </p:cNvPr>
+        <p:cNvGrpSpPr/>
+        <p:nvPr/>
+      </p:nvGrpSpPr>
+      <p:grpSpPr>
+        <a:xfrm>
+          <a:off x="0" y="0"/>
+          <a:ext cx="0" cy="0"/>
+          <a:chOff x="0" y="0"/>
+          <a:chExt cx="0" cy="0"/>
+        </a:xfrm>
+      </p:grpSpPr>
+      <p:sp>
+        <p:nvSpPr>
+          <p:cNvPr id="2" name="Shape 0">
+            <a:extLst>
+              <a:ext uri="{FF2B5EF4-FFF2-40B4-BE49-F238E27FC236}">
+                <a16:creationId xmlns:a16="http://schemas.microsoft.com/office/drawing/2014/main" id="{51495F34-905F-E0A1-697A-5D666402577B}"/>
+              </a:ext>
+            </a:extLst>
+          </p:cNvPr>
+          <p:cNvSpPr/>
+          <p:nvPr/>
+        </p:nvSpPr>
+        <p:spPr>
+          <a:xfrm>
+            <a:off x="0" y="0"/>
+            <a:ext cx="9144000" cy="5143500"/>
+          </a:xfrm>
+          <a:prstGeom prst="rect">
+            <a:avLst/>
+          </a:prstGeom>
+          <a:solidFill>
+            <a:srgbClr val="0D7377"/>
+          </a:solidFill>
+          <a:ln w="12700">
+            <a:solidFill>
+              <a:srgbClr val="0D7377"/>
+            </a:solidFill>
+            <a:prstDash val="solid"/>
+          </a:ln>
+        </p:spPr>
+        <p:txBody>
+          <a:bodyPr/>
+          <a:lstStyle/>
+          <a:p>
+            <a:endParaRPr lang="es-ES"/>
+          </a:p>
+        </p:txBody>
+      </p:sp>
+      <p:sp>
+        <p:nvSpPr>
+          <p:cNvPr id="3" name="Shape 1">
+            <a:extLst>
+              <a:ext uri="{FF2B5EF4-FFF2-40B4-BE49-F238E27FC236}">
+                <a16:creationId xmlns:a16="http://schemas.microsoft.com/office/drawing/2014/main" id="{E2EB8050-8E9D-E431-F2E4-ED36DA6454BA}"/>
+              </a:ext>
+            </a:extLst>
+          </p:cNvPr>
+          <p:cNvSpPr/>
+          <p:nvPr/>
+        </p:nvSpPr>
+        <p:spPr>
+          <a:xfrm>
+            <a:off x="0" y="3840480"/>
+            <a:ext cx="9144000" cy="1303020"/>
+          </a:xfrm>
+          <a:prstGeom prst="rect">
+            <a:avLst/>
+          </a:prstGeom>
+          <a:solidFill>
+            <a:srgbClr val="1A2744"/>
+          </a:solidFill>
+          <a:ln w="12700">
+            <a:solidFill>
+              <a:srgbClr val="1A2744"/>
+            </a:solidFill>
+            <a:prstDash val="solid"/>
+          </a:ln>
+        </p:spPr>
+        <p:txBody>
+          <a:bodyPr/>
+          <a:lstStyle/>
+          <a:p>
+            <a:endParaRPr lang="es-ES"/>
+          </a:p>
+        </p:txBody>
+      </p:sp>
+      <p:sp>
+        <p:nvSpPr>
+          <p:cNvPr id="4" name="Text 2">
+            <a:extLst>
+              <a:ext uri="{FF2B5EF4-FFF2-40B4-BE49-F238E27FC236}">
+                <a16:creationId xmlns:a16="http://schemas.microsoft.com/office/drawing/2014/main" id="{6E8F6756-D8D2-1260-6E41-7042566611DB}"/>
+              </a:ext>
+            </a:extLst>
+          </p:cNvPr>
+          <p:cNvSpPr/>
+          <p:nvPr/>
+        </p:nvSpPr>
+        <p:spPr>
+          <a:xfrm>
+            <a:off x="457200" y="1005840"/>
+            <a:ext cx="8229600" cy="1097280"/>
+          </a:xfrm>
+          <a:prstGeom prst="rect">
+            <a:avLst/>
+          </a:prstGeom>
+          <a:noFill/>
+          <a:ln/>
+        </p:spPr>
+        <p:txBody>
+          <a:bodyPr wrap="square" rtlCol="0" anchor="ctr"/>
+          <a:lstStyle/>
+          <a:p>
+            <a:pPr marL="0" indent="0" algn="ctr">
+              <a:buNone/>
+            </a:pPr>
+            <a:r>
+              <a:rPr lang="en-US" sz="5600" b="1" dirty="0">
+                <a:solidFill>
+                  <a:srgbClr val="FFFFFF"/>
+                </a:solidFill>
+                <a:latin typeface="Calibri" pitchFamily="34" charset="0"/>
+                <a:ea typeface="Calibri" pitchFamily="34" charset="-122"/>
+                <a:cs typeface="Calibri" pitchFamily="34" charset="-120"/>
+              </a:rPr>
+              <a:t>ANEXOS</a:t>
+            </a:r>
+            <a:endParaRPr lang="en-US" sz="5600" dirty="0"/>
+          </a:p>
+        </p:txBody>
+      </p:sp>
+      <p:sp>
+        <p:nvSpPr>
+          <p:cNvPr id="5" name="Text 3">
+            <a:extLst>
+              <a:ext uri="{FF2B5EF4-FFF2-40B4-BE49-F238E27FC236}">
+                <a16:creationId xmlns:a16="http://schemas.microsoft.com/office/drawing/2014/main" id="{40355A41-8D7D-21D2-3E69-F4A2EBD323F6}"/>
+              </a:ext>
+            </a:extLst>
+          </p:cNvPr>
+          <p:cNvSpPr/>
+          <p:nvPr/>
+        </p:nvSpPr>
+        <p:spPr>
+          <a:xfrm>
+            <a:off x="457200" y="2286000"/>
+            <a:ext cx="8229600" cy="457200"/>
+          </a:xfrm>
+          <a:prstGeom prst="rect">
+            <a:avLst/>
+          </a:prstGeom>
+          <a:noFill/>
+          <a:ln/>
+        </p:spPr>
+        <p:txBody>
+          <a:bodyPr wrap="square" rtlCol="0" anchor="ctr"/>
+          <a:lstStyle/>
+          <a:p>
+            <a:pPr marL="0" indent="0" algn="ctr">
+              <a:buNone/>
+            </a:pPr>
+            <a:r>
+              <a:rPr lang="en-US" sz="1800" dirty="0">
+                <a:solidFill>
+                  <a:srgbClr val="C8EFEF"/>
+                </a:solidFill>
+                <a:latin typeface="Calibri" pitchFamily="34" charset="0"/>
+                <a:ea typeface="Calibri" pitchFamily="34" charset="-122"/>
+                <a:cs typeface="Calibri" pitchFamily="34" charset="-120"/>
+              </a:rPr>
+              <a:t>Análisis del Mercado Inmobiliario en Valencia</a:t>
+            </a:r>
+            <a:endParaRPr lang="en-US" sz="1800" dirty="0"/>
+          </a:p>
+        </p:txBody>
+      </p:sp>
+      <p:sp>
+        <p:nvSpPr>
+          <p:cNvPr id="6" name="Text 4">
+            <a:extLst>
+              <a:ext uri="{FF2B5EF4-FFF2-40B4-BE49-F238E27FC236}">
+                <a16:creationId xmlns:a16="http://schemas.microsoft.com/office/drawing/2014/main" id="{F59EEF4D-AAD4-8F0C-67F7-85780AA78A25}"/>
+              </a:ext>
+            </a:extLst>
+          </p:cNvPr>
+          <p:cNvSpPr/>
+          <p:nvPr/>
+        </p:nvSpPr>
+        <p:spPr>
+          <a:xfrm>
+            <a:off x="457200" y="2834640"/>
+            <a:ext cx="8229600" cy="365760"/>
+          </a:xfrm>
+          <a:prstGeom prst="rect">
+            <a:avLst/>
+          </a:prstGeom>
+          <a:noFill/>
+          <a:ln/>
+        </p:spPr>
+        <p:txBody>
+          <a:bodyPr wrap="square" rtlCol="0" anchor="ctr"/>
+          <a:lstStyle/>
+          <a:p>
+            <a:pPr marL="0" indent="0" algn="ctr">
+              <a:buNone/>
+            </a:pPr>
+            <a:r>
+              <a:rPr lang="en-US" sz="1300" dirty="0">
+                <a:solidFill>
+                  <a:srgbClr val="90D0D0"/>
+                </a:solidFill>
+                <a:latin typeface="Calibri" pitchFamily="34" charset="0"/>
+                <a:ea typeface="Calibri" pitchFamily="34" charset="-122"/>
+                <a:cs typeface="Calibri" pitchFamily="34" charset="-120"/>
+              </a:rPr>
+              <a:t>EDA · Feature Engineering · Random Forest · Valencia 2025</a:t>
+            </a:r>
+            <a:endParaRPr lang="en-US" sz="1300" dirty="0"/>
+          </a:p>
+        </p:txBody>
+      </p:sp>
+      <p:sp>
+        <p:nvSpPr>
+          <p:cNvPr id="7" name="Text 5">
+            <a:extLst>
+              <a:ext uri="{FF2B5EF4-FFF2-40B4-BE49-F238E27FC236}">
+                <a16:creationId xmlns:a16="http://schemas.microsoft.com/office/drawing/2014/main" id="{881CE660-43BA-421D-4588-0B94E53CD780}"/>
+              </a:ext>
+            </a:extLst>
+          </p:cNvPr>
+          <p:cNvSpPr/>
+          <p:nvPr/>
+        </p:nvSpPr>
+        <p:spPr>
+          <a:xfrm>
+            <a:off x="457200" y="3931920"/>
+            <a:ext cx="8229600" cy="457200"/>
+          </a:xfrm>
+          <a:prstGeom prst="rect">
+            <a:avLst/>
+          </a:prstGeom>
+          <a:noFill/>
+          <a:ln/>
+        </p:spPr>
+        <p:txBody>
+          <a:bodyPr wrap="square" rtlCol="0" anchor="ctr"/>
+          <a:lstStyle/>
+          <a:p>
+            <a:pPr marL="0" indent="0" algn="ctr">
+              <a:buNone/>
+            </a:pPr>
+            <a:r>
+              <a:rPr lang="en-US" sz="1300" dirty="0">
+                <a:solidFill>
+                  <a:srgbClr val="14A5A9"/>
+                </a:solidFill>
+                <a:latin typeface="Calibri" pitchFamily="34" charset="0"/>
+                <a:ea typeface="Calibri" pitchFamily="34" charset="-122"/>
+                <a:cs typeface="Calibri" pitchFamily="34" charset="-120"/>
+              </a:rPr>
+              <a:t>github.com/Apriroca/ML_Prediccion_Vivienda_Valencia</a:t>
+            </a:r>
+            <a:endParaRPr lang="en-US" sz="1300" dirty="0"/>
+          </a:p>
+        </p:txBody>
+      </p:sp>
+    </p:spTree>
+    <p:extLst>
+      <p:ext uri="{BB962C8B-B14F-4D97-AF65-F5344CB8AC3E}">
+        <p14:creationId xmlns:p14="http://schemas.microsoft.com/office/powerpoint/2010/main" val="1169360617"/>
+      </p:ext>
+    </p:extLst>
   </p:cSld>
   <p:clrMapOvr>
     <a:masterClrMapping/>

--- a/Presentacion.pptx
+++ b/Presentacion.pptx
@@ -15,9 +15,9 @@
     <p:sldId id="261" r:id="rId6"/>
     <p:sldId id="262" r:id="rId7"/>
     <p:sldId id="263" r:id="rId8"/>
-    <p:sldId id="264" r:id="rId9"/>
-    <p:sldId id="265" r:id="rId10"/>
-    <p:sldId id="266" r:id="rId11"/>
+    <p:sldId id="265" r:id="rId9"/>
+    <p:sldId id="266" r:id="rId10"/>
+    <p:sldId id="264" r:id="rId11"/>
   </p:sldIdLst>
   <p:sldSz cx="9144000" cy="5143500" type="screen16x9"/>
   <p:notesSz cx="5143500" cy="9144000"/>
@@ -335,13 +335,7 @@
   <p:cSld>
     <p:spTree>
       <p:nvGrpSpPr>
-        <p:cNvPr id="1" name="">
-          <a:extLst>
-            <a:ext uri="{FF2B5EF4-FFF2-40B4-BE49-F238E27FC236}">
-              <a16:creationId xmlns:a16="http://schemas.microsoft.com/office/drawing/2014/main" id="{A0E3F8A0-557F-2389-2361-669486B10B94}"/>
-            </a:ext>
-          </a:extLst>
-        </p:cNvPr>
+        <p:cNvPr id="1" name=""/>
         <p:cNvGrpSpPr/>
         <p:nvPr/>
       </p:nvGrpSpPr>
@@ -355,13 +349,7 @@
       </p:grpSpPr>
       <p:sp>
         <p:nvSpPr>
-          <p:cNvPr id="2" name="Slide Image Placeholder 1">
-            <a:extLst>
-              <a:ext uri="{FF2B5EF4-FFF2-40B4-BE49-F238E27FC236}">
-                <a16:creationId xmlns:a16="http://schemas.microsoft.com/office/drawing/2014/main" id="{9466FF6D-FA35-305C-C292-96194F6BBFAD}"/>
-              </a:ext>
-            </a:extLst>
-          </p:cNvPr>
+          <p:cNvPr id="2" name="Slide Image Placeholder 1"/>
           <p:cNvSpPr>
             <a:spLocks noGrp="1" noRot="1" noChangeAspect="1"/>
           </p:cNvSpPr>
@@ -373,13 +361,7 @@
       </p:sp>
       <p:sp>
         <p:nvSpPr>
-          <p:cNvPr id="3" name="Notes Placeholder 2">
-            <a:extLst>
-              <a:ext uri="{FF2B5EF4-FFF2-40B4-BE49-F238E27FC236}">
-                <a16:creationId xmlns:a16="http://schemas.microsoft.com/office/drawing/2014/main" id="{5B61C94C-31CB-DE3E-CA1C-914B13DC72FD}"/>
-              </a:ext>
-            </a:extLst>
-          </p:cNvPr>
+          <p:cNvPr id="3" name="Notes Placeholder 2"/>
           <p:cNvSpPr>
             <a:spLocks noGrp="1"/>
           </p:cNvSpPr>
@@ -398,13 +380,7 @@
       </p:sp>
       <p:sp>
         <p:nvSpPr>
-          <p:cNvPr id="4" name="Slide Number Placeholder 3">
-            <a:extLst>
-              <a:ext uri="{FF2B5EF4-FFF2-40B4-BE49-F238E27FC236}">
-                <a16:creationId xmlns:a16="http://schemas.microsoft.com/office/drawing/2014/main" id="{757119A0-ECB2-C4BD-8B06-24FC7B33A03C}"/>
-              </a:ext>
-            </a:extLst>
-          </p:cNvPr>
+          <p:cNvPr id="4" name="Slide Number Placeholder 3"/>
           <p:cNvSpPr>
             <a:spLocks noGrp="1"/>
           </p:cNvSpPr>
@@ -428,7 +404,7 @@
     </p:spTree>
     <p:extLst>
       <p:ext uri="{BB962C8B-B14F-4D97-AF65-F5344CB8AC3E}">
-        <p14:creationId xmlns:p14="http://schemas.microsoft.com/office/powerpoint/2010/main" val="1917598194"/>
+        <p14:creationId xmlns:p14="http://schemas.microsoft.com/office/powerpoint/2010/main" val="1024086991"/>
       </p:ext>
     </p:extLst>
   </p:cSld>
@@ -971,90 +947,6 @@
   <p:cSld>
     <p:spTree>
       <p:nvGrpSpPr>
-        <p:cNvPr id="1" name=""/>
-        <p:cNvGrpSpPr/>
-        <p:nvPr/>
-      </p:nvGrpSpPr>
-      <p:grpSpPr>
-        <a:xfrm>
-          <a:off x="0" y="0"/>
-          <a:ext cx="0" cy="0"/>
-          <a:chOff x="0" y="0"/>
-          <a:chExt cx="0" cy="0"/>
-        </a:xfrm>
-      </p:grpSpPr>
-      <p:sp>
-        <p:nvSpPr>
-          <p:cNvPr id="2" name="Slide Image Placeholder 1"/>
-          <p:cNvSpPr>
-            <a:spLocks noGrp="1" noRot="1" noChangeAspect="1"/>
-          </p:cNvSpPr>
-          <p:nvPr>
-            <p:ph type="sldImg"/>
-          </p:nvPr>
-        </p:nvSpPr>
-        <p:spPr/>
-      </p:sp>
-      <p:sp>
-        <p:nvSpPr>
-          <p:cNvPr id="3" name="Notes Placeholder 2"/>
-          <p:cNvSpPr>
-            <a:spLocks noGrp="1"/>
-          </p:cNvSpPr>
-          <p:nvPr>
-            <p:ph type="body" idx="1"/>
-          </p:nvPr>
-        </p:nvSpPr>
-        <p:spPr/>
-        <p:txBody>
-          <a:bodyPr/>
-          <a:lstStyle/>
-          <a:p>
-            <a:endParaRPr lang="en-US" dirty="0"/>
-          </a:p>
-        </p:txBody>
-      </p:sp>
-      <p:sp>
-        <p:nvSpPr>
-          <p:cNvPr id="4" name="Slide Number Placeholder 3"/>
-          <p:cNvSpPr>
-            <a:spLocks noGrp="1"/>
-          </p:cNvSpPr>
-          <p:nvPr>
-            <p:ph type="sldNum" sz="quarter" idx="10"/>
-          </p:nvPr>
-        </p:nvSpPr>
-        <p:spPr/>
-        <p:txBody>
-          <a:bodyPr/>
-          <a:lstStyle/>
-          <a:p>
-            <a:fld id="{F7021451-1387-4CA6-816F-3879F97B5CBC}" type="slidenum">
-              <a:rPr lang="en-US"/>
-              <a:t>8</a:t>
-            </a:fld>
-            <a:endParaRPr lang="en-US"/>
-          </a:p>
-        </p:txBody>
-      </p:sp>
-    </p:spTree>
-    <p:extLst>
-      <p:ext uri="{BB962C8B-B14F-4D97-AF65-F5344CB8AC3E}">
-        <p14:creationId xmlns:p14="http://schemas.microsoft.com/office/powerpoint/2010/main" val="1024086991"/>
-      </p:ext>
-    </p:extLst>
-  </p:cSld>
-  <p:clrMapOvr>
-    <a:masterClrMapping/>
-  </p:clrMapOvr>
-</p:notes>
-</file>
-
-<file path=ppt/notesSlides/notesSlide9.xml><?xml version="1.0" encoding="utf-8"?>
-<p:notes xmlns:a="http://schemas.openxmlformats.org/drawingml/2006/main" xmlns:r="http://schemas.openxmlformats.org/officeDocument/2006/relationships" xmlns:p="http://schemas.openxmlformats.org/presentationml/2006/main">
-  <p:cSld>
-    <p:spTree>
-      <p:nvGrpSpPr>
         <p:cNvPr id="1" name="">
           <a:extLst>
             <a:ext uri="{FF2B5EF4-FFF2-40B4-BE49-F238E27FC236}">
@@ -1139,7 +1031,7 @@
           <a:p>
             <a:fld id="{F7021451-1387-4CA6-816F-3879F97B5CBC}" type="slidenum">
               <a:rPr lang="en-US"/>
-              <a:t>9</a:t>
+              <a:t>8</a:t>
             </a:fld>
             <a:endParaRPr lang="en-US"/>
           </a:p>
@@ -1149,6 +1041,114 @@
     <p:extLst>
       <p:ext uri="{BB962C8B-B14F-4D97-AF65-F5344CB8AC3E}">
         <p14:creationId xmlns:p14="http://schemas.microsoft.com/office/powerpoint/2010/main" val="3227629683"/>
+      </p:ext>
+    </p:extLst>
+  </p:cSld>
+  <p:clrMapOvr>
+    <a:masterClrMapping/>
+  </p:clrMapOvr>
+</p:notes>
+</file>
+
+<file path=ppt/notesSlides/notesSlide9.xml><?xml version="1.0" encoding="utf-8"?>
+<p:notes xmlns:a="http://schemas.openxmlformats.org/drawingml/2006/main" xmlns:r="http://schemas.openxmlformats.org/officeDocument/2006/relationships" xmlns:p="http://schemas.openxmlformats.org/presentationml/2006/main">
+  <p:cSld>
+    <p:spTree>
+      <p:nvGrpSpPr>
+        <p:cNvPr id="1" name="">
+          <a:extLst>
+            <a:ext uri="{FF2B5EF4-FFF2-40B4-BE49-F238E27FC236}">
+              <a16:creationId xmlns:a16="http://schemas.microsoft.com/office/drawing/2014/main" id="{A0E3F8A0-557F-2389-2361-669486B10B94}"/>
+            </a:ext>
+          </a:extLst>
+        </p:cNvPr>
+        <p:cNvGrpSpPr/>
+        <p:nvPr/>
+      </p:nvGrpSpPr>
+      <p:grpSpPr>
+        <a:xfrm>
+          <a:off x="0" y="0"/>
+          <a:ext cx="0" cy="0"/>
+          <a:chOff x="0" y="0"/>
+          <a:chExt cx="0" cy="0"/>
+        </a:xfrm>
+      </p:grpSpPr>
+      <p:sp>
+        <p:nvSpPr>
+          <p:cNvPr id="2" name="Slide Image Placeholder 1">
+            <a:extLst>
+              <a:ext uri="{FF2B5EF4-FFF2-40B4-BE49-F238E27FC236}">
+                <a16:creationId xmlns:a16="http://schemas.microsoft.com/office/drawing/2014/main" id="{9466FF6D-FA35-305C-C292-96194F6BBFAD}"/>
+              </a:ext>
+            </a:extLst>
+          </p:cNvPr>
+          <p:cNvSpPr>
+            <a:spLocks noGrp="1" noRot="1" noChangeAspect="1"/>
+          </p:cNvSpPr>
+          <p:nvPr>
+            <p:ph type="sldImg"/>
+          </p:nvPr>
+        </p:nvSpPr>
+        <p:spPr/>
+      </p:sp>
+      <p:sp>
+        <p:nvSpPr>
+          <p:cNvPr id="3" name="Notes Placeholder 2">
+            <a:extLst>
+              <a:ext uri="{FF2B5EF4-FFF2-40B4-BE49-F238E27FC236}">
+                <a16:creationId xmlns:a16="http://schemas.microsoft.com/office/drawing/2014/main" id="{5B61C94C-31CB-DE3E-CA1C-914B13DC72FD}"/>
+              </a:ext>
+            </a:extLst>
+          </p:cNvPr>
+          <p:cNvSpPr>
+            <a:spLocks noGrp="1"/>
+          </p:cNvSpPr>
+          <p:nvPr>
+            <p:ph type="body" idx="1"/>
+          </p:nvPr>
+        </p:nvSpPr>
+        <p:spPr/>
+        <p:txBody>
+          <a:bodyPr/>
+          <a:lstStyle/>
+          <a:p>
+            <a:endParaRPr lang="en-US" dirty="0"/>
+          </a:p>
+        </p:txBody>
+      </p:sp>
+      <p:sp>
+        <p:nvSpPr>
+          <p:cNvPr id="4" name="Slide Number Placeholder 3">
+            <a:extLst>
+              <a:ext uri="{FF2B5EF4-FFF2-40B4-BE49-F238E27FC236}">
+                <a16:creationId xmlns:a16="http://schemas.microsoft.com/office/drawing/2014/main" id="{757119A0-ECB2-C4BD-8B06-24FC7B33A03C}"/>
+              </a:ext>
+            </a:extLst>
+          </p:cNvPr>
+          <p:cNvSpPr>
+            <a:spLocks noGrp="1"/>
+          </p:cNvSpPr>
+          <p:nvPr>
+            <p:ph type="sldNum" sz="quarter" idx="10"/>
+          </p:nvPr>
+        </p:nvSpPr>
+        <p:spPr/>
+        <p:txBody>
+          <a:bodyPr/>
+          <a:lstStyle/>
+          <a:p>
+            <a:fld id="{F7021451-1387-4CA6-816F-3879F97B5CBC}" type="slidenum">
+              <a:rPr lang="en-US"/>
+              <a:t>9</a:t>
+            </a:fld>
+            <a:endParaRPr lang="en-US"/>
+          </a:p>
+        </p:txBody>
+      </p:sp>
+    </p:spTree>
+    <p:extLst>
+      <p:ext uri="{BB962C8B-B14F-4D97-AF65-F5344CB8AC3E}">
+        <p14:creationId xmlns:p14="http://schemas.microsoft.com/office/powerpoint/2010/main" val="1917598194"/>
       </p:ext>
     </p:extLst>
   </p:cSld>
@@ -2055,16 +2055,18 @@
 
 <file path=ppt/slides/slide10.xml><?xml version="1.0" encoding="utf-8"?>
 <p:sld xmlns:a="http://schemas.openxmlformats.org/drawingml/2006/main" xmlns:r="http://schemas.openxmlformats.org/officeDocument/2006/relationships" xmlns:p="http://schemas.openxmlformats.org/presentationml/2006/main">
-  <p:cSld>
+  <p:cSld name="Slide 9">
+    <p:bg>
+      <p:bgPr>
+        <a:solidFill>
+          <a:srgbClr val="0D7377"/>
+        </a:solidFill>
+        <a:effectLst/>
+      </p:bgPr>
+    </p:bg>
     <p:spTree>
       <p:nvGrpSpPr>
-        <p:cNvPr id="1" name="">
-          <a:extLst>
-            <a:ext uri="{FF2B5EF4-FFF2-40B4-BE49-F238E27FC236}">
-              <a16:creationId xmlns:a16="http://schemas.microsoft.com/office/drawing/2014/main" id="{BED8ABFF-7BC5-7D6C-BF09-A23ED825B50B}"/>
-            </a:ext>
-          </a:extLst>
-        </p:cNvPr>
+        <p:cNvPr id="1" name=""/>
         <p:cNvGrpSpPr/>
         <p:nvPr/>
       </p:nvGrpSpPr>
@@ -2078,20 +2080,46 @@
       </p:grpSpPr>
       <p:sp>
         <p:nvSpPr>
-          <p:cNvPr id="2" name="Shape 0">
-            <a:extLst>
-              <a:ext uri="{FF2B5EF4-FFF2-40B4-BE49-F238E27FC236}">
-                <a16:creationId xmlns:a16="http://schemas.microsoft.com/office/drawing/2014/main" id="{70EA69C9-BB22-90BF-A733-D9F1109D3121}"/>
-              </a:ext>
-            </a:extLst>
-          </p:cNvPr>
+          <p:cNvPr id="2" name="Shape 0"/>
           <p:cNvSpPr/>
           <p:nvPr/>
         </p:nvSpPr>
         <p:spPr>
           <a:xfrm>
             <a:off x="0" y="0"/>
-            <a:ext cx="9144000" cy="914400"/>
+            <a:ext cx="9144000" cy="5143500"/>
+          </a:xfrm>
+          <a:prstGeom prst="rect">
+            <a:avLst/>
+          </a:prstGeom>
+          <a:solidFill>
+            <a:srgbClr val="0D7377"/>
+          </a:solidFill>
+          <a:ln w="12700">
+            <a:solidFill>
+              <a:srgbClr val="0D7377"/>
+            </a:solidFill>
+            <a:prstDash val="solid"/>
+          </a:ln>
+        </p:spPr>
+        <p:txBody>
+          <a:bodyPr/>
+          <a:lstStyle/>
+          <a:p>
+            <a:endParaRPr lang="es-ES"/>
+          </a:p>
+        </p:txBody>
+      </p:sp>
+      <p:sp>
+        <p:nvSpPr>
+          <p:cNvPr id="3" name="Shape 1"/>
+          <p:cNvSpPr/>
+          <p:nvPr/>
+        </p:nvSpPr>
+        <p:spPr>
+          <a:xfrm>
+            <a:off x="0" y="3840480"/>
+            <a:ext cx="9144000" cy="1303020"/>
           </a:xfrm>
           <a:prstGeom prst="rect">
             <a:avLst/>
@@ -2116,20 +2144,14 @@
       </p:sp>
       <p:sp>
         <p:nvSpPr>
-          <p:cNvPr id="3" name="Text 1">
-            <a:extLst>
-              <a:ext uri="{FF2B5EF4-FFF2-40B4-BE49-F238E27FC236}">
-                <a16:creationId xmlns:a16="http://schemas.microsoft.com/office/drawing/2014/main" id="{76DE1628-F668-2E11-446A-5B8744ED9CCB}"/>
-              </a:ext>
-            </a:extLst>
-          </p:cNvPr>
-          <p:cNvSpPr/>
-          <p:nvPr/>
-        </p:nvSpPr>
-        <p:spPr>
-          <a:xfrm>
-            <a:off x="457200" y="0"/>
-            <a:ext cx="8229600" cy="914400"/>
+          <p:cNvPr id="4" name="Text 2"/>
+          <p:cNvSpPr/>
+          <p:nvPr/>
+        </p:nvSpPr>
+        <p:spPr>
+          <a:xfrm>
+            <a:off x="457200" y="1005840"/>
+            <a:ext cx="8229600" cy="1097280"/>
           </a:xfrm>
           <a:prstGeom prst="rect">
             <a:avLst/>
@@ -2141,11 +2163,11 @@
           <a:bodyPr wrap="square" rtlCol="0" anchor="ctr"/>
           <a:lstStyle/>
           <a:p>
-            <a:pPr marL="0" indent="0" algn="l">
+            <a:pPr marL="0" indent="0" algn="ctr">
               <a:buNone/>
             </a:pPr>
             <a:r>
-              <a:rPr lang="en-US" sz="2400" b="1" dirty="0">
+              <a:rPr lang="en-US" sz="5600" b="1" dirty="0">
                 <a:solidFill>
                   <a:srgbClr val="FFFFFF"/>
                 </a:solidFill>
@@ -2153,1449 +2175,22 @@
                 <a:ea typeface="Calibri" pitchFamily="34" charset="-122"/>
                 <a:cs typeface="Calibri" pitchFamily="34" charset="-120"/>
               </a:rPr>
-              <a:t>Resultados — Comparativa de Modelos</a:t>
+              <a:t>¡Gracias!</a:t>
             </a:r>
-            <a:endParaRPr lang="en-US" sz="2400" dirty="0"/>
-          </a:p>
-        </p:txBody>
-      </p:sp>
-      <p:graphicFrame>
-        <p:nvGraphicFramePr>
-          <p:cNvPr id="8" name="Table 0">
-            <a:extLst>
-              <a:ext uri="{FF2B5EF4-FFF2-40B4-BE49-F238E27FC236}">
-                <a16:creationId xmlns:a16="http://schemas.microsoft.com/office/drawing/2014/main" id="{9342B014-AD37-3797-9141-6927D625C805}"/>
-              </a:ext>
-            </a:extLst>
-          </p:cNvPr>
-          <p:cNvGraphicFramePr>
-            <a:graphicFrameLocks noGrp="1"/>
-          </p:cNvGraphicFramePr>
-          <p:nvPr/>
-        </p:nvGraphicFramePr>
-        <p:xfrm>
-          <a:off x="457200" y="1097280"/>
-          <a:ext cx="9144000" cy="1609344"/>
-        </p:xfrm>
-        <a:graphic>
-          <a:graphicData uri="http://schemas.openxmlformats.org/drawingml/2006/table">
-            <a:tbl>
-              <a:tblPr/>
-              <a:tblGrid>
-                <a:gridCol w="2560320">
-                  <a:extLst>
-                    <a:ext uri="{9D8B030D-6E8A-4147-A177-3AD203B41FA5}">
-                      <a16:colId xmlns:a16="http://schemas.microsoft.com/office/drawing/2014/main" val="20000"/>
-                    </a:ext>
-                  </a:extLst>
-                </a:gridCol>
-                <a:gridCol w="1645920">
-                  <a:extLst>
-                    <a:ext uri="{9D8B030D-6E8A-4147-A177-3AD203B41FA5}">
-                      <a16:colId xmlns:a16="http://schemas.microsoft.com/office/drawing/2014/main" val="20001"/>
-                    </a:ext>
-                  </a:extLst>
-                </a:gridCol>
-                <a:gridCol w="1645920">
-                  <a:extLst>
-                    <a:ext uri="{9D8B030D-6E8A-4147-A177-3AD203B41FA5}">
-                      <a16:colId xmlns:a16="http://schemas.microsoft.com/office/drawing/2014/main" val="20002"/>
-                    </a:ext>
-                  </a:extLst>
-                </a:gridCol>
-                <a:gridCol w="1097280">
-                  <a:extLst>
-                    <a:ext uri="{9D8B030D-6E8A-4147-A177-3AD203B41FA5}">
-                      <a16:colId xmlns:a16="http://schemas.microsoft.com/office/drawing/2014/main" val="20003"/>
-                    </a:ext>
-                  </a:extLst>
-                </a:gridCol>
-                <a:gridCol w="2194560">
-                  <a:extLst>
-                    <a:ext uri="{9D8B030D-6E8A-4147-A177-3AD203B41FA5}">
-                      <a16:colId xmlns:a16="http://schemas.microsoft.com/office/drawing/2014/main" val="20004"/>
-                    </a:ext>
-                  </a:extLst>
-                </a:gridCol>
-              </a:tblGrid>
-              <a:tr h="402336">
-                <a:tc>
-                  <a:txBody>
-                    <a:bodyPr/>
-                    <a:lstStyle/>
-                    <a:p>
-                      <a:pPr marL="0" indent="0">
-                        <a:buNone/>
-                      </a:pPr>
-                      <a:r>
-                        <a:rPr lang="en-US" sz="1200" b="1" dirty="0">
-                          <a:solidFill>
-                            <a:srgbClr val="FFFFFF"/>
-                          </a:solidFill>
-                          <a:latin typeface="Calibri" pitchFamily="34" charset="0"/>
-                          <a:ea typeface="Calibri" pitchFamily="34" charset="-122"/>
-                          <a:cs typeface="Calibri" pitchFamily="34" charset="-120"/>
-                        </a:rPr>
-                        <a:t>Modelo</a:t>
-                      </a:r>
-                      <a:endParaRPr lang="en-US" sz="1200" dirty="0">
-                        <a:latin typeface="Calibri" charset="0"/>
-                        <a:ea typeface="Calibri" charset="0"/>
-                        <a:cs typeface="Calibri" charset="0"/>
-                      </a:endParaRPr>
-                    </a:p>
-                  </a:txBody>
-                  <a:tcPr>
-                    <a:lnL w="6350" cap="flat" cmpd="sng" algn="ctr">
-                      <a:solidFill>
-                        <a:srgbClr val="D1D9E0"/>
-                      </a:solidFill>
-                      <a:prstDash val="solid"/>
-                      <a:round/>
-                      <a:headEnd type="none" w="med" len="med"/>
-                      <a:tailEnd type="none" w="med" len="med"/>
-                    </a:lnL>
-                    <a:lnR w="6350" cap="flat" cmpd="sng" algn="ctr">
-                      <a:solidFill>
-                        <a:srgbClr val="D1D9E0"/>
-                      </a:solidFill>
-                      <a:prstDash val="solid"/>
-                      <a:round/>
-                      <a:headEnd type="none" w="med" len="med"/>
-                      <a:tailEnd type="none" w="med" len="med"/>
-                    </a:lnR>
-                    <a:lnT w="6350" cap="flat" cmpd="sng" algn="ctr">
-                      <a:solidFill>
-                        <a:srgbClr val="D1D9E0"/>
-                      </a:solidFill>
-                      <a:prstDash val="solid"/>
-                      <a:round/>
-                      <a:headEnd type="none" w="med" len="med"/>
-                      <a:tailEnd type="none" w="med" len="med"/>
-                    </a:lnT>
-                    <a:lnB w="6350" cap="flat" cmpd="sng" algn="ctr">
-                      <a:solidFill>
-                        <a:srgbClr val="D1D9E0"/>
-                      </a:solidFill>
-                      <a:prstDash val="solid"/>
-                      <a:round/>
-                      <a:headEnd type="none" w="med" len="med"/>
-                      <a:tailEnd type="none" w="med" len="med"/>
-                    </a:lnB>
-                    <a:solidFill>
-                      <a:srgbClr val="1A2744"/>
-                    </a:solidFill>
-                  </a:tcPr>
-                </a:tc>
-                <a:tc>
-                  <a:txBody>
-                    <a:bodyPr/>
-                    <a:lstStyle/>
-                    <a:p>
-                      <a:pPr marL="0" indent="0">
-                        <a:buNone/>
-                      </a:pPr>
-                      <a:r>
-                        <a:rPr lang="en-US" sz="1200" b="1" dirty="0">
-                          <a:solidFill>
-                            <a:srgbClr val="FFFFFF"/>
-                          </a:solidFill>
-                          <a:latin typeface="Calibri" pitchFamily="34" charset="0"/>
-                          <a:ea typeface="Calibri" pitchFamily="34" charset="-122"/>
-                          <a:cs typeface="Calibri" pitchFamily="34" charset="-120"/>
-                        </a:rPr>
-                        <a:t>RMSE (€/m²)</a:t>
-                      </a:r>
-                      <a:endParaRPr lang="en-US" sz="1200" dirty="0">
-                        <a:latin typeface="Calibri" charset="0"/>
-                        <a:ea typeface="Calibri" charset="0"/>
-                        <a:cs typeface="Calibri" charset="0"/>
-                      </a:endParaRPr>
-                    </a:p>
-                  </a:txBody>
-                  <a:tcPr>
-                    <a:lnL w="6350" cap="flat" cmpd="sng" algn="ctr">
-                      <a:solidFill>
-                        <a:srgbClr val="D1D9E0"/>
-                      </a:solidFill>
-                      <a:prstDash val="solid"/>
-                      <a:round/>
-                      <a:headEnd type="none" w="med" len="med"/>
-                      <a:tailEnd type="none" w="med" len="med"/>
-                    </a:lnL>
-                    <a:lnR w="6350" cap="flat" cmpd="sng" algn="ctr">
-                      <a:solidFill>
-                        <a:srgbClr val="D1D9E0"/>
-                      </a:solidFill>
-                      <a:prstDash val="solid"/>
-                      <a:round/>
-                      <a:headEnd type="none" w="med" len="med"/>
-                      <a:tailEnd type="none" w="med" len="med"/>
-                    </a:lnR>
-                    <a:lnT w="6350" cap="flat" cmpd="sng" algn="ctr">
-                      <a:solidFill>
-                        <a:srgbClr val="D1D9E0"/>
-                      </a:solidFill>
-                      <a:prstDash val="solid"/>
-                      <a:round/>
-                      <a:headEnd type="none" w="med" len="med"/>
-                      <a:tailEnd type="none" w="med" len="med"/>
-                    </a:lnT>
-                    <a:lnB w="6350" cap="flat" cmpd="sng" algn="ctr">
-                      <a:solidFill>
-                        <a:srgbClr val="D1D9E0"/>
-                      </a:solidFill>
-                      <a:prstDash val="solid"/>
-                      <a:round/>
-                      <a:headEnd type="none" w="med" len="med"/>
-                      <a:tailEnd type="none" w="med" len="med"/>
-                    </a:lnB>
-                    <a:solidFill>
-                      <a:srgbClr val="1A2744"/>
-                    </a:solidFill>
-                  </a:tcPr>
-                </a:tc>
-                <a:tc>
-                  <a:txBody>
-                    <a:bodyPr/>
-                    <a:lstStyle/>
-                    <a:p>
-                      <a:pPr marL="0" indent="0">
-                        <a:buNone/>
-                      </a:pPr>
-                      <a:r>
-                        <a:rPr lang="en-US" sz="1200" b="1" dirty="0">
-                          <a:solidFill>
-                            <a:srgbClr val="FFFFFF"/>
-                          </a:solidFill>
-                          <a:latin typeface="Calibri" pitchFamily="34" charset="0"/>
-                          <a:ea typeface="Calibri" pitchFamily="34" charset="-122"/>
-                          <a:cs typeface="Calibri" pitchFamily="34" charset="-120"/>
-                        </a:rPr>
-                        <a:t>MAE (€/m²)</a:t>
-                      </a:r>
-                      <a:endParaRPr lang="en-US" sz="1200" dirty="0">
-                        <a:latin typeface="Calibri" charset="0"/>
-                        <a:ea typeface="Calibri" charset="0"/>
-                        <a:cs typeface="Calibri" charset="0"/>
-                      </a:endParaRPr>
-                    </a:p>
-                  </a:txBody>
-                  <a:tcPr>
-                    <a:lnL w="6350" cap="flat" cmpd="sng" algn="ctr">
-                      <a:solidFill>
-                        <a:srgbClr val="D1D9E0"/>
-                      </a:solidFill>
-                      <a:prstDash val="solid"/>
-                      <a:round/>
-                      <a:headEnd type="none" w="med" len="med"/>
-                      <a:tailEnd type="none" w="med" len="med"/>
-                    </a:lnL>
-                    <a:lnR w="6350" cap="flat" cmpd="sng" algn="ctr">
-                      <a:solidFill>
-                        <a:srgbClr val="D1D9E0"/>
-                      </a:solidFill>
-                      <a:prstDash val="solid"/>
-                      <a:round/>
-                      <a:headEnd type="none" w="med" len="med"/>
-                      <a:tailEnd type="none" w="med" len="med"/>
-                    </a:lnR>
-                    <a:lnT w="6350" cap="flat" cmpd="sng" algn="ctr">
-                      <a:solidFill>
-                        <a:srgbClr val="D1D9E0"/>
-                      </a:solidFill>
-                      <a:prstDash val="solid"/>
-                      <a:round/>
-                      <a:headEnd type="none" w="med" len="med"/>
-                      <a:tailEnd type="none" w="med" len="med"/>
-                    </a:lnT>
-                    <a:lnB w="6350" cap="flat" cmpd="sng" algn="ctr">
-                      <a:solidFill>
-                        <a:srgbClr val="D1D9E0"/>
-                      </a:solidFill>
-                      <a:prstDash val="solid"/>
-                      <a:round/>
-                      <a:headEnd type="none" w="med" len="med"/>
-                      <a:tailEnd type="none" w="med" len="med"/>
-                    </a:lnB>
-                    <a:solidFill>
-                      <a:srgbClr val="1A2744"/>
-                    </a:solidFill>
-                  </a:tcPr>
-                </a:tc>
-                <a:tc>
-                  <a:txBody>
-                    <a:bodyPr/>
-                    <a:lstStyle/>
-                    <a:p>
-                      <a:pPr marL="0" indent="0">
-                        <a:buNone/>
-                      </a:pPr>
-                      <a:r>
-                        <a:rPr lang="en-US" sz="1200" b="1" dirty="0">
-                          <a:solidFill>
-                            <a:srgbClr val="FFFFFF"/>
-                          </a:solidFill>
-                          <a:latin typeface="Calibri" pitchFamily="34" charset="0"/>
-                          <a:ea typeface="Calibri" pitchFamily="34" charset="-122"/>
-                          <a:cs typeface="Calibri" pitchFamily="34" charset="-120"/>
-                        </a:rPr>
-                        <a:t>R²</a:t>
-                      </a:r>
-                      <a:endParaRPr lang="en-US" sz="1200" dirty="0">
-                        <a:latin typeface="Calibri" charset="0"/>
-                        <a:ea typeface="Calibri" charset="0"/>
-                        <a:cs typeface="Calibri" charset="0"/>
-                      </a:endParaRPr>
-                    </a:p>
-                  </a:txBody>
-                  <a:tcPr>
-                    <a:lnL w="6350" cap="flat" cmpd="sng" algn="ctr">
-                      <a:solidFill>
-                        <a:srgbClr val="D1D9E0"/>
-                      </a:solidFill>
-                      <a:prstDash val="solid"/>
-                      <a:round/>
-                      <a:headEnd type="none" w="med" len="med"/>
-                      <a:tailEnd type="none" w="med" len="med"/>
-                    </a:lnL>
-                    <a:lnR w="6350" cap="flat" cmpd="sng" algn="ctr">
-                      <a:solidFill>
-                        <a:srgbClr val="D1D9E0"/>
-                      </a:solidFill>
-                      <a:prstDash val="solid"/>
-                      <a:round/>
-                      <a:headEnd type="none" w="med" len="med"/>
-                      <a:tailEnd type="none" w="med" len="med"/>
-                    </a:lnR>
-                    <a:lnT w="6350" cap="flat" cmpd="sng" algn="ctr">
-                      <a:solidFill>
-                        <a:srgbClr val="D1D9E0"/>
-                      </a:solidFill>
-                      <a:prstDash val="solid"/>
-                      <a:round/>
-                      <a:headEnd type="none" w="med" len="med"/>
-                      <a:tailEnd type="none" w="med" len="med"/>
-                    </a:lnT>
-                    <a:lnB w="6350" cap="flat" cmpd="sng" algn="ctr">
-                      <a:solidFill>
-                        <a:srgbClr val="D1D9E0"/>
-                      </a:solidFill>
-                      <a:prstDash val="solid"/>
-                      <a:round/>
-                      <a:headEnd type="none" w="med" len="med"/>
-                      <a:tailEnd type="none" w="med" len="med"/>
-                    </a:lnB>
-                    <a:solidFill>
-                      <a:srgbClr val="1A2744"/>
-                    </a:solidFill>
-                  </a:tcPr>
-                </a:tc>
-                <a:tc>
-                  <a:txBody>
-                    <a:bodyPr/>
-                    <a:lstStyle/>
-                    <a:p>
-                      <a:pPr marL="0" indent="0">
-                        <a:buNone/>
-                      </a:pPr>
-                      <a:r>
-                        <a:rPr lang="en-US" sz="1200" b="1" dirty="0">
-                          <a:solidFill>
-                            <a:srgbClr val="FFFFFF"/>
-                          </a:solidFill>
-                          <a:latin typeface="Calibri" pitchFamily="34" charset="0"/>
-                          <a:ea typeface="Calibri" pitchFamily="34" charset="-122"/>
-                          <a:cs typeface="Calibri" pitchFamily="34" charset="-120"/>
-                        </a:rPr>
-                        <a:t>Valoración</a:t>
-                      </a:r>
-                      <a:endParaRPr lang="en-US" sz="1200" dirty="0">
-                        <a:latin typeface="Calibri" charset="0"/>
-                        <a:ea typeface="Calibri" charset="0"/>
-                        <a:cs typeface="Calibri" charset="0"/>
-                      </a:endParaRPr>
-                    </a:p>
-                  </a:txBody>
-                  <a:tcPr>
-                    <a:lnL w="6350" cap="flat" cmpd="sng" algn="ctr">
-                      <a:solidFill>
-                        <a:srgbClr val="D1D9E0"/>
-                      </a:solidFill>
-                      <a:prstDash val="solid"/>
-                      <a:round/>
-                      <a:headEnd type="none" w="med" len="med"/>
-                      <a:tailEnd type="none" w="med" len="med"/>
-                    </a:lnL>
-                    <a:lnR w="6350" cap="flat" cmpd="sng" algn="ctr">
-                      <a:solidFill>
-                        <a:srgbClr val="D1D9E0"/>
-                      </a:solidFill>
-                      <a:prstDash val="solid"/>
-                      <a:round/>
-                      <a:headEnd type="none" w="med" len="med"/>
-                      <a:tailEnd type="none" w="med" len="med"/>
-                    </a:lnR>
-                    <a:lnT w="6350" cap="flat" cmpd="sng" algn="ctr">
-                      <a:solidFill>
-                        <a:srgbClr val="D1D9E0"/>
-                      </a:solidFill>
-                      <a:prstDash val="solid"/>
-                      <a:round/>
-                      <a:headEnd type="none" w="med" len="med"/>
-                      <a:tailEnd type="none" w="med" len="med"/>
-                    </a:lnT>
-                    <a:lnB w="6350" cap="flat" cmpd="sng" algn="ctr">
-                      <a:solidFill>
-                        <a:srgbClr val="D1D9E0"/>
-                      </a:solidFill>
-                      <a:prstDash val="solid"/>
-                      <a:round/>
-                      <a:headEnd type="none" w="med" len="med"/>
-                      <a:tailEnd type="none" w="med" len="med"/>
-                    </a:lnB>
-                    <a:solidFill>
-                      <a:srgbClr val="1A2744"/>
-                    </a:solidFill>
-                  </a:tcPr>
-                </a:tc>
-                <a:extLst>
-                  <a:ext uri="{0D108BD9-81ED-4DB2-BD59-A6C34878D82A}">
-                    <a16:rowId xmlns:a16="http://schemas.microsoft.com/office/drawing/2014/main" val="10000"/>
-                  </a:ext>
-                </a:extLst>
-              </a:tr>
-              <a:tr h="402336">
-                <a:tc>
-                  <a:txBody>
-                    <a:bodyPr/>
-                    <a:lstStyle/>
-                    <a:p>
-                      <a:pPr marL="0" indent="0">
-                        <a:buNone/>
-                      </a:pPr>
-                      <a:r>
-                        <a:rPr lang="en-US" sz="1200" dirty="0">
-                          <a:solidFill>
-                            <a:srgbClr val="000000"/>
-                          </a:solidFill>
-                          <a:latin typeface="Calibri" pitchFamily="34" charset="0"/>
-                          <a:ea typeface="Calibri" pitchFamily="34" charset="-122"/>
-                          <a:cs typeface="Calibri" pitchFamily="34" charset="-120"/>
-                        </a:rPr>
-                        <a:t>Regresión Lineal</a:t>
-                      </a:r>
-                      <a:endParaRPr lang="en-US" sz="1200" dirty="0">
-                        <a:latin typeface="Calibri" charset="0"/>
-                        <a:ea typeface="Calibri" charset="0"/>
-                        <a:cs typeface="Calibri" charset="0"/>
-                      </a:endParaRPr>
-                    </a:p>
-                  </a:txBody>
-                  <a:tcPr>
-                    <a:lnL w="6350" cap="flat" cmpd="sng" algn="ctr">
-                      <a:solidFill>
-                        <a:srgbClr val="D1D9E0"/>
-                      </a:solidFill>
-                      <a:prstDash val="solid"/>
-                      <a:round/>
-                      <a:headEnd type="none" w="med" len="med"/>
-                      <a:tailEnd type="none" w="med" len="med"/>
-                    </a:lnL>
-                    <a:lnR w="6350" cap="flat" cmpd="sng" algn="ctr">
-                      <a:solidFill>
-                        <a:srgbClr val="D1D9E0"/>
-                      </a:solidFill>
-                      <a:prstDash val="solid"/>
-                      <a:round/>
-                      <a:headEnd type="none" w="med" len="med"/>
-                      <a:tailEnd type="none" w="med" len="med"/>
-                    </a:lnR>
-                    <a:lnT w="6350" cap="flat" cmpd="sng" algn="ctr">
-                      <a:solidFill>
-                        <a:srgbClr val="D1D9E0"/>
-                      </a:solidFill>
-                      <a:prstDash val="solid"/>
-                      <a:round/>
-                      <a:headEnd type="none" w="med" len="med"/>
-                      <a:tailEnd type="none" w="med" len="med"/>
-                    </a:lnT>
-                    <a:lnB w="6350" cap="flat" cmpd="sng" algn="ctr">
-                      <a:solidFill>
-                        <a:srgbClr val="D1D9E0"/>
-                      </a:solidFill>
-                      <a:prstDash val="solid"/>
-                      <a:round/>
-                      <a:headEnd type="none" w="med" len="med"/>
-                      <a:tailEnd type="none" w="med" len="med"/>
-                    </a:lnB>
-                  </a:tcPr>
-                </a:tc>
-                <a:tc>
-                  <a:txBody>
-                    <a:bodyPr/>
-                    <a:lstStyle/>
-                    <a:p>
-                      <a:pPr marL="0" indent="0">
-                        <a:buNone/>
-                      </a:pPr>
-                      <a:r>
-                        <a:rPr lang="en-US" sz="1200" dirty="0">
-                          <a:solidFill>
-                            <a:srgbClr val="000000"/>
-                          </a:solidFill>
-                          <a:latin typeface="Calibri" pitchFamily="34" charset="0"/>
-                          <a:ea typeface="Calibri" pitchFamily="34" charset="-122"/>
-                          <a:cs typeface="Calibri" pitchFamily="34" charset="-120"/>
-                        </a:rPr>
-                        <a:t>~450</a:t>
-                      </a:r>
-                      <a:endParaRPr lang="en-US" sz="1200" dirty="0">
-                        <a:latin typeface="Calibri" charset="0"/>
-                        <a:ea typeface="Calibri" charset="0"/>
-                        <a:cs typeface="Calibri" charset="0"/>
-                      </a:endParaRPr>
-                    </a:p>
-                  </a:txBody>
-                  <a:tcPr>
-                    <a:lnL w="6350" cap="flat" cmpd="sng" algn="ctr">
-                      <a:solidFill>
-                        <a:srgbClr val="D1D9E0"/>
-                      </a:solidFill>
-                      <a:prstDash val="solid"/>
-                      <a:round/>
-                      <a:headEnd type="none" w="med" len="med"/>
-                      <a:tailEnd type="none" w="med" len="med"/>
-                    </a:lnL>
-                    <a:lnR w="6350" cap="flat" cmpd="sng" algn="ctr">
-                      <a:solidFill>
-                        <a:srgbClr val="D1D9E0"/>
-                      </a:solidFill>
-                      <a:prstDash val="solid"/>
-                      <a:round/>
-                      <a:headEnd type="none" w="med" len="med"/>
-                      <a:tailEnd type="none" w="med" len="med"/>
-                    </a:lnR>
-                    <a:lnT w="6350" cap="flat" cmpd="sng" algn="ctr">
-                      <a:solidFill>
-                        <a:srgbClr val="D1D9E0"/>
-                      </a:solidFill>
-                      <a:prstDash val="solid"/>
-                      <a:round/>
-                      <a:headEnd type="none" w="med" len="med"/>
-                      <a:tailEnd type="none" w="med" len="med"/>
-                    </a:lnT>
-                    <a:lnB w="6350" cap="flat" cmpd="sng" algn="ctr">
-                      <a:solidFill>
-                        <a:srgbClr val="D1D9E0"/>
-                      </a:solidFill>
-                      <a:prstDash val="solid"/>
-                      <a:round/>
-                      <a:headEnd type="none" w="med" len="med"/>
-                      <a:tailEnd type="none" w="med" len="med"/>
-                    </a:lnB>
-                  </a:tcPr>
-                </a:tc>
-                <a:tc>
-                  <a:txBody>
-                    <a:bodyPr/>
-                    <a:lstStyle/>
-                    <a:p>
-                      <a:pPr marL="0" indent="0">
-                        <a:buNone/>
-                      </a:pPr>
-                      <a:r>
-                        <a:rPr lang="en-US" sz="1200" dirty="0">
-                          <a:solidFill>
-                            <a:srgbClr val="000000"/>
-                          </a:solidFill>
-                          <a:latin typeface="Calibri" pitchFamily="34" charset="0"/>
-                          <a:ea typeface="Calibri" pitchFamily="34" charset="-122"/>
-                          <a:cs typeface="Calibri" pitchFamily="34" charset="-120"/>
-                        </a:rPr>
-                        <a:t>~320</a:t>
-                      </a:r>
-                      <a:endParaRPr lang="en-US" sz="1200" dirty="0">
-                        <a:latin typeface="Calibri" charset="0"/>
-                        <a:ea typeface="Calibri" charset="0"/>
-                        <a:cs typeface="Calibri" charset="0"/>
-                      </a:endParaRPr>
-                    </a:p>
-                  </a:txBody>
-                  <a:tcPr>
-                    <a:lnL w="6350" cap="flat" cmpd="sng" algn="ctr">
-                      <a:solidFill>
-                        <a:srgbClr val="D1D9E0"/>
-                      </a:solidFill>
-                      <a:prstDash val="solid"/>
-                      <a:round/>
-                      <a:headEnd type="none" w="med" len="med"/>
-                      <a:tailEnd type="none" w="med" len="med"/>
-                    </a:lnL>
-                    <a:lnR w="6350" cap="flat" cmpd="sng" algn="ctr">
-                      <a:solidFill>
-                        <a:srgbClr val="D1D9E0"/>
-                      </a:solidFill>
-                      <a:prstDash val="solid"/>
-                      <a:round/>
-                      <a:headEnd type="none" w="med" len="med"/>
-                      <a:tailEnd type="none" w="med" len="med"/>
-                    </a:lnR>
-                    <a:lnT w="6350" cap="flat" cmpd="sng" algn="ctr">
-                      <a:solidFill>
-                        <a:srgbClr val="D1D9E0"/>
-                      </a:solidFill>
-                      <a:prstDash val="solid"/>
-                      <a:round/>
-                      <a:headEnd type="none" w="med" len="med"/>
-                      <a:tailEnd type="none" w="med" len="med"/>
-                    </a:lnT>
-                    <a:lnB w="6350" cap="flat" cmpd="sng" algn="ctr">
-                      <a:solidFill>
-                        <a:srgbClr val="D1D9E0"/>
-                      </a:solidFill>
-                      <a:prstDash val="solid"/>
-                      <a:round/>
-                      <a:headEnd type="none" w="med" len="med"/>
-                      <a:tailEnd type="none" w="med" len="med"/>
-                    </a:lnB>
-                  </a:tcPr>
-                </a:tc>
-                <a:tc>
-                  <a:txBody>
-                    <a:bodyPr/>
-                    <a:lstStyle/>
-                    <a:p>
-                      <a:pPr marL="0" indent="0">
-                        <a:buNone/>
-                      </a:pPr>
-                      <a:r>
-                        <a:rPr lang="en-US" sz="1200" dirty="0">
-                          <a:solidFill>
-                            <a:srgbClr val="000000"/>
-                          </a:solidFill>
-                          <a:latin typeface="Calibri" pitchFamily="34" charset="0"/>
-                          <a:ea typeface="Calibri" pitchFamily="34" charset="-122"/>
-                          <a:cs typeface="Calibri" pitchFamily="34" charset="-120"/>
-                        </a:rPr>
-                        <a:t>~0.60</a:t>
-                      </a:r>
-                      <a:endParaRPr lang="en-US" sz="1200" dirty="0">
-                        <a:latin typeface="Calibri" charset="0"/>
-                        <a:ea typeface="Calibri" charset="0"/>
-                        <a:cs typeface="Calibri" charset="0"/>
-                      </a:endParaRPr>
-                    </a:p>
-                  </a:txBody>
-                  <a:tcPr>
-                    <a:lnL w="6350" cap="flat" cmpd="sng" algn="ctr">
-                      <a:solidFill>
-                        <a:srgbClr val="D1D9E0"/>
-                      </a:solidFill>
-                      <a:prstDash val="solid"/>
-                      <a:round/>
-                      <a:headEnd type="none" w="med" len="med"/>
-                      <a:tailEnd type="none" w="med" len="med"/>
-                    </a:lnL>
-                    <a:lnR w="6350" cap="flat" cmpd="sng" algn="ctr">
-                      <a:solidFill>
-                        <a:srgbClr val="D1D9E0"/>
-                      </a:solidFill>
-                      <a:prstDash val="solid"/>
-                      <a:round/>
-                      <a:headEnd type="none" w="med" len="med"/>
-                      <a:tailEnd type="none" w="med" len="med"/>
-                    </a:lnR>
-                    <a:lnT w="6350" cap="flat" cmpd="sng" algn="ctr">
-                      <a:solidFill>
-                        <a:srgbClr val="D1D9E0"/>
-                      </a:solidFill>
-                      <a:prstDash val="solid"/>
-                      <a:round/>
-                      <a:headEnd type="none" w="med" len="med"/>
-                      <a:tailEnd type="none" w="med" len="med"/>
-                    </a:lnT>
-                    <a:lnB w="6350" cap="flat" cmpd="sng" algn="ctr">
-                      <a:solidFill>
-                        <a:srgbClr val="D1D9E0"/>
-                      </a:solidFill>
-                      <a:prstDash val="solid"/>
-                      <a:round/>
-                      <a:headEnd type="none" w="med" len="med"/>
-                      <a:tailEnd type="none" w="med" len="med"/>
-                    </a:lnB>
-                  </a:tcPr>
-                </a:tc>
-                <a:tc>
-                  <a:txBody>
-                    <a:bodyPr/>
-                    <a:lstStyle/>
-                    <a:p>
-                      <a:pPr marL="0" indent="0">
-                        <a:buNone/>
-                      </a:pPr>
-                      <a:r>
-                        <a:rPr lang="en-US" sz="1200" dirty="0">
-                          <a:solidFill>
-                            <a:srgbClr val="64748B"/>
-                          </a:solidFill>
-                          <a:latin typeface="Calibri" pitchFamily="34" charset="0"/>
-                          <a:ea typeface="Calibri" pitchFamily="34" charset="-122"/>
-                          <a:cs typeface="Calibri" pitchFamily="34" charset="-120"/>
-                        </a:rPr>
-                        <a:t>Modelo base</a:t>
-                      </a:r>
-                      <a:endParaRPr lang="en-US" sz="1200" dirty="0">
-                        <a:latin typeface="Calibri" charset="0"/>
-                        <a:ea typeface="Calibri" charset="0"/>
-                        <a:cs typeface="Calibri" charset="0"/>
-                      </a:endParaRPr>
-                    </a:p>
-                  </a:txBody>
-                  <a:tcPr>
-                    <a:lnL w="6350" cap="flat" cmpd="sng" algn="ctr">
-                      <a:solidFill>
-                        <a:srgbClr val="D1D9E0"/>
-                      </a:solidFill>
-                      <a:prstDash val="solid"/>
-                      <a:round/>
-                      <a:headEnd type="none" w="med" len="med"/>
-                      <a:tailEnd type="none" w="med" len="med"/>
-                    </a:lnL>
-                    <a:lnR w="6350" cap="flat" cmpd="sng" algn="ctr">
-                      <a:solidFill>
-                        <a:srgbClr val="D1D9E0"/>
-                      </a:solidFill>
-                      <a:prstDash val="solid"/>
-                      <a:round/>
-                      <a:headEnd type="none" w="med" len="med"/>
-                      <a:tailEnd type="none" w="med" len="med"/>
-                    </a:lnR>
-                    <a:lnT w="6350" cap="flat" cmpd="sng" algn="ctr">
-                      <a:solidFill>
-                        <a:srgbClr val="D1D9E0"/>
-                      </a:solidFill>
-                      <a:prstDash val="solid"/>
-                      <a:round/>
-                      <a:headEnd type="none" w="med" len="med"/>
-                      <a:tailEnd type="none" w="med" len="med"/>
-                    </a:lnT>
-                    <a:lnB w="6350" cap="flat" cmpd="sng" algn="ctr">
-                      <a:solidFill>
-                        <a:srgbClr val="D1D9E0"/>
-                      </a:solidFill>
-                      <a:prstDash val="solid"/>
-                      <a:round/>
-                      <a:headEnd type="none" w="med" len="med"/>
-                      <a:tailEnd type="none" w="med" len="med"/>
-                    </a:lnB>
-                  </a:tcPr>
-                </a:tc>
-                <a:extLst>
-                  <a:ext uri="{0D108BD9-81ED-4DB2-BD59-A6C34878D82A}">
-                    <a16:rowId xmlns:a16="http://schemas.microsoft.com/office/drawing/2014/main" val="10001"/>
-                  </a:ext>
-                </a:extLst>
-              </a:tr>
-              <a:tr h="402336">
-                <a:tc>
-                  <a:txBody>
-                    <a:bodyPr/>
-                    <a:lstStyle/>
-                    <a:p>
-                      <a:pPr marL="0" indent="0">
-                        <a:buNone/>
-                      </a:pPr>
-                      <a:r>
-                        <a:rPr lang="en-US" sz="1200" dirty="0">
-                          <a:solidFill>
-                            <a:srgbClr val="000000"/>
-                          </a:solidFill>
-                          <a:latin typeface="Calibri" pitchFamily="34" charset="0"/>
-                          <a:ea typeface="Calibri" pitchFamily="34" charset="-122"/>
-                          <a:cs typeface="Calibri" pitchFamily="34" charset="-120"/>
-                        </a:rPr>
-                        <a:t>Árbol de Decisión</a:t>
-                      </a:r>
-                      <a:endParaRPr lang="en-US" sz="1200" dirty="0">
-                        <a:latin typeface="Calibri" charset="0"/>
-                        <a:ea typeface="Calibri" charset="0"/>
-                        <a:cs typeface="Calibri" charset="0"/>
-                      </a:endParaRPr>
-                    </a:p>
-                  </a:txBody>
-                  <a:tcPr>
-                    <a:lnL w="6350" cap="flat" cmpd="sng" algn="ctr">
-                      <a:solidFill>
-                        <a:srgbClr val="D1D9E0"/>
-                      </a:solidFill>
-                      <a:prstDash val="solid"/>
-                      <a:round/>
-                      <a:headEnd type="none" w="med" len="med"/>
-                      <a:tailEnd type="none" w="med" len="med"/>
-                    </a:lnL>
-                    <a:lnR w="6350" cap="flat" cmpd="sng" algn="ctr">
-                      <a:solidFill>
-                        <a:srgbClr val="D1D9E0"/>
-                      </a:solidFill>
-                      <a:prstDash val="solid"/>
-                      <a:round/>
-                      <a:headEnd type="none" w="med" len="med"/>
-                      <a:tailEnd type="none" w="med" len="med"/>
-                    </a:lnR>
-                    <a:lnT w="6350" cap="flat" cmpd="sng" algn="ctr">
-                      <a:solidFill>
-                        <a:srgbClr val="D1D9E0"/>
-                      </a:solidFill>
-                      <a:prstDash val="solid"/>
-                      <a:round/>
-                      <a:headEnd type="none" w="med" len="med"/>
-                      <a:tailEnd type="none" w="med" len="med"/>
-                    </a:lnT>
-                    <a:lnB w="6350" cap="flat" cmpd="sng" algn="ctr">
-                      <a:solidFill>
-                        <a:srgbClr val="D1D9E0"/>
-                      </a:solidFill>
-                      <a:prstDash val="solid"/>
-                      <a:round/>
-                      <a:headEnd type="none" w="med" len="med"/>
-                      <a:tailEnd type="none" w="med" len="med"/>
-                    </a:lnB>
-                  </a:tcPr>
-                </a:tc>
-                <a:tc>
-                  <a:txBody>
-                    <a:bodyPr/>
-                    <a:lstStyle/>
-                    <a:p>
-                      <a:pPr marL="0" indent="0">
-                        <a:buNone/>
-                      </a:pPr>
-                      <a:r>
-                        <a:rPr lang="en-US" sz="1200" dirty="0">
-                          <a:solidFill>
-                            <a:srgbClr val="000000"/>
-                          </a:solidFill>
-                          <a:latin typeface="Calibri" pitchFamily="34" charset="0"/>
-                          <a:ea typeface="Calibri" pitchFamily="34" charset="-122"/>
-                          <a:cs typeface="Calibri" pitchFamily="34" charset="-120"/>
-                        </a:rPr>
-                        <a:t>~380</a:t>
-                      </a:r>
-                      <a:endParaRPr lang="en-US" sz="1200" dirty="0">
-                        <a:latin typeface="Calibri" charset="0"/>
-                        <a:ea typeface="Calibri" charset="0"/>
-                        <a:cs typeface="Calibri" charset="0"/>
-                      </a:endParaRPr>
-                    </a:p>
-                  </a:txBody>
-                  <a:tcPr>
-                    <a:lnL w="6350" cap="flat" cmpd="sng" algn="ctr">
-                      <a:solidFill>
-                        <a:srgbClr val="D1D9E0"/>
-                      </a:solidFill>
-                      <a:prstDash val="solid"/>
-                      <a:round/>
-                      <a:headEnd type="none" w="med" len="med"/>
-                      <a:tailEnd type="none" w="med" len="med"/>
-                    </a:lnL>
-                    <a:lnR w="6350" cap="flat" cmpd="sng" algn="ctr">
-                      <a:solidFill>
-                        <a:srgbClr val="D1D9E0"/>
-                      </a:solidFill>
-                      <a:prstDash val="solid"/>
-                      <a:round/>
-                      <a:headEnd type="none" w="med" len="med"/>
-                      <a:tailEnd type="none" w="med" len="med"/>
-                    </a:lnR>
-                    <a:lnT w="6350" cap="flat" cmpd="sng" algn="ctr">
-                      <a:solidFill>
-                        <a:srgbClr val="D1D9E0"/>
-                      </a:solidFill>
-                      <a:prstDash val="solid"/>
-                      <a:round/>
-                      <a:headEnd type="none" w="med" len="med"/>
-                      <a:tailEnd type="none" w="med" len="med"/>
-                    </a:lnT>
-                    <a:lnB w="6350" cap="flat" cmpd="sng" algn="ctr">
-                      <a:solidFill>
-                        <a:srgbClr val="D1D9E0"/>
-                      </a:solidFill>
-                      <a:prstDash val="solid"/>
-                      <a:round/>
-                      <a:headEnd type="none" w="med" len="med"/>
-                      <a:tailEnd type="none" w="med" len="med"/>
-                    </a:lnB>
-                  </a:tcPr>
-                </a:tc>
-                <a:tc>
-                  <a:txBody>
-                    <a:bodyPr/>
-                    <a:lstStyle/>
-                    <a:p>
-                      <a:pPr marL="0" indent="0">
-                        <a:buNone/>
-                      </a:pPr>
-                      <a:r>
-                        <a:rPr lang="en-US" sz="1200" dirty="0">
-                          <a:solidFill>
-                            <a:srgbClr val="000000"/>
-                          </a:solidFill>
-                          <a:latin typeface="Calibri" pitchFamily="34" charset="0"/>
-                          <a:ea typeface="Calibri" pitchFamily="34" charset="-122"/>
-                          <a:cs typeface="Calibri" pitchFamily="34" charset="-120"/>
-                        </a:rPr>
-                        <a:t>~270</a:t>
-                      </a:r>
-                      <a:endParaRPr lang="en-US" sz="1200" dirty="0">
-                        <a:latin typeface="Calibri" charset="0"/>
-                        <a:ea typeface="Calibri" charset="0"/>
-                        <a:cs typeface="Calibri" charset="0"/>
-                      </a:endParaRPr>
-                    </a:p>
-                  </a:txBody>
-                  <a:tcPr>
-                    <a:lnL w="6350" cap="flat" cmpd="sng" algn="ctr">
-                      <a:solidFill>
-                        <a:srgbClr val="D1D9E0"/>
-                      </a:solidFill>
-                      <a:prstDash val="solid"/>
-                      <a:round/>
-                      <a:headEnd type="none" w="med" len="med"/>
-                      <a:tailEnd type="none" w="med" len="med"/>
-                    </a:lnL>
-                    <a:lnR w="6350" cap="flat" cmpd="sng" algn="ctr">
-                      <a:solidFill>
-                        <a:srgbClr val="D1D9E0"/>
-                      </a:solidFill>
-                      <a:prstDash val="solid"/>
-                      <a:round/>
-                      <a:headEnd type="none" w="med" len="med"/>
-                      <a:tailEnd type="none" w="med" len="med"/>
-                    </a:lnR>
-                    <a:lnT w="6350" cap="flat" cmpd="sng" algn="ctr">
-                      <a:solidFill>
-                        <a:srgbClr val="D1D9E0"/>
-                      </a:solidFill>
-                      <a:prstDash val="solid"/>
-                      <a:round/>
-                      <a:headEnd type="none" w="med" len="med"/>
-                      <a:tailEnd type="none" w="med" len="med"/>
-                    </a:lnT>
-                    <a:lnB w="6350" cap="flat" cmpd="sng" algn="ctr">
-                      <a:solidFill>
-                        <a:srgbClr val="D1D9E0"/>
-                      </a:solidFill>
-                      <a:prstDash val="solid"/>
-                      <a:round/>
-                      <a:headEnd type="none" w="med" len="med"/>
-                      <a:tailEnd type="none" w="med" len="med"/>
-                    </a:lnB>
-                  </a:tcPr>
-                </a:tc>
-                <a:tc>
-                  <a:txBody>
-                    <a:bodyPr/>
-                    <a:lstStyle/>
-                    <a:p>
-                      <a:pPr marL="0" indent="0">
-                        <a:buNone/>
-                      </a:pPr>
-                      <a:r>
-                        <a:rPr lang="en-US" sz="1200" dirty="0">
-                          <a:solidFill>
-                            <a:srgbClr val="000000"/>
-                          </a:solidFill>
-                          <a:latin typeface="Calibri" pitchFamily="34" charset="0"/>
-                          <a:ea typeface="Calibri" pitchFamily="34" charset="-122"/>
-                          <a:cs typeface="Calibri" pitchFamily="34" charset="-120"/>
-                        </a:rPr>
-                        <a:t>~0.70</a:t>
-                      </a:r>
-                      <a:endParaRPr lang="en-US" sz="1200" dirty="0">
-                        <a:latin typeface="Calibri" charset="0"/>
-                        <a:ea typeface="Calibri" charset="0"/>
-                        <a:cs typeface="Calibri" charset="0"/>
-                      </a:endParaRPr>
-                    </a:p>
-                  </a:txBody>
-                  <a:tcPr>
-                    <a:lnL w="6350" cap="flat" cmpd="sng" algn="ctr">
-                      <a:solidFill>
-                        <a:srgbClr val="D1D9E0"/>
-                      </a:solidFill>
-                      <a:prstDash val="solid"/>
-                      <a:round/>
-                      <a:headEnd type="none" w="med" len="med"/>
-                      <a:tailEnd type="none" w="med" len="med"/>
-                    </a:lnL>
-                    <a:lnR w="6350" cap="flat" cmpd="sng" algn="ctr">
-                      <a:solidFill>
-                        <a:srgbClr val="D1D9E0"/>
-                      </a:solidFill>
-                      <a:prstDash val="solid"/>
-                      <a:round/>
-                      <a:headEnd type="none" w="med" len="med"/>
-                      <a:tailEnd type="none" w="med" len="med"/>
-                    </a:lnR>
-                    <a:lnT w="6350" cap="flat" cmpd="sng" algn="ctr">
-                      <a:solidFill>
-                        <a:srgbClr val="D1D9E0"/>
-                      </a:solidFill>
-                      <a:prstDash val="solid"/>
-                      <a:round/>
-                      <a:headEnd type="none" w="med" len="med"/>
-                      <a:tailEnd type="none" w="med" len="med"/>
-                    </a:lnT>
-                    <a:lnB w="6350" cap="flat" cmpd="sng" algn="ctr">
-                      <a:solidFill>
-                        <a:srgbClr val="D1D9E0"/>
-                      </a:solidFill>
-                      <a:prstDash val="solid"/>
-                      <a:round/>
-                      <a:headEnd type="none" w="med" len="med"/>
-                      <a:tailEnd type="none" w="med" len="med"/>
-                    </a:lnB>
-                  </a:tcPr>
-                </a:tc>
-                <a:tc>
-                  <a:txBody>
-                    <a:bodyPr/>
-                    <a:lstStyle/>
-                    <a:p>
-                      <a:pPr marL="0" indent="0">
-                        <a:buNone/>
-                      </a:pPr>
-                      <a:r>
-                        <a:rPr lang="en-US" sz="1200" dirty="0">
-                          <a:solidFill>
-                            <a:srgbClr val="0D7377"/>
-                          </a:solidFill>
-                          <a:latin typeface="Calibri" pitchFamily="34" charset="0"/>
-                          <a:ea typeface="Calibri" pitchFamily="34" charset="-122"/>
-                          <a:cs typeface="Calibri" pitchFamily="34" charset="-120"/>
-                        </a:rPr>
-                        <a:t>Mejora notable</a:t>
-                      </a:r>
-                      <a:endParaRPr lang="en-US" sz="1200" dirty="0">
-                        <a:latin typeface="Calibri" charset="0"/>
-                        <a:ea typeface="Calibri" charset="0"/>
-                        <a:cs typeface="Calibri" charset="0"/>
-                      </a:endParaRPr>
-                    </a:p>
-                  </a:txBody>
-                  <a:tcPr>
-                    <a:lnL w="6350" cap="flat" cmpd="sng" algn="ctr">
-                      <a:solidFill>
-                        <a:srgbClr val="D1D9E0"/>
-                      </a:solidFill>
-                      <a:prstDash val="solid"/>
-                      <a:round/>
-                      <a:headEnd type="none" w="med" len="med"/>
-                      <a:tailEnd type="none" w="med" len="med"/>
-                    </a:lnL>
-                    <a:lnR w="6350" cap="flat" cmpd="sng" algn="ctr">
-                      <a:solidFill>
-                        <a:srgbClr val="D1D9E0"/>
-                      </a:solidFill>
-                      <a:prstDash val="solid"/>
-                      <a:round/>
-                      <a:headEnd type="none" w="med" len="med"/>
-                      <a:tailEnd type="none" w="med" len="med"/>
-                    </a:lnR>
-                    <a:lnT w="6350" cap="flat" cmpd="sng" algn="ctr">
-                      <a:solidFill>
-                        <a:srgbClr val="D1D9E0"/>
-                      </a:solidFill>
-                      <a:prstDash val="solid"/>
-                      <a:round/>
-                      <a:headEnd type="none" w="med" len="med"/>
-                      <a:tailEnd type="none" w="med" len="med"/>
-                    </a:lnT>
-                    <a:lnB w="6350" cap="flat" cmpd="sng" algn="ctr">
-                      <a:solidFill>
-                        <a:srgbClr val="D1D9E0"/>
-                      </a:solidFill>
-                      <a:prstDash val="solid"/>
-                      <a:round/>
-                      <a:headEnd type="none" w="med" len="med"/>
-                      <a:tailEnd type="none" w="med" len="med"/>
-                    </a:lnB>
-                  </a:tcPr>
-                </a:tc>
-                <a:extLst>
-                  <a:ext uri="{0D108BD9-81ED-4DB2-BD59-A6C34878D82A}">
-                    <a16:rowId xmlns:a16="http://schemas.microsoft.com/office/drawing/2014/main" val="10002"/>
-                  </a:ext>
-                </a:extLst>
-              </a:tr>
-              <a:tr h="402336">
-                <a:tc>
-                  <a:txBody>
-                    <a:bodyPr/>
-                    <a:lstStyle/>
-                    <a:p>
-                      <a:pPr marL="0" indent="0">
-                        <a:buNone/>
-                      </a:pPr>
-                      <a:r>
-                        <a:rPr lang="en-US" sz="1200" b="1" dirty="0">
-                          <a:solidFill>
-                            <a:srgbClr val="000000"/>
-                          </a:solidFill>
-                          <a:latin typeface="Calibri" pitchFamily="34" charset="0"/>
-                          <a:ea typeface="Calibri" pitchFamily="34" charset="-122"/>
-                          <a:cs typeface="Calibri" pitchFamily="34" charset="-120"/>
-                        </a:rPr>
-                        <a:t>🏆 Random Forest</a:t>
-                      </a:r>
-                      <a:endParaRPr lang="en-US" sz="1200" dirty="0">
-                        <a:latin typeface="Calibri" charset="0"/>
-                        <a:ea typeface="Calibri" charset="0"/>
-                        <a:cs typeface="Calibri" charset="0"/>
-                      </a:endParaRPr>
-                    </a:p>
-                  </a:txBody>
-                  <a:tcPr>
-                    <a:lnL w="6350" cap="flat" cmpd="sng" algn="ctr">
-                      <a:solidFill>
-                        <a:srgbClr val="D1D9E0"/>
-                      </a:solidFill>
-                      <a:prstDash val="solid"/>
-                      <a:round/>
-                      <a:headEnd type="none" w="med" len="med"/>
-                      <a:tailEnd type="none" w="med" len="med"/>
-                    </a:lnL>
-                    <a:lnR w="6350" cap="flat" cmpd="sng" algn="ctr">
-                      <a:solidFill>
-                        <a:srgbClr val="D1D9E0"/>
-                      </a:solidFill>
-                      <a:prstDash val="solid"/>
-                      <a:round/>
-                      <a:headEnd type="none" w="med" len="med"/>
-                      <a:tailEnd type="none" w="med" len="med"/>
-                    </a:lnR>
-                    <a:lnT w="6350" cap="flat" cmpd="sng" algn="ctr">
-                      <a:solidFill>
-                        <a:srgbClr val="D1D9E0"/>
-                      </a:solidFill>
-                      <a:prstDash val="solid"/>
-                      <a:round/>
-                      <a:headEnd type="none" w="med" len="med"/>
-                      <a:tailEnd type="none" w="med" len="med"/>
-                    </a:lnT>
-                    <a:lnB w="6350" cap="flat" cmpd="sng" algn="ctr">
-                      <a:solidFill>
-                        <a:srgbClr val="D1D9E0"/>
-                      </a:solidFill>
-                      <a:prstDash val="solid"/>
-                      <a:round/>
-                      <a:headEnd type="none" w="med" len="med"/>
-                      <a:tailEnd type="none" w="med" len="med"/>
-                    </a:lnB>
-                    <a:solidFill>
-                      <a:srgbClr val="E8F5E9"/>
-                    </a:solidFill>
-                  </a:tcPr>
-                </a:tc>
-                <a:tc>
-                  <a:txBody>
-                    <a:bodyPr/>
-                    <a:lstStyle/>
-                    <a:p>
-                      <a:pPr marL="0" indent="0">
-                        <a:buNone/>
-                      </a:pPr>
-                      <a:r>
-                        <a:rPr lang="en-US" sz="1200" b="1" dirty="0">
-                          <a:solidFill>
-                            <a:srgbClr val="000000"/>
-                          </a:solidFill>
-                          <a:latin typeface="Calibri" pitchFamily="34" charset="0"/>
-                          <a:ea typeface="Calibri" pitchFamily="34" charset="-122"/>
-                          <a:cs typeface="Calibri" pitchFamily="34" charset="-120"/>
-                        </a:rPr>
-                        <a:t>~310</a:t>
-                      </a:r>
-                      <a:endParaRPr lang="en-US" sz="1200" dirty="0">
-                        <a:latin typeface="Calibri" charset="0"/>
-                        <a:ea typeface="Calibri" charset="0"/>
-                        <a:cs typeface="Calibri" charset="0"/>
-                      </a:endParaRPr>
-                    </a:p>
-                  </a:txBody>
-                  <a:tcPr>
-                    <a:lnL w="6350" cap="flat" cmpd="sng" algn="ctr">
-                      <a:solidFill>
-                        <a:srgbClr val="D1D9E0"/>
-                      </a:solidFill>
-                      <a:prstDash val="solid"/>
-                      <a:round/>
-                      <a:headEnd type="none" w="med" len="med"/>
-                      <a:tailEnd type="none" w="med" len="med"/>
-                    </a:lnL>
-                    <a:lnR w="6350" cap="flat" cmpd="sng" algn="ctr">
-                      <a:solidFill>
-                        <a:srgbClr val="D1D9E0"/>
-                      </a:solidFill>
-                      <a:prstDash val="solid"/>
-                      <a:round/>
-                      <a:headEnd type="none" w="med" len="med"/>
-                      <a:tailEnd type="none" w="med" len="med"/>
-                    </a:lnR>
-                    <a:lnT w="6350" cap="flat" cmpd="sng" algn="ctr">
-                      <a:solidFill>
-                        <a:srgbClr val="D1D9E0"/>
-                      </a:solidFill>
-                      <a:prstDash val="solid"/>
-                      <a:round/>
-                      <a:headEnd type="none" w="med" len="med"/>
-                      <a:tailEnd type="none" w="med" len="med"/>
-                    </a:lnT>
-                    <a:lnB w="6350" cap="flat" cmpd="sng" algn="ctr">
-                      <a:solidFill>
-                        <a:srgbClr val="D1D9E0"/>
-                      </a:solidFill>
-                      <a:prstDash val="solid"/>
-                      <a:round/>
-                      <a:headEnd type="none" w="med" len="med"/>
-                      <a:tailEnd type="none" w="med" len="med"/>
-                    </a:lnB>
-                    <a:solidFill>
-                      <a:srgbClr val="E8F5E9"/>
-                    </a:solidFill>
-                  </a:tcPr>
-                </a:tc>
-                <a:tc>
-                  <a:txBody>
-                    <a:bodyPr/>
-                    <a:lstStyle/>
-                    <a:p>
-                      <a:pPr marL="0" indent="0">
-                        <a:buNone/>
-                      </a:pPr>
-                      <a:r>
-                        <a:rPr lang="en-US" sz="1200" b="1" dirty="0">
-                          <a:solidFill>
-                            <a:srgbClr val="000000"/>
-                          </a:solidFill>
-                          <a:latin typeface="Calibri" pitchFamily="34" charset="0"/>
-                          <a:ea typeface="Calibri" pitchFamily="34" charset="-122"/>
-                          <a:cs typeface="Calibri" pitchFamily="34" charset="-120"/>
-                        </a:rPr>
-                        <a:t>~210</a:t>
-                      </a:r>
-                      <a:endParaRPr lang="en-US" sz="1200" dirty="0">
-                        <a:latin typeface="Calibri" charset="0"/>
-                        <a:ea typeface="Calibri" charset="0"/>
-                        <a:cs typeface="Calibri" charset="0"/>
-                      </a:endParaRPr>
-                    </a:p>
-                  </a:txBody>
-                  <a:tcPr>
-                    <a:lnL w="6350" cap="flat" cmpd="sng" algn="ctr">
-                      <a:solidFill>
-                        <a:srgbClr val="D1D9E0"/>
-                      </a:solidFill>
-                      <a:prstDash val="solid"/>
-                      <a:round/>
-                      <a:headEnd type="none" w="med" len="med"/>
-                      <a:tailEnd type="none" w="med" len="med"/>
-                    </a:lnL>
-                    <a:lnR w="6350" cap="flat" cmpd="sng" algn="ctr">
-                      <a:solidFill>
-                        <a:srgbClr val="D1D9E0"/>
-                      </a:solidFill>
-                      <a:prstDash val="solid"/>
-                      <a:round/>
-                      <a:headEnd type="none" w="med" len="med"/>
-                      <a:tailEnd type="none" w="med" len="med"/>
-                    </a:lnR>
-                    <a:lnT w="6350" cap="flat" cmpd="sng" algn="ctr">
-                      <a:solidFill>
-                        <a:srgbClr val="D1D9E0"/>
-                      </a:solidFill>
-                      <a:prstDash val="solid"/>
-                      <a:round/>
-                      <a:headEnd type="none" w="med" len="med"/>
-                      <a:tailEnd type="none" w="med" len="med"/>
-                    </a:lnT>
-                    <a:lnB w="6350" cap="flat" cmpd="sng" algn="ctr">
-                      <a:solidFill>
-                        <a:srgbClr val="D1D9E0"/>
-                      </a:solidFill>
-                      <a:prstDash val="solid"/>
-                      <a:round/>
-                      <a:headEnd type="none" w="med" len="med"/>
-                      <a:tailEnd type="none" w="med" len="med"/>
-                    </a:lnB>
-                    <a:solidFill>
-                      <a:srgbClr val="E8F5E9"/>
-                    </a:solidFill>
-                  </a:tcPr>
-                </a:tc>
-                <a:tc>
-                  <a:txBody>
-                    <a:bodyPr/>
-                    <a:lstStyle/>
-                    <a:p>
-                      <a:pPr marL="0" indent="0">
-                        <a:buNone/>
-                      </a:pPr>
-                      <a:r>
-                        <a:rPr lang="en-US" sz="1200" b="1" dirty="0">
-                          <a:solidFill>
-                            <a:srgbClr val="000000"/>
-                          </a:solidFill>
-                          <a:latin typeface="Calibri" pitchFamily="34" charset="0"/>
-                          <a:ea typeface="Calibri" pitchFamily="34" charset="-122"/>
-                          <a:cs typeface="Calibri" pitchFamily="34" charset="-120"/>
-                        </a:rPr>
-                        <a:t>~0.82</a:t>
-                      </a:r>
-                      <a:endParaRPr lang="en-US" sz="1200" dirty="0">
-                        <a:latin typeface="Calibri" charset="0"/>
-                        <a:ea typeface="Calibri" charset="0"/>
-                        <a:cs typeface="Calibri" charset="0"/>
-                      </a:endParaRPr>
-                    </a:p>
-                  </a:txBody>
-                  <a:tcPr>
-                    <a:lnL w="6350" cap="flat" cmpd="sng" algn="ctr">
-                      <a:solidFill>
-                        <a:srgbClr val="D1D9E0"/>
-                      </a:solidFill>
-                      <a:prstDash val="solid"/>
-                      <a:round/>
-                      <a:headEnd type="none" w="med" len="med"/>
-                      <a:tailEnd type="none" w="med" len="med"/>
-                    </a:lnL>
-                    <a:lnR w="6350" cap="flat" cmpd="sng" algn="ctr">
-                      <a:solidFill>
-                        <a:srgbClr val="D1D9E0"/>
-                      </a:solidFill>
-                      <a:prstDash val="solid"/>
-                      <a:round/>
-                      <a:headEnd type="none" w="med" len="med"/>
-                      <a:tailEnd type="none" w="med" len="med"/>
-                    </a:lnR>
-                    <a:lnT w="6350" cap="flat" cmpd="sng" algn="ctr">
-                      <a:solidFill>
-                        <a:srgbClr val="D1D9E0"/>
-                      </a:solidFill>
-                      <a:prstDash val="solid"/>
-                      <a:round/>
-                      <a:headEnd type="none" w="med" len="med"/>
-                      <a:tailEnd type="none" w="med" len="med"/>
-                    </a:lnT>
-                    <a:lnB w="6350" cap="flat" cmpd="sng" algn="ctr">
-                      <a:solidFill>
-                        <a:srgbClr val="D1D9E0"/>
-                      </a:solidFill>
-                      <a:prstDash val="solid"/>
-                      <a:round/>
-                      <a:headEnd type="none" w="med" len="med"/>
-                      <a:tailEnd type="none" w="med" len="med"/>
-                    </a:lnB>
-                    <a:solidFill>
-                      <a:srgbClr val="E8F5E9"/>
-                    </a:solidFill>
-                  </a:tcPr>
-                </a:tc>
-                <a:tc>
-                  <a:txBody>
-                    <a:bodyPr/>
-                    <a:lstStyle/>
-                    <a:p>
-                      <a:pPr marL="0" indent="0">
-                        <a:buNone/>
-                      </a:pPr>
-                      <a:r>
-                        <a:rPr lang="en-US" sz="1200" b="1" dirty="0">
-                          <a:solidFill>
-                            <a:srgbClr val="0D7377"/>
-                          </a:solidFill>
-                          <a:latin typeface="Calibri" pitchFamily="34" charset="0"/>
-                          <a:ea typeface="Calibri" pitchFamily="34" charset="-122"/>
-                          <a:cs typeface="Calibri" pitchFamily="34" charset="-120"/>
-                        </a:rPr>
-                        <a:t>✅ Mejor modelo</a:t>
-                      </a:r>
-                      <a:endParaRPr lang="en-US" sz="1200" dirty="0">
-                        <a:latin typeface="Calibri" charset="0"/>
-                        <a:ea typeface="Calibri" charset="0"/>
-                        <a:cs typeface="Calibri" charset="0"/>
-                      </a:endParaRPr>
-                    </a:p>
-                  </a:txBody>
-                  <a:tcPr>
-                    <a:lnL w="6350" cap="flat" cmpd="sng" algn="ctr">
-                      <a:solidFill>
-                        <a:srgbClr val="D1D9E0"/>
-                      </a:solidFill>
-                      <a:prstDash val="solid"/>
-                      <a:round/>
-                      <a:headEnd type="none" w="med" len="med"/>
-                      <a:tailEnd type="none" w="med" len="med"/>
-                    </a:lnL>
-                    <a:lnR w="6350" cap="flat" cmpd="sng" algn="ctr">
-                      <a:solidFill>
-                        <a:srgbClr val="D1D9E0"/>
-                      </a:solidFill>
-                      <a:prstDash val="solid"/>
-                      <a:round/>
-                      <a:headEnd type="none" w="med" len="med"/>
-                      <a:tailEnd type="none" w="med" len="med"/>
-                    </a:lnR>
-                    <a:lnT w="6350" cap="flat" cmpd="sng" algn="ctr">
-                      <a:solidFill>
-                        <a:srgbClr val="D1D9E0"/>
-                      </a:solidFill>
-                      <a:prstDash val="solid"/>
-                      <a:round/>
-                      <a:headEnd type="none" w="med" len="med"/>
-                      <a:tailEnd type="none" w="med" len="med"/>
-                    </a:lnT>
-                    <a:lnB w="6350" cap="flat" cmpd="sng" algn="ctr">
-                      <a:solidFill>
-                        <a:srgbClr val="D1D9E0"/>
-                      </a:solidFill>
-                      <a:prstDash val="solid"/>
-                      <a:round/>
-                      <a:headEnd type="none" w="med" len="med"/>
-                      <a:tailEnd type="none" w="med" len="med"/>
-                    </a:lnB>
-                    <a:solidFill>
-                      <a:srgbClr val="E8F5E9"/>
-                    </a:solidFill>
-                  </a:tcPr>
-                </a:tc>
-                <a:extLst>
-                  <a:ext uri="{0D108BD9-81ED-4DB2-BD59-A6C34878D82A}">
-                    <a16:rowId xmlns:a16="http://schemas.microsoft.com/office/drawing/2014/main" val="10003"/>
-                  </a:ext>
-                </a:extLst>
-              </a:tr>
-            </a:tbl>
-          </a:graphicData>
-        </a:graphic>
-      </p:graphicFrame>
-      <p:sp>
-        <p:nvSpPr>
-          <p:cNvPr id="5" name="Text 2">
-            <a:extLst>
-              <a:ext uri="{FF2B5EF4-FFF2-40B4-BE49-F238E27FC236}">
-                <a16:creationId xmlns:a16="http://schemas.microsoft.com/office/drawing/2014/main" id="{2A3869A1-1200-775F-F1B5-801BA46787D8}"/>
-              </a:ext>
-            </a:extLst>
-          </p:cNvPr>
-          <p:cNvSpPr/>
-          <p:nvPr/>
-        </p:nvSpPr>
-        <p:spPr>
-          <a:xfrm>
-            <a:off x="457200" y="3063240"/>
-            <a:ext cx="8229600" cy="365760"/>
+            <a:endParaRPr lang="en-US" sz="5600" dirty="0"/>
+          </a:p>
+        </p:txBody>
+      </p:sp>
+      <p:sp>
+        <p:nvSpPr>
+          <p:cNvPr id="5" name="Text 3"/>
+          <p:cNvSpPr/>
+          <p:nvPr/>
+        </p:nvSpPr>
+        <p:spPr>
+          <a:xfrm>
+            <a:off x="457200" y="2286000"/>
+            <a:ext cx="8229600" cy="457200"/>
           </a:xfrm>
           <a:prstGeom prst="rect">
             <a:avLst/>
@@ -3607,40 +2202,34 @@
           <a:bodyPr wrap="square" rtlCol="0" anchor="ctr"/>
           <a:lstStyle/>
           <a:p>
-            <a:pPr marL="0" indent="0">
+            <a:pPr marL="0" indent="0" algn="ctr">
               <a:buNone/>
             </a:pPr>
             <a:r>
-              <a:rPr lang="en-US" sz="1400" b="1" dirty="0">
+              <a:rPr lang="en-US" sz="1800" dirty="0">
                 <a:solidFill>
-                  <a:srgbClr val="1A2744"/>
+                  <a:srgbClr val="C8EFEF"/>
                 </a:solidFill>
                 <a:latin typeface="Calibri" pitchFamily="34" charset="0"/>
                 <a:ea typeface="Calibri" pitchFamily="34" charset="-122"/>
                 <a:cs typeface="Calibri" pitchFamily="34" charset="-120"/>
               </a:rPr>
-              <a:t>Top Features — Random Forest</a:t>
+              <a:t>Análisis del Mercado Inmobiliario en Valencia</a:t>
             </a:r>
-            <a:endParaRPr lang="en-US" sz="1400" dirty="0"/>
-          </a:p>
-        </p:txBody>
-      </p:sp>
-      <p:sp>
-        <p:nvSpPr>
-          <p:cNvPr id="6" name="Text 3">
-            <a:extLst>
-              <a:ext uri="{FF2B5EF4-FFF2-40B4-BE49-F238E27FC236}">
-                <a16:creationId xmlns:a16="http://schemas.microsoft.com/office/drawing/2014/main" id="{2E05D144-4F72-0639-6186-A845F05FE00E}"/>
-              </a:ext>
-            </a:extLst>
-          </p:cNvPr>
-          <p:cNvSpPr/>
-          <p:nvPr/>
-        </p:nvSpPr>
-        <p:spPr>
-          <a:xfrm>
-            <a:off x="457200" y="3520440"/>
-            <a:ext cx="2011680" cy="246888"/>
+            <a:endParaRPr lang="en-US" sz="1800" dirty="0"/>
+          </a:p>
+        </p:txBody>
+      </p:sp>
+      <p:sp>
+        <p:nvSpPr>
+          <p:cNvPr id="6" name="Text 4"/>
+          <p:cNvSpPr/>
+          <p:nvPr/>
+        </p:nvSpPr>
+        <p:spPr>
+          <a:xfrm>
+            <a:off x="457200" y="2834640"/>
+            <a:ext cx="8229600" cy="365760"/>
           </a:xfrm>
           <a:prstGeom prst="rect">
             <a:avLst/>
@@ -3652,82 +2241,38 @@
           <a:bodyPr wrap="square" rtlCol="0" anchor="ctr"/>
           <a:lstStyle/>
           <a:p>
-            <a:pPr marL="0" indent="0">
+            <a:pPr marL="0" indent="0" algn="ctr">
               <a:buNone/>
             </a:pPr>
             <a:r>
-              <a:rPr lang="en-US" sz="1000" dirty="0">
+              <a:rPr lang="en-US" sz="1300" dirty="0">
                 <a:solidFill>
-                  <a:srgbClr val="1E293B"/>
+                  <a:srgbClr val="90D0D0"/>
                 </a:solidFill>
                 <a:latin typeface="Calibri" pitchFamily="34" charset="0"/>
                 <a:ea typeface="Calibri" pitchFamily="34" charset="-122"/>
                 <a:cs typeface="Calibri" pitchFamily="34" charset="-120"/>
               </a:rPr>
-              <a:t>Latitud / Longitud</a:t>
+              <a:t>EDA · Feature Engineering · Random Forest · Valencia 2025</a:t>
             </a:r>
-            <a:endParaRPr lang="en-US" sz="1000" dirty="0"/>
-          </a:p>
-        </p:txBody>
-      </p:sp>
-      <p:sp>
-        <p:nvSpPr>
-          <p:cNvPr id="7" name="Shape 4">
-            <a:extLst>
-              <a:ext uri="{FF2B5EF4-FFF2-40B4-BE49-F238E27FC236}">
-                <a16:creationId xmlns:a16="http://schemas.microsoft.com/office/drawing/2014/main" id="{1F05F4BF-7E7F-1C0B-B9D1-79B4C164EB7C}"/>
-              </a:ext>
-            </a:extLst>
-          </p:cNvPr>
-          <p:cNvSpPr/>
-          <p:nvPr/>
-        </p:nvSpPr>
-        <p:spPr>
-          <a:xfrm>
-            <a:off x="2514600" y="3557016"/>
-            <a:ext cx="2194560" cy="182880"/>
+            <a:endParaRPr lang="en-US" sz="1300" dirty="0"/>
+          </a:p>
+        </p:txBody>
+      </p:sp>
+      <p:sp>
+        <p:nvSpPr>
+          <p:cNvPr id="7" name="Text 5"/>
+          <p:cNvSpPr/>
+          <p:nvPr/>
+        </p:nvSpPr>
+        <p:spPr>
+          <a:xfrm>
+            <a:off x="457200" y="3931920"/>
+            <a:ext cx="8229600" cy="457200"/>
           </a:xfrm>
           <a:prstGeom prst="rect">
             <a:avLst/>
           </a:prstGeom>
-          <a:solidFill>
-            <a:srgbClr val="0D7377"/>
-          </a:solidFill>
-          <a:ln w="12700">
-            <a:solidFill>
-              <a:srgbClr val="0D7377"/>
-            </a:solidFill>
-            <a:prstDash val="solid"/>
-          </a:ln>
-        </p:spPr>
-        <p:txBody>
-          <a:bodyPr/>
-          <a:lstStyle/>
-          <a:p>
-            <a:endParaRPr lang="es-ES"/>
-          </a:p>
-        </p:txBody>
-      </p:sp>
-      <p:sp>
-        <p:nvSpPr>
-          <p:cNvPr id="4" name="Text 5">
-            <a:extLst>
-              <a:ext uri="{FF2B5EF4-FFF2-40B4-BE49-F238E27FC236}">
-                <a16:creationId xmlns:a16="http://schemas.microsoft.com/office/drawing/2014/main" id="{D177492D-4DDA-FEBB-295E-63D0B0E4CF83}"/>
-              </a:ext>
-            </a:extLst>
-          </p:cNvPr>
-          <p:cNvSpPr/>
-          <p:nvPr/>
-        </p:nvSpPr>
-        <p:spPr>
-          <a:xfrm>
-            <a:off x="4800600" y="3520440"/>
-            <a:ext cx="457200" cy="246888"/>
-          </a:xfrm>
-          <a:prstGeom prst="rect">
-            <a:avLst/>
-          </a:prstGeom>
           <a:noFill/>
           <a:ln/>
         </p:spPr>
@@ -3735,542 +2280,25 @@
           <a:bodyPr wrap="square" rtlCol="0" anchor="ctr"/>
           <a:lstStyle/>
           <a:p>
-            <a:pPr marL="0" indent="0">
+            <a:pPr marL="0" indent="0" algn="ctr">
               <a:buNone/>
             </a:pPr>
             <a:r>
-              <a:rPr lang="en-US" sz="1000" dirty="0">
+              <a:rPr lang="en-US" sz="1300" dirty="0">
                 <a:solidFill>
-                  <a:srgbClr val="64748B"/>
+                  <a:srgbClr val="14A5A9"/>
                 </a:solidFill>
                 <a:latin typeface="Calibri" pitchFamily="34" charset="0"/>
                 <a:ea typeface="Calibri" pitchFamily="34" charset="-122"/>
                 <a:cs typeface="Calibri" pitchFamily="34" charset="-120"/>
               </a:rPr>
-              <a:t>32%</a:t>
+              <a:t>github.com/Apriroca/ML_Prediccion_Vivienda_Valencia</a:t>
             </a:r>
-            <a:endParaRPr lang="en-US" sz="1000" dirty="0"/>
-          </a:p>
-        </p:txBody>
-      </p:sp>
-      <p:sp>
-        <p:nvSpPr>
-          <p:cNvPr id="9" name="Text 6">
-            <a:extLst>
-              <a:ext uri="{FF2B5EF4-FFF2-40B4-BE49-F238E27FC236}">
-                <a16:creationId xmlns:a16="http://schemas.microsoft.com/office/drawing/2014/main" id="{D33A4400-D1A0-29A0-64E5-FC7A26B218F6}"/>
-              </a:ext>
-            </a:extLst>
-          </p:cNvPr>
-          <p:cNvSpPr/>
-          <p:nvPr/>
-        </p:nvSpPr>
-        <p:spPr>
-          <a:xfrm>
-            <a:off x="457200" y="3813048"/>
-            <a:ext cx="2011680" cy="246888"/>
-          </a:xfrm>
-          <a:prstGeom prst="rect">
-            <a:avLst/>
-          </a:prstGeom>
-          <a:noFill/>
-          <a:ln/>
-        </p:spPr>
-        <p:txBody>
-          <a:bodyPr wrap="square" rtlCol="0" anchor="ctr"/>
-          <a:lstStyle/>
-          <a:p>
-            <a:pPr marL="0" indent="0">
-              <a:buNone/>
-            </a:pPr>
-            <a:r>
-              <a:rPr lang="en-US" sz="1000" dirty="0">
-                <a:solidFill>
-                  <a:srgbClr val="1E293B"/>
-                </a:solidFill>
-                <a:latin typeface="Calibri" pitchFamily="34" charset="0"/>
-                <a:ea typeface="Calibri" pitchFamily="34" charset="-122"/>
-                <a:cs typeface="Calibri" pitchFamily="34" charset="-120"/>
-              </a:rPr>
-              <a:t>Superficie</a:t>
-            </a:r>
-            <a:endParaRPr lang="en-US" sz="1000" dirty="0"/>
-          </a:p>
-        </p:txBody>
-      </p:sp>
-      <p:sp>
-        <p:nvSpPr>
-          <p:cNvPr id="10" name="Shape 7">
-            <a:extLst>
-              <a:ext uri="{FF2B5EF4-FFF2-40B4-BE49-F238E27FC236}">
-                <a16:creationId xmlns:a16="http://schemas.microsoft.com/office/drawing/2014/main" id="{B10DD300-F64A-FF19-8AD0-823AA6036979}"/>
-              </a:ext>
-            </a:extLst>
-          </p:cNvPr>
-          <p:cNvSpPr/>
-          <p:nvPr/>
-        </p:nvSpPr>
-        <p:spPr>
-          <a:xfrm>
-            <a:off x="2514600" y="3849624"/>
-            <a:ext cx="1714500" cy="182880"/>
-          </a:xfrm>
-          <a:prstGeom prst="rect">
-            <a:avLst/>
-          </a:prstGeom>
-          <a:solidFill>
-            <a:srgbClr val="0D7377"/>
-          </a:solidFill>
-          <a:ln w="12700">
-            <a:solidFill>
-              <a:srgbClr val="0D7377"/>
-            </a:solidFill>
-            <a:prstDash val="solid"/>
-          </a:ln>
-        </p:spPr>
-        <p:txBody>
-          <a:bodyPr/>
-          <a:lstStyle/>
-          <a:p>
-            <a:endParaRPr lang="es-ES"/>
-          </a:p>
-        </p:txBody>
-      </p:sp>
-      <p:sp>
-        <p:nvSpPr>
-          <p:cNvPr id="11" name="Text 8">
-            <a:extLst>
-              <a:ext uri="{FF2B5EF4-FFF2-40B4-BE49-F238E27FC236}">
-                <a16:creationId xmlns:a16="http://schemas.microsoft.com/office/drawing/2014/main" id="{23A689D9-1E10-1BF5-88BF-D3C0014F5F97}"/>
-              </a:ext>
-            </a:extLst>
-          </p:cNvPr>
-          <p:cNvSpPr/>
-          <p:nvPr/>
-        </p:nvSpPr>
-        <p:spPr>
-          <a:xfrm>
-            <a:off x="4320540" y="3813048"/>
-            <a:ext cx="457200" cy="246888"/>
-          </a:xfrm>
-          <a:prstGeom prst="rect">
-            <a:avLst/>
-          </a:prstGeom>
-          <a:noFill/>
-          <a:ln/>
-        </p:spPr>
-        <p:txBody>
-          <a:bodyPr wrap="square" rtlCol="0" anchor="ctr"/>
-          <a:lstStyle/>
-          <a:p>
-            <a:pPr marL="0" indent="0">
-              <a:buNone/>
-            </a:pPr>
-            <a:r>
-              <a:rPr lang="en-US" sz="1000" dirty="0">
-                <a:solidFill>
-                  <a:srgbClr val="64748B"/>
-                </a:solidFill>
-                <a:latin typeface="Calibri" pitchFamily="34" charset="0"/>
-                <a:ea typeface="Calibri" pitchFamily="34" charset="-122"/>
-                <a:cs typeface="Calibri" pitchFamily="34" charset="-120"/>
-              </a:rPr>
-              <a:t>25%</a:t>
-            </a:r>
-            <a:endParaRPr lang="en-US" sz="1000" dirty="0"/>
-          </a:p>
-        </p:txBody>
-      </p:sp>
-      <p:sp>
-        <p:nvSpPr>
-          <p:cNvPr id="12" name="Text 9">
-            <a:extLst>
-              <a:ext uri="{FF2B5EF4-FFF2-40B4-BE49-F238E27FC236}">
-                <a16:creationId xmlns:a16="http://schemas.microsoft.com/office/drawing/2014/main" id="{C14FCE1C-6641-4CB3-AFC9-04A41F1804FB}"/>
-              </a:ext>
-            </a:extLst>
-          </p:cNvPr>
-          <p:cNvSpPr/>
-          <p:nvPr/>
-        </p:nvSpPr>
-        <p:spPr>
-          <a:xfrm>
-            <a:off x="457200" y="4105656"/>
-            <a:ext cx="2011680" cy="246888"/>
-          </a:xfrm>
-          <a:prstGeom prst="rect">
-            <a:avLst/>
-          </a:prstGeom>
-          <a:noFill/>
-          <a:ln/>
-        </p:spPr>
-        <p:txBody>
-          <a:bodyPr wrap="square" rtlCol="0" anchor="ctr"/>
-          <a:lstStyle/>
-          <a:p>
-            <a:pPr marL="0" indent="0">
-              <a:buNone/>
-            </a:pPr>
-            <a:r>
-              <a:rPr lang="en-US" sz="1000" dirty="0">
-                <a:solidFill>
-                  <a:srgbClr val="1E293B"/>
-                </a:solidFill>
-                <a:latin typeface="Calibri" pitchFamily="34" charset="0"/>
-                <a:ea typeface="Calibri" pitchFamily="34" charset="-122"/>
-                <a:cs typeface="Calibri" pitchFamily="34" charset="-120"/>
-              </a:rPr>
-              <a:t>Barrio (OHE)</a:t>
-            </a:r>
-            <a:endParaRPr lang="en-US" sz="1000" dirty="0"/>
-          </a:p>
-        </p:txBody>
-      </p:sp>
-      <p:sp>
-        <p:nvSpPr>
-          <p:cNvPr id="13" name="Shape 10">
-            <a:extLst>
-              <a:ext uri="{FF2B5EF4-FFF2-40B4-BE49-F238E27FC236}">
-                <a16:creationId xmlns:a16="http://schemas.microsoft.com/office/drawing/2014/main" id="{A415AD2F-B4D5-D59E-0EFD-07FA93AC01A2}"/>
-              </a:ext>
-            </a:extLst>
-          </p:cNvPr>
-          <p:cNvSpPr/>
-          <p:nvPr/>
-        </p:nvSpPr>
-        <p:spPr>
-          <a:xfrm>
-            <a:off x="2514600" y="4142232"/>
-            <a:ext cx="1234440" cy="182880"/>
-          </a:xfrm>
-          <a:prstGeom prst="rect">
-            <a:avLst/>
-          </a:prstGeom>
-          <a:solidFill>
-            <a:srgbClr val="E07B39"/>
-          </a:solidFill>
-          <a:ln w="12700">
-            <a:solidFill>
-              <a:srgbClr val="E07B39"/>
-            </a:solidFill>
-            <a:prstDash val="solid"/>
-          </a:ln>
-        </p:spPr>
-        <p:txBody>
-          <a:bodyPr/>
-          <a:lstStyle/>
-          <a:p>
-            <a:endParaRPr lang="es-ES"/>
-          </a:p>
-        </p:txBody>
-      </p:sp>
-      <p:sp>
-        <p:nvSpPr>
-          <p:cNvPr id="14" name="Text 11">
-            <a:extLst>
-              <a:ext uri="{FF2B5EF4-FFF2-40B4-BE49-F238E27FC236}">
-                <a16:creationId xmlns:a16="http://schemas.microsoft.com/office/drawing/2014/main" id="{1308897B-42D8-92D3-A6DB-4C453DE53073}"/>
-              </a:ext>
-            </a:extLst>
-          </p:cNvPr>
-          <p:cNvSpPr/>
-          <p:nvPr/>
-        </p:nvSpPr>
-        <p:spPr>
-          <a:xfrm>
-            <a:off x="3840480" y="4105656"/>
-            <a:ext cx="457200" cy="246888"/>
-          </a:xfrm>
-          <a:prstGeom prst="rect">
-            <a:avLst/>
-          </a:prstGeom>
-          <a:noFill/>
-          <a:ln/>
-        </p:spPr>
-        <p:txBody>
-          <a:bodyPr wrap="square" rtlCol="0" anchor="ctr"/>
-          <a:lstStyle/>
-          <a:p>
-            <a:pPr marL="0" indent="0">
-              <a:buNone/>
-            </a:pPr>
-            <a:r>
-              <a:rPr lang="en-US" sz="1000" dirty="0">
-                <a:solidFill>
-                  <a:srgbClr val="64748B"/>
-                </a:solidFill>
-                <a:latin typeface="Calibri" pitchFamily="34" charset="0"/>
-                <a:ea typeface="Calibri" pitchFamily="34" charset="-122"/>
-                <a:cs typeface="Calibri" pitchFamily="34" charset="-120"/>
-              </a:rPr>
-              <a:t>18%</a:t>
-            </a:r>
-            <a:endParaRPr lang="en-US" sz="1000" dirty="0"/>
-          </a:p>
-        </p:txBody>
-      </p:sp>
-      <p:sp>
-        <p:nvSpPr>
-          <p:cNvPr id="15" name="Text 12">
-            <a:extLst>
-              <a:ext uri="{FF2B5EF4-FFF2-40B4-BE49-F238E27FC236}">
-                <a16:creationId xmlns:a16="http://schemas.microsoft.com/office/drawing/2014/main" id="{D708B6BB-9713-6A9A-7EDB-C607C554A94B}"/>
-              </a:ext>
-            </a:extLst>
-          </p:cNvPr>
-          <p:cNvSpPr/>
-          <p:nvPr/>
-        </p:nvSpPr>
-        <p:spPr>
-          <a:xfrm>
-            <a:off x="457200" y="4398264"/>
-            <a:ext cx="2011680" cy="246888"/>
-          </a:xfrm>
-          <a:prstGeom prst="rect">
-            <a:avLst/>
-          </a:prstGeom>
-          <a:noFill/>
-          <a:ln/>
-        </p:spPr>
-        <p:txBody>
-          <a:bodyPr wrap="square" rtlCol="0" anchor="ctr"/>
-          <a:lstStyle/>
-          <a:p>
-            <a:pPr marL="0" indent="0">
-              <a:buNone/>
-            </a:pPr>
-            <a:r>
-              <a:rPr lang="en-US" sz="1000" dirty="0">
-                <a:solidFill>
-                  <a:srgbClr val="1E293B"/>
-                </a:solidFill>
-                <a:latin typeface="Calibri" pitchFamily="34" charset="0"/>
-                <a:ea typeface="Calibri" pitchFamily="34" charset="-122"/>
-                <a:cs typeface="Calibri" pitchFamily="34" charset="-120"/>
-              </a:rPr>
-              <a:t>Baños</a:t>
-            </a:r>
-            <a:endParaRPr lang="en-US" sz="1000" dirty="0"/>
-          </a:p>
-        </p:txBody>
-      </p:sp>
-      <p:sp>
-        <p:nvSpPr>
-          <p:cNvPr id="16" name="Shape 13">
-            <a:extLst>
-              <a:ext uri="{FF2B5EF4-FFF2-40B4-BE49-F238E27FC236}">
-                <a16:creationId xmlns:a16="http://schemas.microsoft.com/office/drawing/2014/main" id="{561C803A-DF42-8F55-AEBA-0C9AFEA86541}"/>
-              </a:ext>
-            </a:extLst>
-          </p:cNvPr>
-          <p:cNvSpPr/>
-          <p:nvPr/>
-        </p:nvSpPr>
-        <p:spPr>
-          <a:xfrm>
-            <a:off x="2514600" y="4434840"/>
-            <a:ext cx="822960" cy="182880"/>
-          </a:xfrm>
-          <a:prstGeom prst="rect">
-            <a:avLst/>
-          </a:prstGeom>
-          <a:solidFill>
-            <a:srgbClr val="E07B39"/>
-          </a:solidFill>
-          <a:ln w="12700">
-            <a:solidFill>
-              <a:srgbClr val="E07B39"/>
-            </a:solidFill>
-            <a:prstDash val="solid"/>
-          </a:ln>
-        </p:spPr>
-        <p:txBody>
-          <a:bodyPr/>
-          <a:lstStyle/>
-          <a:p>
-            <a:endParaRPr lang="es-ES"/>
-          </a:p>
-        </p:txBody>
-      </p:sp>
-      <p:sp>
-        <p:nvSpPr>
-          <p:cNvPr id="17" name="Text 14">
-            <a:extLst>
-              <a:ext uri="{FF2B5EF4-FFF2-40B4-BE49-F238E27FC236}">
-                <a16:creationId xmlns:a16="http://schemas.microsoft.com/office/drawing/2014/main" id="{A464375A-CDB3-3DE6-5646-E64CFF1B63D5}"/>
-              </a:ext>
-            </a:extLst>
-          </p:cNvPr>
-          <p:cNvSpPr/>
-          <p:nvPr/>
-        </p:nvSpPr>
-        <p:spPr>
-          <a:xfrm>
-            <a:off x="3429000" y="4398264"/>
-            <a:ext cx="457200" cy="246888"/>
-          </a:xfrm>
-          <a:prstGeom prst="rect">
-            <a:avLst/>
-          </a:prstGeom>
-          <a:noFill/>
-          <a:ln/>
-        </p:spPr>
-        <p:txBody>
-          <a:bodyPr wrap="square" rtlCol="0" anchor="ctr"/>
-          <a:lstStyle/>
-          <a:p>
-            <a:pPr marL="0" indent="0">
-              <a:buNone/>
-            </a:pPr>
-            <a:r>
-              <a:rPr lang="en-US" sz="1000" dirty="0">
-                <a:solidFill>
-                  <a:srgbClr val="64748B"/>
-                </a:solidFill>
-                <a:latin typeface="Calibri" pitchFamily="34" charset="0"/>
-                <a:ea typeface="Calibri" pitchFamily="34" charset="-122"/>
-                <a:cs typeface="Calibri" pitchFamily="34" charset="-120"/>
-              </a:rPr>
-              <a:t>12%</a:t>
-            </a:r>
-            <a:endParaRPr lang="en-US" sz="1000" dirty="0"/>
-          </a:p>
-        </p:txBody>
-      </p:sp>
-      <p:sp>
-        <p:nvSpPr>
-          <p:cNvPr id="18" name="Text 15">
-            <a:extLst>
-              <a:ext uri="{FF2B5EF4-FFF2-40B4-BE49-F238E27FC236}">
-                <a16:creationId xmlns:a16="http://schemas.microsoft.com/office/drawing/2014/main" id="{AE95EA2F-BF99-0BB8-608C-FB0AE3187FD5}"/>
-              </a:ext>
-            </a:extLst>
-          </p:cNvPr>
-          <p:cNvSpPr/>
-          <p:nvPr/>
-        </p:nvSpPr>
-        <p:spPr>
-          <a:xfrm>
-            <a:off x="457200" y="4690872"/>
-            <a:ext cx="2011680" cy="246888"/>
-          </a:xfrm>
-          <a:prstGeom prst="rect">
-            <a:avLst/>
-          </a:prstGeom>
-          <a:noFill/>
-          <a:ln/>
-        </p:spPr>
-        <p:txBody>
-          <a:bodyPr wrap="square" rtlCol="0" anchor="ctr"/>
-          <a:lstStyle/>
-          <a:p>
-            <a:pPr marL="0" indent="0">
-              <a:buNone/>
-            </a:pPr>
-            <a:r>
-              <a:rPr lang="en-US" sz="1000" dirty="0">
-                <a:solidFill>
-                  <a:srgbClr val="1E293B"/>
-                </a:solidFill>
-                <a:latin typeface="Calibri" pitchFamily="34" charset="0"/>
-                <a:ea typeface="Calibri" pitchFamily="34" charset="-122"/>
-                <a:cs typeface="Calibri" pitchFamily="34" charset="-120"/>
-              </a:rPr>
-              <a:t>Dormitorios</a:t>
-            </a:r>
-            <a:endParaRPr lang="en-US" sz="1000" dirty="0"/>
-          </a:p>
-        </p:txBody>
-      </p:sp>
-      <p:sp>
-        <p:nvSpPr>
-          <p:cNvPr id="19" name="Shape 16">
-            <a:extLst>
-              <a:ext uri="{FF2B5EF4-FFF2-40B4-BE49-F238E27FC236}">
-                <a16:creationId xmlns:a16="http://schemas.microsoft.com/office/drawing/2014/main" id="{0AFE9B3E-5430-DE6F-8CA7-F292F453D2EC}"/>
-              </a:ext>
-            </a:extLst>
-          </p:cNvPr>
-          <p:cNvSpPr/>
-          <p:nvPr/>
-        </p:nvSpPr>
-        <p:spPr>
-          <a:xfrm>
-            <a:off x="2514600" y="4727448"/>
-            <a:ext cx="548640" cy="182880"/>
-          </a:xfrm>
-          <a:prstGeom prst="rect">
-            <a:avLst/>
-          </a:prstGeom>
-          <a:solidFill>
-            <a:srgbClr val="64748B"/>
-          </a:solidFill>
-          <a:ln w="12700">
-            <a:solidFill>
-              <a:srgbClr val="64748B"/>
-            </a:solidFill>
-            <a:prstDash val="solid"/>
-          </a:ln>
-        </p:spPr>
-        <p:txBody>
-          <a:bodyPr/>
-          <a:lstStyle/>
-          <a:p>
-            <a:endParaRPr lang="es-ES"/>
-          </a:p>
-        </p:txBody>
-      </p:sp>
-      <p:sp>
-        <p:nvSpPr>
-          <p:cNvPr id="20" name="Text 17">
-            <a:extLst>
-              <a:ext uri="{FF2B5EF4-FFF2-40B4-BE49-F238E27FC236}">
-                <a16:creationId xmlns:a16="http://schemas.microsoft.com/office/drawing/2014/main" id="{D13B263F-6F51-2D54-A86F-39C639FAF93F}"/>
-              </a:ext>
-            </a:extLst>
-          </p:cNvPr>
-          <p:cNvSpPr/>
-          <p:nvPr/>
-        </p:nvSpPr>
-        <p:spPr>
-          <a:xfrm>
-            <a:off x="3154680" y="4690872"/>
-            <a:ext cx="457200" cy="246888"/>
-          </a:xfrm>
-          <a:prstGeom prst="rect">
-            <a:avLst/>
-          </a:prstGeom>
-          <a:noFill/>
-          <a:ln/>
-        </p:spPr>
-        <p:txBody>
-          <a:bodyPr wrap="square" rtlCol="0" anchor="ctr"/>
-          <a:lstStyle/>
-          <a:p>
-            <a:pPr marL="0" indent="0">
-              <a:buNone/>
-            </a:pPr>
-            <a:r>
-              <a:rPr lang="en-US" sz="1000" dirty="0">
-                <a:solidFill>
-                  <a:srgbClr val="64748B"/>
-                </a:solidFill>
-                <a:latin typeface="Calibri" pitchFamily="34" charset="0"/>
-                <a:ea typeface="Calibri" pitchFamily="34" charset="-122"/>
-                <a:cs typeface="Calibri" pitchFamily="34" charset="-120"/>
-              </a:rPr>
-              <a:t>8%</a:t>
-            </a:r>
-            <a:endParaRPr lang="en-US" sz="1000" dirty="0"/>
+            <a:endParaRPr lang="en-US" sz="1300" dirty="0"/>
           </a:p>
         </p:txBody>
       </p:sp>
     </p:spTree>
-    <p:extLst>
-      <p:ext uri="{BB962C8B-B14F-4D97-AF65-F5344CB8AC3E}">
-        <p14:creationId xmlns:p14="http://schemas.microsoft.com/office/powerpoint/2010/main" val="3707589325"/>
-      </p:ext>
-    </p:extLst>
   </p:cSld>
   <p:clrMapOvr>
     <a:masterClrMapping/>
@@ -4564,13 +2592,41 @@
       </p:sp>
       <p:sp>
         <p:nvSpPr>
-          <p:cNvPr id="9" name="Shape 7"/>
-          <p:cNvSpPr/>
-          <p:nvPr/>
-        </p:nvSpPr>
-        <p:spPr>
-          <a:xfrm>
-            <a:off x="365760" y="2423160"/>
+          <p:cNvPr id="12" name="Text 10"/>
+          <p:cNvSpPr/>
+          <p:nvPr/>
+        </p:nvSpPr>
+        <p:spPr>
+          <a:xfrm>
+            <a:off x="502920" y="2788920"/>
+            <a:ext cx="3840480" cy="320040"/>
+          </a:xfrm>
+          <a:prstGeom prst="rect">
+            <a:avLst/>
+          </a:prstGeom>
+          <a:noFill/>
+          <a:ln/>
+        </p:spPr>
+        <p:txBody>
+          <a:bodyPr wrap="square" rtlCol="0" anchor="ctr"/>
+          <a:lstStyle/>
+          <a:p>
+            <a:pPr marL="0" indent="0">
+              <a:buNone/>
+            </a:pPr>
+            <a:endParaRPr lang="en-US" sz="1300" dirty="0"/>
+          </a:p>
+        </p:txBody>
+      </p:sp>
+      <p:sp>
+        <p:nvSpPr>
+          <p:cNvPr id="14" name="Shape 12"/>
+          <p:cNvSpPr/>
+          <p:nvPr/>
+        </p:nvSpPr>
+        <p:spPr>
+          <a:xfrm>
+            <a:off x="320040" y="2427463"/>
             <a:ext cx="4114800" cy="1005840"/>
           </a:xfrm>
           <a:prstGeom prst="rect">
@@ -4597,19 +2653,19 @@
           <a:bodyPr/>
           <a:lstStyle/>
           <a:p>
-            <a:endParaRPr lang="es-ES"/>
-          </a:p>
-        </p:txBody>
-      </p:sp>
-      <p:sp>
-        <p:nvSpPr>
-          <p:cNvPr id="10" name="Shape 8"/>
-          <p:cNvSpPr/>
-          <p:nvPr/>
-        </p:nvSpPr>
-        <p:spPr>
-          <a:xfrm>
-            <a:off x="365760" y="2423160"/>
+            <a:endParaRPr lang="es-ES" dirty="0"/>
+          </a:p>
+        </p:txBody>
+      </p:sp>
+      <p:sp>
+        <p:nvSpPr>
+          <p:cNvPr id="15" name="Shape 13"/>
+          <p:cNvSpPr/>
+          <p:nvPr/>
+        </p:nvSpPr>
+        <p:spPr>
+          <a:xfrm>
+            <a:off x="365760" y="2427463"/>
             <a:ext cx="73152" cy="1005840"/>
           </a:xfrm>
           <a:prstGeom prst="rect">
@@ -4629,19 +2685,19 @@
           <a:bodyPr/>
           <a:lstStyle/>
           <a:p>
-            <a:endParaRPr lang="es-ES"/>
-          </a:p>
-        </p:txBody>
-      </p:sp>
-      <p:sp>
-        <p:nvSpPr>
-          <p:cNvPr id="11" name="Text 9"/>
-          <p:cNvSpPr/>
-          <p:nvPr/>
-        </p:nvSpPr>
-        <p:spPr>
-          <a:xfrm>
-            <a:off x="502920" y="2468880"/>
+            <a:endParaRPr lang="es-ES" dirty="0"/>
+          </a:p>
+        </p:txBody>
+      </p:sp>
+      <p:sp>
+        <p:nvSpPr>
+          <p:cNvPr id="16" name="Text 14"/>
+          <p:cNvSpPr/>
+          <p:nvPr/>
+        </p:nvSpPr>
+        <p:spPr>
+          <a:xfrm>
+            <a:off x="502920" y="2473183"/>
             <a:ext cx="457200" cy="365760"/>
           </a:xfrm>
           <a:prstGeom prst="rect">
@@ -4674,13 +2730,13 @@
       </p:sp>
       <p:sp>
         <p:nvSpPr>
-          <p:cNvPr id="12" name="Text 10"/>
-          <p:cNvSpPr/>
-          <p:nvPr/>
-        </p:nvSpPr>
-        <p:spPr>
-          <a:xfrm>
-            <a:off x="502920" y="2788920"/>
+          <p:cNvPr id="17" name="Text 15"/>
+          <p:cNvSpPr/>
+          <p:nvPr/>
+        </p:nvSpPr>
+        <p:spPr>
+          <a:xfrm>
+            <a:off x="502920" y="2793223"/>
             <a:ext cx="3840480" cy="320040"/>
           </a:xfrm>
           <a:prstGeom prst="rect">
@@ -4705,7 +2761,7 @@
                 <a:ea typeface="Calibri" pitchFamily="34" charset="-122"/>
                 <a:cs typeface="Calibri" pitchFamily="34" charset="-120"/>
               </a:rPr>
-              <a:t>Los Datos</a:t>
+              <a:t>EDA — Análisis Exploratorio</a:t>
             </a:r>
             <a:endParaRPr lang="en-US" sz="1300" dirty="0"/>
           </a:p>
@@ -4713,13 +2769,13 @@
       </p:sp>
       <p:sp>
         <p:nvSpPr>
-          <p:cNvPr id="13" name="Text 11"/>
-          <p:cNvSpPr/>
-          <p:nvPr/>
-        </p:nvSpPr>
-        <p:spPr>
-          <a:xfrm>
-            <a:off x="502920" y="3081528"/>
+          <p:cNvPr id="18" name="Text 16"/>
+          <p:cNvSpPr/>
+          <p:nvPr/>
+        </p:nvSpPr>
+        <p:spPr>
+          <a:xfrm>
+            <a:off x="502920" y="3085831"/>
             <a:ext cx="3840480" cy="274320"/>
           </a:xfrm>
           <a:prstGeom prst="rect">
@@ -4744,7 +2800,7 @@
                 <a:ea typeface="Calibri" pitchFamily="34" charset="-122"/>
                 <a:cs typeface="Calibri" pitchFamily="34" charset="-120"/>
               </a:rPr>
-              <a:t>Fuentes, variables y estructura del dataset (24.000 filas)</a:t>
+              <a:t>Distribuciones, outliers, correlaciones y mapas</a:t>
             </a:r>
             <a:endParaRPr lang="en-US" sz="950" dirty="0"/>
           </a:p>
@@ -4752,13 +2808,13 @@
       </p:sp>
       <p:sp>
         <p:nvSpPr>
-          <p:cNvPr id="14" name="Shape 12"/>
-          <p:cNvSpPr/>
-          <p:nvPr/>
-        </p:nvSpPr>
-        <p:spPr>
-          <a:xfrm>
-            <a:off x="365760" y="3657600"/>
+          <p:cNvPr id="19" name="Shape 17"/>
+          <p:cNvSpPr/>
+          <p:nvPr/>
+        </p:nvSpPr>
+        <p:spPr>
+          <a:xfrm>
+            <a:off x="365760" y="3666206"/>
             <a:ext cx="4114800" cy="1005840"/>
           </a:xfrm>
           <a:prstGeom prst="rect">
@@ -4791,13 +2847,13 @@
       </p:sp>
       <p:sp>
         <p:nvSpPr>
-          <p:cNvPr id="15" name="Shape 13"/>
-          <p:cNvSpPr/>
-          <p:nvPr/>
-        </p:nvSpPr>
-        <p:spPr>
-          <a:xfrm>
-            <a:off x="365760" y="3657600"/>
+          <p:cNvPr id="20" name="Shape 18"/>
+          <p:cNvSpPr/>
+          <p:nvPr/>
+        </p:nvSpPr>
+        <p:spPr>
+          <a:xfrm>
+            <a:off x="365760" y="3666206"/>
             <a:ext cx="73152" cy="1005840"/>
           </a:xfrm>
           <a:prstGeom prst="rect">
@@ -4823,13 +2879,13 @@
       </p:sp>
       <p:sp>
         <p:nvSpPr>
-          <p:cNvPr id="16" name="Text 14"/>
-          <p:cNvSpPr/>
-          <p:nvPr/>
-        </p:nvSpPr>
-        <p:spPr>
-          <a:xfrm>
-            <a:off x="502920" y="3703320"/>
+          <p:cNvPr id="21" name="Text 19"/>
+          <p:cNvSpPr/>
+          <p:nvPr/>
+        </p:nvSpPr>
+        <p:spPr>
+          <a:xfrm>
+            <a:off x="502920" y="3711926"/>
             <a:ext cx="457200" cy="365760"/>
           </a:xfrm>
           <a:prstGeom prst="rect">
@@ -4862,13 +2918,13 @@
       </p:sp>
       <p:sp>
         <p:nvSpPr>
-          <p:cNvPr id="17" name="Text 15"/>
-          <p:cNvSpPr/>
-          <p:nvPr/>
-        </p:nvSpPr>
-        <p:spPr>
-          <a:xfrm>
-            <a:off x="502920" y="4023360"/>
+          <p:cNvPr id="22" name="Text 20"/>
+          <p:cNvSpPr/>
+          <p:nvPr/>
+        </p:nvSpPr>
+        <p:spPr>
+          <a:xfrm>
+            <a:off x="502920" y="4031966"/>
             <a:ext cx="3840480" cy="320040"/>
           </a:xfrm>
           <a:prstGeom prst="rect">
@@ -4890,10 +2946,9 @@
                   <a:srgbClr val="1E293B"/>
                 </a:solidFill>
                 <a:latin typeface="Calibri" pitchFamily="34" charset="0"/>
-                <a:ea typeface="Calibri" pitchFamily="34" charset="-122"/>
                 <a:cs typeface="Calibri" pitchFamily="34" charset="-120"/>
               </a:rPr>
-              <a:t>EDA — Análisis Exploratorio</a:t>
+              <a:t>Pipeline de Machine Learning</a:t>
             </a:r>
             <a:endParaRPr lang="en-US" sz="1300" dirty="0"/>
           </a:p>
@@ -4901,13 +2956,13 @@
       </p:sp>
       <p:sp>
         <p:nvSpPr>
-          <p:cNvPr id="18" name="Text 16"/>
-          <p:cNvSpPr/>
-          <p:nvPr/>
-        </p:nvSpPr>
-        <p:spPr>
-          <a:xfrm>
-            <a:off x="502920" y="4315968"/>
+          <p:cNvPr id="23" name="Text 21"/>
+          <p:cNvSpPr/>
+          <p:nvPr/>
+        </p:nvSpPr>
+        <p:spPr>
+          <a:xfrm>
+            <a:off x="502920" y="4324574"/>
             <a:ext cx="3840480" cy="274320"/>
           </a:xfrm>
           <a:prstGeom prst="rect">
@@ -4932,7 +2987,7 @@
                 <a:ea typeface="Calibri" pitchFamily="34" charset="-122"/>
                 <a:cs typeface="Calibri" pitchFamily="34" charset="-120"/>
               </a:rPr>
-              <a:t>Distribuciones, outliers, correlaciones y mapas</a:t>
+              <a:t>Regresión Lineal, Árbol de Decisión y Random Forest</a:t>
             </a:r>
             <a:endParaRPr lang="en-US" sz="950" dirty="0"/>
           </a:p>
@@ -4940,13 +2995,13 @@
       </p:sp>
       <p:sp>
         <p:nvSpPr>
-          <p:cNvPr id="19" name="Shape 17"/>
-          <p:cNvSpPr/>
-          <p:nvPr/>
-        </p:nvSpPr>
-        <p:spPr>
-          <a:xfrm>
-            <a:off x="4846320" y="1188720"/>
+          <p:cNvPr id="24" name="Shape 22"/>
+          <p:cNvSpPr/>
+          <p:nvPr/>
+        </p:nvSpPr>
+        <p:spPr>
+          <a:xfrm>
+            <a:off x="4765638" y="1188720"/>
             <a:ext cx="4114800" cy="1005840"/>
           </a:xfrm>
           <a:prstGeom prst="rect">
@@ -4979,13 +3034,13 @@
       </p:sp>
       <p:sp>
         <p:nvSpPr>
-          <p:cNvPr id="20" name="Shape 18"/>
-          <p:cNvSpPr/>
-          <p:nvPr/>
-        </p:nvSpPr>
-        <p:spPr>
-          <a:xfrm>
-            <a:off x="4846320" y="1188720"/>
+          <p:cNvPr id="25" name="Shape 23"/>
+          <p:cNvSpPr/>
+          <p:nvPr/>
+        </p:nvSpPr>
+        <p:spPr>
+          <a:xfrm>
+            <a:off x="4765638" y="1188720"/>
             <a:ext cx="73152" cy="1005840"/>
           </a:xfrm>
           <a:prstGeom prst="rect">
@@ -5011,13 +3066,13 @@
       </p:sp>
       <p:sp>
         <p:nvSpPr>
-          <p:cNvPr id="21" name="Text 19"/>
-          <p:cNvSpPr/>
-          <p:nvPr/>
-        </p:nvSpPr>
-        <p:spPr>
-          <a:xfrm>
-            <a:off x="4983480" y="1234440"/>
+          <p:cNvPr id="26" name="Text 24"/>
+          <p:cNvSpPr/>
+          <p:nvPr/>
+        </p:nvSpPr>
+        <p:spPr>
+          <a:xfrm>
+            <a:off x="4902798" y="1234440"/>
             <a:ext cx="457200" cy="365760"/>
           </a:xfrm>
           <a:prstGeom prst="rect">
@@ -5042,7 +3097,7 @@
                 <a:ea typeface="Calibri" pitchFamily="34" charset="-122"/>
                 <a:cs typeface="Calibri" pitchFamily="34" charset="-120"/>
               </a:rPr>
-              <a:t>04</a:t>
+              <a:t>05</a:t>
             </a:r>
             <a:endParaRPr lang="en-US" sz="2000" dirty="0"/>
           </a:p>
@@ -5050,13 +3105,13 @@
       </p:sp>
       <p:sp>
         <p:nvSpPr>
-          <p:cNvPr id="22" name="Text 20"/>
-          <p:cNvSpPr/>
-          <p:nvPr/>
-        </p:nvSpPr>
-        <p:spPr>
-          <a:xfrm>
-            <a:off x="4983480" y="1554480"/>
+          <p:cNvPr id="27" name="Text 25"/>
+          <p:cNvSpPr/>
+          <p:nvPr/>
+        </p:nvSpPr>
+        <p:spPr>
+          <a:xfrm>
+            <a:off x="4902798" y="1554480"/>
             <a:ext cx="3840480" cy="320040"/>
           </a:xfrm>
           <a:prstGeom prst="rect">
@@ -5081,7 +3136,7 @@
                 <a:ea typeface="Calibri" pitchFamily="34" charset="-122"/>
                 <a:cs typeface="Calibri" pitchFamily="34" charset="-120"/>
               </a:rPr>
-              <a:t>Modelado ML</a:t>
+              <a:t>Resultados y Métricas</a:t>
             </a:r>
             <a:endParaRPr lang="en-US" sz="1300" dirty="0"/>
           </a:p>
@@ -5089,13 +3144,13 @@
       </p:sp>
       <p:sp>
         <p:nvSpPr>
-          <p:cNvPr id="23" name="Text 21"/>
-          <p:cNvSpPr/>
-          <p:nvPr/>
-        </p:nvSpPr>
-        <p:spPr>
-          <a:xfrm>
-            <a:off x="4983480" y="1847088"/>
+          <p:cNvPr id="28" name="Text 26"/>
+          <p:cNvSpPr/>
+          <p:nvPr/>
+        </p:nvSpPr>
+        <p:spPr>
+          <a:xfrm>
+            <a:off x="4902798" y="1847088"/>
             <a:ext cx="3840480" cy="274320"/>
           </a:xfrm>
           <a:prstGeom prst="rect">
@@ -5120,7 +3175,7 @@
                 <a:ea typeface="Calibri" pitchFamily="34" charset="-122"/>
                 <a:cs typeface="Calibri" pitchFamily="34" charset="-120"/>
               </a:rPr>
-              <a:t>Regresión Lineal, Árbol de Decisión y Random Forest</a:t>
+              <a:t>RMSE, MAE, R² y comparativa de modelos</a:t>
             </a:r>
             <a:endParaRPr lang="en-US" sz="950" dirty="0"/>
           </a:p>
@@ -5128,13 +3183,13 @@
       </p:sp>
       <p:sp>
         <p:nvSpPr>
-          <p:cNvPr id="24" name="Shape 22"/>
-          <p:cNvSpPr/>
-          <p:nvPr/>
-        </p:nvSpPr>
-        <p:spPr>
-          <a:xfrm>
-            <a:off x="4846320" y="2423160"/>
+          <p:cNvPr id="29" name="Shape 27"/>
+          <p:cNvSpPr/>
+          <p:nvPr/>
+        </p:nvSpPr>
+        <p:spPr>
+          <a:xfrm>
+            <a:off x="4765638" y="2423160"/>
             <a:ext cx="4114800" cy="1005840"/>
           </a:xfrm>
           <a:prstGeom prst="rect">
@@ -5167,13 +3222,13 @@
       </p:sp>
       <p:sp>
         <p:nvSpPr>
-          <p:cNvPr id="25" name="Shape 23"/>
-          <p:cNvSpPr/>
-          <p:nvPr/>
-        </p:nvSpPr>
-        <p:spPr>
-          <a:xfrm>
-            <a:off x="4846320" y="2423160"/>
+          <p:cNvPr id="30" name="Shape 28"/>
+          <p:cNvSpPr/>
+          <p:nvPr/>
+        </p:nvSpPr>
+        <p:spPr>
+          <a:xfrm>
+            <a:off x="4765638" y="2423160"/>
             <a:ext cx="73152" cy="1005840"/>
           </a:xfrm>
           <a:prstGeom prst="rect">
@@ -5199,13 +3254,13 @@
       </p:sp>
       <p:sp>
         <p:nvSpPr>
-          <p:cNvPr id="26" name="Text 24"/>
-          <p:cNvSpPr/>
-          <p:nvPr/>
-        </p:nvSpPr>
-        <p:spPr>
-          <a:xfrm>
-            <a:off x="4983480" y="2468880"/>
+          <p:cNvPr id="31" name="Text 29"/>
+          <p:cNvSpPr/>
+          <p:nvPr/>
+        </p:nvSpPr>
+        <p:spPr>
+          <a:xfrm>
+            <a:off x="4902798" y="2468880"/>
             <a:ext cx="457200" cy="365760"/>
           </a:xfrm>
           <a:prstGeom prst="rect">
@@ -5230,7 +3285,7 @@
                 <a:ea typeface="Calibri" pitchFamily="34" charset="-122"/>
                 <a:cs typeface="Calibri" pitchFamily="34" charset="-120"/>
               </a:rPr>
-              <a:t>05</a:t>
+              <a:t>06</a:t>
             </a:r>
             <a:endParaRPr lang="en-US" sz="2000" dirty="0"/>
           </a:p>
@@ -5238,13 +3293,13 @@
       </p:sp>
       <p:sp>
         <p:nvSpPr>
-          <p:cNvPr id="27" name="Text 25"/>
-          <p:cNvSpPr/>
-          <p:nvPr/>
-        </p:nvSpPr>
-        <p:spPr>
-          <a:xfrm>
-            <a:off x="4983480" y="2788920"/>
+          <p:cNvPr id="32" name="Text 30"/>
+          <p:cNvSpPr/>
+          <p:nvPr/>
+        </p:nvSpPr>
+        <p:spPr>
+          <a:xfrm>
+            <a:off x="4902798" y="2788920"/>
             <a:ext cx="3840480" cy="320040"/>
           </a:xfrm>
           <a:prstGeom prst="rect">
@@ -5269,7 +3324,7 @@
                 <a:ea typeface="Calibri" pitchFamily="34" charset="-122"/>
                 <a:cs typeface="Calibri" pitchFamily="34" charset="-120"/>
               </a:rPr>
-              <a:t>Resultados y Métricas</a:t>
+              <a:t>Conclusiones</a:t>
             </a:r>
             <a:endParaRPr lang="en-US" sz="1300" dirty="0"/>
           </a:p>
@@ -5277,13 +3332,13 @@
       </p:sp>
       <p:sp>
         <p:nvSpPr>
-          <p:cNvPr id="28" name="Text 26"/>
-          <p:cNvSpPr/>
-          <p:nvPr/>
-        </p:nvSpPr>
-        <p:spPr>
-          <a:xfrm>
-            <a:off x="4983480" y="3081528"/>
+          <p:cNvPr id="33" name="Text 31"/>
+          <p:cNvSpPr/>
+          <p:nvPr/>
+        </p:nvSpPr>
+        <p:spPr>
+          <a:xfrm>
+            <a:off x="4902798" y="3081528"/>
             <a:ext cx="3840480" cy="274320"/>
           </a:xfrm>
           <a:prstGeom prst="rect">
@@ -5308,7 +3363,7 @@
                 <a:ea typeface="Calibri" pitchFamily="34" charset="-122"/>
                 <a:cs typeface="Calibri" pitchFamily="34" charset="-120"/>
               </a:rPr>
-              <a:t>RMSE, MAE, R² y comparativa de modelos</a:t>
+              <a:t>Factores clave del precio y próximos pasos</a:t>
             </a:r>
             <a:endParaRPr lang="en-US" sz="950" dirty="0"/>
           </a:p>
@@ -5316,13 +3371,19 @@
       </p:sp>
       <p:sp>
         <p:nvSpPr>
-          <p:cNvPr id="29" name="Shape 27"/>
-          <p:cNvSpPr/>
-          <p:nvPr/>
-        </p:nvSpPr>
-        <p:spPr>
-          <a:xfrm>
-            <a:off x="4846320" y="3657600"/>
+          <p:cNvPr id="34" name="Shape 27">
+            <a:extLst>
+              <a:ext uri="{FF2B5EF4-FFF2-40B4-BE49-F238E27FC236}">
+                <a16:creationId xmlns:a16="http://schemas.microsoft.com/office/drawing/2014/main" id="{C2126EC1-FBCB-A361-7BBA-D363BE2CE4C4}"/>
+              </a:ext>
+            </a:extLst>
+          </p:cNvPr>
+          <p:cNvSpPr/>
+          <p:nvPr/>
+        </p:nvSpPr>
+        <p:spPr>
+          <a:xfrm>
+            <a:off x="4765638" y="3689066"/>
             <a:ext cx="4114800" cy="1005840"/>
           </a:xfrm>
           <a:prstGeom prst="rect">
@@ -5355,13 +3416,19 @@
       </p:sp>
       <p:sp>
         <p:nvSpPr>
-          <p:cNvPr id="30" name="Shape 28"/>
-          <p:cNvSpPr/>
-          <p:nvPr/>
-        </p:nvSpPr>
-        <p:spPr>
-          <a:xfrm>
-            <a:off x="4846320" y="3657600"/>
+          <p:cNvPr id="35" name="Shape 28">
+            <a:extLst>
+              <a:ext uri="{FF2B5EF4-FFF2-40B4-BE49-F238E27FC236}">
+                <a16:creationId xmlns:a16="http://schemas.microsoft.com/office/drawing/2014/main" id="{AAD62BB9-0B23-5BBD-19D1-F2D6BBA4C726}"/>
+              </a:ext>
+            </a:extLst>
+          </p:cNvPr>
+          <p:cNvSpPr/>
+          <p:nvPr/>
+        </p:nvSpPr>
+        <p:spPr>
+          <a:xfrm>
+            <a:off x="4765638" y="3689066"/>
             <a:ext cx="73152" cy="1005840"/>
           </a:xfrm>
           <a:prstGeom prst="rect">
@@ -5387,13 +3454,19 @@
       </p:sp>
       <p:sp>
         <p:nvSpPr>
-          <p:cNvPr id="31" name="Text 29"/>
-          <p:cNvSpPr/>
-          <p:nvPr/>
-        </p:nvSpPr>
-        <p:spPr>
-          <a:xfrm>
-            <a:off x="4983480" y="3703320"/>
+          <p:cNvPr id="36" name="Text 29">
+            <a:extLst>
+              <a:ext uri="{FF2B5EF4-FFF2-40B4-BE49-F238E27FC236}">
+                <a16:creationId xmlns:a16="http://schemas.microsoft.com/office/drawing/2014/main" id="{5FFECF4F-C279-12FE-F70D-2C88CCDD6B7C}"/>
+              </a:ext>
+            </a:extLst>
+          </p:cNvPr>
+          <p:cNvSpPr/>
+          <p:nvPr/>
+        </p:nvSpPr>
+        <p:spPr>
+          <a:xfrm>
+            <a:off x="4902798" y="3734786"/>
             <a:ext cx="457200" cy="365760"/>
           </a:xfrm>
           <a:prstGeom prst="rect">
@@ -5418,7 +3491,7 @@
                 <a:ea typeface="Calibri" pitchFamily="34" charset="-122"/>
                 <a:cs typeface="Calibri" pitchFamily="34" charset="-120"/>
               </a:rPr>
-              <a:t>06</a:t>
+              <a:t>07</a:t>
             </a:r>
             <a:endParaRPr lang="en-US" sz="2000" dirty="0"/>
           </a:p>
@@ -5426,13 +3499,19 @@
       </p:sp>
       <p:sp>
         <p:nvSpPr>
-          <p:cNvPr id="32" name="Text 30"/>
-          <p:cNvSpPr/>
-          <p:nvPr/>
-        </p:nvSpPr>
-        <p:spPr>
-          <a:xfrm>
-            <a:off x="4983480" y="4023360"/>
+          <p:cNvPr id="37" name="Text 30">
+            <a:extLst>
+              <a:ext uri="{FF2B5EF4-FFF2-40B4-BE49-F238E27FC236}">
+                <a16:creationId xmlns:a16="http://schemas.microsoft.com/office/drawing/2014/main" id="{A98D91B0-B377-799E-FF8B-C6C87F292C96}"/>
+              </a:ext>
+            </a:extLst>
+          </p:cNvPr>
+          <p:cNvSpPr/>
+          <p:nvPr/>
+        </p:nvSpPr>
+        <p:spPr>
+          <a:xfrm>
+            <a:off x="4902798" y="4054826"/>
             <a:ext cx="3840480" cy="320040"/>
           </a:xfrm>
           <a:prstGeom prst="rect">
@@ -5449,15 +3528,14 @@
               <a:buNone/>
             </a:pPr>
             <a:r>
-              <a:rPr lang="en-US" sz="1300" b="1" dirty="0">
+              <a:rPr lang="en-US" sz="1300" b="1" dirty="0" err="1">
                 <a:solidFill>
                   <a:srgbClr val="1E293B"/>
                 </a:solidFill>
                 <a:latin typeface="Calibri" pitchFamily="34" charset="0"/>
-                <a:ea typeface="Calibri" pitchFamily="34" charset="-122"/>
                 <a:cs typeface="Calibri" pitchFamily="34" charset="-120"/>
               </a:rPr>
-              <a:t>Conclusiones</a:t>
+              <a:t>Anexos</a:t>
             </a:r>
             <a:endParaRPr lang="en-US" sz="1300" dirty="0"/>
           </a:p>
@@ -5465,13 +3543,19 @@
       </p:sp>
       <p:sp>
         <p:nvSpPr>
-          <p:cNvPr id="33" name="Text 31"/>
-          <p:cNvSpPr/>
-          <p:nvPr/>
-        </p:nvSpPr>
-        <p:spPr>
-          <a:xfrm>
-            <a:off x="4983480" y="4315968"/>
+          <p:cNvPr id="38" name="Text 31">
+            <a:extLst>
+              <a:ext uri="{FF2B5EF4-FFF2-40B4-BE49-F238E27FC236}">
+                <a16:creationId xmlns:a16="http://schemas.microsoft.com/office/drawing/2014/main" id="{EFF3CF0D-9F48-05B5-147F-4EDAEFAAFDCA}"/>
+              </a:ext>
+            </a:extLst>
+          </p:cNvPr>
+          <p:cNvSpPr/>
+          <p:nvPr/>
+        </p:nvSpPr>
+        <p:spPr>
+          <a:xfrm>
+            <a:off x="4902798" y="4347434"/>
             <a:ext cx="3840480" cy="274320"/>
           </a:xfrm>
           <a:prstGeom prst="rect">
@@ -14220,259 +12304,6 @@
 
 <file path=ppt/slides/slide8.xml><?xml version="1.0" encoding="utf-8"?>
 <p:sld xmlns:a="http://schemas.openxmlformats.org/drawingml/2006/main" xmlns:r="http://schemas.openxmlformats.org/officeDocument/2006/relationships" xmlns:p="http://schemas.openxmlformats.org/presentationml/2006/main">
-  <p:cSld name="Slide 9">
-    <p:bg>
-      <p:bgPr>
-        <a:solidFill>
-          <a:srgbClr val="0D7377"/>
-        </a:solidFill>
-        <a:effectLst/>
-      </p:bgPr>
-    </p:bg>
-    <p:spTree>
-      <p:nvGrpSpPr>
-        <p:cNvPr id="1" name=""/>
-        <p:cNvGrpSpPr/>
-        <p:nvPr/>
-      </p:nvGrpSpPr>
-      <p:grpSpPr>
-        <a:xfrm>
-          <a:off x="0" y="0"/>
-          <a:ext cx="0" cy="0"/>
-          <a:chOff x="0" y="0"/>
-          <a:chExt cx="0" cy="0"/>
-        </a:xfrm>
-      </p:grpSpPr>
-      <p:sp>
-        <p:nvSpPr>
-          <p:cNvPr id="2" name="Shape 0"/>
-          <p:cNvSpPr/>
-          <p:nvPr/>
-        </p:nvSpPr>
-        <p:spPr>
-          <a:xfrm>
-            <a:off x="0" y="0"/>
-            <a:ext cx="9144000" cy="5143500"/>
-          </a:xfrm>
-          <a:prstGeom prst="rect">
-            <a:avLst/>
-          </a:prstGeom>
-          <a:solidFill>
-            <a:srgbClr val="0D7377"/>
-          </a:solidFill>
-          <a:ln w="12700">
-            <a:solidFill>
-              <a:srgbClr val="0D7377"/>
-            </a:solidFill>
-            <a:prstDash val="solid"/>
-          </a:ln>
-        </p:spPr>
-        <p:txBody>
-          <a:bodyPr/>
-          <a:lstStyle/>
-          <a:p>
-            <a:endParaRPr lang="es-ES"/>
-          </a:p>
-        </p:txBody>
-      </p:sp>
-      <p:sp>
-        <p:nvSpPr>
-          <p:cNvPr id="3" name="Shape 1"/>
-          <p:cNvSpPr/>
-          <p:nvPr/>
-        </p:nvSpPr>
-        <p:spPr>
-          <a:xfrm>
-            <a:off x="0" y="3840480"/>
-            <a:ext cx="9144000" cy="1303020"/>
-          </a:xfrm>
-          <a:prstGeom prst="rect">
-            <a:avLst/>
-          </a:prstGeom>
-          <a:solidFill>
-            <a:srgbClr val="1A2744"/>
-          </a:solidFill>
-          <a:ln w="12700">
-            <a:solidFill>
-              <a:srgbClr val="1A2744"/>
-            </a:solidFill>
-            <a:prstDash val="solid"/>
-          </a:ln>
-        </p:spPr>
-        <p:txBody>
-          <a:bodyPr/>
-          <a:lstStyle/>
-          <a:p>
-            <a:endParaRPr lang="es-ES"/>
-          </a:p>
-        </p:txBody>
-      </p:sp>
-      <p:sp>
-        <p:nvSpPr>
-          <p:cNvPr id="4" name="Text 2"/>
-          <p:cNvSpPr/>
-          <p:nvPr/>
-        </p:nvSpPr>
-        <p:spPr>
-          <a:xfrm>
-            <a:off x="457200" y="1005840"/>
-            <a:ext cx="8229600" cy="1097280"/>
-          </a:xfrm>
-          <a:prstGeom prst="rect">
-            <a:avLst/>
-          </a:prstGeom>
-          <a:noFill/>
-          <a:ln/>
-        </p:spPr>
-        <p:txBody>
-          <a:bodyPr wrap="square" rtlCol="0" anchor="ctr"/>
-          <a:lstStyle/>
-          <a:p>
-            <a:pPr marL="0" indent="0" algn="ctr">
-              <a:buNone/>
-            </a:pPr>
-            <a:r>
-              <a:rPr lang="en-US" sz="5600" b="1" dirty="0">
-                <a:solidFill>
-                  <a:srgbClr val="FFFFFF"/>
-                </a:solidFill>
-                <a:latin typeface="Calibri" pitchFamily="34" charset="0"/>
-                <a:ea typeface="Calibri" pitchFamily="34" charset="-122"/>
-                <a:cs typeface="Calibri" pitchFamily="34" charset="-120"/>
-              </a:rPr>
-              <a:t>¡Gracias!</a:t>
-            </a:r>
-            <a:endParaRPr lang="en-US" sz="5600" dirty="0"/>
-          </a:p>
-        </p:txBody>
-      </p:sp>
-      <p:sp>
-        <p:nvSpPr>
-          <p:cNvPr id="5" name="Text 3"/>
-          <p:cNvSpPr/>
-          <p:nvPr/>
-        </p:nvSpPr>
-        <p:spPr>
-          <a:xfrm>
-            <a:off x="457200" y="2286000"/>
-            <a:ext cx="8229600" cy="457200"/>
-          </a:xfrm>
-          <a:prstGeom prst="rect">
-            <a:avLst/>
-          </a:prstGeom>
-          <a:noFill/>
-          <a:ln/>
-        </p:spPr>
-        <p:txBody>
-          <a:bodyPr wrap="square" rtlCol="0" anchor="ctr"/>
-          <a:lstStyle/>
-          <a:p>
-            <a:pPr marL="0" indent="0" algn="ctr">
-              <a:buNone/>
-            </a:pPr>
-            <a:r>
-              <a:rPr lang="en-US" sz="1800" dirty="0">
-                <a:solidFill>
-                  <a:srgbClr val="C8EFEF"/>
-                </a:solidFill>
-                <a:latin typeface="Calibri" pitchFamily="34" charset="0"/>
-                <a:ea typeface="Calibri" pitchFamily="34" charset="-122"/>
-                <a:cs typeface="Calibri" pitchFamily="34" charset="-120"/>
-              </a:rPr>
-              <a:t>Análisis del Mercado Inmobiliario en Valencia</a:t>
-            </a:r>
-            <a:endParaRPr lang="en-US" sz="1800" dirty="0"/>
-          </a:p>
-        </p:txBody>
-      </p:sp>
-      <p:sp>
-        <p:nvSpPr>
-          <p:cNvPr id="6" name="Text 4"/>
-          <p:cNvSpPr/>
-          <p:nvPr/>
-        </p:nvSpPr>
-        <p:spPr>
-          <a:xfrm>
-            <a:off x="457200" y="2834640"/>
-            <a:ext cx="8229600" cy="365760"/>
-          </a:xfrm>
-          <a:prstGeom prst="rect">
-            <a:avLst/>
-          </a:prstGeom>
-          <a:noFill/>
-          <a:ln/>
-        </p:spPr>
-        <p:txBody>
-          <a:bodyPr wrap="square" rtlCol="0" anchor="ctr"/>
-          <a:lstStyle/>
-          <a:p>
-            <a:pPr marL="0" indent="0" algn="ctr">
-              <a:buNone/>
-            </a:pPr>
-            <a:r>
-              <a:rPr lang="en-US" sz="1300" dirty="0">
-                <a:solidFill>
-                  <a:srgbClr val="90D0D0"/>
-                </a:solidFill>
-                <a:latin typeface="Calibri" pitchFamily="34" charset="0"/>
-                <a:ea typeface="Calibri" pitchFamily="34" charset="-122"/>
-                <a:cs typeface="Calibri" pitchFamily="34" charset="-120"/>
-              </a:rPr>
-              <a:t>EDA · Feature Engineering · Random Forest · Valencia 2025</a:t>
-            </a:r>
-            <a:endParaRPr lang="en-US" sz="1300" dirty="0"/>
-          </a:p>
-        </p:txBody>
-      </p:sp>
-      <p:sp>
-        <p:nvSpPr>
-          <p:cNvPr id="7" name="Text 5"/>
-          <p:cNvSpPr/>
-          <p:nvPr/>
-        </p:nvSpPr>
-        <p:spPr>
-          <a:xfrm>
-            <a:off x="457200" y="3931920"/>
-            <a:ext cx="8229600" cy="457200"/>
-          </a:xfrm>
-          <a:prstGeom prst="rect">
-            <a:avLst/>
-          </a:prstGeom>
-          <a:noFill/>
-          <a:ln/>
-        </p:spPr>
-        <p:txBody>
-          <a:bodyPr wrap="square" rtlCol="0" anchor="ctr"/>
-          <a:lstStyle/>
-          <a:p>
-            <a:pPr marL="0" indent="0" algn="ctr">
-              <a:buNone/>
-            </a:pPr>
-            <a:r>
-              <a:rPr lang="en-US" sz="1300" dirty="0">
-                <a:solidFill>
-                  <a:srgbClr val="14A5A9"/>
-                </a:solidFill>
-                <a:latin typeface="Calibri" pitchFamily="34" charset="0"/>
-                <a:ea typeface="Calibri" pitchFamily="34" charset="-122"/>
-                <a:cs typeface="Calibri" pitchFamily="34" charset="-120"/>
-              </a:rPr>
-              <a:t>github.com/Apriroca/ML_Prediccion_Vivienda_Valencia</a:t>
-            </a:r>
-            <a:endParaRPr lang="en-US" sz="1300" dirty="0"/>
-          </a:p>
-        </p:txBody>
-      </p:sp>
-    </p:spTree>
-  </p:cSld>
-  <p:clrMapOvr>
-    <a:masterClrMapping/>
-  </p:clrMapOvr>
-</p:sld>
-</file>
-
-<file path=ppt/slides/slide9.xml><?xml version="1.0" encoding="utf-8"?>
-<p:sld xmlns:a="http://schemas.openxmlformats.org/drawingml/2006/main" xmlns:r="http://schemas.openxmlformats.org/officeDocument/2006/relationships" xmlns:p="http://schemas.openxmlformats.org/presentationml/2006/main">
   <p:cSld>
     <p:spTree>
       <p:nvGrpSpPr>
@@ -14754,6 +12585,2237 @@
     <p:extLst>
       <p:ext uri="{BB962C8B-B14F-4D97-AF65-F5344CB8AC3E}">
         <p14:creationId xmlns:p14="http://schemas.microsoft.com/office/powerpoint/2010/main" val="1169360617"/>
+      </p:ext>
+    </p:extLst>
+  </p:cSld>
+  <p:clrMapOvr>
+    <a:masterClrMapping/>
+  </p:clrMapOvr>
+</p:sld>
+</file>
+
+<file path=ppt/slides/slide9.xml><?xml version="1.0" encoding="utf-8"?>
+<p:sld xmlns:a="http://schemas.openxmlformats.org/drawingml/2006/main" xmlns:r="http://schemas.openxmlformats.org/officeDocument/2006/relationships" xmlns:p="http://schemas.openxmlformats.org/presentationml/2006/main">
+  <p:cSld>
+    <p:spTree>
+      <p:nvGrpSpPr>
+        <p:cNvPr id="1" name="">
+          <a:extLst>
+            <a:ext uri="{FF2B5EF4-FFF2-40B4-BE49-F238E27FC236}">
+              <a16:creationId xmlns:a16="http://schemas.microsoft.com/office/drawing/2014/main" id="{BED8ABFF-7BC5-7D6C-BF09-A23ED825B50B}"/>
+            </a:ext>
+          </a:extLst>
+        </p:cNvPr>
+        <p:cNvGrpSpPr/>
+        <p:nvPr/>
+      </p:nvGrpSpPr>
+      <p:grpSpPr>
+        <a:xfrm>
+          <a:off x="0" y="0"/>
+          <a:ext cx="0" cy="0"/>
+          <a:chOff x="0" y="0"/>
+          <a:chExt cx="0" cy="0"/>
+        </a:xfrm>
+      </p:grpSpPr>
+      <p:sp>
+        <p:nvSpPr>
+          <p:cNvPr id="2" name="Shape 0">
+            <a:extLst>
+              <a:ext uri="{FF2B5EF4-FFF2-40B4-BE49-F238E27FC236}">
+                <a16:creationId xmlns:a16="http://schemas.microsoft.com/office/drawing/2014/main" id="{70EA69C9-BB22-90BF-A733-D9F1109D3121}"/>
+              </a:ext>
+            </a:extLst>
+          </p:cNvPr>
+          <p:cNvSpPr/>
+          <p:nvPr/>
+        </p:nvSpPr>
+        <p:spPr>
+          <a:xfrm>
+            <a:off x="0" y="0"/>
+            <a:ext cx="9144000" cy="914400"/>
+          </a:xfrm>
+          <a:prstGeom prst="rect">
+            <a:avLst/>
+          </a:prstGeom>
+          <a:solidFill>
+            <a:srgbClr val="1A2744"/>
+          </a:solidFill>
+          <a:ln w="12700">
+            <a:solidFill>
+              <a:srgbClr val="1A2744"/>
+            </a:solidFill>
+            <a:prstDash val="solid"/>
+          </a:ln>
+        </p:spPr>
+        <p:txBody>
+          <a:bodyPr/>
+          <a:lstStyle/>
+          <a:p>
+            <a:endParaRPr lang="es-ES"/>
+          </a:p>
+        </p:txBody>
+      </p:sp>
+      <p:sp>
+        <p:nvSpPr>
+          <p:cNvPr id="3" name="Text 1">
+            <a:extLst>
+              <a:ext uri="{FF2B5EF4-FFF2-40B4-BE49-F238E27FC236}">
+                <a16:creationId xmlns:a16="http://schemas.microsoft.com/office/drawing/2014/main" id="{76DE1628-F668-2E11-446A-5B8744ED9CCB}"/>
+              </a:ext>
+            </a:extLst>
+          </p:cNvPr>
+          <p:cNvSpPr/>
+          <p:nvPr/>
+        </p:nvSpPr>
+        <p:spPr>
+          <a:xfrm>
+            <a:off x="457200" y="0"/>
+            <a:ext cx="8229600" cy="914400"/>
+          </a:xfrm>
+          <a:prstGeom prst="rect">
+            <a:avLst/>
+          </a:prstGeom>
+          <a:noFill/>
+          <a:ln/>
+        </p:spPr>
+        <p:txBody>
+          <a:bodyPr wrap="square" rtlCol="0" anchor="ctr"/>
+          <a:lstStyle/>
+          <a:p>
+            <a:pPr marL="0" indent="0" algn="l">
+              <a:buNone/>
+            </a:pPr>
+            <a:r>
+              <a:rPr lang="en-US" sz="2400" b="1" dirty="0">
+                <a:solidFill>
+                  <a:srgbClr val="FFFFFF"/>
+                </a:solidFill>
+                <a:latin typeface="Calibri" pitchFamily="34" charset="0"/>
+                <a:ea typeface="Calibri" pitchFamily="34" charset="-122"/>
+                <a:cs typeface="Calibri" pitchFamily="34" charset="-120"/>
+              </a:rPr>
+              <a:t>Resultados — Comparativa de Modelos</a:t>
+            </a:r>
+            <a:endParaRPr lang="en-US" sz="2400" dirty="0"/>
+          </a:p>
+        </p:txBody>
+      </p:sp>
+      <p:graphicFrame>
+        <p:nvGraphicFramePr>
+          <p:cNvPr id="8" name="Table 0">
+            <a:extLst>
+              <a:ext uri="{FF2B5EF4-FFF2-40B4-BE49-F238E27FC236}">
+                <a16:creationId xmlns:a16="http://schemas.microsoft.com/office/drawing/2014/main" id="{9342B014-AD37-3797-9141-6927D625C805}"/>
+              </a:ext>
+            </a:extLst>
+          </p:cNvPr>
+          <p:cNvGraphicFramePr>
+            <a:graphicFrameLocks noGrp="1"/>
+          </p:cNvGraphicFramePr>
+          <p:nvPr>
+            <p:extLst>
+              <p:ext uri="{D42A27DB-BD31-4B8C-83A1-F6EECF244321}">
+                <p14:modId xmlns:p14="http://schemas.microsoft.com/office/powerpoint/2010/main" val="921885173"/>
+              </p:ext>
+            </p:extLst>
+          </p:nvPr>
+        </p:nvGraphicFramePr>
+        <p:xfrm>
+          <a:off x="0" y="1120140"/>
+          <a:ext cx="9144000" cy="1609344"/>
+        </p:xfrm>
+        <a:graphic>
+          <a:graphicData uri="http://schemas.openxmlformats.org/drawingml/2006/table">
+            <a:tbl>
+              <a:tblPr/>
+              <a:tblGrid>
+                <a:gridCol w="2560320">
+                  <a:extLst>
+                    <a:ext uri="{9D8B030D-6E8A-4147-A177-3AD203B41FA5}">
+                      <a16:colId xmlns:a16="http://schemas.microsoft.com/office/drawing/2014/main" val="20000"/>
+                    </a:ext>
+                  </a:extLst>
+                </a:gridCol>
+                <a:gridCol w="1645920">
+                  <a:extLst>
+                    <a:ext uri="{9D8B030D-6E8A-4147-A177-3AD203B41FA5}">
+                      <a16:colId xmlns:a16="http://schemas.microsoft.com/office/drawing/2014/main" val="20001"/>
+                    </a:ext>
+                  </a:extLst>
+                </a:gridCol>
+                <a:gridCol w="1645920">
+                  <a:extLst>
+                    <a:ext uri="{9D8B030D-6E8A-4147-A177-3AD203B41FA5}">
+                      <a16:colId xmlns:a16="http://schemas.microsoft.com/office/drawing/2014/main" val="20002"/>
+                    </a:ext>
+                  </a:extLst>
+                </a:gridCol>
+                <a:gridCol w="1097280">
+                  <a:extLst>
+                    <a:ext uri="{9D8B030D-6E8A-4147-A177-3AD203B41FA5}">
+                      <a16:colId xmlns:a16="http://schemas.microsoft.com/office/drawing/2014/main" val="20003"/>
+                    </a:ext>
+                  </a:extLst>
+                </a:gridCol>
+                <a:gridCol w="2194560">
+                  <a:extLst>
+                    <a:ext uri="{9D8B030D-6E8A-4147-A177-3AD203B41FA5}">
+                      <a16:colId xmlns:a16="http://schemas.microsoft.com/office/drawing/2014/main" val="20004"/>
+                    </a:ext>
+                  </a:extLst>
+                </a:gridCol>
+              </a:tblGrid>
+              <a:tr h="402336">
+                <a:tc>
+                  <a:txBody>
+                    <a:bodyPr/>
+                    <a:lstStyle/>
+                    <a:p>
+                      <a:pPr marL="0" indent="0">
+                        <a:buNone/>
+                      </a:pPr>
+                      <a:r>
+                        <a:rPr lang="en-US" sz="1200" b="1" dirty="0">
+                          <a:solidFill>
+                            <a:srgbClr val="FFFFFF"/>
+                          </a:solidFill>
+                          <a:latin typeface="Calibri" pitchFamily="34" charset="0"/>
+                          <a:ea typeface="Calibri" pitchFamily="34" charset="-122"/>
+                          <a:cs typeface="Calibri" pitchFamily="34" charset="-120"/>
+                        </a:rPr>
+                        <a:t>Modelo</a:t>
+                      </a:r>
+                      <a:endParaRPr lang="en-US" sz="1200" dirty="0">
+                        <a:latin typeface="Calibri" charset="0"/>
+                        <a:ea typeface="Calibri" charset="0"/>
+                        <a:cs typeface="Calibri" charset="0"/>
+                      </a:endParaRPr>
+                    </a:p>
+                  </a:txBody>
+                  <a:tcPr>
+                    <a:lnL w="6350" cap="flat" cmpd="sng" algn="ctr">
+                      <a:solidFill>
+                        <a:srgbClr val="D1D9E0"/>
+                      </a:solidFill>
+                      <a:prstDash val="solid"/>
+                      <a:round/>
+                      <a:headEnd type="none" w="med" len="med"/>
+                      <a:tailEnd type="none" w="med" len="med"/>
+                    </a:lnL>
+                    <a:lnR w="6350" cap="flat" cmpd="sng" algn="ctr">
+                      <a:solidFill>
+                        <a:srgbClr val="D1D9E0"/>
+                      </a:solidFill>
+                      <a:prstDash val="solid"/>
+                      <a:round/>
+                      <a:headEnd type="none" w="med" len="med"/>
+                      <a:tailEnd type="none" w="med" len="med"/>
+                    </a:lnR>
+                    <a:lnT w="6350" cap="flat" cmpd="sng" algn="ctr">
+                      <a:solidFill>
+                        <a:srgbClr val="D1D9E0"/>
+                      </a:solidFill>
+                      <a:prstDash val="solid"/>
+                      <a:round/>
+                      <a:headEnd type="none" w="med" len="med"/>
+                      <a:tailEnd type="none" w="med" len="med"/>
+                    </a:lnT>
+                    <a:lnB w="6350" cap="flat" cmpd="sng" algn="ctr">
+                      <a:solidFill>
+                        <a:srgbClr val="D1D9E0"/>
+                      </a:solidFill>
+                      <a:prstDash val="solid"/>
+                      <a:round/>
+                      <a:headEnd type="none" w="med" len="med"/>
+                      <a:tailEnd type="none" w="med" len="med"/>
+                    </a:lnB>
+                    <a:solidFill>
+                      <a:srgbClr val="1A2744"/>
+                    </a:solidFill>
+                  </a:tcPr>
+                </a:tc>
+                <a:tc>
+                  <a:txBody>
+                    <a:bodyPr/>
+                    <a:lstStyle/>
+                    <a:p>
+                      <a:pPr marL="0" indent="0">
+                        <a:buNone/>
+                      </a:pPr>
+                      <a:r>
+                        <a:rPr lang="en-US" sz="1200" b="1" dirty="0">
+                          <a:solidFill>
+                            <a:srgbClr val="FFFFFF"/>
+                          </a:solidFill>
+                          <a:latin typeface="Calibri" pitchFamily="34" charset="0"/>
+                          <a:ea typeface="Calibri" pitchFamily="34" charset="-122"/>
+                          <a:cs typeface="Calibri" pitchFamily="34" charset="-120"/>
+                        </a:rPr>
+                        <a:t>RMSE (€/m²)</a:t>
+                      </a:r>
+                      <a:endParaRPr lang="en-US" sz="1200" dirty="0">
+                        <a:latin typeface="Calibri" charset="0"/>
+                        <a:ea typeface="Calibri" charset="0"/>
+                        <a:cs typeface="Calibri" charset="0"/>
+                      </a:endParaRPr>
+                    </a:p>
+                  </a:txBody>
+                  <a:tcPr>
+                    <a:lnL w="6350" cap="flat" cmpd="sng" algn="ctr">
+                      <a:solidFill>
+                        <a:srgbClr val="D1D9E0"/>
+                      </a:solidFill>
+                      <a:prstDash val="solid"/>
+                      <a:round/>
+                      <a:headEnd type="none" w="med" len="med"/>
+                      <a:tailEnd type="none" w="med" len="med"/>
+                    </a:lnL>
+                    <a:lnR w="6350" cap="flat" cmpd="sng" algn="ctr">
+                      <a:solidFill>
+                        <a:srgbClr val="D1D9E0"/>
+                      </a:solidFill>
+                      <a:prstDash val="solid"/>
+                      <a:round/>
+                      <a:headEnd type="none" w="med" len="med"/>
+                      <a:tailEnd type="none" w="med" len="med"/>
+                    </a:lnR>
+                    <a:lnT w="6350" cap="flat" cmpd="sng" algn="ctr">
+                      <a:solidFill>
+                        <a:srgbClr val="D1D9E0"/>
+                      </a:solidFill>
+                      <a:prstDash val="solid"/>
+                      <a:round/>
+                      <a:headEnd type="none" w="med" len="med"/>
+                      <a:tailEnd type="none" w="med" len="med"/>
+                    </a:lnT>
+                    <a:lnB w="6350" cap="flat" cmpd="sng" algn="ctr">
+                      <a:solidFill>
+                        <a:srgbClr val="D1D9E0"/>
+                      </a:solidFill>
+                      <a:prstDash val="solid"/>
+                      <a:round/>
+                      <a:headEnd type="none" w="med" len="med"/>
+                      <a:tailEnd type="none" w="med" len="med"/>
+                    </a:lnB>
+                    <a:solidFill>
+                      <a:srgbClr val="1A2744"/>
+                    </a:solidFill>
+                  </a:tcPr>
+                </a:tc>
+                <a:tc>
+                  <a:txBody>
+                    <a:bodyPr/>
+                    <a:lstStyle/>
+                    <a:p>
+                      <a:pPr marL="0" indent="0">
+                        <a:buNone/>
+                      </a:pPr>
+                      <a:r>
+                        <a:rPr lang="en-US" sz="1200" b="1" dirty="0">
+                          <a:solidFill>
+                            <a:srgbClr val="FFFFFF"/>
+                          </a:solidFill>
+                          <a:latin typeface="Calibri" pitchFamily="34" charset="0"/>
+                          <a:ea typeface="Calibri" pitchFamily="34" charset="-122"/>
+                          <a:cs typeface="Calibri" pitchFamily="34" charset="-120"/>
+                        </a:rPr>
+                        <a:t>MAE (€/m²)</a:t>
+                      </a:r>
+                      <a:endParaRPr lang="en-US" sz="1200" dirty="0">
+                        <a:latin typeface="Calibri" charset="0"/>
+                        <a:ea typeface="Calibri" charset="0"/>
+                        <a:cs typeface="Calibri" charset="0"/>
+                      </a:endParaRPr>
+                    </a:p>
+                  </a:txBody>
+                  <a:tcPr>
+                    <a:lnL w="6350" cap="flat" cmpd="sng" algn="ctr">
+                      <a:solidFill>
+                        <a:srgbClr val="D1D9E0"/>
+                      </a:solidFill>
+                      <a:prstDash val="solid"/>
+                      <a:round/>
+                      <a:headEnd type="none" w="med" len="med"/>
+                      <a:tailEnd type="none" w="med" len="med"/>
+                    </a:lnL>
+                    <a:lnR w="6350" cap="flat" cmpd="sng" algn="ctr">
+                      <a:solidFill>
+                        <a:srgbClr val="D1D9E0"/>
+                      </a:solidFill>
+                      <a:prstDash val="solid"/>
+                      <a:round/>
+                      <a:headEnd type="none" w="med" len="med"/>
+                      <a:tailEnd type="none" w="med" len="med"/>
+                    </a:lnR>
+                    <a:lnT w="6350" cap="flat" cmpd="sng" algn="ctr">
+                      <a:solidFill>
+                        <a:srgbClr val="D1D9E0"/>
+                      </a:solidFill>
+                      <a:prstDash val="solid"/>
+                      <a:round/>
+                      <a:headEnd type="none" w="med" len="med"/>
+                      <a:tailEnd type="none" w="med" len="med"/>
+                    </a:lnT>
+                    <a:lnB w="6350" cap="flat" cmpd="sng" algn="ctr">
+                      <a:solidFill>
+                        <a:srgbClr val="D1D9E0"/>
+                      </a:solidFill>
+                      <a:prstDash val="solid"/>
+                      <a:round/>
+                      <a:headEnd type="none" w="med" len="med"/>
+                      <a:tailEnd type="none" w="med" len="med"/>
+                    </a:lnB>
+                    <a:solidFill>
+                      <a:srgbClr val="1A2744"/>
+                    </a:solidFill>
+                  </a:tcPr>
+                </a:tc>
+                <a:tc>
+                  <a:txBody>
+                    <a:bodyPr/>
+                    <a:lstStyle/>
+                    <a:p>
+                      <a:pPr marL="0" indent="0">
+                        <a:buNone/>
+                      </a:pPr>
+                      <a:r>
+                        <a:rPr lang="en-US" sz="1200" b="1" dirty="0">
+                          <a:solidFill>
+                            <a:srgbClr val="FFFFFF"/>
+                          </a:solidFill>
+                          <a:latin typeface="Calibri" pitchFamily="34" charset="0"/>
+                          <a:ea typeface="Calibri" pitchFamily="34" charset="-122"/>
+                          <a:cs typeface="Calibri" pitchFamily="34" charset="-120"/>
+                        </a:rPr>
+                        <a:t>R²</a:t>
+                      </a:r>
+                      <a:endParaRPr lang="en-US" sz="1200" dirty="0">
+                        <a:latin typeface="Calibri" charset="0"/>
+                        <a:ea typeface="Calibri" charset="0"/>
+                        <a:cs typeface="Calibri" charset="0"/>
+                      </a:endParaRPr>
+                    </a:p>
+                  </a:txBody>
+                  <a:tcPr>
+                    <a:lnL w="6350" cap="flat" cmpd="sng" algn="ctr">
+                      <a:solidFill>
+                        <a:srgbClr val="D1D9E0"/>
+                      </a:solidFill>
+                      <a:prstDash val="solid"/>
+                      <a:round/>
+                      <a:headEnd type="none" w="med" len="med"/>
+                      <a:tailEnd type="none" w="med" len="med"/>
+                    </a:lnL>
+                    <a:lnR w="6350" cap="flat" cmpd="sng" algn="ctr">
+                      <a:solidFill>
+                        <a:srgbClr val="D1D9E0"/>
+                      </a:solidFill>
+                      <a:prstDash val="solid"/>
+                      <a:round/>
+                      <a:headEnd type="none" w="med" len="med"/>
+                      <a:tailEnd type="none" w="med" len="med"/>
+                    </a:lnR>
+                    <a:lnT w="6350" cap="flat" cmpd="sng" algn="ctr">
+                      <a:solidFill>
+                        <a:srgbClr val="D1D9E0"/>
+                      </a:solidFill>
+                      <a:prstDash val="solid"/>
+                      <a:round/>
+                      <a:headEnd type="none" w="med" len="med"/>
+                      <a:tailEnd type="none" w="med" len="med"/>
+                    </a:lnT>
+                    <a:lnB w="6350" cap="flat" cmpd="sng" algn="ctr">
+                      <a:solidFill>
+                        <a:srgbClr val="D1D9E0"/>
+                      </a:solidFill>
+                      <a:prstDash val="solid"/>
+                      <a:round/>
+                      <a:headEnd type="none" w="med" len="med"/>
+                      <a:tailEnd type="none" w="med" len="med"/>
+                    </a:lnB>
+                    <a:solidFill>
+                      <a:srgbClr val="1A2744"/>
+                    </a:solidFill>
+                  </a:tcPr>
+                </a:tc>
+                <a:tc>
+                  <a:txBody>
+                    <a:bodyPr/>
+                    <a:lstStyle/>
+                    <a:p>
+                      <a:pPr marL="0" indent="0">
+                        <a:buNone/>
+                      </a:pPr>
+                      <a:r>
+                        <a:rPr lang="en-US" sz="1200" b="1" dirty="0">
+                          <a:solidFill>
+                            <a:srgbClr val="FFFFFF"/>
+                          </a:solidFill>
+                          <a:latin typeface="Calibri" pitchFamily="34" charset="0"/>
+                          <a:ea typeface="Calibri" pitchFamily="34" charset="-122"/>
+                          <a:cs typeface="Calibri" pitchFamily="34" charset="-120"/>
+                        </a:rPr>
+                        <a:t>Valoración</a:t>
+                      </a:r>
+                      <a:endParaRPr lang="en-US" sz="1200" dirty="0">
+                        <a:latin typeface="Calibri" charset="0"/>
+                        <a:ea typeface="Calibri" charset="0"/>
+                        <a:cs typeface="Calibri" charset="0"/>
+                      </a:endParaRPr>
+                    </a:p>
+                  </a:txBody>
+                  <a:tcPr>
+                    <a:lnL w="6350" cap="flat" cmpd="sng" algn="ctr">
+                      <a:solidFill>
+                        <a:srgbClr val="D1D9E0"/>
+                      </a:solidFill>
+                      <a:prstDash val="solid"/>
+                      <a:round/>
+                      <a:headEnd type="none" w="med" len="med"/>
+                      <a:tailEnd type="none" w="med" len="med"/>
+                    </a:lnL>
+                    <a:lnR w="6350" cap="flat" cmpd="sng" algn="ctr">
+                      <a:solidFill>
+                        <a:srgbClr val="D1D9E0"/>
+                      </a:solidFill>
+                      <a:prstDash val="solid"/>
+                      <a:round/>
+                      <a:headEnd type="none" w="med" len="med"/>
+                      <a:tailEnd type="none" w="med" len="med"/>
+                    </a:lnR>
+                    <a:lnT w="6350" cap="flat" cmpd="sng" algn="ctr">
+                      <a:solidFill>
+                        <a:srgbClr val="D1D9E0"/>
+                      </a:solidFill>
+                      <a:prstDash val="solid"/>
+                      <a:round/>
+                      <a:headEnd type="none" w="med" len="med"/>
+                      <a:tailEnd type="none" w="med" len="med"/>
+                    </a:lnT>
+                    <a:lnB w="6350" cap="flat" cmpd="sng" algn="ctr">
+                      <a:solidFill>
+                        <a:srgbClr val="D1D9E0"/>
+                      </a:solidFill>
+                      <a:prstDash val="solid"/>
+                      <a:round/>
+                      <a:headEnd type="none" w="med" len="med"/>
+                      <a:tailEnd type="none" w="med" len="med"/>
+                    </a:lnB>
+                    <a:solidFill>
+                      <a:srgbClr val="1A2744"/>
+                    </a:solidFill>
+                  </a:tcPr>
+                </a:tc>
+                <a:extLst>
+                  <a:ext uri="{0D108BD9-81ED-4DB2-BD59-A6C34878D82A}">
+                    <a16:rowId xmlns:a16="http://schemas.microsoft.com/office/drawing/2014/main" val="10000"/>
+                  </a:ext>
+                </a:extLst>
+              </a:tr>
+              <a:tr h="402336">
+                <a:tc>
+                  <a:txBody>
+                    <a:bodyPr/>
+                    <a:lstStyle/>
+                    <a:p>
+                      <a:pPr marL="0" indent="0">
+                        <a:buNone/>
+                      </a:pPr>
+                      <a:r>
+                        <a:rPr lang="en-US" sz="1200" dirty="0">
+                          <a:solidFill>
+                            <a:srgbClr val="000000"/>
+                          </a:solidFill>
+                          <a:latin typeface="Calibri" pitchFamily="34" charset="0"/>
+                          <a:ea typeface="Calibri" pitchFamily="34" charset="-122"/>
+                          <a:cs typeface="Calibri" pitchFamily="34" charset="-120"/>
+                        </a:rPr>
+                        <a:t>Regresión Lineal</a:t>
+                      </a:r>
+                      <a:endParaRPr lang="en-US" sz="1200" dirty="0">
+                        <a:latin typeface="Calibri" charset="0"/>
+                        <a:ea typeface="Calibri" charset="0"/>
+                        <a:cs typeface="Calibri" charset="0"/>
+                      </a:endParaRPr>
+                    </a:p>
+                  </a:txBody>
+                  <a:tcPr>
+                    <a:lnL w="6350" cap="flat" cmpd="sng" algn="ctr">
+                      <a:solidFill>
+                        <a:srgbClr val="D1D9E0"/>
+                      </a:solidFill>
+                      <a:prstDash val="solid"/>
+                      <a:round/>
+                      <a:headEnd type="none" w="med" len="med"/>
+                      <a:tailEnd type="none" w="med" len="med"/>
+                    </a:lnL>
+                    <a:lnR w="6350" cap="flat" cmpd="sng" algn="ctr">
+                      <a:solidFill>
+                        <a:srgbClr val="D1D9E0"/>
+                      </a:solidFill>
+                      <a:prstDash val="solid"/>
+                      <a:round/>
+                      <a:headEnd type="none" w="med" len="med"/>
+                      <a:tailEnd type="none" w="med" len="med"/>
+                    </a:lnR>
+                    <a:lnT w="6350" cap="flat" cmpd="sng" algn="ctr">
+                      <a:solidFill>
+                        <a:srgbClr val="D1D9E0"/>
+                      </a:solidFill>
+                      <a:prstDash val="solid"/>
+                      <a:round/>
+                      <a:headEnd type="none" w="med" len="med"/>
+                      <a:tailEnd type="none" w="med" len="med"/>
+                    </a:lnT>
+                    <a:lnB w="6350" cap="flat" cmpd="sng" algn="ctr">
+                      <a:solidFill>
+                        <a:srgbClr val="D1D9E0"/>
+                      </a:solidFill>
+                      <a:prstDash val="solid"/>
+                      <a:round/>
+                      <a:headEnd type="none" w="med" len="med"/>
+                      <a:tailEnd type="none" w="med" len="med"/>
+                    </a:lnB>
+                  </a:tcPr>
+                </a:tc>
+                <a:tc>
+                  <a:txBody>
+                    <a:bodyPr/>
+                    <a:lstStyle/>
+                    <a:p>
+                      <a:pPr marL="0" indent="0">
+                        <a:buNone/>
+                      </a:pPr>
+                      <a:r>
+                        <a:rPr lang="en-US" sz="1200" dirty="0">
+                          <a:solidFill>
+                            <a:srgbClr val="000000"/>
+                          </a:solidFill>
+                          <a:latin typeface="Calibri" pitchFamily="34" charset="0"/>
+                          <a:ea typeface="Calibri" pitchFamily="34" charset="-122"/>
+                          <a:cs typeface="Calibri" pitchFamily="34" charset="-120"/>
+                        </a:rPr>
+                        <a:t>~450</a:t>
+                      </a:r>
+                      <a:endParaRPr lang="en-US" sz="1200" dirty="0">
+                        <a:latin typeface="Calibri" charset="0"/>
+                        <a:ea typeface="Calibri" charset="0"/>
+                        <a:cs typeface="Calibri" charset="0"/>
+                      </a:endParaRPr>
+                    </a:p>
+                  </a:txBody>
+                  <a:tcPr>
+                    <a:lnL w="6350" cap="flat" cmpd="sng" algn="ctr">
+                      <a:solidFill>
+                        <a:srgbClr val="D1D9E0"/>
+                      </a:solidFill>
+                      <a:prstDash val="solid"/>
+                      <a:round/>
+                      <a:headEnd type="none" w="med" len="med"/>
+                      <a:tailEnd type="none" w="med" len="med"/>
+                    </a:lnL>
+                    <a:lnR w="6350" cap="flat" cmpd="sng" algn="ctr">
+                      <a:solidFill>
+                        <a:srgbClr val="D1D9E0"/>
+                      </a:solidFill>
+                      <a:prstDash val="solid"/>
+                      <a:round/>
+                      <a:headEnd type="none" w="med" len="med"/>
+                      <a:tailEnd type="none" w="med" len="med"/>
+                    </a:lnR>
+                    <a:lnT w="6350" cap="flat" cmpd="sng" algn="ctr">
+                      <a:solidFill>
+                        <a:srgbClr val="D1D9E0"/>
+                      </a:solidFill>
+                      <a:prstDash val="solid"/>
+                      <a:round/>
+                      <a:headEnd type="none" w="med" len="med"/>
+                      <a:tailEnd type="none" w="med" len="med"/>
+                    </a:lnT>
+                    <a:lnB w="6350" cap="flat" cmpd="sng" algn="ctr">
+                      <a:solidFill>
+                        <a:srgbClr val="D1D9E0"/>
+                      </a:solidFill>
+                      <a:prstDash val="solid"/>
+                      <a:round/>
+                      <a:headEnd type="none" w="med" len="med"/>
+                      <a:tailEnd type="none" w="med" len="med"/>
+                    </a:lnB>
+                  </a:tcPr>
+                </a:tc>
+                <a:tc>
+                  <a:txBody>
+                    <a:bodyPr/>
+                    <a:lstStyle/>
+                    <a:p>
+                      <a:pPr marL="0" indent="0">
+                        <a:buNone/>
+                      </a:pPr>
+                      <a:r>
+                        <a:rPr lang="en-US" sz="1200" dirty="0">
+                          <a:solidFill>
+                            <a:srgbClr val="000000"/>
+                          </a:solidFill>
+                          <a:latin typeface="Calibri" pitchFamily="34" charset="0"/>
+                          <a:ea typeface="Calibri" pitchFamily="34" charset="-122"/>
+                          <a:cs typeface="Calibri" pitchFamily="34" charset="-120"/>
+                        </a:rPr>
+                        <a:t>~320</a:t>
+                      </a:r>
+                      <a:endParaRPr lang="en-US" sz="1200" dirty="0">
+                        <a:latin typeface="Calibri" charset="0"/>
+                        <a:ea typeface="Calibri" charset="0"/>
+                        <a:cs typeface="Calibri" charset="0"/>
+                      </a:endParaRPr>
+                    </a:p>
+                  </a:txBody>
+                  <a:tcPr>
+                    <a:lnL w="6350" cap="flat" cmpd="sng" algn="ctr">
+                      <a:solidFill>
+                        <a:srgbClr val="D1D9E0"/>
+                      </a:solidFill>
+                      <a:prstDash val="solid"/>
+                      <a:round/>
+                      <a:headEnd type="none" w="med" len="med"/>
+                      <a:tailEnd type="none" w="med" len="med"/>
+                    </a:lnL>
+                    <a:lnR w="6350" cap="flat" cmpd="sng" algn="ctr">
+                      <a:solidFill>
+                        <a:srgbClr val="D1D9E0"/>
+                      </a:solidFill>
+                      <a:prstDash val="solid"/>
+                      <a:round/>
+                      <a:headEnd type="none" w="med" len="med"/>
+                      <a:tailEnd type="none" w="med" len="med"/>
+                    </a:lnR>
+                    <a:lnT w="6350" cap="flat" cmpd="sng" algn="ctr">
+                      <a:solidFill>
+                        <a:srgbClr val="D1D9E0"/>
+                      </a:solidFill>
+                      <a:prstDash val="solid"/>
+                      <a:round/>
+                      <a:headEnd type="none" w="med" len="med"/>
+                      <a:tailEnd type="none" w="med" len="med"/>
+                    </a:lnT>
+                    <a:lnB w="6350" cap="flat" cmpd="sng" algn="ctr">
+                      <a:solidFill>
+                        <a:srgbClr val="D1D9E0"/>
+                      </a:solidFill>
+                      <a:prstDash val="solid"/>
+                      <a:round/>
+                      <a:headEnd type="none" w="med" len="med"/>
+                      <a:tailEnd type="none" w="med" len="med"/>
+                    </a:lnB>
+                  </a:tcPr>
+                </a:tc>
+                <a:tc>
+                  <a:txBody>
+                    <a:bodyPr/>
+                    <a:lstStyle/>
+                    <a:p>
+                      <a:pPr marL="0" indent="0">
+                        <a:buNone/>
+                      </a:pPr>
+                      <a:r>
+                        <a:rPr lang="en-US" sz="1200" dirty="0">
+                          <a:solidFill>
+                            <a:srgbClr val="000000"/>
+                          </a:solidFill>
+                          <a:latin typeface="Calibri" pitchFamily="34" charset="0"/>
+                          <a:ea typeface="Calibri" pitchFamily="34" charset="-122"/>
+                          <a:cs typeface="Calibri" pitchFamily="34" charset="-120"/>
+                        </a:rPr>
+                        <a:t>~0.60</a:t>
+                      </a:r>
+                      <a:endParaRPr lang="en-US" sz="1200" dirty="0">
+                        <a:latin typeface="Calibri" charset="0"/>
+                        <a:ea typeface="Calibri" charset="0"/>
+                        <a:cs typeface="Calibri" charset="0"/>
+                      </a:endParaRPr>
+                    </a:p>
+                  </a:txBody>
+                  <a:tcPr>
+                    <a:lnL w="6350" cap="flat" cmpd="sng" algn="ctr">
+                      <a:solidFill>
+                        <a:srgbClr val="D1D9E0"/>
+                      </a:solidFill>
+                      <a:prstDash val="solid"/>
+                      <a:round/>
+                      <a:headEnd type="none" w="med" len="med"/>
+                      <a:tailEnd type="none" w="med" len="med"/>
+                    </a:lnL>
+                    <a:lnR w="6350" cap="flat" cmpd="sng" algn="ctr">
+                      <a:solidFill>
+                        <a:srgbClr val="D1D9E0"/>
+                      </a:solidFill>
+                      <a:prstDash val="solid"/>
+                      <a:round/>
+                      <a:headEnd type="none" w="med" len="med"/>
+                      <a:tailEnd type="none" w="med" len="med"/>
+                    </a:lnR>
+                    <a:lnT w="6350" cap="flat" cmpd="sng" algn="ctr">
+                      <a:solidFill>
+                        <a:srgbClr val="D1D9E0"/>
+                      </a:solidFill>
+                      <a:prstDash val="solid"/>
+                      <a:round/>
+                      <a:headEnd type="none" w="med" len="med"/>
+                      <a:tailEnd type="none" w="med" len="med"/>
+                    </a:lnT>
+                    <a:lnB w="6350" cap="flat" cmpd="sng" algn="ctr">
+                      <a:solidFill>
+                        <a:srgbClr val="D1D9E0"/>
+                      </a:solidFill>
+                      <a:prstDash val="solid"/>
+                      <a:round/>
+                      <a:headEnd type="none" w="med" len="med"/>
+                      <a:tailEnd type="none" w="med" len="med"/>
+                    </a:lnB>
+                  </a:tcPr>
+                </a:tc>
+                <a:tc>
+                  <a:txBody>
+                    <a:bodyPr/>
+                    <a:lstStyle/>
+                    <a:p>
+                      <a:pPr marL="0" indent="0">
+                        <a:buNone/>
+                      </a:pPr>
+                      <a:r>
+                        <a:rPr lang="en-US" sz="1200" dirty="0">
+                          <a:solidFill>
+                            <a:srgbClr val="64748B"/>
+                          </a:solidFill>
+                          <a:latin typeface="Calibri" pitchFamily="34" charset="0"/>
+                          <a:ea typeface="Calibri" pitchFamily="34" charset="-122"/>
+                          <a:cs typeface="Calibri" pitchFamily="34" charset="-120"/>
+                        </a:rPr>
+                        <a:t>Modelo base</a:t>
+                      </a:r>
+                      <a:endParaRPr lang="en-US" sz="1200" dirty="0">
+                        <a:latin typeface="Calibri" charset="0"/>
+                        <a:ea typeface="Calibri" charset="0"/>
+                        <a:cs typeface="Calibri" charset="0"/>
+                      </a:endParaRPr>
+                    </a:p>
+                  </a:txBody>
+                  <a:tcPr>
+                    <a:lnL w="6350" cap="flat" cmpd="sng" algn="ctr">
+                      <a:solidFill>
+                        <a:srgbClr val="D1D9E0"/>
+                      </a:solidFill>
+                      <a:prstDash val="solid"/>
+                      <a:round/>
+                      <a:headEnd type="none" w="med" len="med"/>
+                      <a:tailEnd type="none" w="med" len="med"/>
+                    </a:lnL>
+                    <a:lnR w="6350" cap="flat" cmpd="sng" algn="ctr">
+                      <a:solidFill>
+                        <a:srgbClr val="D1D9E0"/>
+                      </a:solidFill>
+                      <a:prstDash val="solid"/>
+                      <a:round/>
+                      <a:headEnd type="none" w="med" len="med"/>
+                      <a:tailEnd type="none" w="med" len="med"/>
+                    </a:lnR>
+                    <a:lnT w="6350" cap="flat" cmpd="sng" algn="ctr">
+                      <a:solidFill>
+                        <a:srgbClr val="D1D9E0"/>
+                      </a:solidFill>
+                      <a:prstDash val="solid"/>
+                      <a:round/>
+                      <a:headEnd type="none" w="med" len="med"/>
+                      <a:tailEnd type="none" w="med" len="med"/>
+                    </a:lnT>
+                    <a:lnB w="6350" cap="flat" cmpd="sng" algn="ctr">
+                      <a:solidFill>
+                        <a:srgbClr val="D1D9E0"/>
+                      </a:solidFill>
+                      <a:prstDash val="solid"/>
+                      <a:round/>
+                      <a:headEnd type="none" w="med" len="med"/>
+                      <a:tailEnd type="none" w="med" len="med"/>
+                    </a:lnB>
+                  </a:tcPr>
+                </a:tc>
+                <a:extLst>
+                  <a:ext uri="{0D108BD9-81ED-4DB2-BD59-A6C34878D82A}">
+                    <a16:rowId xmlns:a16="http://schemas.microsoft.com/office/drawing/2014/main" val="10001"/>
+                  </a:ext>
+                </a:extLst>
+              </a:tr>
+              <a:tr h="402336">
+                <a:tc>
+                  <a:txBody>
+                    <a:bodyPr/>
+                    <a:lstStyle/>
+                    <a:p>
+                      <a:pPr marL="0" indent="0">
+                        <a:buNone/>
+                      </a:pPr>
+                      <a:r>
+                        <a:rPr lang="en-US" sz="1200" dirty="0">
+                          <a:solidFill>
+                            <a:srgbClr val="000000"/>
+                          </a:solidFill>
+                          <a:latin typeface="Calibri" pitchFamily="34" charset="0"/>
+                          <a:ea typeface="Calibri" pitchFamily="34" charset="-122"/>
+                          <a:cs typeface="Calibri" pitchFamily="34" charset="-120"/>
+                        </a:rPr>
+                        <a:t>Árbol de Decisión</a:t>
+                      </a:r>
+                      <a:endParaRPr lang="en-US" sz="1200" dirty="0">
+                        <a:latin typeface="Calibri" charset="0"/>
+                        <a:ea typeface="Calibri" charset="0"/>
+                        <a:cs typeface="Calibri" charset="0"/>
+                      </a:endParaRPr>
+                    </a:p>
+                  </a:txBody>
+                  <a:tcPr>
+                    <a:lnL w="6350" cap="flat" cmpd="sng" algn="ctr">
+                      <a:solidFill>
+                        <a:srgbClr val="D1D9E0"/>
+                      </a:solidFill>
+                      <a:prstDash val="solid"/>
+                      <a:round/>
+                      <a:headEnd type="none" w="med" len="med"/>
+                      <a:tailEnd type="none" w="med" len="med"/>
+                    </a:lnL>
+                    <a:lnR w="6350" cap="flat" cmpd="sng" algn="ctr">
+                      <a:solidFill>
+                        <a:srgbClr val="D1D9E0"/>
+                      </a:solidFill>
+                      <a:prstDash val="solid"/>
+                      <a:round/>
+                      <a:headEnd type="none" w="med" len="med"/>
+                      <a:tailEnd type="none" w="med" len="med"/>
+                    </a:lnR>
+                    <a:lnT w="6350" cap="flat" cmpd="sng" algn="ctr">
+                      <a:solidFill>
+                        <a:srgbClr val="D1D9E0"/>
+                      </a:solidFill>
+                      <a:prstDash val="solid"/>
+                      <a:round/>
+                      <a:headEnd type="none" w="med" len="med"/>
+                      <a:tailEnd type="none" w="med" len="med"/>
+                    </a:lnT>
+                    <a:lnB w="6350" cap="flat" cmpd="sng" algn="ctr">
+                      <a:solidFill>
+                        <a:srgbClr val="D1D9E0"/>
+                      </a:solidFill>
+                      <a:prstDash val="solid"/>
+                      <a:round/>
+                      <a:headEnd type="none" w="med" len="med"/>
+                      <a:tailEnd type="none" w="med" len="med"/>
+                    </a:lnB>
+                  </a:tcPr>
+                </a:tc>
+                <a:tc>
+                  <a:txBody>
+                    <a:bodyPr/>
+                    <a:lstStyle/>
+                    <a:p>
+                      <a:pPr marL="0" indent="0">
+                        <a:buNone/>
+                      </a:pPr>
+                      <a:r>
+                        <a:rPr lang="en-US" sz="1200" dirty="0">
+                          <a:solidFill>
+                            <a:srgbClr val="000000"/>
+                          </a:solidFill>
+                          <a:latin typeface="Calibri" pitchFamily="34" charset="0"/>
+                          <a:ea typeface="Calibri" pitchFamily="34" charset="-122"/>
+                          <a:cs typeface="Calibri" pitchFamily="34" charset="-120"/>
+                        </a:rPr>
+                        <a:t>~380</a:t>
+                      </a:r>
+                      <a:endParaRPr lang="en-US" sz="1200" dirty="0">
+                        <a:latin typeface="Calibri" charset="0"/>
+                        <a:ea typeface="Calibri" charset="0"/>
+                        <a:cs typeface="Calibri" charset="0"/>
+                      </a:endParaRPr>
+                    </a:p>
+                  </a:txBody>
+                  <a:tcPr>
+                    <a:lnL w="6350" cap="flat" cmpd="sng" algn="ctr">
+                      <a:solidFill>
+                        <a:srgbClr val="D1D9E0"/>
+                      </a:solidFill>
+                      <a:prstDash val="solid"/>
+                      <a:round/>
+                      <a:headEnd type="none" w="med" len="med"/>
+                      <a:tailEnd type="none" w="med" len="med"/>
+                    </a:lnL>
+                    <a:lnR w="6350" cap="flat" cmpd="sng" algn="ctr">
+                      <a:solidFill>
+                        <a:srgbClr val="D1D9E0"/>
+                      </a:solidFill>
+                      <a:prstDash val="solid"/>
+                      <a:round/>
+                      <a:headEnd type="none" w="med" len="med"/>
+                      <a:tailEnd type="none" w="med" len="med"/>
+                    </a:lnR>
+                    <a:lnT w="6350" cap="flat" cmpd="sng" algn="ctr">
+                      <a:solidFill>
+                        <a:srgbClr val="D1D9E0"/>
+                      </a:solidFill>
+                      <a:prstDash val="solid"/>
+                      <a:round/>
+                      <a:headEnd type="none" w="med" len="med"/>
+                      <a:tailEnd type="none" w="med" len="med"/>
+                    </a:lnT>
+                    <a:lnB w="6350" cap="flat" cmpd="sng" algn="ctr">
+                      <a:solidFill>
+                        <a:srgbClr val="D1D9E0"/>
+                      </a:solidFill>
+                      <a:prstDash val="solid"/>
+                      <a:round/>
+                      <a:headEnd type="none" w="med" len="med"/>
+                      <a:tailEnd type="none" w="med" len="med"/>
+                    </a:lnB>
+                  </a:tcPr>
+                </a:tc>
+                <a:tc>
+                  <a:txBody>
+                    <a:bodyPr/>
+                    <a:lstStyle/>
+                    <a:p>
+                      <a:pPr marL="0" indent="0">
+                        <a:buNone/>
+                      </a:pPr>
+                      <a:r>
+                        <a:rPr lang="en-US" sz="1200" dirty="0">
+                          <a:solidFill>
+                            <a:srgbClr val="000000"/>
+                          </a:solidFill>
+                          <a:latin typeface="Calibri" pitchFamily="34" charset="0"/>
+                          <a:ea typeface="Calibri" pitchFamily="34" charset="-122"/>
+                          <a:cs typeface="Calibri" pitchFamily="34" charset="-120"/>
+                        </a:rPr>
+                        <a:t>~270</a:t>
+                      </a:r>
+                      <a:endParaRPr lang="en-US" sz="1200" dirty="0">
+                        <a:latin typeface="Calibri" charset="0"/>
+                        <a:ea typeface="Calibri" charset="0"/>
+                        <a:cs typeface="Calibri" charset="0"/>
+                      </a:endParaRPr>
+                    </a:p>
+                  </a:txBody>
+                  <a:tcPr>
+                    <a:lnL w="6350" cap="flat" cmpd="sng" algn="ctr">
+                      <a:solidFill>
+                        <a:srgbClr val="D1D9E0"/>
+                      </a:solidFill>
+                      <a:prstDash val="solid"/>
+                      <a:round/>
+                      <a:headEnd type="none" w="med" len="med"/>
+                      <a:tailEnd type="none" w="med" len="med"/>
+                    </a:lnL>
+                    <a:lnR w="6350" cap="flat" cmpd="sng" algn="ctr">
+                      <a:solidFill>
+                        <a:srgbClr val="D1D9E0"/>
+                      </a:solidFill>
+                      <a:prstDash val="solid"/>
+                      <a:round/>
+                      <a:headEnd type="none" w="med" len="med"/>
+                      <a:tailEnd type="none" w="med" len="med"/>
+                    </a:lnR>
+                    <a:lnT w="6350" cap="flat" cmpd="sng" algn="ctr">
+                      <a:solidFill>
+                        <a:srgbClr val="D1D9E0"/>
+                      </a:solidFill>
+                      <a:prstDash val="solid"/>
+                      <a:round/>
+                      <a:headEnd type="none" w="med" len="med"/>
+                      <a:tailEnd type="none" w="med" len="med"/>
+                    </a:lnT>
+                    <a:lnB w="6350" cap="flat" cmpd="sng" algn="ctr">
+                      <a:solidFill>
+                        <a:srgbClr val="D1D9E0"/>
+                      </a:solidFill>
+                      <a:prstDash val="solid"/>
+                      <a:round/>
+                      <a:headEnd type="none" w="med" len="med"/>
+                      <a:tailEnd type="none" w="med" len="med"/>
+                    </a:lnB>
+                  </a:tcPr>
+                </a:tc>
+                <a:tc>
+                  <a:txBody>
+                    <a:bodyPr/>
+                    <a:lstStyle/>
+                    <a:p>
+                      <a:pPr marL="0" indent="0">
+                        <a:buNone/>
+                      </a:pPr>
+                      <a:r>
+                        <a:rPr lang="en-US" sz="1200" dirty="0">
+                          <a:solidFill>
+                            <a:srgbClr val="000000"/>
+                          </a:solidFill>
+                          <a:latin typeface="Calibri" pitchFamily="34" charset="0"/>
+                          <a:ea typeface="Calibri" pitchFamily="34" charset="-122"/>
+                          <a:cs typeface="Calibri" pitchFamily="34" charset="-120"/>
+                        </a:rPr>
+                        <a:t>~0.70</a:t>
+                      </a:r>
+                      <a:endParaRPr lang="en-US" sz="1200" dirty="0">
+                        <a:latin typeface="Calibri" charset="0"/>
+                        <a:ea typeface="Calibri" charset="0"/>
+                        <a:cs typeface="Calibri" charset="0"/>
+                      </a:endParaRPr>
+                    </a:p>
+                  </a:txBody>
+                  <a:tcPr>
+                    <a:lnL w="6350" cap="flat" cmpd="sng" algn="ctr">
+                      <a:solidFill>
+                        <a:srgbClr val="D1D9E0"/>
+                      </a:solidFill>
+                      <a:prstDash val="solid"/>
+                      <a:round/>
+                      <a:headEnd type="none" w="med" len="med"/>
+                      <a:tailEnd type="none" w="med" len="med"/>
+                    </a:lnL>
+                    <a:lnR w="6350" cap="flat" cmpd="sng" algn="ctr">
+                      <a:solidFill>
+                        <a:srgbClr val="D1D9E0"/>
+                      </a:solidFill>
+                      <a:prstDash val="solid"/>
+                      <a:round/>
+                      <a:headEnd type="none" w="med" len="med"/>
+                      <a:tailEnd type="none" w="med" len="med"/>
+                    </a:lnR>
+                    <a:lnT w="6350" cap="flat" cmpd="sng" algn="ctr">
+                      <a:solidFill>
+                        <a:srgbClr val="D1D9E0"/>
+                      </a:solidFill>
+                      <a:prstDash val="solid"/>
+                      <a:round/>
+                      <a:headEnd type="none" w="med" len="med"/>
+                      <a:tailEnd type="none" w="med" len="med"/>
+                    </a:lnT>
+                    <a:lnB w="6350" cap="flat" cmpd="sng" algn="ctr">
+                      <a:solidFill>
+                        <a:srgbClr val="D1D9E0"/>
+                      </a:solidFill>
+                      <a:prstDash val="solid"/>
+                      <a:round/>
+                      <a:headEnd type="none" w="med" len="med"/>
+                      <a:tailEnd type="none" w="med" len="med"/>
+                    </a:lnB>
+                  </a:tcPr>
+                </a:tc>
+                <a:tc>
+                  <a:txBody>
+                    <a:bodyPr/>
+                    <a:lstStyle/>
+                    <a:p>
+                      <a:pPr marL="0" indent="0">
+                        <a:buNone/>
+                      </a:pPr>
+                      <a:r>
+                        <a:rPr lang="en-US" sz="1200" dirty="0">
+                          <a:solidFill>
+                            <a:srgbClr val="0D7377"/>
+                          </a:solidFill>
+                          <a:latin typeface="Calibri" pitchFamily="34" charset="0"/>
+                          <a:ea typeface="Calibri" pitchFamily="34" charset="-122"/>
+                          <a:cs typeface="Calibri" pitchFamily="34" charset="-120"/>
+                        </a:rPr>
+                        <a:t>Mejora notable</a:t>
+                      </a:r>
+                      <a:endParaRPr lang="en-US" sz="1200" dirty="0">
+                        <a:latin typeface="Calibri" charset="0"/>
+                        <a:ea typeface="Calibri" charset="0"/>
+                        <a:cs typeface="Calibri" charset="0"/>
+                      </a:endParaRPr>
+                    </a:p>
+                  </a:txBody>
+                  <a:tcPr>
+                    <a:lnL w="6350" cap="flat" cmpd="sng" algn="ctr">
+                      <a:solidFill>
+                        <a:srgbClr val="D1D9E0"/>
+                      </a:solidFill>
+                      <a:prstDash val="solid"/>
+                      <a:round/>
+                      <a:headEnd type="none" w="med" len="med"/>
+                      <a:tailEnd type="none" w="med" len="med"/>
+                    </a:lnL>
+                    <a:lnR w="6350" cap="flat" cmpd="sng" algn="ctr">
+                      <a:solidFill>
+                        <a:srgbClr val="D1D9E0"/>
+                      </a:solidFill>
+                      <a:prstDash val="solid"/>
+                      <a:round/>
+                      <a:headEnd type="none" w="med" len="med"/>
+                      <a:tailEnd type="none" w="med" len="med"/>
+                    </a:lnR>
+                    <a:lnT w="6350" cap="flat" cmpd="sng" algn="ctr">
+                      <a:solidFill>
+                        <a:srgbClr val="D1D9E0"/>
+                      </a:solidFill>
+                      <a:prstDash val="solid"/>
+                      <a:round/>
+                      <a:headEnd type="none" w="med" len="med"/>
+                      <a:tailEnd type="none" w="med" len="med"/>
+                    </a:lnT>
+                    <a:lnB w="6350" cap="flat" cmpd="sng" algn="ctr">
+                      <a:solidFill>
+                        <a:srgbClr val="D1D9E0"/>
+                      </a:solidFill>
+                      <a:prstDash val="solid"/>
+                      <a:round/>
+                      <a:headEnd type="none" w="med" len="med"/>
+                      <a:tailEnd type="none" w="med" len="med"/>
+                    </a:lnB>
+                  </a:tcPr>
+                </a:tc>
+                <a:extLst>
+                  <a:ext uri="{0D108BD9-81ED-4DB2-BD59-A6C34878D82A}">
+                    <a16:rowId xmlns:a16="http://schemas.microsoft.com/office/drawing/2014/main" val="10002"/>
+                  </a:ext>
+                </a:extLst>
+              </a:tr>
+              <a:tr h="402336">
+                <a:tc>
+                  <a:txBody>
+                    <a:bodyPr/>
+                    <a:lstStyle/>
+                    <a:p>
+                      <a:pPr marL="0" indent="0">
+                        <a:buNone/>
+                      </a:pPr>
+                      <a:r>
+                        <a:rPr lang="en-US" sz="1200" b="1" dirty="0">
+                          <a:solidFill>
+                            <a:srgbClr val="000000"/>
+                          </a:solidFill>
+                          <a:latin typeface="Calibri" pitchFamily="34" charset="0"/>
+                          <a:ea typeface="Calibri" pitchFamily="34" charset="-122"/>
+                          <a:cs typeface="Calibri" pitchFamily="34" charset="-120"/>
+                        </a:rPr>
+                        <a:t>🏆 Random Forest</a:t>
+                      </a:r>
+                      <a:endParaRPr lang="en-US" sz="1200" dirty="0">
+                        <a:latin typeface="Calibri" charset="0"/>
+                        <a:ea typeface="Calibri" charset="0"/>
+                        <a:cs typeface="Calibri" charset="0"/>
+                      </a:endParaRPr>
+                    </a:p>
+                  </a:txBody>
+                  <a:tcPr>
+                    <a:lnL w="6350" cap="flat" cmpd="sng" algn="ctr">
+                      <a:solidFill>
+                        <a:srgbClr val="D1D9E0"/>
+                      </a:solidFill>
+                      <a:prstDash val="solid"/>
+                      <a:round/>
+                      <a:headEnd type="none" w="med" len="med"/>
+                      <a:tailEnd type="none" w="med" len="med"/>
+                    </a:lnL>
+                    <a:lnR w="6350" cap="flat" cmpd="sng" algn="ctr">
+                      <a:solidFill>
+                        <a:srgbClr val="D1D9E0"/>
+                      </a:solidFill>
+                      <a:prstDash val="solid"/>
+                      <a:round/>
+                      <a:headEnd type="none" w="med" len="med"/>
+                      <a:tailEnd type="none" w="med" len="med"/>
+                    </a:lnR>
+                    <a:lnT w="6350" cap="flat" cmpd="sng" algn="ctr">
+                      <a:solidFill>
+                        <a:srgbClr val="D1D9E0"/>
+                      </a:solidFill>
+                      <a:prstDash val="solid"/>
+                      <a:round/>
+                      <a:headEnd type="none" w="med" len="med"/>
+                      <a:tailEnd type="none" w="med" len="med"/>
+                    </a:lnT>
+                    <a:lnB w="6350" cap="flat" cmpd="sng" algn="ctr">
+                      <a:solidFill>
+                        <a:srgbClr val="D1D9E0"/>
+                      </a:solidFill>
+                      <a:prstDash val="solid"/>
+                      <a:round/>
+                      <a:headEnd type="none" w="med" len="med"/>
+                      <a:tailEnd type="none" w="med" len="med"/>
+                    </a:lnB>
+                    <a:solidFill>
+                      <a:srgbClr val="E8F5E9"/>
+                    </a:solidFill>
+                  </a:tcPr>
+                </a:tc>
+                <a:tc>
+                  <a:txBody>
+                    <a:bodyPr/>
+                    <a:lstStyle/>
+                    <a:p>
+                      <a:pPr marL="0" indent="0">
+                        <a:buNone/>
+                      </a:pPr>
+                      <a:r>
+                        <a:rPr lang="en-US" sz="1200" b="1" dirty="0">
+                          <a:solidFill>
+                            <a:srgbClr val="000000"/>
+                          </a:solidFill>
+                          <a:latin typeface="Calibri" pitchFamily="34" charset="0"/>
+                          <a:ea typeface="Calibri" pitchFamily="34" charset="-122"/>
+                          <a:cs typeface="Calibri" pitchFamily="34" charset="-120"/>
+                        </a:rPr>
+                        <a:t>~310</a:t>
+                      </a:r>
+                      <a:endParaRPr lang="en-US" sz="1200" dirty="0">
+                        <a:latin typeface="Calibri" charset="0"/>
+                        <a:ea typeface="Calibri" charset="0"/>
+                        <a:cs typeface="Calibri" charset="0"/>
+                      </a:endParaRPr>
+                    </a:p>
+                  </a:txBody>
+                  <a:tcPr>
+                    <a:lnL w="6350" cap="flat" cmpd="sng" algn="ctr">
+                      <a:solidFill>
+                        <a:srgbClr val="D1D9E0"/>
+                      </a:solidFill>
+                      <a:prstDash val="solid"/>
+                      <a:round/>
+                      <a:headEnd type="none" w="med" len="med"/>
+                      <a:tailEnd type="none" w="med" len="med"/>
+                    </a:lnL>
+                    <a:lnR w="6350" cap="flat" cmpd="sng" algn="ctr">
+                      <a:solidFill>
+                        <a:srgbClr val="D1D9E0"/>
+                      </a:solidFill>
+                      <a:prstDash val="solid"/>
+                      <a:round/>
+                      <a:headEnd type="none" w="med" len="med"/>
+                      <a:tailEnd type="none" w="med" len="med"/>
+                    </a:lnR>
+                    <a:lnT w="6350" cap="flat" cmpd="sng" algn="ctr">
+                      <a:solidFill>
+                        <a:srgbClr val="D1D9E0"/>
+                      </a:solidFill>
+                      <a:prstDash val="solid"/>
+                      <a:round/>
+                      <a:headEnd type="none" w="med" len="med"/>
+                      <a:tailEnd type="none" w="med" len="med"/>
+                    </a:lnT>
+                    <a:lnB w="6350" cap="flat" cmpd="sng" algn="ctr">
+                      <a:solidFill>
+                        <a:srgbClr val="D1D9E0"/>
+                      </a:solidFill>
+                      <a:prstDash val="solid"/>
+                      <a:round/>
+                      <a:headEnd type="none" w="med" len="med"/>
+                      <a:tailEnd type="none" w="med" len="med"/>
+                    </a:lnB>
+                    <a:solidFill>
+                      <a:srgbClr val="E8F5E9"/>
+                    </a:solidFill>
+                  </a:tcPr>
+                </a:tc>
+                <a:tc>
+                  <a:txBody>
+                    <a:bodyPr/>
+                    <a:lstStyle/>
+                    <a:p>
+                      <a:pPr marL="0" indent="0">
+                        <a:buNone/>
+                      </a:pPr>
+                      <a:r>
+                        <a:rPr lang="en-US" sz="1200" b="1" dirty="0">
+                          <a:solidFill>
+                            <a:srgbClr val="000000"/>
+                          </a:solidFill>
+                          <a:latin typeface="Calibri" pitchFamily="34" charset="0"/>
+                          <a:ea typeface="Calibri" pitchFamily="34" charset="-122"/>
+                          <a:cs typeface="Calibri" pitchFamily="34" charset="-120"/>
+                        </a:rPr>
+                        <a:t>~210</a:t>
+                      </a:r>
+                      <a:endParaRPr lang="en-US" sz="1200" dirty="0">
+                        <a:latin typeface="Calibri" charset="0"/>
+                        <a:ea typeface="Calibri" charset="0"/>
+                        <a:cs typeface="Calibri" charset="0"/>
+                      </a:endParaRPr>
+                    </a:p>
+                  </a:txBody>
+                  <a:tcPr>
+                    <a:lnL w="6350" cap="flat" cmpd="sng" algn="ctr">
+                      <a:solidFill>
+                        <a:srgbClr val="D1D9E0"/>
+                      </a:solidFill>
+                      <a:prstDash val="solid"/>
+                      <a:round/>
+                      <a:headEnd type="none" w="med" len="med"/>
+                      <a:tailEnd type="none" w="med" len="med"/>
+                    </a:lnL>
+                    <a:lnR w="6350" cap="flat" cmpd="sng" algn="ctr">
+                      <a:solidFill>
+                        <a:srgbClr val="D1D9E0"/>
+                      </a:solidFill>
+                      <a:prstDash val="solid"/>
+                      <a:round/>
+                      <a:headEnd type="none" w="med" len="med"/>
+                      <a:tailEnd type="none" w="med" len="med"/>
+                    </a:lnR>
+                    <a:lnT w="6350" cap="flat" cmpd="sng" algn="ctr">
+                      <a:solidFill>
+                        <a:srgbClr val="D1D9E0"/>
+                      </a:solidFill>
+                      <a:prstDash val="solid"/>
+                      <a:round/>
+                      <a:headEnd type="none" w="med" len="med"/>
+                      <a:tailEnd type="none" w="med" len="med"/>
+                    </a:lnT>
+                    <a:lnB w="6350" cap="flat" cmpd="sng" algn="ctr">
+                      <a:solidFill>
+                        <a:srgbClr val="D1D9E0"/>
+                      </a:solidFill>
+                      <a:prstDash val="solid"/>
+                      <a:round/>
+                      <a:headEnd type="none" w="med" len="med"/>
+                      <a:tailEnd type="none" w="med" len="med"/>
+                    </a:lnB>
+                    <a:solidFill>
+                      <a:srgbClr val="E8F5E9"/>
+                    </a:solidFill>
+                  </a:tcPr>
+                </a:tc>
+                <a:tc>
+                  <a:txBody>
+                    <a:bodyPr/>
+                    <a:lstStyle/>
+                    <a:p>
+                      <a:pPr marL="0" indent="0">
+                        <a:buNone/>
+                      </a:pPr>
+                      <a:r>
+                        <a:rPr lang="en-US" sz="1200" b="1" dirty="0">
+                          <a:solidFill>
+                            <a:srgbClr val="000000"/>
+                          </a:solidFill>
+                          <a:latin typeface="Calibri" pitchFamily="34" charset="0"/>
+                          <a:ea typeface="Calibri" pitchFamily="34" charset="-122"/>
+                          <a:cs typeface="Calibri" pitchFamily="34" charset="-120"/>
+                        </a:rPr>
+                        <a:t>~0.82</a:t>
+                      </a:r>
+                      <a:endParaRPr lang="en-US" sz="1200" dirty="0">
+                        <a:latin typeface="Calibri" charset="0"/>
+                        <a:ea typeface="Calibri" charset="0"/>
+                        <a:cs typeface="Calibri" charset="0"/>
+                      </a:endParaRPr>
+                    </a:p>
+                  </a:txBody>
+                  <a:tcPr>
+                    <a:lnL w="6350" cap="flat" cmpd="sng" algn="ctr">
+                      <a:solidFill>
+                        <a:srgbClr val="D1D9E0"/>
+                      </a:solidFill>
+                      <a:prstDash val="solid"/>
+                      <a:round/>
+                      <a:headEnd type="none" w="med" len="med"/>
+                      <a:tailEnd type="none" w="med" len="med"/>
+                    </a:lnL>
+                    <a:lnR w="6350" cap="flat" cmpd="sng" algn="ctr">
+                      <a:solidFill>
+                        <a:srgbClr val="D1D9E0"/>
+                      </a:solidFill>
+                      <a:prstDash val="solid"/>
+                      <a:round/>
+                      <a:headEnd type="none" w="med" len="med"/>
+                      <a:tailEnd type="none" w="med" len="med"/>
+                    </a:lnR>
+                    <a:lnT w="6350" cap="flat" cmpd="sng" algn="ctr">
+                      <a:solidFill>
+                        <a:srgbClr val="D1D9E0"/>
+                      </a:solidFill>
+                      <a:prstDash val="solid"/>
+                      <a:round/>
+                      <a:headEnd type="none" w="med" len="med"/>
+                      <a:tailEnd type="none" w="med" len="med"/>
+                    </a:lnT>
+                    <a:lnB w="6350" cap="flat" cmpd="sng" algn="ctr">
+                      <a:solidFill>
+                        <a:srgbClr val="D1D9E0"/>
+                      </a:solidFill>
+                      <a:prstDash val="solid"/>
+                      <a:round/>
+                      <a:headEnd type="none" w="med" len="med"/>
+                      <a:tailEnd type="none" w="med" len="med"/>
+                    </a:lnB>
+                    <a:solidFill>
+                      <a:srgbClr val="E8F5E9"/>
+                    </a:solidFill>
+                  </a:tcPr>
+                </a:tc>
+                <a:tc>
+                  <a:txBody>
+                    <a:bodyPr/>
+                    <a:lstStyle/>
+                    <a:p>
+                      <a:pPr marL="0" indent="0">
+                        <a:buNone/>
+                      </a:pPr>
+                      <a:r>
+                        <a:rPr lang="en-US" sz="1200" b="1" dirty="0">
+                          <a:solidFill>
+                            <a:srgbClr val="0D7377"/>
+                          </a:solidFill>
+                          <a:latin typeface="Calibri" pitchFamily="34" charset="0"/>
+                          <a:ea typeface="Calibri" pitchFamily="34" charset="-122"/>
+                          <a:cs typeface="Calibri" pitchFamily="34" charset="-120"/>
+                        </a:rPr>
+                        <a:t>✅ Mejor modelo</a:t>
+                      </a:r>
+                      <a:endParaRPr lang="en-US" sz="1200" dirty="0">
+                        <a:latin typeface="Calibri" charset="0"/>
+                        <a:ea typeface="Calibri" charset="0"/>
+                        <a:cs typeface="Calibri" charset="0"/>
+                      </a:endParaRPr>
+                    </a:p>
+                  </a:txBody>
+                  <a:tcPr>
+                    <a:lnL w="6350" cap="flat" cmpd="sng" algn="ctr">
+                      <a:solidFill>
+                        <a:srgbClr val="D1D9E0"/>
+                      </a:solidFill>
+                      <a:prstDash val="solid"/>
+                      <a:round/>
+                      <a:headEnd type="none" w="med" len="med"/>
+                      <a:tailEnd type="none" w="med" len="med"/>
+                    </a:lnL>
+                    <a:lnR w="6350" cap="flat" cmpd="sng" algn="ctr">
+                      <a:solidFill>
+                        <a:srgbClr val="D1D9E0"/>
+                      </a:solidFill>
+                      <a:prstDash val="solid"/>
+                      <a:round/>
+                      <a:headEnd type="none" w="med" len="med"/>
+                      <a:tailEnd type="none" w="med" len="med"/>
+                    </a:lnR>
+                    <a:lnT w="6350" cap="flat" cmpd="sng" algn="ctr">
+                      <a:solidFill>
+                        <a:srgbClr val="D1D9E0"/>
+                      </a:solidFill>
+                      <a:prstDash val="solid"/>
+                      <a:round/>
+                      <a:headEnd type="none" w="med" len="med"/>
+                      <a:tailEnd type="none" w="med" len="med"/>
+                    </a:lnT>
+                    <a:lnB w="6350" cap="flat" cmpd="sng" algn="ctr">
+                      <a:solidFill>
+                        <a:srgbClr val="D1D9E0"/>
+                      </a:solidFill>
+                      <a:prstDash val="solid"/>
+                      <a:round/>
+                      <a:headEnd type="none" w="med" len="med"/>
+                      <a:tailEnd type="none" w="med" len="med"/>
+                    </a:lnB>
+                    <a:solidFill>
+                      <a:srgbClr val="E8F5E9"/>
+                    </a:solidFill>
+                  </a:tcPr>
+                </a:tc>
+                <a:extLst>
+                  <a:ext uri="{0D108BD9-81ED-4DB2-BD59-A6C34878D82A}">
+                    <a16:rowId xmlns:a16="http://schemas.microsoft.com/office/drawing/2014/main" val="10003"/>
+                  </a:ext>
+                </a:extLst>
+              </a:tr>
+            </a:tbl>
+          </a:graphicData>
+        </a:graphic>
+      </p:graphicFrame>
+      <p:sp>
+        <p:nvSpPr>
+          <p:cNvPr id="5" name="Text 2">
+            <a:extLst>
+              <a:ext uri="{FF2B5EF4-FFF2-40B4-BE49-F238E27FC236}">
+                <a16:creationId xmlns:a16="http://schemas.microsoft.com/office/drawing/2014/main" id="{2A3869A1-1200-775F-F1B5-801BA46787D8}"/>
+              </a:ext>
+            </a:extLst>
+          </p:cNvPr>
+          <p:cNvSpPr/>
+          <p:nvPr/>
+        </p:nvSpPr>
+        <p:spPr>
+          <a:xfrm>
+            <a:off x="457200" y="3063240"/>
+            <a:ext cx="8229600" cy="365760"/>
+          </a:xfrm>
+          <a:prstGeom prst="rect">
+            <a:avLst/>
+          </a:prstGeom>
+          <a:noFill/>
+          <a:ln/>
+        </p:spPr>
+        <p:txBody>
+          <a:bodyPr wrap="square" rtlCol="0" anchor="ctr"/>
+          <a:lstStyle/>
+          <a:p>
+            <a:pPr marL="0" indent="0">
+              <a:buNone/>
+            </a:pPr>
+            <a:r>
+              <a:rPr lang="en-US" sz="1400" b="1" dirty="0">
+                <a:solidFill>
+                  <a:srgbClr val="1A2744"/>
+                </a:solidFill>
+                <a:latin typeface="Calibri" pitchFamily="34" charset="0"/>
+                <a:ea typeface="Calibri" pitchFamily="34" charset="-122"/>
+                <a:cs typeface="Calibri" pitchFamily="34" charset="-120"/>
+              </a:rPr>
+              <a:t>Top Features — Random Forest</a:t>
+            </a:r>
+            <a:endParaRPr lang="en-US" sz="1400" dirty="0"/>
+          </a:p>
+        </p:txBody>
+      </p:sp>
+      <p:sp>
+        <p:nvSpPr>
+          <p:cNvPr id="6" name="Text 3">
+            <a:extLst>
+              <a:ext uri="{FF2B5EF4-FFF2-40B4-BE49-F238E27FC236}">
+                <a16:creationId xmlns:a16="http://schemas.microsoft.com/office/drawing/2014/main" id="{2E05D144-4F72-0639-6186-A845F05FE00E}"/>
+              </a:ext>
+            </a:extLst>
+          </p:cNvPr>
+          <p:cNvSpPr/>
+          <p:nvPr/>
+        </p:nvSpPr>
+        <p:spPr>
+          <a:xfrm>
+            <a:off x="457200" y="3520440"/>
+            <a:ext cx="2011680" cy="246888"/>
+          </a:xfrm>
+          <a:prstGeom prst="rect">
+            <a:avLst/>
+          </a:prstGeom>
+          <a:noFill/>
+          <a:ln/>
+        </p:spPr>
+        <p:txBody>
+          <a:bodyPr wrap="square" rtlCol="0" anchor="ctr"/>
+          <a:lstStyle/>
+          <a:p>
+            <a:pPr marL="0" indent="0">
+              <a:buNone/>
+            </a:pPr>
+            <a:r>
+              <a:rPr lang="en-US" sz="1000" dirty="0">
+                <a:solidFill>
+                  <a:srgbClr val="1E293B"/>
+                </a:solidFill>
+                <a:latin typeface="Calibri" pitchFamily="34" charset="0"/>
+                <a:ea typeface="Calibri" pitchFamily="34" charset="-122"/>
+                <a:cs typeface="Calibri" pitchFamily="34" charset="-120"/>
+              </a:rPr>
+              <a:t>Latitud / Longitud</a:t>
+            </a:r>
+            <a:endParaRPr lang="en-US" sz="1000" dirty="0"/>
+          </a:p>
+        </p:txBody>
+      </p:sp>
+      <p:sp>
+        <p:nvSpPr>
+          <p:cNvPr id="7" name="Shape 4">
+            <a:extLst>
+              <a:ext uri="{FF2B5EF4-FFF2-40B4-BE49-F238E27FC236}">
+                <a16:creationId xmlns:a16="http://schemas.microsoft.com/office/drawing/2014/main" id="{1F05F4BF-7E7F-1C0B-B9D1-79B4C164EB7C}"/>
+              </a:ext>
+            </a:extLst>
+          </p:cNvPr>
+          <p:cNvSpPr/>
+          <p:nvPr/>
+        </p:nvSpPr>
+        <p:spPr>
+          <a:xfrm>
+            <a:off x="2514600" y="3557016"/>
+            <a:ext cx="2194560" cy="182880"/>
+          </a:xfrm>
+          <a:prstGeom prst="rect">
+            <a:avLst/>
+          </a:prstGeom>
+          <a:solidFill>
+            <a:srgbClr val="0D7377"/>
+          </a:solidFill>
+          <a:ln w="12700">
+            <a:solidFill>
+              <a:srgbClr val="0D7377"/>
+            </a:solidFill>
+            <a:prstDash val="solid"/>
+          </a:ln>
+        </p:spPr>
+        <p:txBody>
+          <a:bodyPr/>
+          <a:lstStyle/>
+          <a:p>
+            <a:endParaRPr lang="es-ES"/>
+          </a:p>
+        </p:txBody>
+      </p:sp>
+      <p:sp>
+        <p:nvSpPr>
+          <p:cNvPr id="4" name="Text 5">
+            <a:extLst>
+              <a:ext uri="{FF2B5EF4-FFF2-40B4-BE49-F238E27FC236}">
+                <a16:creationId xmlns:a16="http://schemas.microsoft.com/office/drawing/2014/main" id="{D177492D-4DDA-FEBB-295E-63D0B0E4CF83}"/>
+              </a:ext>
+            </a:extLst>
+          </p:cNvPr>
+          <p:cNvSpPr/>
+          <p:nvPr/>
+        </p:nvSpPr>
+        <p:spPr>
+          <a:xfrm>
+            <a:off x="4800600" y="3520440"/>
+            <a:ext cx="457200" cy="246888"/>
+          </a:xfrm>
+          <a:prstGeom prst="rect">
+            <a:avLst/>
+          </a:prstGeom>
+          <a:noFill/>
+          <a:ln/>
+        </p:spPr>
+        <p:txBody>
+          <a:bodyPr wrap="square" rtlCol="0" anchor="ctr"/>
+          <a:lstStyle/>
+          <a:p>
+            <a:pPr marL="0" indent="0">
+              <a:buNone/>
+            </a:pPr>
+            <a:r>
+              <a:rPr lang="en-US" sz="1000" dirty="0">
+                <a:solidFill>
+                  <a:srgbClr val="64748B"/>
+                </a:solidFill>
+                <a:latin typeface="Calibri" pitchFamily="34" charset="0"/>
+                <a:ea typeface="Calibri" pitchFamily="34" charset="-122"/>
+                <a:cs typeface="Calibri" pitchFamily="34" charset="-120"/>
+              </a:rPr>
+              <a:t>32%</a:t>
+            </a:r>
+            <a:endParaRPr lang="en-US" sz="1000" dirty="0"/>
+          </a:p>
+        </p:txBody>
+      </p:sp>
+      <p:sp>
+        <p:nvSpPr>
+          <p:cNvPr id="9" name="Text 6">
+            <a:extLst>
+              <a:ext uri="{FF2B5EF4-FFF2-40B4-BE49-F238E27FC236}">
+                <a16:creationId xmlns:a16="http://schemas.microsoft.com/office/drawing/2014/main" id="{D33A4400-D1A0-29A0-64E5-FC7A26B218F6}"/>
+              </a:ext>
+            </a:extLst>
+          </p:cNvPr>
+          <p:cNvSpPr/>
+          <p:nvPr/>
+        </p:nvSpPr>
+        <p:spPr>
+          <a:xfrm>
+            <a:off x="457200" y="3813048"/>
+            <a:ext cx="2011680" cy="246888"/>
+          </a:xfrm>
+          <a:prstGeom prst="rect">
+            <a:avLst/>
+          </a:prstGeom>
+          <a:noFill/>
+          <a:ln/>
+        </p:spPr>
+        <p:txBody>
+          <a:bodyPr wrap="square" rtlCol="0" anchor="ctr"/>
+          <a:lstStyle/>
+          <a:p>
+            <a:pPr marL="0" indent="0">
+              <a:buNone/>
+            </a:pPr>
+            <a:r>
+              <a:rPr lang="en-US" sz="1000" dirty="0">
+                <a:solidFill>
+                  <a:srgbClr val="1E293B"/>
+                </a:solidFill>
+                <a:latin typeface="Calibri" pitchFamily="34" charset="0"/>
+                <a:ea typeface="Calibri" pitchFamily="34" charset="-122"/>
+                <a:cs typeface="Calibri" pitchFamily="34" charset="-120"/>
+              </a:rPr>
+              <a:t>Superficie</a:t>
+            </a:r>
+            <a:endParaRPr lang="en-US" sz="1000" dirty="0"/>
+          </a:p>
+        </p:txBody>
+      </p:sp>
+      <p:sp>
+        <p:nvSpPr>
+          <p:cNvPr id="10" name="Shape 7">
+            <a:extLst>
+              <a:ext uri="{FF2B5EF4-FFF2-40B4-BE49-F238E27FC236}">
+                <a16:creationId xmlns:a16="http://schemas.microsoft.com/office/drawing/2014/main" id="{B10DD300-F64A-FF19-8AD0-823AA6036979}"/>
+              </a:ext>
+            </a:extLst>
+          </p:cNvPr>
+          <p:cNvSpPr/>
+          <p:nvPr/>
+        </p:nvSpPr>
+        <p:spPr>
+          <a:xfrm>
+            <a:off x="2514600" y="3849624"/>
+            <a:ext cx="1714500" cy="182880"/>
+          </a:xfrm>
+          <a:prstGeom prst="rect">
+            <a:avLst/>
+          </a:prstGeom>
+          <a:solidFill>
+            <a:srgbClr val="0D7377"/>
+          </a:solidFill>
+          <a:ln w="12700">
+            <a:solidFill>
+              <a:srgbClr val="0D7377"/>
+            </a:solidFill>
+            <a:prstDash val="solid"/>
+          </a:ln>
+        </p:spPr>
+        <p:txBody>
+          <a:bodyPr/>
+          <a:lstStyle/>
+          <a:p>
+            <a:endParaRPr lang="es-ES"/>
+          </a:p>
+        </p:txBody>
+      </p:sp>
+      <p:sp>
+        <p:nvSpPr>
+          <p:cNvPr id="11" name="Text 8">
+            <a:extLst>
+              <a:ext uri="{FF2B5EF4-FFF2-40B4-BE49-F238E27FC236}">
+                <a16:creationId xmlns:a16="http://schemas.microsoft.com/office/drawing/2014/main" id="{23A689D9-1E10-1BF5-88BF-D3C0014F5F97}"/>
+              </a:ext>
+            </a:extLst>
+          </p:cNvPr>
+          <p:cNvSpPr/>
+          <p:nvPr/>
+        </p:nvSpPr>
+        <p:spPr>
+          <a:xfrm>
+            <a:off x="4320540" y="3813048"/>
+            <a:ext cx="457200" cy="246888"/>
+          </a:xfrm>
+          <a:prstGeom prst="rect">
+            <a:avLst/>
+          </a:prstGeom>
+          <a:noFill/>
+          <a:ln/>
+        </p:spPr>
+        <p:txBody>
+          <a:bodyPr wrap="square" rtlCol="0" anchor="ctr"/>
+          <a:lstStyle/>
+          <a:p>
+            <a:pPr marL="0" indent="0">
+              <a:buNone/>
+            </a:pPr>
+            <a:r>
+              <a:rPr lang="en-US" sz="1000" dirty="0">
+                <a:solidFill>
+                  <a:srgbClr val="64748B"/>
+                </a:solidFill>
+                <a:latin typeface="Calibri" pitchFamily="34" charset="0"/>
+                <a:ea typeface="Calibri" pitchFamily="34" charset="-122"/>
+                <a:cs typeface="Calibri" pitchFamily="34" charset="-120"/>
+              </a:rPr>
+              <a:t>25%</a:t>
+            </a:r>
+            <a:endParaRPr lang="en-US" sz="1000" dirty="0"/>
+          </a:p>
+        </p:txBody>
+      </p:sp>
+      <p:sp>
+        <p:nvSpPr>
+          <p:cNvPr id="12" name="Text 9">
+            <a:extLst>
+              <a:ext uri="{FF2B5EF4-FFF2-40B4-BE49-F238E27FC236}">
+                <a16:creationId xmlns:a16="http://schemas.microsoft.com/office/drawing/2014/main" id="{C14FCE1C-6641-4CB3-AFC9-04A41F1804FB}"/>
+              </a:ext>
+            </a:extLst>
+          </p:cNvPr>
+          <p:cNvSpPr/>
+          <p:nvPr/>
+        </p:nvSpPr>
+        <p:spPr>
+          <a:xfrm>
+            <a:off x="457200" y="4105656"/>
+            <a:ext cx="2011680" cy="246888"/>
+          </a:xfrm>
+          <a:prstGeom prst="rect">
+            <a:avLst/>
+          </a:prstGeom>
+          <a:noFill/>
+          <a:ln/>
+        </p:spPr>
+        <p:txBody>
+          <a:bodyPr wrap="square" rtlCol="0" anchor="ctr"/>
+          <a:lstStyle/>
+          <a:p>
+            <a:pPr marL="0" indent="0">
+              <a:buNone/>
+            </a:pPr>
+            <a:r>
+              <a:rPr lang="en-US" sz="1000" dirty="0">
+                <a:solidFill>
+                  <a:srgbClr val="1E293B"/>
+                </a:solidFill>
+                <a:latin typeface="Calibri" pitchFamily="34" charset="0"/>
+                <a:ea typeface="Calibri" pitchFamily="34" charset="-122"/>
+                <a:cs typeface="Calibri" pitchFamily="34" charset="-120"/>
+              </a:rPr>
+              <a:t>Barrio (OHE)</a:t>
+            </a:r>
+            <a:endParaRPr lang="en-US" sz="1000" dirty="0"/>
+          </a:p>
+        </p:txBody>
+      </p:sp>
+      <p:sp>
+        <p:nvSpPr>
+          <p:cNvPr id="13" name="Shape 10">
+            <a:extLst>
+              <a:ext uri="{FF2B5EF4-FFF2-40B4-BE49-F238E27FC236}">
+                <a16:creationId xmlns:a16="http://schemas.microsoft.com/office/drawing/2014/main" id="{A415AD2F-B4D5-D59E-0EFD-07FA93AC01A2}"/>
+              </a:ext>
+            </a:extLst>
+          </p:cNvPr>
+          <p:cNvSpPr/>
+          <p:nvPr/>
+        </p:nvSpPr>
+        <p:spPr>
+          <a:xfrm>
+            <a:off x="2514600" y="4142232"/>
+            <a:ext cx="1234440" cy="182880"/>
+          </a:xfrm>
+          <a:prstGeom prst="rect">
+            <a:avLst/>
+          </a:prstGeom>
+          <a:solidFill>
+            <a:srgbClr val="E07B39"/>
+          </a:solidFill>
+          <a:ln w="12700">
+            <a:solidFill>
+              <a:srgbClr val="E07B39"/>
+            </a:solidFill>
+            <a:prstDash val="solid"/>
+          </a:ln>
+        </p:spPr>
+        <p:txBody>
+          <a:bodyPr/>
+          <a:lstStyle/>
+          <a:p>
+            <a:endParaRPr lang="es-ES"/>
+          </a:p>
+        </p:txBody>
+      </p:sp>
+      <p:sp>
+        <p:nvSpPr>
+          <p:cNvPr id="14" name="Text 11">
+            <a:extLst>
+              <a:ext uri="{FF2B5EF4-FFF2-40B4-BE49-F238E27FC236}">
+                <a16:creationId xmlns:a16="http://schemas.microsoft.com/office/drawing/2014/main" id="{1308897B-42D8-92D3-A6DB-4C453DE53073}"/>
+              </a:ext>
+            </a:extLst>
+          </p:cNvPr>
+          <p:cNvSpPr/>
+          <p:nvPr/>
+        </p:nvSpPr>
+        <p:spPr>
+          <a:xfrm>
+            <a:off x="3840480" y="4105656"/>
+            <a:ext cx="457200" cy="246888"/>
+          </a:xfrm>
+          <a:prstGeom prst="rect">
+            <a:avLst/>
+          </a:prstGeom>
+          <a:noFill/>
+          <a:ln/>
+        </p:spPr>
+        <p:txBody>
+          <a:bodyPr wrap="square" rtlCol="0" anchor="ctr"/>
+          <a:lstStyle/>
+          <a:p>
+            <a:pPr marL="0" indent="0">
+              <a:buNone/>
+            </a:pPr>
+            <a:r>
+              <a:rPr lang="en-US" sz="1000" dirty="0">
+                <a:solidFill>
+                  <a:srgbClr val="64748B"/>
+                </a:solidFill>
+                <a:latin typeface="Calibri" pitchFamily="34" charset="0"/>
+                <a:ea typeface="Calibri" pitchFamily="34" charset="-122"/>
+                <a:cs typeface="Calibri" pitchFamily="34" charset="-120"/>
+              </a:rPr>
+              <a:t>18%</a:t>
+            </a:r>
+            <a:endParaRPr lang="en-US" sz="1000" dirty="0"/>
+          </a:p>
+        </p:txBody>
+      </p:sp>
+      <p:sp>
+        <p:nvSpPr>
+          <p:cNvPr id="15" name="Text 12">
+            <a:extLst>
+              <a:ext uri="{FF2B5EF4-FFF2-40B4-BE49-F238E27FC236}">
+                <a16:creationId xmlns:a16="http://schemas.microsoft.com/office/drawing/2014/main" id="{D708B6BB-9713-6A9A-7EDB-C607C554A94B}"/>
+              </a:ext>
+            </a:extLst>
+          </p:cNvPr>
+          <p:cNvSpPr/>
+          <p:nvPr/>
+        </p:nvSpPr>
+        <p:spPr>
+          <a:xfrm>
+            <a:off x="457200" y="4398264"/>
+            <a:ext cx="2011680" cy="246888"/>
+          </a:xfrm>
+          <a:prstGeom prst="rect">
+            <a:avLst/>
+          </a:prstGeom>
+          <a:noFill/>
+          <a:ln/>
+        </p:spPr>
+        <p:txBody>
+          <a:bodyPr wrap="square" rtlCol="0" anchor="ctr"/>
+          <a:lstStyle/>
+          <a:p>
+            <a:pPr marL="0" indent="0">
+              <a:buNone/>
+            </a:pPr>
+            <a:r>
+              <a:rPr lang="en-US" sz="1000" dirty="0">
+                <a:solidFill>
+                  <a:srgbClr val="1E293B"/>
+                </a:solidFill>
+                <a:latin typeface="Calibri" pitchFamily="34" charset="0"/>
+                <a:ea typeface="Calibri" pitchFamily="34" charset="-122"/>
+                <a:cs typeface="Calibri" pitchFamily="34" charset="-120"/>
+              </a:rPr>
+              <a:t>Baños</a:t>
+            </a:r>
+            <a:endParaRPr lang="en-US" sz="1000" dirty="0"/>
+          </a:p>
+        </p:txBody>
+      </p:sp>
+      <p:sp>
+        <p:nvSpPr>
+          <p:cNvPr id="16" name="Shape 13">
+            <a:extLst>
+              <a:ext uri="{FF2B5EF4-FFF2-40B4-BE49-F238E27FC236}">
+                <a16:creationId xmlns:a16="http://schemas.microsoft.com/office/drawing/2014/main" id="{561C803A-DF42-8F55-AEBA-0C9AFEA86541}"/>
+              </a:ext>
+            </a:extLst>
+          </p:cNvPr>
+          <p:cNvSpPr/>
+          <p:nvPr/>
+        </p:nvSpPr>
+        <p:spPr>
+          <a:xfrm>
+            <a:off x="2514600" y="4434840"/>
+            <a:ext cx="822960" cy="182880"/>
+          </a:xfrm>
+          <a:prstGeom prst="rect">
+            <a:avLst/>
+          </a:prstGeom>
+          <a:solidFill>
+            <a:srgbClr val="E07B39"/>
+          </a:solidFill>
+          <a:ln w="12700">
+            <a:solidFill>
+              <a:srgbClr val="E07B39"/>
+            </a:solidFill>
+            <a:prstDash val="solid"/>
+          </a:ln>
+        </p:spPr>
+        <p:txBody>
+          <a:bodyPr/>
+          <a:lstStyle/>
+          <a:p>
+            <a:endParaRPr lang="es-ES"/>
+          </a:p>
+        </p:txBody>
+      </p:sp>
+      <p:sp>
+        <p:nvSpPr>
+          <p:cNvPr id="17" name="Text 14">
+            <a:extLst>
+              <a:ext uri="{FF2B5EF4-FFF2-40B4-BE49-F238E27FC236}">
+                <a16:creationId xmlns:a16="http://schemas.microsoft.com/office/drawing/2014/main" id="{A464375A-CDB3-3DE6-5646-E64CFF1B63D5}"/>
+              </a:ext>
+            </a:extLst>
+          </p:cNvPr>
+          <p:cNvSpPr/>
+          <p:nvPr/>
+        </p:nvSpPr>
+        <p:spPr>
+          <a:xfrm>
+            <a:off x="3429000" y="4398264"/>
+            <a:ext cx="457200" cy="246888"/>
+          </a:xfrm>
+          <a:prstGeom prst="rect">
+            <a:avLst/>
+          </a:prstGeom>
+          <a:noFill/>
+          <a:ln/>
+        </p:spPr>
+        <p:txBody>
+          <a:bodyPr wrap="square" rtlCol="0" anchor="ctr"/>
+          <a:lstStyle/>
+          <a:p>
+            <a:pPr marL="0" indent="0">
+              <a:buNone/>
+            </a:pPr>
+            <a:r>
+              <a:rPr lang="en-US" sz="1000" dirty="0">
+                <a:solidFill>
+                  <a:srgbClr val="64748B"/>
+                </a:solidFill>
+                <a:latin typeface="Calibri" pitchFamily="34" charset="0"/>
+                <a:ea typeface="Calibri" pitchFamily="34" charset="-122"/>
+                <a:cs typeface="Calibri" pitchFamily="34" charset="-120"/>
+              </a:rPr>
+              <a:t>12%</a:t>
+            </a:r>
+            <a:endParaRPr lang="en-US" sz="1000" dirty="0"/>
+          </a:p>
+        </p:txBody>
+      </p:sp>
+      <p:sp>
+        <p:nvSpPr>
+          <p:cNvPr id="18" name="Text 15">
+            <a:extLst>
+              <a:ext uri="{FF2B5EF4-FFF2-40B4-BE49-F238E27FC236}">
+                <a16:creationId xmlns:a16="http://schemas.microsoft.com/office/drawing/2014/main" id="{AE95EA2F-BF99-0BB8-608C-FB0AE3187FD5}"/>
+              </a:ext>
+            </a:extLst>
+          </p:cNvPr>
+          <p:cNvSpPr/>
+          <p:nvPr/>
+        </p:nvSpPr>
+        <p:spPr>
+          <a:xfrm>
+            <a:off x="457200" y="4690872"/>
+            <a:ext cx="2011680" cy="246888"/>
+          </a:xfrm>
+          <a:prstGeom prst="rect">
+            <a:avLst/>
+          </a:prstGeom>
+          <a:noFill/>
+          <a:ln/>
+        </p:spPr>
+        <p:txBody>
+          <a:bodyPr wrap="square" rtlCol="0" anchor="ctr"/>
+          <a:lstStyle/>
+          <a:p>
+            <a:pPr marL="0" indent="0">
+              <a:buNone/>
+            </a:pPr>
+            <a:r>
+              <a:rPr lang="en-US" sz="1000" dirty="0">
+                <a:solidFill>
+                  <a:srgbClr val="1E293B"/>
+                </a:solidFill>
+                <a:latin typeface="Calibri" pitchFamily="34" charset="0"/>
+                <a:ea typeface="Calibri" pitchFamily="34" charset="-122"/>
+                <a:cs typeface="Calibri" pitchFamily="34" charset="-120"/>
+              </a:rPr>
+              <a:t>Dormitorios</a:t>
+            </a:r>
+            <a:endParaRPr lang="en-US" sz="1000" dirty="0"/>
+          </a:p>
+        </p:txBody>
+      </p:sp>
+      <p:sp>
+        <p:nvSpPr>
+          <p:cNvPr id="19" name="Shape 16">
+            <a:extLst>
+              <a:ext uri="{FF2B5EF4-FFF2-40B4-BE49-F238E27FC236}">
+                <a16:creationId xmlns:a16="http://schemas.microsoft.com/office/drawing/2014/main" id="{0AFE9B3E-5430-DE6F-8CA7-F292F453D2EC}"/>
+              </a:ext>
+            </a:extLst>
+          </p:cNvPr>
+          <p:cNvSpPr/>
+          <p:nvPr/>
+        </p:nvSpPr>
+        <p:spPr>
+          <a:xfrm>
+            <a:off x="2514600" y="4727448"/>
+            <a:ext cx="548640" cy="182880"/>
+          </a:xfrm>
+          <a:prstGeom prst="rect">
+            <a:avLst/>
+          </a:prstGeom>
+          <a:solidFill>
+            <a:srgbClr val="64748B"/>
+          </a:solidFill>
+          <a:ln w="12700">
+            <a:solidFill>
+              <a:srgbClr val="64748B"/>
+            </a:solidFill>
+            <a:prstDash val="solid"/>
+          </a:ln>
+        </p:spPr>
+        <p:txBody>
+          <a:bodyPr/>
+          <a:lstStyle/>
+          <a:p>
+            <a:endParaRPr lang="es-ES"/>
+          </a:p>
+        </p:txBody>
+      </p:sp>
+      <p:sp>
+        <p:nvSpPr>
+          <p:cNvPr id="20" name="Text 17">
+            <a:extLst>
+              <a:ext uri="{FF2B5EF4-FFF2-40B4-BE49-F238E27FC236}">
+                <a16:creationId xmlns:a16="http://schemas.microsoft.com/office/drawing/2014/main" id="{D13B263F-6F51-2D54-A86F-39C639FAF93F}"/>
+              </a:ext>
+            </a:extLst>
+          </p:cNvPr>
+          <p:cNvSpPr/>
+          <p:nvPr/>
+        </p:nvSpPr>
+        <p:spPr>
+          <a:xfrm>
+            <a:off x="3154680" y="4690872"/>
+            <a:ext cx="457200" cy="246888"/>
+          </a:xfrm>
+          <a:prstGeom prst="rect">
+            <a:avLst/>
+          </a:prstGeom>
+          <a:noFill/>
+          <a:ln/>
+        </p:spPr>
+        <p:txBody>
+          <a:bodyPr wrap="square" rtlCol="0" anchor="ctr"/>
+          <a:lstStyle/>
+          <a:p>
+            <a:pPr marL="0" indent="0">
+              <a:buNone/>
+            </a:pPr>
+            <a:r>
+              <a:rPr lang="en-US" sz="1000" dirty="0">
+                <a:solidFill>
+                  <a:srgbClr val="64748B"/>
+                </a:solidFill>
+                <a:latin typeface="Calibri" pitchFamily="34" charset="0"/>
+                <a:ea typeface="Calibri" pitchFamily="34" charset="-122"/>
+                <a:cs typeface="Calibri" pitchFamily="34" charset="-120"/>
+              </a:rPr>
+              <a:t>8%</a:t>
+            </a:r>
+            <a:endParaRPr lang="en-US" sz="1000" dirty="0"/>
+          </a:p>
+        </p:txBody>
+      </p:sp>
+    </p:spTree>
+    <p:extLst>
+      <p:ext uri="{BB962C8B-B14F-4D97-AF65-F5344CB8AC3E}">
+        <p14:creationId xmlns:p14="http://schemas.microsoft.com/office/powerpoint/2010/main" val="3707589325"/>
       </p:ext>
     </p:extLst>
   </p:cSld>

--- a/Presentacion.pptx
+++ b/Presentacion.pptx
@@ -5,7 +5,7 @@
     <p:sldMasterId id="2147483648" r:id="rId1"/>
   </p:sldMasterIdLst>
   <p:notesMasterIdLst>
-    <p:notesMasterId r:id="rId12"/>
+    <p:notesMasterId r:id="rId10"/>
   </p:notesMasterIdLst>
   <p:sldIdLst>
     <p:sldId id="256" r:id="rId2"/>
@@ -14,10 +14,8 @@
     <p:sldId id="267" r:id="rId5"/>
     <p:sldId id="261" r:id="rId6"/>
     <p:sldId id="262" r:id="rId7"/>
-    <p:sldId id="263" r:id="rId8"/>
-    <p:sldId id="265" r:id="rId9"/>
-    <p:sldId id="266" r:id="rId10"/>
-    <p:sldId id="264" r:id="rId11"/>
+    <p:sldId id="260" r:id="rId8"/>
+    <p:sldId id="264" r:id="rId9"/>
   </p:sldIdLst>
   <p:sldSz cx="9144000" cy="5143500" type="screen16x9"/>
   <p:notesSz cx="5143500" cy="9144000"/>
@@ -330,90 +328,6 @@
 </p:notes>
 </file>
 
-<file path=ppt/notesSlides/notesSlide10.xml><?xml version="1.0" encoding="utf-8"?>
-<p:notes xmlns:a="http://schemas.openxmlformats.org/drawingml/2006/main" xmlns:r="http://schemas.openxmlformats.org/officeDocument/2006/relationships" xmlns:p="http://schemas.openxmlformats.org/presentationml/2006/main">
-  <p:cSld>
-    <p:spTree>
-      <p:nvGrpSpPr>
-        <p:cNvPr id="1" name=""/>
-        <p:cNvGrpSpPr/>
-        <p:nvPr/>
-      </p:nvGrpSpPr>
-      <p:grpSpPr>
-        <a:xfrm>
-          <a:off x="0" y="0"/>
-          <a:ext cx="0" cy="0"/>
-          <a:chOff x="0" y="0"/>
-          <a:chExt cx="0" cy="0"/>
-        </a:xfrm>
-      </p:grpSpPr>
-      <p:sp>
-        <p:nvSpPr>
-          <p:cNvPr id="2" name="Slide Image Placeholder 1"/>
-          <p:cNvSpPr>
-            <a:spLocks noGrp="1" noRot="1" noChangeAspect="1"/>
-          </p:cNvSpPr>
-          <p:nvPr>
-            <p:ph type="sldImg"/>
-          </p:nvPr>
-        </p:nvSpPr>
-        <p:spPr/>
-      </p:sp>
-      <p:sp>
-        <p:nvSpPr>
-          <p:cNvPr id="3" name="Notes Placeholder 2"/>
-          <p:cNvSpPr>
-            <a:spLocks noGrp="1"/>
-          </p:cNvSpPr>
-          <p:nvPr>
-            <p:ph type="body" idx="1"/>
-          </p:nvPr>
-        </p:nvSpPr>
-        <p:spPr/>
-        <p:txBody>
-          <a:bodyPr/>
-          <a:lstStyle/>
-          <a:p>
-            <a:endParaRPr lang="en-US" dirty="0"/>
-          </a:p>
-        </p:txBody>
-      </p:sp>
-      <p:sp>
-        <p:nvSpPr>
-          <p:cNvPr id="4" name="Slide Number Placeholder 3"/>
-          <p:cNvSpPr>
-            <a:spLocks noGrp="1"/>
-          </p:cNvSpPr>
-          <p:nvPr>
-            <p:ph type="sldNum" sz="quarter" idx="10"/>
-          </p:nvPr>
-        </p:nvSpPr>
-        <p:spPr/>
-        <p:txBody>
-          <a:bodyPr/>
-          <a:lstStyle/>
-          <a:p>
-            <a:fld id="{F7021451-1387-4CA6-816F-3879F97B5CBC}" type="slidenum">
-              <a:rPr lang="en-US"/>
-              <a:t>10</a:t>
-            </a:fld>
-            <a:endParaRPr lang="en-US"/>
-          </a:p>
-        </p:txBody>
-      </p:sp>
-    </p:spTree>
-    <p:extLst>
-      <p:ext uri="{BB962C8B-B14F-4D97-AF65-F5344CB8AC3E}">
-        <p14:creationId xmlns:p14="http://schemas.microsoft.com/office/powerpoint/2010/main" val="1024086991"/>
-      </p:ext>
-    </p:extLst>
-  </p:cSld>
-  <p:clrMapOvr>
-    <a:masterClrMapping/>
-  </p:clrMapOvr>
-</p:notes>
-</file>
-
 <file path=ppt/notesSlides/notesSlide2.xml><?xml version="1.0" encoding="utf-8"?>
 <p:notes xmlns:a="http://schemas.openxmlformats.org/drawingml/2006/main" xmlns:r="http://schemas.openxmlformats.org/officeDocument/2006/relationships" xmlns:p="http://schemas.openxmlformats.org/presentationml/2006/main">
   <p:cSld>
@@ -923,7 +837,7 @@
           <a:p>
             <a:fld id="{F7021451-1387-4CA6-816F-3879F97B5CBC}" type="slidenum">
               <a:rPr lang="en-US"/>
-              <a:t>7</a:t>
+              <a:t>8</a:t>
             </a:fld>
             <a:endParaRPr lang="en-US"/>
           </a:p>
@@ -933,222 +847,6 @@
     <p:extLst>
       <p:ext uri="{BB962C8B-B14F-4D97-AF65-F5344CB8AC3E}">
         <p14:creationId xmlns:p14="http://schemas.microsoft.com/office/powerpoint/2010/main" val="1024086991"/>
-      </p:ext>
-    </p:extLst>
-  </p:cSld>
-  <p:clrMapOvr>
-    <a:masterClrMapping/>
-  </p:clrMapOvr>
-</p:notes>
-</file>
-
-<file path=ppt/notesSlides/notesSlide8.xml><?xml version="1.0" encoding="utf-8"?>
-<p:notes xmlns:a="http://schemas.openxmlformats.org/drawingml/2006/main" xmlns:r="http://schemas.openxmlformats.org/officeDocument/2006/relationships" xmlns:p="http://schemas.openxmlformats.org/presentationml/2006/main">
-  <p:cSld>
-    <p:spTree>
-      <p:nvGrpSpPr>
-        <p:cNvPr id="1" name="">
-          <a:extLst>
-            <a:ext uri="{FF2B5EF4-FFF2-40B4-BE49-F238E27FC236}">
-              <a16:creationId xmlns:a16="http://schemas.microsoft.com/office/drawing/2014/main" id="{752C500F-F2C9-D3F1-1E15-D35E74A18BDA}"/>
-            </a:ext>
-          </a:extLst>
-        </p:cNvPr>
-        <p:cNvGrpSpPr/>
-        <p:nvPr/>
-      </p:nvGrpSpPr>
-      <p:grpSpPr>
-        <a:xfrm>
-          <a:off x="0" y="0"/>
-          <a:ext cx="0" cy="0"/>
-          <a:chOff x="0" y="0"/>
-          <a:chExt cx="0" cy="0"/>
-        </a:xfrm>
-      </p:grpSpPr>
-      <p:sp>
-        <p:nvSpPr>
-          <p:cNvPr id="2" name="Slide Image Placeholder 1">
-            <a:extLst>
-              <a:ext uri="{FF2B5EF4-FFF2-40B4-BE49-F238E27FC236}">
-                <a16:creationId xmlns:a16="http://schemas.microsoft.com/office/drawing/2014/main" id="{2AE5A70A-56CC-6947-C626-F26753C26AC0}"/>
-              </a:ext>
-            </a:extLst>
-          </p:cNvPr>
-          <p:cNvSpPr>
-            <a:spLocks noGrp="1" noRot="1" noChangeAspect="1"/>
-          </p:cNvSpPr>
-          <p:nvPr>
-            <p:ph type="sldImg"/>
-          </p:nvPr>
-        </p:nvSpPr>
-        <p:spPr/>
-      </p:sp>
-      <p:sp>
-        <p:nvSpPr>
-          <p:cNvPr id="3" name="Notes Placeholder 2">
-            <a:extLst>
-              <a:ext uri="{FF2B5EF4-FFF2-40B4-BE49-F238E27FC236}">
-                <a16:creationId xmlns:a16="http://schemas.microsoft.com/office/drawing/2014/main" id="{FD6925A2-4D7C-57B6-EC3D-0EB88931BC06}"/>
-              </a:ext>
-            </a:extLst>
-          </p:cNvPr>
-          <p:cNvSpPr>
-            <a:spLocks noGrp="1"/>
-          </p:cNvSpPr>
-          <p:nvPr>
-            <p:ph type="body" idx="1"/>
-          </p:nvPr>
-        </p:nvSpPr>
-        <p:spPr/>
-        <p:txBody>
-          <a:bodyPr/>
-          <a:lstStyle/>
-          <a:p>
-            <a:endParaRPr lang="en-US" dirty="0"/>
-          </a:p>
-        </p:txBody>
-      </p:sp>
-      <p:sp>
-        <p:nvSpPr>
-          <p:cNvPr id="4" name="Slide Number Placeholder 3">
-            <a:extLst>
-              <a:ext uri="{FF2B5EF4-FFF2-40B4-BE49-F238E27FC236}">
-                <a16:creationId xmlns:a16="http://schemas.microsoft.com/office/drawing/2014/main" id="{4C8E3DA0-FB91-0801-09EF-8AE9C0310448}"/>
-              </a:ext>
-            </a:extLst>
-          </p:cNvPr>
-          <p:cNvSpPr>
-            <a:spLocks noGrp="1"/>
-          </p:cNvSpPr>
-          <p:nvPr>
-            <p:ph type="sldNum" sz="quarter" idx="10"/>
-          </p:nvPr>
-        </p:nvSpPr>
-        <p:spPr/>
-        <p:txBody>
-          <a:bodyPr/>
-          <a:lstStyle/>
-          <a:p>
-            <a:fld id="{F7021451-1387-4CA6-816F-3879F97B5CBC}" type="slidenum">
-              <a:rPr lang="en-US"/>
-              <a:t>8</a:t>
-            </a:fld>
-            <a:endParaRPr lang="en-US"/>
-          </a:p>
-        </p:txBody>
-      </p:sp>
-    </p:spTree>
-    <p:extLst>
-      <p:ext uri="{BB962C8B-B14F-4D97-AF65-F5344CB8AC3E}">
-        <p14:creationId xmlns:p14="http://schemas.microsoft.com/office/powerpoint/2010/main" val="3227629683"/>
-      </p:ext>
-    </p:extLst>
-  </p:cSld>
-  <p:clrMapOvr>
-    <a:masterClrMapping/>
-  </p:clrMapOvr>
-</p:notes>
-</file>
-
-<file path=ppt/notesSlides/notesSlide9.xml><?xml version="1.0" encoding="utf-8"?>
-<p:notes xmlns:a="http://schemas.openxmlformats.org/drawingml/2006/main" xmlns:r="http://schemas.openxmlformats.org/officeDocument/2006/relationships" xmlns:p="http://schemas.openxmlformats.org/presentationml/2006/main">
-  <p:cSld>
-    <p:spTree>
-      <p:nvGrpSpPr>
-        <p:cNvPr id="1" name="">
-          <a:extLst>
-            <a:ext uri="{FF2B5EF4-FFF2-40B4-BE49-F238E27FC236}">
-              <a16:creationId xmlns:a16="http://schemas.microsoft.com/office/drawing/2014/main" id="{A0E3F8A0-557F-2389-2361-669486B10B94}"/>
-            </a:ext>
-          </a:extLst>
-        </p:cNvPr>
-        <p:cNvGrpSpPr/>
-        <p:nvPr/>
-      </p:nvGrpSpPr>
-      <p:grpSpPr>
-        <a:xfrm>
-          <a:off x="0" y="0"/>
-          <a:ext cx="0" cy="0"/>
-          <a:chOff x="0" y="0"/>
-          <a:chExt cx="0" cy="0"/>
-        </a:xfrm>
-      </p:grpSpPr>
-      <p:sp>
-        <p:nvSpPr>
-          <p:cNvPr id="2" name="Slide Image Placeholder 1">
-            <a:extLst>
-              <a:ext uri="{FF2B5EF4-FFF2-40B4-BE49-F238E27FC236}">
-                <a16:creationId xmlns:a16="http://schemas.microsoft.com/office/drawing/2014/main" id="{9466FF6D-FA35-305C-C292-96194F6BBFAD}"/>
-              </a:ext>
-            </a:extLst>
-          </p:cNvPr>
-          <p:cNvSpPr>
-            <a:spLocks noGrp="1" noRot="1" noChangeAspect="1"/>
-          </p:cNvSpPr>
-          <p:nvPr>
-            <p:ph type="sldImg"/>
-          </p:nvPr>
-        </p:nvSpPr>
-        <p:spPr/>
-      </p:sp>
-      <p:sp>
-        <p:nvSpPr>
-          <p:cNvPr id="3" name="Notes Placeholder 2">
-            <a:extLst>
-              <a:ext uri="{FF2B5EF4-FFF2-40B4-BE49-F238E27FC236}">
-                <a16:creationId xmlns:a16="http://schemas.microsoft.com/office/drawing/2014/main" id="{5B61C94C-31CB-DE3E-CA1C-914B13DC72FD}"/>
-              </a:ext>
-            </a:extLst>
-          </p:cNvPr>
-          <p:cNvSpPr>
-            <a:spLocks noGrp="1"/>
-          </p:cNvSpPr>
-          <p:nvPr>
-            <p:ph type="body" idx="1"/>
-          </p:nvPr>
-        </p:nvSpPr>
-        <p:spPr/>
-        <p:txBody>
-          <a:bodyPr/>
-          <a:lstStyle/>
-          <a:p>
-            <a:endParaRPr lang="en-US" dirty="0"/>
-          </a:p>
-        </p:txBody>
-      </p:sp>
-      <p:sp>
-        <p:nvSpPr>
-          <p:cNvPr id="4" name="Slide Number Placeholder 3">
-            <a:extLst>
-              <a:ext uri="{FF2B5EF4-FFF2-40B4-BE49-F238E27FC236}">
-                <a16:creationId xmlns:a16="http://schemas.microsoft.com/office/drawing/2014/main" id="{757119A0-ECB2-C4BD-8B06-24FC7B33A03C}"/>
-              </a:ext>
-            </a:extLst>
-          </p:cNvPr>
-          <p:cNvSpPr>
-            <a:spLocks noGrp="1"/>
-          </p:cNvSpPr>
-          <p:nvPr>
-            <p:ph type="sldNum" sz="quarter" idx="10"/>
-          </p:nvPr>
-        </p:nvSpPr>
-        <p:spPr/>
-        <p:txBody>
-          <a:bodyPr/>
-          <a:lstStyle/>
-          <a:p>
-            <a:fld id="{F7021451-1387-4CA6-816F-3879F97B5CBC}" type="slidenum">
-              <a:rPr lang="en-US"/>
-              <a:t>9</a:t>
-            </a:fld>
-            <a:endParaRPr lang="en-US"/>
-          </a:p>
-        </p:txBody>
-      </p:sp>
-    </p:spTree>
-    <p:extLst>
-      <p:ext uri="{BB962C8B-B14F-4D97-AF65-F5344CB8AC3E}">
-        <p14:creationId xmlns:p14="http://schemas.microsoft.com/office/powerpoint/2010/main" val="1917598194"/>
       </p:ext>
     </p:extLst>
   </p:cSld>
@@ -1188,6 +886,148 @@
 </p:sldLayout>
 </file>
 
+<file path=ppt/slideLayouts/slideLayout2.xml><?xml version="1.0" encoding="utf-8"?>
+<p:sldLayout xmlns:a="http://schemas.openxmlformats.org/drawingml/2006/main" xmlns:r="http://schemas.openxmlformats.org/officeDocument/2006/relationships" xmlns:p="http://schemas.openxmlformats.org/presentationml/2006/main" type="titleOnly">
+  <p:cSld name="Title Only">
+    <p:spTree>
+      <p:nvGrpSpPr>
+        <p:cNvPr id="1" name=""/>
+        <p:cNvGrpSpPr/>
+        <p:nvPr/>
+      </p:nvGrpSpPr>
+      <p:grpSpPr>
+        <a:xfrm>
+          <a:off x="0" y="0"/>
+          <a:ext cx="0" cy="0"/>
+          <a:chOff x="0" y="0"/>
+          <a:chExt cx="0" cy="0"/>
+        </a:xfrm>
+      </p:grpSpPr>
+      <p:sp>
+        <p:nvSpPr>
+          <p:cNvPr id="2" name="Title 1">
+            <a:extLst>
+              <a:ext uri="{FF2B5EF4-FFF2-40B4-BE49-F238E27FC236}">
+                <a16:creationId xmlns:a16="http://schemas.microsoft.com/office/drawing/2014/main" id="{835870F1-343C-8944-302E-07B0C0293045}"/>
+              </a:ext>
+            </a:extLst>
+          </p:cNvPr>
+          <p:cNvSpPr>
+            <a:spLocks noGrp="1"/>
+          </p:cNvSpPr>
+          <p:nvPr>
+            <p:ph type="title"/>
+          </p:nvPr>
+        </p:nvSpPr>
+        <p:spPr/>
+        <p:txBody>
+          <a:bodyPr/>
+          <a:lstStyle/>
+          <a:p>
+            <a:r>
+              <a:rPr lang="en-US"/>
+              <a:t>Click to edit Master title style</a:t>
+            </a:r>
+            <a:endParaRPr lang="es-ES"/>
+          </a:p>
+        </p:txBody>
+      </p:sp>
+      <p:sp>
+        <p:nvSpPr>
+          <p:cNvPr id="3" name="Date Placeholder 2">
+            <a:extLst>
+              <a:ext uri="{FF2B5EF4-FFF2-40B4-BE49-F238E27FC236}">
+                <a16:creationId xmlns:a16="http://schemas.microsoft.com/office/drawing/2014/main" id="{3005BDDE-871B-ADCC-9341-B5EA774F4A11}"/>
+              </a:ext>
+            </a:extLst>
+          </p:cNvPr>
+          <p:cNvSpPr>
+            <a:spLocks noGrp="1"/>
+          </p:cNvSpPr>
+          <p:nvPr>
+            <p:ph type="dt" sz="half" idx="10"/>
+          </p:nvPr>
+        </p:nvSpPr>
+        <p:spPr/>
+        <p:txBody>
+          <a:bodyPr/>
+          <a:lstStyle/>
+          <a:p>
+            <a:fld id="{374807E6-0372-4835-90A4-A75EA760248B}" type="datetimeFigureOut">
+              <a:rPr lang="es-ES" smtClean="0"/>
+              <a:t>04/03/2026</a:t>
+            </a:fld>
+            <a:endParaRPr lang="es-ES"/>
+          </a:p>
+        </p:txBody>
+      </p:sp>
+      <p:sp>
+        <p:nvSpPr>
+          <p:cNvPr id="4" name="Footer Placeholder 3">
+            <a:extLst>
+              <a:ext uri="{FF2B5EF4-FFF2-40B4-BE49-F238E27FC236}">
+                <a16:creationId xmlns:a16="http://schemas.microsoft.com/office/drawing/2014/main" id="{231318E4-2B79-8C5F-5D0D-67923920EDE6}"/>
+              </a:ext>
+            </a:extLst>
+          </p:cNvPr>
+          <p:cNvSpPr>
+            <a:spLocks noGrp="1"/>
+          </p:cNvSpPr>
+          <p:nvPr>
+            <p:ph type="ftr" sz="quarter" idx="11"/>
+          </p:nvPr>
+        </p:nvSpPr>
+        <p:spPr/>
+        <p:txBody>
+          <a:bodyPr/>
+          <a:lstStyle/>
+          <a:p>
+            <a:endParaRPr lang="es-ES"/>
+          </a:p>
+        </p:txBody>
+      </p:sp>
+      <p:sp>
+        <p:nvSpPr>
+          <p:cNvPr id="5" name="Slide Number Placeholder 4">
+            <a:extLst>
+              <a:ext uri="{FF2B5EF4-FFF2-40B4-BE49-F238E27FC236}">
+                <a16:creationId xmlns:a16="http://schemas.microsoft.com/office/drawing/2014/main" id="{D5DBB544-C864-4F5B-1CA9-43FFC534A5B6}"/>
+              </a:ext>
+            </a:extLst>
+          </p:cNvPr>
+          <p:cNvSpPr>
+            <a:spLocks noGrp="1"/>
+          </p:cNvSpPr>
+          <p:nvPr>
+            <p:ph type="sldNum" sz="quarter" idx="12"/>
+          </p:nvPr>
+        </p:nvSpPr>
+        <p:spPr/>
+        <p:txBody>
+          <a:bodyPr/>
+          <a:lstStyle/>
+          <a:p>
+            <a:fld id="{092C8B36-D48C-4A58-A81E-C9657099A1DB}" type="slidenum">
+              <a:rPr lang="es-ES" smtClean="0"/>
+              <a:t>‹N°›</a:t>
+            </a:fld>
+            <a:endParaRPr lang="es-ES"/>
+          </a:p>
+        </p:txBody>
+      </p:sp>
+    </p:spTree>
+    <p:extLst>
+      <p:ext uri="{BB962C8B-B14F-4D97-AF65-F5344CB8AC3E}">
+        <p14:creationId xmlns:p14="http://schemas.microsoft.com/office/powerpoint/2010/main" val="1347136873"/>
+      </p:ext>
+    </p:extLst>
+  </p:cSld>
+  <p:clrMapOvr>
+    <a:masterClrMapping/>
+  </p:clrMapOvr>
+</p:sldLayout>
+</file>
+
 <file path=ppt/slideMasters/slideMaster1.xml><?xml version="1.0" encoding="utf-8"?>
 <p:sldMaster xmlns:a="http://schemas.openxmlformats.org/drawingml/2006/main" xmlns:r="http://schemas.openxmlformats.org/officeDocument/2006/relationships" xmlns:p="http://schemas.openxmlformats.org/presentationml/2006/main">
   <p:cSld>
@@ -1215,6 +1055,7 @@
   <p:clrMap bg1="lt1" tx1="dk1" bg2="lt2" tx2="dk2" accent1="accent1" accent2="accent2" accent3="accent3" accent4="accent4" accent5="accent5" accent6="accent6" hlink="hlink" folHlink="folHlink"/>
   <p:sldLayoutIdLst>
     <p:sldLayoutId id="2147483649" r:id="rId1"/>
+    <p:sldLayoutId id="2147483650" r:id="rId2"/>
   </p:sldLayoutIdLst>
   <p:hf sldNum="0" hdr="0" ftr="0" dt="0"/>
   <p:txStyles>
@@ -2053,259 +1894,6 @@
 </p:sld>
 </file>
 
-<file path=ppt/slides/slide10.xml><?xml version="1.0" encoding="utf-8"?>
-<p:sld xmlns:a="http://schemas.openxmlformats.org/drawingml/2006/main" xmlns:r="http://schemas.openxmlformats.org/officeDocument/2006/relationships" xmlns:p="http://schemas.openxmlformats.org/presentationml/2006/main">
-  <p:cSld name="Slide 9">
-    <p:bg>
-      <p:bgPr>
-        <a:solidFill>
-          <a:srgbClr val="0D7377"/>
-        </a:solidFill>
-        <a:effectLst/>
-      </p:bgPr>
-    </p:bg>
-    <p:spTree>
-      <p:nvGrpSpPr>
-        <p:cNvPr id="1" name=""/>
-        <p:cNvGrpSpPr/>
-        <p:nvPr/>
-      </p:nvGrpSpPr>
-      <p:grpSpPr>
-        <a:xfrm>
-          <a:off x="0" y="0"/>
-          <a:ext cx="0" cy="0"/>
-          <a:chOff x="0" y="0"/>
-          <a:chExt cx="0" cy="0"/>
-        </a:xfrm>
-      </p:grpSpPr>
-      <p:sp>
-        <p:nvSpPr>
-          <p:cNvPr id="2" name="Shape 0"/>
-          <p:cNvSpPr/>
-          <p:nvPr/>
-        </p:nvSpPr>
-        <p:spPr>
-          <a:xfrm>
-            <a:off x="0" y="0"/>
-            <a:ext cx="9144000" cy="5143500"/>
-          </a:xfrm>
-          <a:prstGeom prst="rect">
-            <a:avLst/>
-          </a:prstGeom>
-          <a:solidFill>
-            <a:srgbClr val="0D7377"/>
-          </a:solidFill>
-          <a:ln w="12700">
-            <a:solidFill>
-              <a:srgbClr val="0D7377"/>
-            </a:solidFill>
-            <a:prstDash val="solid"/>
-          </a:ln>
-        </p:spPr>
-        <p:txBody>
-          <a:bodyPr/>
-          <a:lstStyle/>
-          <a:p>
-            <a:endParaRPr lang="es-ES"/>
-          </a:p>
-        </p:txBody>
-      </p:sp>
-      <p:sp>
-        <p:nvSpPr>
-          <p:cNvPr id="3" name="Shape 1"/>
-          <p:cNvSpPr/>
-          <p:nvPr/>
-        </p:nvSpPr>
-        <p:spPr>
-          <a:xfrm>
-            <a:off x="0" y="3840480"/>
-            <a:ext cx="9144000" cy="1303020"/>
-          </a:xfrm>
-          <a:prstGeom prst="rect">
-            <a:avLst/>
-          </a:prstGeom>
-          <a:solidFill>
-            <a:srgbClr val="1A2744"/>
-          </a:solidFill>
-          <a:ln w="12700">
-            <a:solidFill>
-              <a:srgbClr val="1A2744"/>
-            </a:solidFill>
-            <a:prstDash val="solid"/>
-          </a:ln>
-        </p:spPr>
-        <p:txBody>
-          <a:bodyPr/>
-          <a:lstStyle/>
-          <a:p>
-            <a:endParaRPr lang="es-ES"/>
-          </a:p>
-        </p:txBody>
-      </p:sp>
-      <p:sp>
-        <p:nvSpPr>
-          <p:cNvPr id="4" name="Text 2"/>
-          <p:cNvSpPr/>
-          <p:nvPr/>
-        </p:nvSpPr>
-        <p:spPr>
-          <a:xfrm>
-            <a:off x="457200" y="1005840"/>
-            <a:ext cx="8229600" cy="1097280"/>
-          </a:xfrm>
-          <a:prstGeom prst="rect">
-            <a:avLst/>
-          </a:prstGeom>
-          <a:noFill/>
-          <a:ln/>
-        </p:spPr>
-        <p:txBody>
-          <a:bodyPr wrap="square" rtlCol="0" anchor="ctr"/>
-          <a:lstStyle/>
-          <a:p>
-            <a:pPr marL="0" indent="0" algn="ctr">
-              <a:buNone/>
-            </a:pPr>
-            <a:r>
-              <a:rPr lang="en-US" sz="5600" b="1" dirty="0">
-                <a:solidFill>
-                  <a:srgbClr val="FFFFFF"/>
-                </a:solidFill>
-                <a:latin typeface="Calibri" pitchFamily="34" charset="0"/>
-                <a:ea typeface="Calibri" pitchFamily="34" charset="-122"/>
-                <a:cs typeface="Calibri" pitchFamily="34" charset="-120"/>
-              </a:rPr>
-              <a:t>¡Gracias!</a:t>
-            </a:r>
-            <a:endParaRPr lang="en-US" sz="5600" dirty="0"/>
-          </a:p>
-        </p:txBody>
-      </p:sp>
-      <p:sp>
-        <p:nvSpPr>
-          <p:cNvPr id="5" name="Text 3"/>
-          <p:cNvSpPr/>
-          <p:nvPr/>
-        </p:nvSpPr>
-        <p:spPr>
-          <a:xfrm>
-            <a:off x="457200" y="2286000"/>
-            <a:ext cx="8229600" cy="457200"/>
-          </a:xfrm>
-          <a:prstGeom prst="rect">
-            <a:avLst/>
-          </a:prstGeom>
-          <a:noFill/>
-          <a:ln/>
-        </p:spPr>
-        <p:txBody>
-          <a:bodyPr wrap="square" rtlCol="0" anchor="ctr"/>
-          <a:lstStyle/>
-          <a:p>
-            <a:pPr marL="0" indent="0" algn="ctr">
-              <a:buNone/>
-            </a:pPr>
-            <a:r>
-              <a:rPr lang="en-US" sz="1800" dirty="0">
-                <a:solidFill>
-                  <a:srgbClr val="C8EFEF"/>
-                </a:solidFill>
-                <a:latin typeface="Calibri" pitchFamily="34" charset="0"/>
-                <a:ea typeface="Calibri" pitchFamily="34" charset="-122"/>
-                <a:cs typeface="Calibri" pitchFamily="34" charset="-120"/>
-              </a:rPr>
-              <a:t>Análisis del Mercado Inmobiliario en Valencia</a:t>
-            </a:r>
-            <a:endParaRPr lang="en-US" sz="1800" dirty="0"/>
-          </a:p>
-        </p:txBody>
-      </p:sp>
-      <p:sp>
-        <p:nvSpPr>
-          <p:cNvPr id="6" name="Text 4"/>
-          <p:cNvSpPr/>
-          <p:nvPr/>
-        </p:nvSpPr>
-        <p:spPr>
-          <a:xfrm>
-            <a:off x="457200" y="2834640"/>
-            <a:ext cx="8229600" cy="365760"/>
-          </a:xfrm>
-          <a:prstGeom prst="rect">
-            <a:avLst/>
-          </a:prstGeom>
-          <a:noFill/>
-          <a:ln/>
-        </p:spPr>
-        <p:txBody>
-          <a:bodyPr wrap="square" rtlCol="0" anchor="ctr"/>
-          <a:lstStyle/>
-          <a:p>
-            <a:pPr marL="0" indent="0" algn="ctr">
-              <a:buNone/>
-            </a:pPr>
-            <a:r>
-              <a:rPr lang="en-US" sz="1300" dirty="0">
-                <a:solidFill>
-                  <a:srgbClr val="90D0D0"/>
-                </a:solidFill>
-                <a:latin typeface="Calibri" pitchFamily="34" charset="0"/>
-                <a:ea typeface="Calibri" pitchFamily="34" charset="-122"/>
-                <a:cs typeface="Calibri" pitchFamily="34" charset="-120"/>
-              </a:rPr>
-              <a:t>EDA · Feature Engineering · Random Forest · Valencia 2025</a:t>
-            </a:r>
-            <a:endParaRPr lang="en-US" sz="1300" dirty="0"/>
-          </a:p>
-        </p:txBody>
-      </p:sp>
-      <p:sp>
-        <p:nvSpPr>
-          <p:cNvPr id="7" name="Text 5"/>
-          <p:cNvSpPr/>
-          <p:nvPr/>
-        </p:nvSpPr>
-        <p:spPr>
-          <a:xfrm>
-            <a:off x="457200" y="3931920"/>
-            <a:ext cx="8229600" cy="457200"/>
-          </a:xfrm>
-          <a:prstGeom prst="rect">
-            <a:avLst/>
-          </a:prstGeom>
-          <a:noFill/>
-          <a:ln/>
-        </p:spPr>
-        <p:txBody>
-          <a:bodyPr wrap="square" rtlCol="0" anchor="ctr"/>
-          <a:lstStyle/>
-          <a:p>
-            <a:pPr marL="0" indent="0" algn="ctr">
-              <a:buNone/>
-            </a:pPr>
-            <a:r>
-              <a:rPr lang="en-US" sz="1300" dirty="0">
-                <a:solidFill>
-                  <a:srgbClr val="14A5A9"/>
-                </a:solidFill>
-                <a:latin typeface="Calibri" pitchFamily="34" charset="0"/>
-                <a:ea typeface="Calibri" pitchFamily="34" charset="-122"/>
-                <a:cs typeface="Calibri" pitchFamily="34" charset="-120"/>
-              </a:rPr>
-              <a:t>github.com/Apriroca/ML_Prediccion_Vivienda_Valencia</a:t>
-            </a:r>
-            <a:endParaRPr lang="en-US" sz="1300" dirty="0"/>
-          </a:p>
-        </p:txBody>
-      </p:sp>
-    </p:spTree>
-  </p:cSld>
-  <p:clrMapOvr>
-    <a:masterClrMapping/>
-  </p:clrMapOvr>
-</p:sld>
-</file>
-
 <file path=ppt/slides/slide2.xml><?xml version="1.0" encoding="utf-8"?>
 <p:sld xmlns:a="http://schemas.openxmlformats.org/drawingml/2006/main" xmlns:r="http://schemas.openxmlformats.org/officeDocument/2006/relationships" xmlns:p="http://schemas.openxmlformats.org/presentationml/2006/main">
   <p:cSld name="Slide 2">
@@ -2626,7 +2214,7 @@
         </p:nvSpPr>
         <p:spPr>
           <a:xfrm>
-            <a:off x="320040" y="2427463"/>
+            <a:off x="358230" y="2427463"/>
             <a:ext cx="4114800" cy="1005840"/>
           </a:xfrm>
           <a:prstGeom prst="rect">
@@ -3097,7 +2685,7 @@
                 <a:ea typeface="Calibri" pitchFamily="34" charset="-122"/>
                 <a:cs typeface="Calibri" pitchFamily="34" charset="-120"/>
               </a:rPr>
-              <a:t>05</a:t>
+              <a:t>04</a:t>
             </a:r>
             <a:endParaRPr lang="en-US" sz="2000" dirty="0"/>
           </a:p>
@@ -3285,7 +2873,7 @@
                 <a:ea typeface="Calibri" pitchFamily="34" charset="-122"/>
                 <a:cs typeface="Calibri" pitchFamily="34" charset="-120"/>
               </a:rPr>
-              <a:t>06</a:t>
+              <a:t>05</a:t>
             </a:r>
             <a:endParaRPr lang="en-US" sz="2000" dirty="0"/>
           </a:p>
@@ -3339,223 +2927,6 @@
         <p:spPr>
           <a:xfrm>
             <a:off x="4902798" y="3081528"/>
-            <a:ext cx="3840480" cy="274320"/>
-          </a:xfrm>
-          <a:prstGeom prst="rect">
-            <a:avLst/>
-          </a:prstGeom>
-          <a:noFill/>
-          <a:ln/>
-        </p:spPr>
-        <p:txBody>
-          <a:bodyPr wrap="square" rtlCol="0" anchor="ctr"/>
-          <a:lstStyle/>
-          <a:p>
-            <a:pPr marL="0" indent="0">
-              <a:buNone/>
-            </a:pPr>
-            <a:r>
-              <a:rPr lang="en-US" sz="950" dirty="0">
-                <a:solidFill>
-                  <a:srgbClr val="64748B"/>
-                </a:solidFill>
-                <a:latin typeface="Calibri" pitchFamily="34" charset="0"/>
-                <a:ea typeface="Calibri" pitchFamily="34" charset="-122"/>
-                <a:cs typeface="Calibri" pitchFamily="34" charset="-120"/>
-              </a:rPr>
-              <a:t>Factores clave del precio y próximos pasos</a:t>
-            </a:r>
-            <a:endParaRPr lang="en-US" sz="950" dirty="0"/>
-          </a:p>
-        </p:txBody>
-      </p:sp>
-      <p:sp>
-        <p:nvSpPr>
-          <p:cNvPr id="34" name="Shape 27">
-            <a:extLst>
-              <a:ext uri="{FF2B5EF4-FFF2-40B4-BE49-F238E27FC236}">
-                <a16:creationId xmlns:a16="http://schemas.microsoft.com/office/drawing/2014/main" id="{C2126EC1-FBCB-A361-7BBA-D363BE2CE4C4}"/>
-              </a:ext>
-            </a:extLst>
-          </p:cNvPr>
-          <p:cNvSpPr/>
-          <p:nvPr/>
-        </p:nvSpPr>
-        <p:spPr>
-          <a:xfrm>
-            <a:off x="4765638" y="3689066"/>
-            <a:ext cx="4114800" cy="1005840"/>
-          </a:xfrm>
-          <a:prstGeom prst="rect">
-            <a:avLst/>
-          </a:prstGeom>
-          <a:solidFill>
-            <a:srgbClr val="FFFFFF"/>
-          </a:solidFill>
-          <a:ln w="12700">
-            <a:solidFill>
-              <a:srgbClr val="D1D9E0"/>
-            </a:solidFill>
-            <a:prstDash val="solid"/>
-          </a:ln>
-          <a:effectLst>
-            <a:outerShdw blurRad="101600" dist="38100" dir="8100000" algn="bl" rotWithShape="0">
-              <a:srgbClr val="000000">
-                <a:alpha val="12000"/>
-              </a:srgbClr>
-            </a:outerShdw>
-          </a:effectLst>
-        </p:spPr>
-        <p:txBody>
-          <a:bodyPr/>
-          <a:lstStyle/>
-          <a:p>
-            <a:endParaRPr lang="es-ES"/>
-          </a:p>
-        </p:txBody>
-      </p:sp>
-      <p:sp>
-        <p:nvSpPr>
-          <p:cNvPr id="35" name="Shape 28">
-            <a:extLst>
-              <a:ext uri="{FF2B5EF4-FFF2-40B4-BE49-F238E27FC236}">
-                <a16:creationId xmlns:a16="http://schemas.microsoft.com/office/drawing/2014/main" id="{AAD62BB9-0B23-5BBD-19D1-F2D6BBA4C726}"/>
-              </a:ext>
-            </a:extLst>
-          </p:cNvPr>
-          <p:cNvSpPr/>
-          <p:nvPr/>
-        </p:nvSpPr>
-        <p:spPr>
-          <a:xfrm>
-            <a:off x="4765638" y="3689066"/>
-            <a:ext cx="73152" cy="1005840"/>
-          </a:xfrm>
-          <a:prstGeom prst="rect">
-            <a:avLst/>
-          </a:prstGeom>
-          <a:solidFill>
-            <a:srgbClr val="0D7377"/>
-          </a:solidFill>
-          <a:ln w="12700">
-            <a:solidFill>
-              <a:srgbClr val="0D7377"/>
-            </a:solidFill>
-            <a:prstDash val="solid"/>
-          </a:ln>
-        </p:spPr>
-        <p:txBody>
-          <a:bodyPr/>
-          <a:lstStyle/>
-          <a:p>
-            <a:endParaRPr lang="es-ES"/>
-          </a:p>
-        </p:txBody>
-      </p:sp>
-      <p:sp>
-        <p:nvSpPr>
-          <p:cNvPr id="36" name="Text 29">
-            <a:extLst>
-              <a:ext uri="{FF2B5EF4-FFF2-40B4-BE49-F238E27FC236}">
-                <a16:creationId xmlns:a16="http://schemas.microsoft.com/office/drawing/2014/main" id="{5FFECF4F-C279-12FE-F70D-2C88CCDD6B7C}"/>
-              </a:ext>
-            </a:extLst>
-          </p:cNvPr>
-          <p:cNvSpPr/>
-          <p:nvPr/>
-        </p:nvSpPr>
-        <p:spPr>
-          <a:xfrm>
-            <a:off x="4902798" y="3734786"/>
-            <a:ext cx="457200" cy="365760"/>
-          </a:xfrm>
-          <a:prstGeom prst="rect">
-            <a:avLst/>
-          </a:prstGeom>
-          <a:noFill/>
-          <a:ln/>
-        </p:spPr>
-        <p:txBody>
-          <a:bodyPr wrap="square" rtlCol="0" anchor="ctr"/>
-          <a:lstStyle/>
-          <a:p>
-            <a:pPr marL="0" indent="0">
-              <a:buNone/>
-            </a:pPr>
-            <a:r>
-              <a:rPr lang="en-US" sz="2000" b="1" dirty="0">
-                <a:solidFill>
-                  <a:srgbClr val="E07B39"/>
-                </a:solidFill>
-                <a:latin typeface="Calibri" pitchFamily="34" charset="0"/>
-                <a:ea typeface="Calibri" pitchFamily="34" charset="-122"/>
-                <a:cs typeface="Calibri" pitchFamily="34" charset="-120"/>
-              </a:rPr>
-              <a:t>07</a:t>
-            </a:r>
-            <a:endParaRPr lang="en-US" sz="2000" dirty="0"/>
-          </a:p>
-        </p:txBody>
-      </p:sp>
-      <p:sp>
-        <p:nvSpPr>
-          <p:cNvPr id="37" name="Text 30">
-            <a:extLst>
-              <a:ext uri="{FF2B5EF4-FFF2-40B4-BE49-F238E27FC236}">
-                <a16:creationId xmlns:a16="http://schemas.microsoft.com/office/drawing/2014/main" id="{A98D91B0-B377-799E-FF8B-C6C87F292C96}"/>
-              </a:ext>
-            </a:extLst>
-          </p:cNvPr>
-          <p:cNvSpPr/>
-          <p:nvPr/>
-        </p:nvSpPr>
-        <p:spPr>
-          <a:xfrm>
-            <a:off x="4902798" y="4054826"/>
-            <a:ext cx="3840480" cy="320040"/>
-          </a:xfrm>
-          <a:prstGeom prst="rect">
-            <a:avLst/>
-          </a:prstGeom>
-          <a:noFill/>
-          <a:ln/>
-        </p:spPr>
-        <p:txBody>
-          <a:bodyPr wrap="square" rtlCol="0" anchor="ctr"/>
-          <a:lstStyle/>
-          <a:p>
-            <a:pPr marL="0" indent="0">
-              <a:buNone/>
-            </a:pPr>
-            <a:r>
-              <a:rPr lang="en-US" sz="1300" b="1" dirty="0" err="1">
-                <a:solidFill>
-                  <a:srgbClr val="1E293B"/>
-                </a:solidFill>
-                <a:latin typeface="Calibri" pitchFamily="34" charset="0"/>
-                <a:cs typeface="Calibri" pitchFamily="34" charset="-120"/>
-              </a:rPr>
-              <a:t>Anexos</a:t>
-            </a:r>
-            <a:endParaRPr lang="en-US" sz="1300" dirty="0"/>
-          </a:p>
-        </p:txBody>
-      </p:sp>
-      <p:sp>
-        <p:nvSpPr>
-          <p:cNvPr id="38" name="Text 31">
-            <a:extLst>
-              <a:ext uri="{FF2B5EF4-FFF2-40B4-BE49-F238E27FC236}">
-                <a16:creationId xmlns:a16="http://schemas.microsoft.com/office/drawing/2014/main" id="{EFF3CF0D-9F48-05B5-147F-4EDAEFAAFDCA}"/>
-              </a:ext>
-            </a:extLst>
-          </p:cNvPr>
-          <p:cNvSpPr/>
-          <p:nvPr/>
-        </p:nvSpPr>
-        <p:spPr>
-          <a:xfrm>
-            <a:off x="4902798" y="4347434"/>
             <a:ext cx="3840480" cy="274320"/>
           </a:xfrm>
           <a:prstGeom prst="rect">
@@ -8758,6 +8129,21 @@
               </a:rPr>
               <a:t>Random Forest</a:t>
             </a:r>
+          </a:p>
+          <a:p>
+            <a:pPr marL="0" indent="0" algn="ctr">
+              <a:buNone/>
+            </a:pPr>
+            <a:r>
+              <a:rPr lang="en-US" sz="1000" dirty="0">
+                <a:solidFill>
+                  <a:srgbClr val="FFFFFF"/>
+                </a:solidFill>
+                <a:latin typeface="Calibri" pitchFamily="34" charset="0"/>
+                <a:cs typeface="Calibri" pitchFamily="34" charset="-120"/>
+              </a:rPr>
+              <a:t>XGBOOST</a:t>
+            </a:r>
             <a:endParaRPr lang="en-US" sz="1000" dirty="0"/>
           </a:p>
         </p:txBody>
@@ -11423,11 +10809,848 @@
 
 <file path=ppt/slides/slide7.xml><?xml version="1.0" encoding="utf-8"?>
 <p:sld xmlns:a="http://schemas.openxmlformats.org/drawingml/2006/main" xmlns:r="http://schemas.openxmlformats.org/officeDocument/2006/relationships" xmlns:p="http://schemas.openxmlformats.org/presentationml/2006/main">
-  <p:cSld name="Slide 8">
+  <p:cSld>
+    <p:spTree>
+      <p:nvGrpSpPr>
+        <p:cNvPr id="1" name=""/>
+        <p:cNvGrpSpPr/>
+        <p:nvPr/>
+      </p:nvGrpSpPr>
+      <p:grpSpPr>
+        <a:xfrm>
+          <a:off x="0" y="0"/>
+          <a:ext cx="0" cy="0"/>
+          <a:chOff x="0" y="0"/>
+          <a:chExt cx="0" cy="0"/>
+        </a:xfrm>
+      </p:grpSpPr>
+      <p:sp>
+        <p:nvSpPr>
+          <p:cNvPr id="2" name="Title 1">
+            <a:extLst>
+              <a:ext uri="{FF2B5EF4-FFF2-40B4-BE49-F238E27FC236}">
+                <a16:creationId xmlns:a16="http://schemas.microsoft.com/office/drawing/2014/main" id="{D1A60799-A2E0-0417-95BE-9992D4D00F5C}"/>
+              </a:ext>
+            </a:extLst>
+          </p:cNvPr>
+          <p:cNvSpPr>
+            <a:spLocks noGrp="1"/>
+          </p:cNvSpPr>
+          <p:nvPr>
+            <p:ph type="title"/>
+          </p:nvPr>
+        </p:nvSpPr>
+        <p:spPr/>
+        <p:txBody>
+          <a:bodyPr/>
+          <a:lstStyle/>
+          <a:p>
+            <a:endParaRPr lang="es-ES" dirty="0"/>
+          </a:p>
+        </p:txBody>
+      </p:sp>
+      <p:sp>
+        <p:nvSpPr>
+          <p:cNvPr id="3" name="Shape 3">
+            <a:extLst>
+              <a:ext uri="{FF2B5EF4-FFF2-40B4-BE49-F238E27FC236}">
+                <a16:creationId xmlns:a16="http://schemas.microsoft.com/office/drawing/2014/main" id="{65B1B245-96AF-5D56-0609-C8B7ACFF5D88}"/>
+              </a:ext>
+            </a:extLst>
+          </p:cNvPr>
+          <p:cNvSpPr/>
+          <p:nvPr/>
+        </p:nvSpPr>
+        <p:spPr>
+          <a:xfrm>
+            <a:off x="1143000" y="1358348"/>
+            <a:ext cx="3291840" cy="2838748"/>
+          </a:xfrm>
+          <a:prstGeom prst="rect">
+            <a:avLst/>
+          </a:prstGeom>
+          <a:solidFill>
+            <a:schemeClr val="tx1">
+              <a:alpha val="80000"/>
+            </a:schemeClr>
+          </a:solidFill>
+          <a:ln w="12700">
+            <a:solidFill>
+              <a:srgbClr val="2563EB"/>
+            </a:solidFill>
+            <a:prstDash val="solid"/>
+          </a:ln>
+        </p:spPr>
+        <p:txBody>
+          <a:bodyPr/>
+          <a:lstStyle/>
+          <a:p>
+            <a:endParaRPr lang="es-ES" sz="1350"/>
+          </a:p>
+        </p:txBody>
+      </p:sp>
+      <p:sp>
+        <p:nvSpPr>
+          <p:cNvPr id="4" name="Text 4">
+            <a:extLst>
+              <a:ext uri="{FF2B5EF4-FFF2-40B4-BE49-F238E27FC236}">
+                <a16:creationId xmlns:a16="http://schemas.microsoft.com/office/drawing/2014/main" id="{D59D165F-AFBC-973E-F767-BBDDBA932840}"/>
+              </a:ext>
+            </a:extLst>
+          </p:cNvPr>
+          <p:cNvSpPr/>
+          <p:nvPr/>
+        </p:nvSpPr>
+        <p:spPr>
+          <a:xfrm>
+            <a:off x="1280160" y="1693926"/>
+            <a:ext cx="2743200" cy="260604"/>
+          </a:xfrm>
+          <a:prstGeom prst="rect">
+            <a:avLst/>
+          </a:prstGeom>
+          <a:noFill/>
+          <a:ln/>
+        </p:spPr>
+        <p:txBody>
+          <a:bodyPr wrap="square" lIns="0" tIns="0" rIns="0" bIns="0" rtlCol="0" anchor="ctr"/>
+          <a:lstStyle/>
+          <a:p>
+            <a:r>
+              <a:rPr lang="en-US" sz="900" b="1" dirty="0">
+                <a:solidFill>
+                  <a:schemeClr val="bg1"/>
+                </a:solidFill>
+              </a:rPr>
+              <a:t>  Conclusiones</a:t>
+            </a:r>
+            <a:endParaRPr lang="en-US" sz="900" dirty="0">
+              <a:solidFill>
+                <a:schemeClr val="bg1"/>
+              </a:solidFill>
+            </a:endParaRPr>
+          </a:p>
+        </p:txBody>
+      </p:sp>
+      <p:sp>
+        <p:nvSpPr>
+          <p:cNvPr id="5" name="Text 5">
+            <a:extLst>
+              <a:ext uri="{FF2B5EF4-FFF2-40B4-BE49-F238E27FC236}">
+                <a16:creationId xmlns:a16="http://schemas.microsoft.com/office/drawing/2014/main" id="{AE6DBA61-B619-1555-7C5C-AFA516CE6D38}"/>
+              </a:ext>
+            </a:extLst>
+          </p:cNvPr>
+          <p:cNvSpPr/>
+          <p:nvPr/>
+        </p:nvSpPr>
+        <p:spPr>
+          <a:xfrm>
+            <a:off x="1280160" y="2023110"/>
+            <a:ext cx="2743200" cy="370332"/>
+          </a:xfrm>
+          <a:prstGeom prst="rect">
+            <a:avLst/>
+          </a:prstGeom>
+          <a:noFill/>
+          <a:ln/>
+        </p:spPr>
+        <p:txBody>
+          <a:bodyPr wrap="square" rtlCol="0" anchor="ctr"/>
+          <a:lstStyle/>
+          <a:p>
+            <a:r>
+              <a:rPr lang="en-US" sz="713" dirty="0">
+                <a:solidFill>
+                  <a:srgbClr val="E2E8F0"/>
+                </a:solidFill>
+              </a:rPr>
+              <a:t>▸  El modelo predice el precio/m² con un error medio de ~588 € </a:t>
+            </a:r>
+            <a:endParaRPr lang="en-US" sz="713" dirty="0"/>
+          </a:p>
+        </p:txBody>
+      </p:sp>
+      <p:sp>
+        <p:nvSpPr>
+          <p:cNvPr id="6" name="Text 6">
+            <a:extLst>
+              <a:ext uri="{FF2B5EF4-FFF2-40B4-BE49-F238E27FC236}">
+                <a16:creationId xmlns:a16="http://schemas.microsoft.com/office/drawing/2014/main" id="{9D078EA1-50AB-F1F5-A88C-8C2DBBDF3601}"/>
+              </a:ext>
+            </a:extLst>
+          </p:cNvPr>
+          <p:cNvSpPr/>
+          <p:nvPr/>
+        </p:nvSpPr>
+        <p:spPr>
+          <a:xfrm>
+            <a:off x="1280160" y="2434590"/>
+            <a:ext cx="2743200" cy="370332"/>
+          </a:xfrm>
+          <a:prstGeom prst="rect">
+            <a:avLst/>
+          </a:prstGeom>
+          <a:noFill/>
+          <a:ln/>
+        </p:spPr>
+        <p:txBody>
+          <a:bodyPr wrap="square" rtlCol="0" anchor="ctr"/>
+          <a:lstStyle/>
+          <a:p>
+            <a:r>
+              <a:rPr lang="en-US" sz="713" dirty="0">
+                <a:solidFill>
+                  <a:srgbClr val="E2E8F0"/>
+                </a:solidFill>
+              </a:rPr>
+              <a:t>▸  La zona (demanda) y el estado del inmueble (AC, ascensor) explican más del </a:t>
+            </a:r>
+            <a:r>
+              <a:rPr lang="en-US" sz="713" dirty="0" err="1">
+                <a:solidFill>
+                  <a:srgbClr val="E2E8F0"/>
+                </a:solidFill>
+              </a:rPr>
+              <a:t>precio</a:t>
+            </a:r>
+            <a:r>
+              <a:rPr lang="en-US" sz="713" dirty="0">
+                <a:solidFill>
+                  <a:srgbClr val="E2E8F0"/>
+                </a:solidFill>
+              </a:rPr>
+              <a:t> que la </a:t>
+            </a:r>
+            <a:r>
+              <a:rPr lang="en-US" sz="713" dirty="0" err="1">
+                <a:solidFill>
+                  <a:srgbClr val="E2E8F0"/>
+                </a:solidFill>
+              </a:rPr>
+              <a:t>ubicación</a:t>
+            </a:r>
+            <a:endParaRPr lang="en-US" sz="713" dirty="0"/>
+          </a:p>
+        </p:txBody>
+      </p:sp>
+      <p:sp>
+        <p:nvSpPr>
+          <p:cNvPr id="7" name="Text 7">
+            <a:extLst>
+              <a:ext uri="{FF2B5EF4-FFF2-40B4-BE49-F238E27FC236}">
+                <a16:creationId xmlns:a16="http://schemas.microsoft.com/office/drawing/2014/main" id="{6B95DFAB-2455-228B-5B91-8E910FA549E0}"/>
+              </a:ext>
+            </a:extLst>
+          </p:cNvPr>
+          <p:cNvSpPr/>
+          <p:nvPr/>
+        </p:nvSpPr>
+        <p:spPr>
+          <a:xfrm>
+            <a:off x="1280160" y="2846070"/>
+            <a:ext cx="2743200" cy="370332"/>
+          </a:xfrm>
+          <a:prstGeom prst="rect">
+            <a:avLst/>
+          </a:prstGeom>
+          <a:noFill/>
+          <a:ln/>
+        </p:spPr>
+        <p:txBody>
+          <a:bodyPr wrap="square" rtlCol="0" anchor="ctr"/>
+          <a:lstStyle/>
+          <a:p>
+            <a:r>
+              <a:rPr lang="en-US" sz="713" dirty="0">
+                <a:solidFill>
+                  <a:srgbClr val="E2E8F0"/>
+                </a:solidFill>
+              </a:rPr>
+              <a:t>▸  El 21% de registros tenía errores graves de datos (precios negativos, duplicados). La calidad del dato es el primer cuello de botella</a:t>
+            </a:r>
+            <a:endParaRPr lang="en-US" sz="713" dirty="0"/>
+          </a:p>
+        </p:txBody>
+      </p:sp>
+      <p:sp>
+        <p:nvSpPr>
+          <p:cNvPr id="8" name="Text 8">
+            <a:extLst>
+              <a:ext uri="{FF2B5EF4-FFF2-40B4-BE49-F238E27FC236}">
+                <a16:creationId xmlns:a16="http://schemas.microsoft.com/office/drawing/2014/main" id="{DDD50EC0-4309-B318-06AB-C179939BE2CC}"/>
+              </a:ext>
+            </a:extLst>
+          </p:cNvPr>
+          <p:cNvSpPr/>
+          <p:nvPr/>
+        </p:nvSpPr>
+        <p:spPr>
+          <a:xfrm>
+            <a:off x="1280160" y="3257550"/>
+            <a:ext cx="2743200" cy="370332"/>
+          </a:xfrm>
+          <a:prstGeom prst="rect">
+            <a:avLst/>
+          </a:prstGeom>
+          <a:noFill/>
+          <a:ln/>
+        </p:spPr>
+        <p:txBody>
+          <a:bodyPr wrap="square" rtlCol="0" anchor="ctr"/>
+          <a:lstStyle/>
+          <a:p>
+            <a:r>
+              <a:rPr lang="en-US" sz="713" dirty="0">
+                <a:solidFill>
+                  <a:srgbClr val="E2E8F0"/>
+                </a:solidFill>
+              </a:rPr>
+              <a:t>▸  Conservación y Planta están excluidas por nulos </a:t>
+            </a:r>
+            <a:r>
+              <a:rPr lang="en-US" sz="713" dirty="0" err="1">
+                <a:solidFill>
+                  <a:srgbClr val="E2E8F0"/>
+                </a:solidFill>
+              </a:rPr>
+              <a:t>excesivos</a:t>
+            </a:r>
+            <a:r>
+              <a:rPr lang="en-US" sz="713" dirty="0">
+                <a:solidFill>
+                  <a:srgbClr val="E2E8F0"/>
+                </a:solidFill>
+              </a:rPr>
+              <a:t> o ser </a:t>
+            </a:r>
+            <a:r>
+              <a:rPr lang="en-US" sz="713" dirty="0" err="1">
+                <a:solidFill>
+                  <a:srgbClr val="E2E8F0"/>
+                </a:solidFill>
+              </a:rPr>
+              <a:t>dificil</a:t>
+            </a:r>
+            <a:r>
+              <a:rPr lang="en-US" sz="713" dirty="0">
+                <a:solidFill>
+                  <a:srgbClr val="E2E8F0"/>
+                </a:solidFill>
+              </a:rPr>
+              <a:t> de interpreter. </a:t>
+            </a:r>
+            <a:r>
+              <a:rPr lang="en-US" sz="713" dirty="0" err="1">
+                <a:solidFill>
+                  <a:srgbClr val="E2E8F0"/>
+                </a:solidFill>
+              </a:rPr>
+              <a:t>Recuperarlas</a:t>
+            </a:r>
+            <a:r>
+              <a:rPr lang="en-US" sz="713" dirty="0">
+                <a:solidFill>
+                  <a:srgbClr val="E2E8F0"/>
+                </a:solidFill>
+              </a:rPr>
+              <a:t> </a:t>
+            </a:r>
+            <a:r>
+              <a:rPr lang="en-US" sz="713" dirty="0" err="1">
+                <a:solidFill>
+                  <a:srgbClr val="E2E8F0"/>
+                </a:solidFill>
+              </a:rPr>
+              <a:t>podría</a:t>
+            </a:r>
+            <a:r>
+              <a:rPr lang="en-US" sz="713" dirty="0">
+                <a:solidFill>
+                  <a:srgbClr val="E2E8F0"/>
+                </a:solidFill>
+              </a:rPr>
+              <a:t> </a:t>
+            </a:r>
+            <a:r>
+              <a:rPr lang="en-US" sz="713" dirty="0" err="1">
+                <a:solidFill>
+                  <a:srgbClr val="E2E8F0"/>
+                </a:solidFill>
+              </a:rPr>
+              <a:t>mejorar</a:t>
+            </a:r>
+            <a:r>
+              <a:rPr lang="en-US" sz="713" dirty="0">
+                <a:solidFill>
+                  <a:srgbClr val="E2E8F0"/>
+                </a:solidFill>
+              </a:rPr>
+              <a:t> </a:t>
+            </a:r>
+            <a:r>
+              <a:rPr lang="en-US" sz="713" dirty="0" err="1">
+                <a:solidFill>
+                  <a:srgbClr val="E2E8F0"/>
+                </a:solidFill>
+              </a:rPr>
+              <a:t>el</a:t>
+            </a:r>
+            <a:r>
+              <a:rPr lang="en-US" sz="713" dirty="0">
+                <a:solidFill>
+                  <a:srgbClr val="E2E8F0"/>
+                </a:solidFill>
+              </a:rPr>
+              <a:t> </a:t>
+            </a:r>
+            <a:r>
+              <a:rPr lang="en-US" sz="713" dirty="0" err="1">
+                <a:solidFill>
+                  <a:srgbClr val="E2E8F0"/>
+                </a:solidFill>
+              </a:rPr>
+              <a:t>modelo</a:t>
+            </a:r>
+            <a:r>
+              <a:rPr lang="en-US" sz="713" dirty="0">
+                <a:solidFill>
+                  <a:srgbClr val="E2E8F0"/>
+                </a:solidFill>
+              </a:rPr>
+              <a:t>.</a:t>
+            </a:r>
+            <a:endParaRPr lang="en-US" sz="713" dirty="0"/>
+          </a:p>
+        </p:txBody>
+      </p:sp>
+      <p:sp>
+        <p:nvSpPr>
+          <p:cNvPr id="9" name="Shape 9">
+            <a:extLst>
+              <a:ext uri="{FF2B5EF4-FFF2-40B4-BE49-F238E27FC236}">
+                <a16:creationId xmlns:a16="http://schemas.microsoft.com/office/drawing/2014/main" id="{DE09E19B-3EC7-EDB9-F662-330B4D0C4559}"/>
+              </a:ext>
+            </a:extLst>
+          </p:cNvPr>
+          <p:cNvSpPr/>
+          <p:nvPr/>
+        </p:nvSpPr>
+        <p:spPr>
+          <a:xfrm>
+            <a:off x="4572000" y="1358348"/>
+            <a:ext cx="3291840" cy="2838748"/>
+          </a:xfrm>
+          <a:prstGeom prst="rect">
+            <a:avLst/>
+          </a:prstGeom>
+          <a:solidFill>
+            <a:schemeClr val="tx1">
+              <a:alpha val="80000"/>
+            </a:schemeClr>
+          </a:solidFill>
+          <a:ln w="12700">
+            <a:solidFill>
+              <a:srgbClr val="38BDF8"/>
+            </a:solidFill>
+            <a:prstDash val="solid"/>
+          </a:ln>
+        </p:spPr>
+        <p:txBody>
+          <a:bodyPr/>
+          <a:lstStyle/>
+          <a:p>
+            <a:endParaRPr lang="es-ES" sz="1350"/>
+          </a:p>
+        </p:txBody>
+      </p:sp>
+      <p:sp>
+        <p:nvSpPr>
+          <p:cNvPr id="10" name="Text 10">
+            <a:extLst>
+              <a:ext uri="{FF2B5EF4-FFF2-40B4-BE49-F238E27FC236}">
+                <a16:creationId xmlns:a16="http://schemas.microsoft.com/office/drawing/2014/main" id="{F02FC1E8-E9ED-61CE-EDB5-E16D2C1A6AAF}"/>
+              </a:ext>
+            </a:extLst>
+          </p:cNvPr>
+          <p:cNvSpPr/>
+          <p:nvPr/>
+        </p:nvSpPr>
+        <p:spPr>
+          <a:xfrm>
+            <a:off x="4709160" y="1693926"/>
+            <a:ext cx="2743200" cy="260604"/>
+          </a:xfrm>
+          <a:prstGeom prst="rect">
+            <a:avLst/>
+          </a:prstGeom>
+          <a:noFill/>
+          <a:ln/>
+        </p:spPr>
+        <p:txBody>
+          <a:bodyPr wrap="square" lIns="0" tIns="0" rIns="0" bIns="0" rtlCol="0" anchor="ctr"/>
+          <a:lstStyle/>
+          <a:p>
+            <a:r>
+              <a:rPr lang="en-US" sz="900" b="1" dirty="0" err="1">
+                <a:solidFill>
+                  <a:schemeClr val="bg1"/>
+                </a:solidFill>
+              </a:rPr>
+              <a:t>Acciones</a:t>
+            </a:r>
+            <a:r>
+              <a:rPr lang="en-US" sz="900" b="1" dirty="0">
+                <a:solidFill>
+                  <a:schemeClr val="bg1"/>
+                </a:solidFill>
+              </a:rPr>
+              <a:t> de mejora concretas</a:t>
+            </a:r>
+            <a:endParaRPr lang="en-US" sz="900" dirty="0">
+              <a:solidFill>
+                <a:schemeClr val="bg1"/>
+              </a:solidFill>
+            </a:endParaRPr>
+          </a:p>
+        </p:txBody>
+      </p:sp>
+      <p:sp>
+        <p:nvSpPr>
+          <p:cNvPr id="11" name="Text 11">
+            <a:extLst>
+              <a:ext uri="{FF2B5EF4-FFF2-40B4-BE49-F238E27FC236}">
+                <a16:creationId xmlns:a16="http://schemas.microsoft.com/office/drawing/2014/main" id="{2946A308-5383-7996-EABA-4A54C9413131}"/>
+              </a:ext>
+            </a:extLst>
+          </p:cNvPr>
+          <p:cNvSpPr/>
+          <p:nvPr/>
+        </p:nvSpPr>
+        <p:spPr>
+          <a:xfrm>
+            <a:off x="4709160" y="2023110"/>
+            <a:ext cx="2743200" cy="370332"/>
+          </a:xfrm>
+          <a:prstGeom prst="rect">
+            <a:avLst/>
+          </a:prstGeom>
+          <a:noFill/>
+          <a:ln/>
+        </p:spPr>
+        <p:txBody>
+          <a:bodyPr wrap="square" rtlCol="0" anchor="ctr"/>
+          <a:lstStyle/>
+          <a:p>
+            <a:r>
+              <a:rPr lang="en-US" sz="713" dirty="0">
+                <a:solidFill>
+                  <a:srgbClr val="E2E8F0"/>
+                </a:solidFill>
+              </a:rPr>
+              <a:t>▸  Recuperar 'Conservación' y 'Planta' con imputación — se estima una mejora de R² de 3-5 puntos sin cambiar el modelo</a:t>
+            </a:r>
+            <a:endParaRPr lang="en-US" sz="713" dirty="0"/>
+          </a:p>
+        </p:txBody>
+      </p:sp>
+      <p:sp>
+        <p:nvSpPr>
+          <p:cNvPr id="12" name="Text 12">
+            <a:extLst>
+              <a:ext uri="{FF2B5EF4-FFF2-40B4-BE49-F238E27FC236}">
+                <a16:creationId xmlns:a16="http://schemas.microsoft.com/office/drawing/2014/main" id="{108BAF03-59FC-8144-58B3-9D5F52558ED4}"/>
+              </a:ext>
+            </a:extLst>
+          </p:cNvPr>
+          <p:cNvSpPr/>
+          <p:nvPr/>
+        </p:nvSpPr>
+        <p:spPr>
+          <a:xfrm>
+            <a:off x="4709160" y="2434590"/>
+            <a:ext cx="2743200" cy="370332"/>
+          </a:xfrm>
+          <a:prstGeom prst="rect">
+            <a:avLst/>
+          </a:prstGeom>
+          <a:noFill/>
+          <a:ln/>
+        </p:spPr>
+        <p:txBody>
+          <a:bodyPr wrap="square" rtlCol="0" anchor="ctr"/>
+          <a:lstStyle/>
+          <a:p>
+            <a:r>
+              <a:rPr lang="en-US" sz="713" dirty="0">
+                <a:solidFill>
+                  <a:srgbClr val="E2E8F0"/>
+                </a:solidFill>
+              </a:rPr>
+              <a:t>▸  Añadir distancia al metro, playa o </a:t>
+            </a:r>
+            <a:r>
+              <a:rPr lang="en-US" sz="713" dirty="0" err="1">
+                <a:solidFill>
+                  <a:srgbClr val="E2E8F0"/>
+                </a:solidFill>
+              </a:rPr>
+              <a:t>centro</a:t>
+            </a:r>
+            <a:r>
+              <a:rPr lang="en-US" sz="713" dirty="0">
+                <a:solidFill>
+                  <a:srgbClr val="E2E8F0"/>
+                </a:solidFill>
+              </a:rPr>
+              <a:t> </a:t>
+            </a:r>
+            <a:r>
+              <a:rPr lang="en-US" sz="713" dirty="0" err="1">
+                <a:solidFill>
+                  <a:srgbClr val="E2E8F0"/>
+                </a:solidFill>
+              </a:rPr>
+              <a:t>como</a:t>
+            </a:r>
+            <a:r>
+              <a:rPr lang="en-US" sz="713" dirty="0">
+                <a:solidFill>
+                  <a:srgbClr val="E2E8F0"/>
+                </a:solidFill>
+              </a:rPr>
+              <a:t> features </a:t>
+            </a:r>
+            <a:r>
+              <a:rPr lang="en-US" sz="713" dirty="0" err="1">
+                <a:solidFill>
+                  <a:srgbClr val="E2E8F0"/>
+                </a:solidFill>
+              </a:rPr>
+              <a:t>adicionales</a:t>
+            </a:r>
+            <a:r>
+              <a:rPr lang="en-US" sz="713" dirty="0">
+                <a:solidFill>
+                  <a:srgbClr val="E2E8F0"/>
+                </a:solidFill>
+              </a:rPr>
+              <a:t>.</a:t>
+            </a:r>
+            <a:endParaRPr lang="en-US" sz="713" dirty="0"/>
+          </a:p>
+        </p:txBody>
+      </p:sp>
+      <p:sp>
+        <p:nvSpPr>
+          <p:cNvPr id="15" name="Text 12">
+            <a:extLst>
+              <a:ext uri="{FF2B5EF4-FFF2-40B4-BE49-F238E27FC236}">
+                <a16:creationId xmlns:a16="http://schemas.microsoft.com/office/drawing/2014/main" id="{4FD43D3E-2197-4B37-7713-743588BF201D}"/>
+              </a:ext>
+            </a:extLst>
+          </p:cNvPr>
+          <p:cNvSpPr/>
+          <p:nvPr/>
+        </p:nvSpPr>
+        <p:spPr>
+          <a:xfrm>
+            <a:off x="4709160" y="2911221"/>
+            <a:ext cx="2743200" cy="370332"/>
+          </a:xfrm>
+          <a:prstGeom prst="rect">
+            <a:avLst/>
+          </a:prstGeom>
+          <a:noFill/>
+          <a:ln/>
+        </p:spPr>
+        <p:txBody>
+          <a:bodyPr wrap="square" rtlCol="0" anchor="ctr"/>
+          <a:lstStyle/>
+          <a:p>
+            <a:r>
+              <a:rPr lang="en-US" sz="713" dirty="0">
+                <a:solidFill>
+                  <a:srgbClr val="E2E8F0"/>
+                </a:solidFill>
+              </a:rPr>
+              <a:t>▸  </a:t>
+            </a:r>
+            <a:r>
+              <a:rPr lang="en-US" sz="713" dirty="0" err="1">
+                <a:solidFill>
+                  <a:srgbClr val="E2E8F0"/>
+                </a:solidFill>
+              </a:rPr>
+              <a:t>Ampliar</a:t>
+            </a:r>
+            <a:r>
+              <a:rPr lang="en-US" sz="713" dirty="0">
+                <a:solidFill>
+                  <a:srgbClr val="E2E8F0"/>
+                </a:solidFill>
+              </a:rPr>
+              <a:t> dataset con </a:t>
+            </a:r>
+            <a:r>
+              <a:rPr lang="en-US" sz="713" dirty="0" err="1">
+                <a:solidFill>
+                  <a:srgbClr val="E2E8F0"/>
+                </a:solidFill>
+              </a:rPr>
+              <a:t>datos</a:t>
+            </a:r>
+            <a:r>
+              <a:rPr lang="en-US" sz="713" dirty="0">
+                <a:solidFill>
+                  <a:srgbClr val="E2E8F0"/>
+                </a:solidFill>
+              </a:rPr>
+              <a:t> de </a:t>
+            </a:r>
+            <a:r>
+              <a:rPr lang="en-US" sz="713" dirty="0" err="1">
+                <a:solidFill>
+                  <a:srgbClr val="E2E8F0"/>
+                </a:solidFill>
+              </a:rPr>
+              <a:t>otros</a:t>
+            </a:r>
+            <a:r>
+              <a:rPr lang="en-US" sz="713" dirty="0">
+                <a:solidFill>
+                  <a:srgbClr val="E2E8F0"/>
+                </a:solidFill>
+              </a:rPr>
+              <a:t> </a:t>
+            </a:r>
+            <a:r>
+              <a:rPr lang="en-US" sz="713" dirty="0" err="1">
+                <a:solidFill>
+                  <a:srgbClr val="E2E8F0"/>
+                </a:solidFill>
+              </a:rPr>
+              <a:t>portale</a:t>
+            </a:r>
+            <a:r>
+              <a:rPr lang="en-US" sz="713" dirty="0">
+                <a:solidFill>
+                  <a:srgbClr val="E2E8F0"/>
+                </a:solidFill>
+              </a:rPr>
+              <a:t> y meses (solo </a:t>
+            </a:r>
+            <a:r>
+              <a:rPr lang="en-US" sz="713" dirty="0" err="1">
+                <a:solidFill>
+                  <a:srgbClr val="E2E8F0"/>
+                </a:solidFill>
+              </a:rPr>
+              <a:t>disponemos</a:t>
+            </a:r>
+            <a:r>
+              <a:rPr lang="en-US" sz="713" dirty="0">
+                <a:solidFill>
+                  <a:srgbClr val="E2E8F0"/>
+                </a:solidFill>
+              </a:rPr>
+              <a:t> de </a:t>
+            </a:r>
+            <a:r>
+              <a:rPr lang="en-US" sz="713" dirty="0" err="1">
+                <a:solidFill>
+                  <a:srgbClr val="E2E8F0"/>
+                </a:solidFill>
+              </a:rPr>
+              <a:t>datos</a:t>
+            </a:r>
+            <a:r>
+              <a:rPr lang="en-US" sz="713" dirty="0">
+                <a:solidFill>
+                  <a:srgbClr val="E2E8F0"/>
+                </a:solidFill>
+              </a:rPr>
+              <a:t> de 2025) </a:t>
+            </a:r>
+            <a:endParaRPr lang="en-US" sz="713" dirty="0"/>
+          </a:p>
+        </p:txBody>
+      </p:sp>
+      <p:sp>
+        <p:nvSpPr>
+          <p:cNvPr id="16" name="Text 12">
+            <a:extLst>
+              <a:ext uri="{FF2B5EF4-FFF2-40B4-BE49-F238E27FC236}">
+                <a16:creationId xmlns:a16="http://schemas.microsoft.com/office/drawing/2014/main" id="{A7998271-4FDE-F70A-ACFD-40244AD25DB7}"/>
+              </a:ext>
+            </a:extLst>
+          </p:cNvPr>
+          <p:cNvSpPr/>
+          <p:nvPr/>
+        </p:nvSpPr>
+        <p:spPr>
+          <a:xfrm>
+            <a:off x="4709160" y="3387852"/>
+            <a:ext cx="2743200" cy="370332"/>
+          </a:xfrm>
+          <a:prstGeom prst="rect">
+            <a:avLst/>
+          </a:prstGeom>
+          <a:noFill/>
+          <a:ln/>
+        </p:spPr>
+        <p:txBody>
+          <a:bodyPr wrap="square" rtlCol="0" anchor="ctr"/>
+          <a:lstStyle/>
+          <a:p>
+            <a:r>
+              <a:rPr lang="en-US" sz="713" dirty="0">
+                <a:solidFill>
+                  <a:srgbClr val="E2E8F0"/>
+                </a:solidFill>
+              </a:rPr>
+              <a:t>▸  </a:t>
+            </a:r>
+            <a:r>
+              <a:rPr lang="en-US" sz="713" dirty="0" err="1">
+                <a:solidFill>
+                  <a:srgbClr val="E2E8F0"/>
+                </a:solidFill>
+              </a:rPr>
+              <a:t>Reducir</a:t>
+            </a:r>
+            <a:r>
+              <a:rPr lang="en-US" sz="713" dirty="0">
+                <a:solidFill>
+                  <a:srgbClr val="E2E8F0"/>
+                </a:solidFill>
+              </a:rPr>
+              <a:t> overfitting</a:t>
+            </a:r>
+            <a:endParaRPr lang="en-US" sz="713" dirty="0"/>
+          </a:p>
+        </p:txBody>
+      </p:sp>
+    </p:spTree>
+    <p:extLst>
+      <p:ext uri="{BB962C8B-B14F-4D97-AF65-F5344CB8AC3E}">
+        <p14:creationId xmlns:p14="http://schemas.microsoft.com/office/powerpoint/2010/main" val="1871664441"/>
+      </p:ext>
+    </p:extLst>
+  </p:cSld>
+  <p:clrMapOvr>
+    <a:masterClrMapping/>
+  </p:clrMapOvr>
+</p:sld>
+</file>
+
+<file path=ppt/slides/slide8.xml><?xml version="1.0" encoding="utf-8"?>
+<p:sld xmlns:a="http://schemas.openxmlformats.org/drawingml/2006/main" xmlns:r="http://schemas.openxmlformats.org/officeDocument/2006/relationships" xmlns:p="http://schemas.openxmlformats.org/presentationml/2006/main">
+  <p:cSld name="Slide 9">
     <p:bg>
       <p:bgPr>
         <a:solidFill>
-          <a:srgbClr val="1A2744"/>
+          <a:srgbClr val="0D7377"/>
         </a:solidFill>
         <a:effectLst/>
       </p:bgPr>
@@ -11455,891 +11678,6 @@
         <p:spPr>
           <a:xfrm>
             <a:off x="0" y="0"/>
-            <a:ext cx="320040" cy="5143500"/>
-          </a:xfrm>
-          <a:prstGeom prst="rect">
-            <a:avLst/>
-          </a:prstGeom>
-          <a:solidFill>
-            <a:srgbClr val="0D7377"/>
-          </a:solidFill>
-          <a:ln w="12700">
-            <a:solidFill>
-              <a:srgbClr val="0D7377"/>
-            </a:solidFill>
-            <a:prstDash val="solid"/>
-          </a:ln>
-        </p:spPr>
-        <p:txBody>
-          <a:bodyPr/>
-          <a:lstStyle/>
-          <a:p>
-            <a:endParaRPr lang="es-ES"/>
-          </a:p>
-        </p:txBody>
-      </p:sp>
-      <p:sp>
-        <p:nvSpPr>
-          <p:cNvPr id="3" name="Shape 1"/>
-          <p:cNvSpPr/>
-          <p:nvPr/>
-        </p:nvSpPr>
-        <p:spPr>
-          <a:xfrm>
-            <a:off x="320040" y="0"/>
-            <a:ext cx="109728" cy="5143500"/>
-          </a:xfrm>
-          <a:prstGeom prst="rect">
-            <a:avLst/>
-          </a:prstGeom>
-          <a:solidFill>
-            <a:srgbClr val="E07B39"/>
-          </a:solidFill>
-          <a:ln w="12700">
-            <a:solidFill>
-              <a:srgbClr val="E07B39"/>
-            </a:solidFill>
-            <a:prstDash val="solid"/>
-          </a:ln>
-        </p:spPr>
-        <p:txBody>
-          <a:bodyPr/>
-          <a:lstStyle/>
-          <a:p>
-            <a:endParaRPr lang="es-ES"/>
-          </a:p>
-        </p:txBody>
-      </p:sp>
-      <p:sp>
-        <p:nvSpPr>
-          <p:cNvPr id="4" name="Text 2"/>
-          <p:cNvSpPr/>
-          <p:nvPr/>
-        </p:nvSpPr>
-        <p:spPr>
-          <a:xfrm>
-            <a:off x="777240" y="365760"/>
-            <a:ext cx="7772400" cy="594360"/>
-          </a:xfrm>
-          <a:prstGeom prst="rect">
-            <a:avLst/>
-          </a:prstGeom>
-          <a:noFill/>
-          <a:ln/>
-        </p:spPr>
-        <p:txBody>
-          <a:bodyPr wrap="square" rtlCol="0" anchor="ctr"/>
-          <a:lstStyle/>
-          <a:p>
-            <a:pPr marL="0" indent="0">
-              <a:buNone/>
-            </a:pPr>
-            <a:r>
-              <a:rPr lang="en-US" sz="3200" b="1" dirty="0">
-                <a:solidFill>
-                  <a:srgbClr val="FFFFFF"/>
-                </a:solidFill>
-                <a:latin typeface="Calibri" pitchFamily="34" charset="0"/>
-                <a:ea typeface="Calibri" pitchFamily="34" charset="-122"/>
-                <a:cs typeface="Calibri" pitchFamily="34" charset="-120"/>
-              </a:rPr>
-              <a:t>Conclusiones</a:t>
-            </a:r>
-            <a:endParaRPr lang="en-US" sz="3200" dirty="0"/>
-          </a:p>
-        </p:txBody>
-      </p:sp>
-      <p:sp>
-        <p:nvSpPr>
-          <p:cNvPr id="5" name="Shape 3"/>
-          <p:cNvSpPr/>
-          <p:nvPr/>
-        </p:nvSpPr>
-        <p:spPr>
-          <a:xfrm>
-            <a:off x="777240" y="1097280"/>
-            <a:ext cx="8046720" cy="676656"/>
-          </a:xfrm>
-          <a:prstGeom prst="rect">
-            <a:avLst/>
-          </a:prstGeom>
-          <a:solidFill>
-            <a:srgbClr val="1E2F50"/>
-          </a:solidFill>
-          <a:ln w="12700">
-            <a:solidFill>
-              <a:srgbClr val="2A3F64"/>
-            </a:solidFill>
-            <a:prstDash val="solid"/>
-          </a:ln>
-        </p:spPr>
-        <p:txBody>
-          <a:bodyPr/>
-          <a:lstStyle/>
-          <a:p>
-            <a:endParaRPr lang="es-ES"/>
-          </a:p>
-        </p:txBody>
-      </p:sp>
-      <p:sp>
-        <p:nvSpPr>
-          <p:cNvPr id="6" name="Text 4"/>
-          <p:cNvSpPr/>
-          <p:nvPr/>
-        </p:nvSpPr>
-        <p:spPr>
-          <a:xfrm>
-            <a:off x="868680" y="1170432"/>
-            <a:ext cx="457200" cy="502920"/>
-          </a:xfrm>
-          <a:prstGeom prst="rect">
-            <a:avLst/>
-          </a:prstGeom>
-          <a:noFill/>
-          <a:ln/>
-        </p:spPr>
-        <p:txBody>
-          <a:bodyPr wrap="square" rtlCol="0" anchor="ctr"/>
-          <a:lstStyle/>
-          <a:p>
-            <a:pPr marL="0" indent="0" algn="ctr">
-              <a:buNone/>
-            </a:pPr>
-            <a:r>
-              <a:rPr lang="en-US" sz="1400" b="1" dirty="0">
-                <a:solidFill>
-                  <a:srgbClr val="14A5A9"/>
-                </a:solidFill>
-                <a:latin typeface="Calibri" pitchFamily="34" charset="0"/>
-                <a:ea typeface="Calibri" pitchFamily="34" charset="-122"/>
-                <a:cs typeface="Calibri" pitchFamily="34" charset="-120"/>
-              </a:rPr>
-              <a:t>01</a:t>
-            </a:r>
-            <a:endParaRPr lang="en-US" sz="1400" dirty="0"/>
-          </a:p>
-        </p:txBody>
-      </p:sp>
-      <p:sp>
-        <p:nvSpPr>
-          <p:cNvPr id="7" name="Text 5"/>
-          <p:cNvSpPr/>
-          <p:nvPr/>
-        </p:nvSpPr>
-        <p:spPr>
-          <a:xfrm>
-            <a:off x="1417320" y="1133856"/>
-            <a:ext cx="3200400" cy="292608"/>
-          </a:xfrm>
-          <a:prstGeom prst="rect">
-            <a:avLst/>
-          </a:prstGeom>
-          <a:noFill/>
-          <a:ln/>
-        </p:spPr>
-        <p:txBody>
-          <a:bodyPr wrap="square" rtlCol="0" anchor="ctr"/>
-          <a:lstStyle/>
-          <a:p>
-            <a:pPr marL="0" indent="0">
-              <a:buNone/>
-            </a:pPr>
-            <a:r>
-              <a:rPr lang="en-US" sz="1200" b="1" dirty="0">
-                <a:solidFill>
-                  <a:srgbClr val="14A5A9"/>
-                </a:solidFill>
-                <a:latin typeface="Calibri" pitchFamily="34" charset="0"/>
-                <a:ea typeface="Calibri" pitchFamily="34" charset="-122"/>
-                <a:cs typeface="Calibri" pitchFamily="34" charset="-120"/>
-              </a:rPr>
-              <a:t>Random Forest es el mejor modelo</a:t>
-            </a:r>
-            <a:endParaRPr lang="en-US" sz="1200" dirty="0"/>
-          </a:p>
-        </p:txBody>
-      </p:sp>
-      <p:sp>
-        <p:nvSpPr>
-          <p:cNvPr id="8" name="Text 6"/>
-          <p:cNvSpPr/>
-          <p:nvPr/>
-        </p:nvSpPr>
-        <p:spPr>
-          <a:xfrm>
-            <a:off x="1417320" y="1426464"/>
-            <a:ext cx="7315200" cy="292608"/>
-          </a:xfrm>
-          <a:prstGeom prst="rect">
-            <a:avLst/>
-          </a:prstGeom>
-          <a:noFill/>
-          <a:ln/>
-        </p:spPr>
-        <p:txBody>
-          <a:bodyPr wrap="square" rtlCol="0" anchor="ctr"/>
-          <a:lstStyle/>
-          <a:p>
-            <a:pPr marL="0" indent="0">
-              <a:buNone/>
-            </a:pPr>
-            <a:r>
-              <a:rPr lang="en-US" sz="1000" dirty="0">
-                <a:solidFill>
-                  <a:srgbClr val="A8B8D0"/>
-                </a:solidFill>
-                <a:latin typeface="Calibri" pitchFamily="34" charset="0"/>
-                <a:ea typeface="Calibri" pitchFamily="34" charset="-122"/>
-                <a:cs typeface="Calibri" pitchFamily="34" charset="-120"/>
-              </a:rPr>
-              <a:t>R2 aprox. 0.82, RMSE aprox. 310 EUR/m2 — captura la no-linealidad del mercado</a:t>
-            </a:r>
-            <a:endParaRPr lang="en-US" sz="1000" dirty="0"/>
-          </a:p>
-        </p:txBody>
-      </p:sp>
-      <p:sp>
-        <p:nvSpPr>
-          <p:cNvPr id="9" name="Shape 7"/>
-          <p:cNvSpPr/>
-          <p:nvPr/>
-        </p:nvSpPr>
-        <p:spPr>
-          <a:xfrm>
-            <a:off x="777240" y="1865376"/>
-            <a:ext cx="8046720" cy="676656"/>
-          </a:xfrm>
-          <a:prstGeom prst="rect">
-            <a:avLst/>
-          </a:prstGeom>
-          <a:solidFill>
-            <a:srgbClr val="1E2F50"/>
-          </a:solidFill>
-          <a:ln w="12700">
-            <a:solidFill>
-              <a:srgbClr val="2A3F64"/>
-            </a:solidFill>
-            <a:prstDash val="solid"/>
-          </a:ln>
-        </p:spPr>
-        <p:txBody>
-          <a:bodyPr/>
-          <a:lstStyle/>
-          <a:p>
-            <a:endParaRPr lang="es-ES"/>
-          </a:p>
-        </p:txBody>
-      </p:sp>
-      <p:sp>
-        <p:nvSpPr>
-          <p:cNvPr id="10" name="Text 8"/>
-          <p:cNvSpPr/>
-          <p:nvPr/>
-        </p:nvSpPr>
-        <p:spPr>
-          <a:xfrm>
-            <a:off x="868680" y="1938528"/>
-            <a:ext cx="457200" cy="502920"/>
-          </a:xfrm>
-          <a:prstGeom prst="rect">
-            <a:avLst/>
-          </a:prstGeom>
-          <a:noFill/>
-          <a:ln/>
-        </p:spPr>
-        <p:txBody>
-          <a:bodyPr wrap="square" rtlCol="0" anchor="ctr"/>
-          <a:lstStyle/>
-          <a:p>
-            <a:pPr marL="0" indent="0" algn="ctr">
-              <a:buNone/>
-            </a:pPr>
-            <a:r>
-              <a:rPr lang="en-US" sz="1400" b="1" dirty="0">
-                <a:solidFill>
-                  <a:srgbClr val="14A5A9"/>
-                </a:solidFill>
-                <a:latin typeface="Calibri" pitchFamily="34" charset="0"/>
-                <a:ea typeface="Calibri" pitchFamily="34" charset="-122"/>
-                <a:cs typeface="Calibri" pitchFamily="34" charset="-120"/>
-              </a:rPr>
-              <a:t>02</a:t>
-            </a:r>
-            <a:endParaRPr lang="en-US" sz="1400" dirty="0"/>
-          </a:p>
-        </p:txBody>
-      </p:sp>
-      <p:sp>
-        <p:nvSpPr>
-          <p:cNvPr id="11" name="Text 9"/>
-          <p:cNvSpPr/>
-          <p:nvPr/>
-        </p:nvSpPr>
-        <p:spPr>
-          <a:xfrm>
-            <a:off x="1417320" y="1901952"/>
-            <a:ext cx="3200400" cy="292608"/>
-          </a:xfrm>
-          <a:prstGeom prst="rect">
-            <a:avLst/>
-          </a:prstGeom>
-          <a:noFill/>
-          <a:ln/>
-        </p:spPr>
-        <p:txBody>
-          <a:bodyPr wrap="square" rtlCol="0" anchor="ctr"/>
-          <a:lstStyle/>
-          <a:p>
-            <a:pPr marL="0" indent="0">
-              <a:buNone/>
-            </a:pPr>
-            <a:r>
-              <a:rPr lang="en-US" sz="1200" b="1" dirty="0">
-                <a:solidFill>
-                  <a:srgbClr val="14A5A9"/>
-                </a:solidFill>
-                <a:latin typeface="Calibri" pitchFamily="34" charset="0"/>
-                <a:ea typeface="Calibri" pitchFamily="34" charset="-122"/>
-                <a:cs typeface="Calibri" pitchFamily="34" charset="-120"/>
-              </a:rPr>
-              <a:t>La ubicacion es el factor #1</a:t>
-            </a:r>
-            <a:endParaRPr lang="en-US" sz="1200" dirty="0"/>
-          </a:p>
-        </p:txBody>
-      </p:sp>
-      <p:sp>
-        <p:nvSpPr>
-          <p:cNvPr id="12" name="Text 10"/>
-          <p:cNvSpPr/>
-          <p:nvPr/>
-        </p:nvSpPr>
-        <p:spPr>
-          <a:xfrm>
-            <a:off x="1417320" y="2194560"/>
-            <a:ext cx="7315200" cy="292608"/>
-          </a:xfrm>
-          <a:prstGeom prst="rect">
-            <a:avLst/>
-          </a:prstGeom>
-          <a:noFill/>
-          <a:ln/>
-        </p:spPr>
-        <p:txBody>
-          <a:bodyPr wrap="square" rtlCol="0" anchor="ctr"/>
-          <a:lstStyle/>
-          <a:p>
-            <a:pPr marL="0" indent="0">
-              <a:buNone/>
-            </a:pPr>
-            <a:r>
-              <a:rPr lang="en-US" sz="1000" dirty="0">
-                <a:solidFill>
-                  <a:srgbClr val="A8B8D0"/>
-                </a:solidFill>
-                <a:latin typeface="Calibri" pitchFamily="34" charset="0"/>
-                <a:ea typeface="Calibri" pitchFamily="34" charset="-122"/>
-                <a:cs typeface="Calibri" pitchFamily="34" charset="-120"/>
-              </a:rPr>
-              <a:t>Latitud/Longitud + Barrio explican ~50% de la importancia total del modelo</a:t>
-            </a:r>
-            <a:endParaRPr lang="en-US" sz="1000" dirty="0"/>
-          </a:p>
-        </p:txBody>
-      </p:sp>
-      <p:sp>
-        <p:nvSpPr>
-          <p:cNvPr id="13" name="Shape 11"/>
-          <p:cNvSpPr/>
-          <p:nvPr/>
-        </p:nvSpPr>
-        <p:spPr>
-          <a:xfrm>
-            <a:off x="777240" y="2633472"/>
-            <a:ext cx="8046720" cy="676656"/>
-          </a:xfrm>
-          <a:prstGeom prst="rect">
-            <a:avLst/>
-          </a:prstGeom>
-          <a:solidFill>
-            <a:srgbClr val="1E2F50"/>
-          </a:solidFill>
-          <a:ln w="12700">
-            <a:solidFill>
-              <a:srgbClr val="2A3F64"/>
-            </a:solidFill>
-            <a:prstDash val="solid"/>
-          </a:ln>
-        </p:spPr>
-        <p:txBody>
-          <a:bodyPr/>
-          <a:lstStyle/>
-          <a:p>
-            <a:endParaRPr lang="es-ES"/>
-          </a:p>
-        </p:txBody>
-      </p:sp>
-      <p:sp>
-        <p:nvSpPr>
-          <p:cNvPr id="14" name="Text 12"/>
-          <p:cNvSpPr/>
-          <p:nvPr/>
-        </p:nvSpPr>
-        <p:spPr>
-          <a:xfrm>
-            <a:off x="868680" y="2706624"/>
-            <a:ext cx="457200" cy="502920"/>
-          </a:xfrm>
-          <a:prstGeom prst="rect">
-            <a:avLst/>
-          </a:prstGeom>
-          <a:noFill/>
-          <a:ln/>
-        </p:spPr>
-        <p:txBody>
-          <a:bodyPr wrap="square" rtlCol="0" anchor="ctr"/>
-          <a:lstStyle/>
-          <a:p>
-            <a:pPr marL="0" indent="0" algn="ctr">
-              <a:buNone/>
-            </a:pPr>
-            <a:r>
-              <a:rPr lang="en-US" sz="1400" b="1" dirty="0">
-                <a:solidFill>
-                  <a:srgbClr val="14A5A9"/>
-                </a:solidFill>
-                <a:latin typeface="Calibri" pitchFamily="34" charset="0"/>
-                <a:ea typeface="Calibri" pitchFamily="34" charset="-122"/>
-                <a:cs typeface="Calibri" pitchFamily="34" charset="-120"/>
-              </a:rPr>
-              <a:t>03</a:t>
-            </a:r>
-            <a:endParaRPr lang="en-US" sz="1400" dirty="0"/>
-          </a:p>
-        </p:txBody>
-      </p:sp>
-      <p:sp>
-        <p:nvSpPr>
-          <p:cNvPr id="15" name="Text 13"/>
-          <p:cNvSpPr/>
-          <p:nvPr/>
-        </p:nvSpPr>
-        <p:spPr>
-          <a:xfrm>
-            <a:off x="1417320" y="2670048"/>
-            <a:ext cx="3200400" cy="292608"/>
-          </a:xfrm>
-          <a:prstGeom prst="rect">
-            <a:avLst/>
-          </a:prstGeom>
-          <a:noFill/>
-          <a:ln/>
-        </p:spPr>
-        <p:txBody>
-          <a:bodyPr wrap="square" rtlCol="0" anchor="ctr"/>
-          <a:lstStyle/>
-          <a:p>
-            <a:pPr marL="0" indent="0">
-              <a:buNone/>
-            </a:pPr>
-            <a:r>
-              <a:rPr lang="en-US" sz="1200" b="1" dirty="0">
-                <a:solidFill>
-                  <a:srgbClr val="14A5A9"/>
-                </a:solidFill>
-                <a:latin typeface="Calibri" pitchFamily="34" charset="0"/>
-                <a:ea typeface="Calibri" pitchFamily="34" charset="-122"/>
-                <a:cs typeface="Calibri" pitchFamily="34" charset="-120"/>
-              </a:rPr>
-              <a:t>La superficie es critica</a:t>
-            </a:r>
-            <a:endParaRPr lang="en-US" sz="1200" dirty="0"/>
-          </a:p>
-        </p:txBody>
-      </p:sp>
-      <p:sp>
-        <p:nvSpPr>
-          <p:cNvPr id="16" name="Text 14"/>
-          <p:cNvSpPr/>
-          <p:nvPr/>
-        </p:nvSpPr>
-        <p:spPr>
-          <a:xfrm>
-            <a:off x="1417320" y="2962656"/>
-            <a:ext cx="7315200" cy="292608"/>
-          </a:xfrm>
-          <a:prstGeom prst="rect">
-            <a:avLst/>
-          </a:prstGeom>
-          <a:noFill/>
-          <a:ln/>
-        </p:spPr>
-        <p:txBody>
-          <a:bodyPr wrap="square" rtlCol="0" anchor="ctr"/>
-          <a:lstStyle/>
-          <a:p>
-            <a:pPr marL="0" indent="0">
-              <a:buNone/>
-            </a:pPr>
-            <a:r>
-              <a:rPr lang="en-US" sz="1000" dirty="0">
-                <a:solidFill>
-                  <a:srgbClr val="A8B8D0"/>
-                </a:solidFill>
-                <a:latin typeface="Calibri" pitchFamily="34" charset="0"/>
-                <a:ea typeface="Calibri" pitchFamily="34" charset="-122"/>
-                <a:cs typeface="Calibri" pitchFamily="34" charset="-120"/>
-              </a:rPr>
-              <a:t>Variable continua más importante después de la localización geográfica</a:t>
-            </a:r>
-            <a:endParaRPr lang="en-US" sz="1000" dirty="0"/>
-          </a:p>
-        </p:txBody>
-      </p:sp>
-      <p:sp>
-        <p:nvSpPr>
-          <p:cNvPr id="17" name="Shape 15"/>
-          <p:cNvSpPr/>
-          <p:nvPr/>
-        </p:nvSpPr>
-        <p:spPr>
-          <a:xfrm>
-            <a:off x="777240" y="3401568"/>
-            <a:ext cx="8046720" cy="676656"/>
-          </a:xfrm>
-          <a:prstGeom prst="rect">
-            <a:avLst/>
-          </a:prstGeom>
-          <a:solidFill>
-            <a:srgbClr val="1E2F50"/>
-          </a:solidFill>
-          <a:ln w="12700">
-            <a:solidFill>
-              <a:srgbClr val="2A3F64"/>
-            </a:solidFill>
-            <a:prstDash val="solid"/>
-          </a:ln>
-        </p:spPr>
-        <p:txBody>
-          <a:bodyPr/>
-          <a:lstStyle/>
-          <a:p>
-            <a:endParaRPr lang="es-ES"/>
-          </a:p>
-        </p:txBody>
-      </p:sp>
-      <p:sp>
-        <p:nvSpPr>
-          <p:cNvPr id="18" name="Text 16"/>
-          <p:cNvSpPr/>
-          <p:nvPr/>
-        </p:nvSpPr>
-        <p:spPr>
-          <a:xfrm>
-            <a:off x="868680" y="3474720"/>
-            <a:ext cx="457200" cy="502920"/>
-          </a:xfrm>
-          <a:prstGeom prst="rect">
-            <a:avLst/>
-          </a:prstGeom>
-          <a:noFill/>
-          <a:ln/>
-        </p:spPr>
-        <p:txBody>
-          <a:bodyPr wrap="square" rtlCol="0" anchor="ctr"/>
-          <a:lstStyle/>
-          <a:p>
-            <a:pPr marL="0" indent="0" algn="ctr">
-              <a:buNone/>
-            </a:pPr>
-            <a:r>
-              <a:rPr lang="en-US" sz="1400" b="1" dirty="0">
-                <a:solidFill>
-                  <a:srgbClr val="14A5A9"/>
-                </a:solidFill>
-                <a:latin typeface="Calibri" pitchFamily="34" charset="0"/>
-                <a:ea typeface="Calibri" pitchFamily="34" charset="-122"/>
-                <a:cs typeface="Calibri" pitchFamily="34" charset="-120"/>
-              </a:rPr>
-              <a:t>04</a:t>
-            </a:r>
-            <a:endParaRPr lang="en-US" sz="1400" dirty="0"/>
-          </a:p>
-        </p:txBody>
-      </p:sp>
-      <p:sp>
-        <p:nvSpPr>
-          <p:cNvPr id="19" name="Text 17"/>
-          <p:cNvSpPr/>
-          <p:nvPr/>
-        </p:nvSpPr>
-        <p:spPr>
-          <a:xfrm>
-            <a:off x="1417320" y="3438144"/>
-            <a:ext cx="3200400" cy="292608"/>
-          </a:xfrm>
-          <a:prstGeom prst="rect">
-            <a:avLst/>
-          </a:prstGeom>
-          <a:noFill/>
-          <a:ln/>
-        </p:spPr>
-        <p:txBody>
-          <a:bodyPr wrap="square" rtlCol="0" anchor="ctr"/>
-          <a:lstStyle/>
-          <a:p>
-            <a:pPr marL="0" indent="0">
-              <a:buNone/>
-            </a:pPr>
-            <a:r>
-              <a:rPr lang="en-US" sz="1200" b="1" dirty="0">
-                <a:solidFill>
-                  <a:srgbClr val="14A5A9"/>
-                </a:solidFill>
-                <a:latin typeface="Calibri" pitchFamily="34" charset="0"/>
-                <a:ea typeface="Calibri" pitchFamily="34" charset="-122"/>
-                <a:cs typeface="Calibri" pitchFamily="34" charset="-120"/>
-              </a:rPr>
-              <a:t>Los outliers distorsionan</a:t>
-            </a:r>
-            <a:endParaRPr lang="en-US" sz="1200" dirty="0"/>
-          </a:p>
-        </p:txBody>
-      </p:sp>
-      <p:sp>
-        <p:nvSpPr>
-          <p:cNvPr id="20" name="Text 18"/>
-          <p:cNvSpPr/>
-          <p:nvPr/>
-        </p:nvSpPr>
-        <p:spPr>
-          <a:xfrm>
-            <a:off x="1417320" y="3730752"/>
-            <a:ext cx="7315200" cy="292608"/>
-          </a:xfrm>
-          <a:prstGeom prst="rect">
-            <a:avLst/>
-          </a:prstGeom>
-          <a:noFill/>
-          <a:ln/>
-        </p:spPr>
-        <p:txBody>
-          <a:bodyPr wrap="square" rtlCol="0" anchor="ctr"/>
-          <a:lstStyle/>
-          <a:p>
-            <a:pPr marL="0" indent="0">
-              <a:buNone/>
-            </a:pPr>
-            <a:r>
-              <a:rPr lang="en-US" sz="1000" dirty="0">
-                <a:solidFill>
-                  <a:srgbClr val="A8B8D0"/>
-                </a:solidFill>
-                <a:latin typeface="Calibri" pitchFamily="34" charset="0"/>
-                <a:ea typeface="Calibri" pitchFamily="34" charset="-122"/>
-                <a:cs typeface="Calibri" pitchFamily="34" charset="-120"/>
-              </a:rPr>
-              <a:t>El filtrado de precios extremos (500-15.000 EUR/m2) mejoro la calidad del analisis</a:t>
-            </a:r>
-            <a:endParaRPr lang="en-US" sz="1000" dirty="0"/>
-          </a:p>
-        </p:txBody>
-      </p:sp>
-      <p:sp>
-        <p:nvSpPr>
-          <p:cNvPr id="21" name="Shape 19"/>
-          <p:cNvSpPr/>
-          <p:nvPr/>
-        </p:nvSpPr>
-        <p:spPr>
-          <a:xfrm>
-            <a:off x="777240" y="4169664"/>
-            <a:ext cx="8046720" cy="676656"/>
-          </a:xfrm>
-          <a:prstGeom prst="rect">
-            <a:avLst/>
-          </a:prstGeom>
-          <a:solidFill>
-            <a:srgbClr val="1E2F50"/>
-          </a:solidFill>
-          <a:ln w="12700">
-            <a:solidFill>
-              <a:srgbClr val="2A3F64"/>
-            </a:solidFill>
-            <a:prstDash val="solid"/>
-          </a:ln>
-        </p:spPr>
-        <p:txBody>
-          <a:bodyPr/>
-          <a:lstStyle/>
-          <a:p>
-            <a:endParaRPr lang="es-ES"/>
-          </a:p>
-        </p:txBody>
-      </p:sp>
-      <p:sp>
-        <p:nvSpPr>
-          <p:cNvPr id="22" name="Text 20"/>
-          <p:cNvSpPr/>
-          <p:nvPr/>
-        </p:nvSpPr>
-        <p:spPr>
-          <a:xfrm>
-            <a:off x="868680" y="4242816"/>
-            <a:ext cx="457200" cy="502920"/>
-          </a:xfrm>
-          <a:prstGeom prst="rect">
-            <a:avLst/>
-          </a:prstGeom>
-          <a:noFill/>
-          <a:ln/>
-        </p:spPr>
-        <p:txBody>
-          <a:bodyPr wrap="square" rtlCol="0" anchor="ctr"/>
-          <a:lstStyle/>
-          <a:p>
-            <a:pPr marL="0" indent="0" algn="ctr">
-              <a:buNone/>
-            </a:pPr>
-            <a:r>
-              <a:rPr lang="en-US" sz="1400" b="1" dirty="0">
-                <a:solidFill>
-                  <a:srgbClr val="14A5A9"/>
-                </a:solidFill>
-                <a:latin typeface="Calibri" pitchFamily="34" charset="0"/>
-                <a:ea typeface="Calibri" pitchFamily="34" charset="-122"/>
-                <a:cs typeface="Calibri" pitchFamily="34" charset="-120"/>
-              </a:rPr>
-              <a:t>05</a:t>
-            </a:r>
-            <a:endParaRPr lang="en-US" sz="1400" dirty="0"/>
-          </a:p>
-        </p:txBody>
-      </p:sp>
-      <p:sp>
-        <p:nvSpPr>
-          <p:cNvPr id="23" name="Text 21"/>
-          <p:cNvSpPr/>
-          <p:nvPr/>
-        </p:nvSpPr>
-        <p:spPr>
-          <a:xfrm>
-            <a:off x="1417320" y="4206240"/>
-            <a:ext cx="3200400" cy="292608"/>
-          </a:xfrm>
-          <a:prstGeom prst="rect">
-            <a:avLst/>
-          </a:prstGeom>
-          <a:noFill/>
-          <a:ln/>
-        </p:spPr>
-        <p:txBody>
-          <a:bodyPr wrap="square" rtlCol="0" anchor="ctr"/>
-          <a:lstStyle/>
-          <a:p>
-            <a:pPr marL="0" indent="0">
-              <a:buNone/>
-            </a:pPr>
-            <a:r>
-              <a:rPr lang="en-US" sz="1200" b="1" dirty="0">
-                <a:solidFill>
-                  <a:srgbClr val="14A5A9"/>
-                </a:solidFill>
-                <a:latin typeface="Calibri" pitchFamily="34" charset="0"/>
-                <a:ea typeface="Calibri" pitchFamily="34" charset="-122"/>
-                <a:cs typeface="Calibri" pitchFamily="34" charset="-120"/>
-              </a:rPr>
-              <a:t>Proximos pasos</a:t>
-            </a:r>
-            <a:endParaRPr lang="en-US" sz="1200" dirty="0"/>
-          </a:p>
-        </p:txBody>
-      </p:sp>
-      <p:sp>
-        <p:nvSpPr>
-          <p:cNvPr id="24" name="Text 22"/>
-          <p:cNvSpPr/>
-          <p:nvPr/>
-        </p:nvSpPr>
-        <p:spPr>
-          <a:xfrm>
-            <a:off x="1417320" y="4498848"/>
-            <a:ext cx="7315200" cy="292608"/>
-          </a:xfrm>
-          <a:prstGeom prst="rect">
-            <a:avLst/>
-          </a:prstGeom>
-          <a:noFill/>
-          <a:ln/>
-        </p:spPr>
-        <p:txBody>
-          <a:bodyPr wrap="square" rtlCol="0" anchor="ctr"/>
-          <a:lstStyle/>
-          <a:p>
-            <a:pPr marL="0" indent="0">
-              <a:buNone/>
-            </a:pPr>
-            <a:r>
-              <a:rPr lang="en-US" sz="1000" dirty="0">
-                <a:solidFill>
-                  <a:srgbClr val="A8B8D0"/>
-                </a:solidFill>
-                <a:latin typeface="Calibri" pitchFamily="34" charset="0"/>
-                <a:ea typeface="Calibri" pitchFamily="34" charset="-122"/>
-                <a:cs typeface="Calibri" pitchFamily="34" charset="-120"/>
-              </a:rPr>
-              <a:t>Optimizacion de hiperparametros (GridSearch), anadir antiguedad y certificacion energetica</a:t>
-            </a:r>
-            <a:endParaRPr lang="en-US" sz="1000" dirty="0"/>
-          </a:p>
-        </p:txBody>
-      </p:sp>
-    </p:spTree>
-  </p:cSld>
-  <p:clrMapOvr>
-    <a:masterClrMapping/>
-  </p:clrMapOvr>
-</p:sld>
-</file>
-
-<file path=ppt/slides/slide8.xml><?xml version="1.0" encoding="utf-8"?>
-<p:sld xmlns:a="http://schemas.openxmlformats.org/drawingml/2006/main" xmlns:r="http://schemas.openxmlformats.org/officeDocument/2006/relationships" xmlns:p="http://schemas.openxmlformats.org/presentationml/2006/main">
-  <p:cSld>
-    <p:spTree>
-      <p:nvGrpSpPr>
-        <p:cNvPr id="1" name="">
-          <a:extLst>
-            <a:ext uri="{FF2B5EF4-FFF2-40B4-BE49-F238E27FC236}">
-              <a16:creationId xmlns:a16="http://schemas.microsoft.com/office/drawing/2014/main" id="{1B969C4B-AC3E-4562-31CD-C84F255D7638}"/>
-            </a:ext>
-          </a:extLst>
-        </p:cNvPr>
-        <p:cNvGrpSpPr/>
-        <p:nvPr/>
-      </p:nvGrpSpPr>
-      <p:grpSpPr>
-        <a:xfrm>
-          <a:off x="0" y="0"/>
-          <a:ext cx="0" cy="0"/>
-          <a:chOff x="0" y="0"/>
-          <a:chExt cx="0" cy="0"/>
-        </a:xfrm>
-      </p:grpSpPr>
-      <p:sp>
-        <p:nvSpPr>
-          <p:cNvPr id="2" name="Shape 0">
-            <a:extLst>
-              <a:ext uri="{FF2B5EF4-FFF2-40B4-BE49-F238E27FC236}">
-                <a16:creationId xmlns:a16="http://schemas.microsoft.com/office/drawing/2014/main" id="{51495F34-905F-E0A1-697A-5D666402577B}"/>
-              </a:ext>
-            </a:extLst>
-          </p:cNvPr>
-          <p:cNvSpPr/>
-          <p:nvPr/>
-        </p:nvSpPr>
-        <p:spPr>
-          <a:xfrm>
-            <a:off x="0" y="0"/>
             <a:ext cx="9144000" cy="5143500"/>
           </a:xfrm>
           <a:prstGeom prst="rect">
@@ -12365,13 +11703,7 @@
       </p:sp>
       <p:sp>
         <p:nvSpPr>
-          <p:cNvPr id="3" name="Shape 1">
-            <a:extLst>
-              <a:ext uri="{FF2B5EF4-FFF2-40B4-BE49-F238E27FC236}">
-                <a16:creationId xmlns:a16="http://schemas.microsoft.com/office/drawing/2014/main" id="{E2EB8050-8E9D-E431-F2E4-ED36DA6454BA}"/>
-              </a:ext>
-            </a:extLst>
-          </p:cNvPr>
+          <p:cNvPr id="3" name="Shape 1"/>
           <p:cNvSpPr/>
           <p:nvPr/>
         </p:nvSpPr>
@@ -12403,13 +11735,7 @@
       </p:sp>
       <p:sp>
         <p:nvSpPr>
-          <p:cNvPr id="4" name="Text 2">
-            <a:extLst>
-              <a:ext uri="{FF2B5EF4-FFF2-40B4-BE49-F238E27FC236}">
-                <a16:creationId xmlns:a16="http://schemas.microsoft.com/office/drawing/2014/main" id="{6E8F6756-D8D2-1260-6E41-7042566611DB}"/>
-              </a:ext>
-            </a:extLst>
-          </p:cNvPr>
+          <p:cNvPr id="4" name="Text 2"/>
           <p:cNvSpPr/>
           <p:nvPr/>
         </p:nvSpPr>
@@ -12440,7 +11766,7 @@
                 <a:ea typeface="Calibri" pitchFamily="34" charset="-122"/>
                 <a:cs typeface="Calibri" pitchFamily="34" charset="-120"/>
               </a:rPr>
-              <a:t>ANEXOS</a:t>
+              <a:t>¡Gracias!</a:t>
             </a:r>
             <a:endParaRPr lang="en-US" sz="5600" dirty="0"/>
           </a:p>
@@ -12448,13 +11774,7 @@
       </p:sp>
       <p:sp>
         <p:nvSpPr>
-          <p:cNvPr id="5" name="Text 3">
-            <a:extLst>
-              <a:ext uri="{FF2B5EF4-FFF2-40B4-BE49-F238E27FC236}">
-                <a16:creationId xmlns:a16="http://schemas.microsoft.com/office/drawing/2014/main" id="{40355A41-8D7D-21D2-3E69-F4A2EBD323F6}"/>
-              </a:ext>
-            </a:extLst>
-          </p:cNvPr>
+          <p:cNvPr id="5" name="Text 3"/>
           <p:cNvSpPr/>
           <p:nvPr/>
         </p:nvSpPr>
@@ -12493,13 +11813,7 @@
       </p:sp>
       <p:sp>
         <p:nvSpPr>
-          <p:cNvPr id="6" name="Text 4">
-            <a:extLst>
-              <a:ext uri="{FF2B5EF4-FFF2-40B4-BE49-F238E27FC236}">
-                <a16:creationId xmlns:a16="http://schemas.microsoft.com/office/drawing/2014/main" id="{F59EEF4D-AAD4-8F0C-67F7-85780AA78A25}"/>
-              </a:ext>
-            </a:extLst>
-          </p:cNvPr>
+          <p:cNvPr id="6" name="Text 4"/>
           <p:cNvSpPr/>
           <p:nvPr/>
         </p:nvSpPr>
@@ -12538,13 +11852,7 @@
       </p:sp>
       <p:sp>
         <p:nvSpPr>
-          <p:cNvPr id="7" name="Text 5">
-            <a:extLst>
-              <a:ext uri="{FF2B5EF4-FFF2-40B4-BE49-F238E27FC236}">
-                <a16:creationId xmlns:a16="http://schemas.microsoft.com/office/drawing/2014/main" id="{881CE660-43BA-421D-4588-0B94E53CD780}"/>
-              </a:ext>
-            </a:extLst>
-          </p:cNvPr>
+          <p:cNvPr id="7" name="Text 5"/>
           <p:cNvSpPr/>
           <p:nvPr/>
         </p:nvSpPr>
@@ -12582,2242 +11890,6 @@
         </p:txBody>
       </p:sp>
     </p:spTree>
-    <p:extLst>
-      <p:ext uri="{BB962C8B-B14F-4D97-AF65-F5344CB8AC3E}">
-        <p14:creationId xmlns:p14="http://schemas.microsoft.com/office/powerpoint/2010/main" val="1169360617"/>
-      </p:ext>
-    </p:extLst>
-  </p:cSld>
-  <p:clrMapOvr>
-    <a:masterClrMapping/>
-  </p:clrMapOvr>
-</p:sld>
-</file>
-
-<file path=ppt/slides/slide9.xml><?xml version="1.0" encoding="utf-8"?>
-<p:sld xmlns:a="http://schemas.openxmlformats.org/drawingml/2006/main" xmlns:r="http://schemas.openxmlformats.org/officeDocument/2006/relationships" xmlns:p="http://schemas.openxmlformats.org/presentationml/2006/main">
-  <p:cSld>
-    <p:spTree>
-      <p:nvGrpSpPr>
-        <p:cNvPr id="1" name="">
-          <a:extLst>
-            <a:ext uri="{FF2B5EF4-FFF2-40B4-BE49-F238E27FC236}">
-              <a16:creationId xmlns:a16="http://schemas.microsoft.com/office/drawing/2014/main" id="{BED8ABFF-7BC5-7D6C-BF09-A23ED825B50B}"/>
-            </a:ext>
-          </a:extLst>
-        </p:cNvPr>
-        <p:cNvGrpSpPr/>
-        <p:nvPr/>
-      </p:nvGrpSpPr>
-      <p:grpSpPr>
-        <a:xfrm>
-          <a:off x="0" y="0"/>
-          <a:ext cx="0" cy="0"/>
-          <a:chOff x="0" y="0"/>
-          <a:chExt cx="0" cy="0"/>
-        </a:xfrm>
-      </p:grpSpPr>
-      <p:sp>
-        <p:nvSpPr>
-          <p:cNvPr id="2" name="Shape 0">
-            <a:extLst>
-              <a:ext uri="{FF2B5EF4-FFF2-40B4-BE49-F238E27FC236}">
-                <a16:creationId xmlns:a16="http://schemas.microsoft.com/office/drawing/2014/main" id="{70EA69C9-BB22-90BF-A733-D9F1109D3121}"/>
-              </a:ext>
-            </a:extLst>
-          </p:cNvPr>
-          <p:cNvSpPr/>
-          <p:nvPr/>
-        </p:nvSpPr>
-        <p:spPr>
-          <a:xfrm>
-            <a:off x="0" y="0"/>
-            <a:ext cx="9144000" cy="914400"/>
-          </a:xfrm>
-          <a:prstGeom prst="rect">
-            <a:avLst/>
-          </a:prstGeom>
-          <a:solidFill>
-            <a:srgbClr val="1A2744"/>
-          </a:solidFill>
-          <a:ln w="12700">
-            <a:solidFill>
-              <a:srgbClr val="1A2744"/>
-            </a:solidFill>
-            <a:prstDash val="solid"/>
-          </a:ln>
-        </p:spPr>
-        <p:txBody>
-          <a:bodyPr/>
-          <a:lstStyle/>
-          <a:p>
-            <a:endParaRPr lang="es-ES"/>
-          </a:p>
-        </p:txBody>
-      </p:sp>
-      <p:sp>
-        <p:nvSpPr>
-          <p:cNvPr id="3" name="Text 1">
-            <a:extLst>
-              <a:ext uri="{FF2B5EF4-FFF2-40B4-BE49-F238E27FC236}">
-                <a16:creationId xmlns:a16="http://schemas.microsoft.com/office/drawing/2014/main" id="{76DE1628-F668-2E11-446A-5B8744ED9CCB}"/>
-              </a:ext>
-            </a:extLst>
-          </p:cNvPr>
-          <p:cNvSpPr/>
-          <p:nvPr/>
-        </p:nvSpPr>
-        <p:spPr>
-          <a:xfrm>
-            <a:off x="457200" y="0"/>
-            <a:ext cx="8229600" cy="914400"/>
-          </a:xfrm>
-          <a:prstGeom prst="rect">
-            <a:avLst/>
-          </a:prstGeom>
-          <a:noFill/>
-          <a:ln/>
-        </p:spPr>
-        <p:txBody>
-          <a:bodyPr wrap="square" rtlCol="0" anchor="ctr"/>
-          <a:lstStyle/>
-          <a:p>
-            <a:pPr marL="0" indent="0" algn="l">
-              <a:buNone/>
-            </a:pPr>
-            <a:r>
-              <a:rPr lang="en-US" sz="2400" b="1" dirty="0">
-                <a:solidFill>
-                  <a:srgbClr val="FFFFFF"/>
-                </a:solidFill>
-                <a:latin typeface="Calibri" pitchFamily="34" charset="0"/>
-                <a:ea typeface="Calibri" pitchFamily="34" charset="-122"/>
-                <a:cs typeface="Calibri" pitchFamily="34" charset="-120"/>
-              </a:rPr>
-              <a:t>Resultados — Comparativa de Modelos</a:t>
-            </a:r>
-            <a:endParaRPr lang="en-US" sz="2400" dirty="0"/>
-          </a:p>
-        </p:txBody>
-      </p:sp>
-      <p:graphicFrame>
-        <p:nvGraphicFramePr>
-          <p:cNvPr id="8" name="Table 0">
-            <a:extLst>
-              <a:ext uri="{FF2B5EF4-FFF2-40B4-BE49-F238E27FC236}">
-                <a16:creationId xmlns:a16="http://schemas.microsoft.com/office/drawing/2014/main" id="{9342B014-AD37-3797-9141-6927D625C805}"/>
-              </a:ext>
-            </a:extLst>
-          </p:cNvPr>
-          <p:cNvGraphicFramePr>
-            <a:graphicFrameLocks noGrp="1"/>
-          </p:cNvGraphicFramePr>
-          <p:nvPr>
-            <p:extLst>
-              <p:ext uri="{D42A27DB-BD31-4B8C-83A1-F6EECF244321}">
-                <p14:modId xmlns:p14="http://schemas.microsoft.com/office/powerpoint/2010/main" val="921885173"/>
-              </p:ext>
-            </p:extLst>
-          </p:nvPr>
-        </p:nvGraphicFramePr>
-        <p:xfrm>
-          <a:off x="0" y="1120140"/>
-          <a:ext cx="9144000" cy="1609344"/>
-        </p:xfrm>
-        <a:graphic>
-          <a:graphicData uri="http://schemas.openxmlformats.org/drawingml/2006/table">
-            <a:tbl>
-              <a:tblPr/>
-              <a:tblGrid>
-                <a:gridCol w="2560320">
-                  <a:extLst>
-                    <a:ext uri="{9D8B030D-6E8A-4147-A177-3AD203B41FA5}">
-                      <a16:colId xmlns:a16="http://schemas.microsoft.com/office/drawing/2014/main" val="20000"/>
-                    </a:ext>
-                  </a:extLst>
-                </a:gridCol>
-                <a:gridCol w="1645920">
-                  <a:extLst>
-                    <a:ext uri="{9D8B030D-6E8A-4147-A177-3AD203B41FA5}">
-                      <a16:colId xmlns:a16="http://schemas.microsoft.com/office/drawing/2014/main" val="20001"/>
-                    </a:ext>
-                  </a:extLst>
-                </a:gridCol>
-                <a:gridCol w="1645920">
-                  <a:extLst>
-                    <a:ext uri="{9D8B030D-6E8A-4147-A177-3AD203B41FA5}">
-                      <a16:colId xmlns:a16="http://schemas.microsoft.com/office/drawing/2014/main" val="20002"/>
-                    </a:ext>
-                  </a:extLst>
-                </a:gridCol>
-                <a:gridCol w="1097280">
-                  <a:extLst>
-                    <a:ext uri="{9D8B030D-6E8A-4147-A177-3AD203B41FA5}">
-                      <a16:colId xmlns:a16="http://schemas.microsoft.com/office/drawing/2014/main" val="20003"/>
-                    </a:ext>
-                  </a:extLst>
-                </a:gridCol>
-                <a:gridCol w="2194560">
-                  <a:extLst>
-                    <a:ext uri="{9D8B030D-6E8A-4147-A177-3AD203B41FA5}">
-                      <a16:colId xmlns:a16="http://schemas.microsoft.com/office/drawing/2014/main" val="20004"/>
-                    </a:ext>
-                  </a:extLst>
-                </a:gridCol>
-              </a:tblGrid>
-              <a:tr h="402336">
-                <a:tc>
-                  <a:txBody>
-                    <a:bodyPr/>
-                    <a:lstStyle/>
-                    <a:p>
-                      <a:pPr marL="0" indent="0">
-                        <a:buNone/>
-                      </a:pPr>
-                      <a:r>
-                        <a:rPr lang="en-US" sz="1200" b="1" dirty="0">
-                          <a:solidFill>
-                            <a:srgbClr val="FFFFFF"/>
-                          </a:solidFill>
-                          <a:latin typeface="Calibri" pitchFamily="34" charset="0"/>
-                          <a:ea typeface="Calibri" pitchFamily="34" charset="-122"/>
-                          <a:cs typeface="Calibri" pitchFamily="34" charset="-120"/>
-                        </a:rPr>
-                        <a:t>Modelo</a:t>
-                      </a:r>
-                      <a:endParaRPr lang="en-US" sz="1200" dirty="0">
-                        <a:latin typeface="Calibri" charset="0"/>
-                        <a:ea typeface="Calibri" charset="0"/>
-                        <a:cs typeface="Calibri" charset="0"/>
-                      </a:endParaRPr>
-                    </a:p>
-                  </a:txBody>
-                  <a:tcPr>
-                    <a:lnL w="6350" cap="flat" cmpd="sng" algn="ctr">
-                      <a:solidFill>
-                        <a:srgbClr val="D1D9E0"/>
-                      </a:solidFill>
-                      <a:prstDash val="solid"/>
-                      <a:round/>
-                      <a:headEnd type="none" w="med" len="med"/>
-                      <a:tailEnd type="none" w="med" len="med"/>
-                    </a:lnL>
-                    <a:lnR w="6350" cap="flat" cmpd="sng" algn="ctr">
-                      <a:solidFill>
-                        <a:srgbClr val="D1D9E0"/>
-                      </a:solidFill>
-                      <a:prstDash val="solid"/>
-                      <a:round/>
-                      <a:headEnd type="none" w="med" len="med"/>
-                      <a:tailEnd type="none" w="med" len="med"/>
-                    </a:lnR>
-                    <a:lnT w="6350" cap="flat" cmpd="sng" algn="ctr">
-                      <a:solidFill>
-                        <a:srgbClr val="D1D9E0"/>
-                      </a:solidFill>
-                      <a:prstDash val="solid"/>
-                      <a:round/>
-                      <a:headEnd type="none" w="med" len="med"/>
-                      <a:tailEnd type="none" w="med" len="med"/>
-                    </a:lnT>
-                    <a:lnB w="6350" cap="flat" cmpd="sng" algn="ctr">
-                      <a:solidFill>
-                        <a:srgbClr val="D1D9E0"/>
-                      </a:solidFill>
-                      <a:prstDash val="solid"/>
-                      <a:round/>
-                      <a:headEnd type="none" w="med" len="med"/>
-                      <a:tailEnd type="none" w="med" len="med"/>
-                    </a:lnB>
-                    <a:solidFill>
-                      <a:srgbClr val="1A2744"/>
-                    </a:solidFill>
-                  </a:tcPr>
-                </a:tc>
-                <a:tc>
-                  <a:txBody>
-                    <a:bodyPr/>
-                    <a:lstStyle/>
-                    <a:p>
-                      <a:pPr marL="0" indent="0">
-                        <a:buNone/>
-                      </a:pPr>
-                      <a:r>
-                        <a:rPr lang="en-US" sz="1200" b="1" dirty="0">
-                          <a:solidFill>
-                            <a:srgbClr val="FFFFFF"/>
-                          </a:solidFill>
-                          <a:latin typeface="Calibri" pitchFamily="34" charset="0"/>
-                          <a:ea typeface="Calibri" pitchFamily="34" charset="-122"/>
-                          <a:cs typeface="Calibri" pitchFamily="34" charset="-120"/>
-                        </a:rPr>
-                        <a:t>RMSE (€/m²)</a:t>
-                      </a:r>
-                      <a:endParaRPr lang="en-US" sz="1200" dirty="0">
-                        <a:latin typeface="Calibri" charset="0"/>
-                        <a:ea typeface="Calibri" charset="0"/>
-                        <a:cs typeface="Calibri" charset="0"/>
-                      </a:endParaRPr>
-                    </a:p>
-                  </a:txBody>
-                  <a:tcPr>
-                    <a:lnL w="6350" cap="flat" cmpd="sng" algn="ctr">
-                      <a:solidFill>
-                        <a:srgbClr val="D1D9E0"/>
-                      </a:solidFill>
-                      <a:prstDash val="solid"/>
-                      <a:round/>
-                      <a:headEnd type="none" w="med" len="med"/>
-                      <a:tailEnd type="none" w="med" len="med"/>
-                    </a:lnL>
-                    <a:lnR w="6350" cap="flat" cmpd="sng" algn="ctr">
-                      <a:solidFill>
-                        <a:srgbClr val="D1D9E0"/>
-                      </a:solidFill>
-                      <a:prstDash val="solid"/>
-                      <a:round/>
-                      <a:headEnd type="none" w="med" len="med"/>
-                      <a:tailEnd type="none" w="med" len="med"/>
-                    </a:lnR>
-                    <a:lnT w="6350" cap="flat" cmpd="sng" algn="ctr">
-                      <a:solidFill>
-                        <a:srgbClr val="D1D9E0"/>
-                      </a:solidFill>
-                      <a:prstDash val="solid"/>
-                      <a:round/>
-                      <a:headEnd type="none" w="med" len="med"/>
-                      <a:tailEnd type="none" w="med" len="med"/>
-                    </a:lnT>
-                    <a:lnB w="6350" cap="flat" cmpd="sng" algn="ctr">
-                      <a:solidFill>
-                        <a:srgbClr val="D1D9E0"/>
-                      </a:solidFill>
-                      <a:prstDash val="solid"/>
-                      <a:round/>
-                      <a:headEnd type="none" w="med" len="med"/>
-                      <a:tailEnd type="none" w="med" len="med"/>
-                    </a:lnB>
-                    <a:solidFill>
-                      <a:srgbClr val="1A2744"/>
-                    </a:solidFill>
-                  </a:tcPr>
-                </a:tc>
-                <a:tc>
-                  <a:txBody>
-                    <a:bodyPr/>
-                    <a:lstStyle/>
-                    <a:p>
-                      <a:pPr marL="0" indent="0">
-                        <a:buNone/>
-                      </a:pPr>
-                      <a:r>
-                        <a:rPr lang="en-US" sz="1200" b="1" dirty="0">
-                          <a:solidFill>
-                            <a:srgbClr val="FFFFFF"/>
-                          </a:solidFill>
-                          <a:latin typeface="Calibri" pitchFamily="34" charset="0"/>
-                          <a:ea typeface="Calibri" pitchFamily="34" charset="-122"/>
-                          <a:cs typeface="Calibri" pitchFamily="34" charset="-120"/>
-                        </a:rPr>
-                        <a:t>MAE (€/m²)</a:t>
-                      </a:r>
-                      <a:endParaRPr lang="en-US" sz="1200" dirty="0">
-                        <a:latin typeface="Calibri" charset="0"/>
-                        <a:ea typeface="Calibri" charset="0"/>
-                        <a:cs typeface="Calibri" charset="0"/>
-                      </a:endParaRPr>
-                    </a:p>
-                  </a:txBody>
-                  <a:tcPr>
-                    <a:lnL w="6350" cap="flat" cmpd="sng" algn="ctr">
-                      <a:solidFill>
-                        <a:srgbClr val="D1D9E0"/>
-                      </a:solidFill>
-                      <a:prstDash val="solid"/>
-                      <a:round/>
-                      <a:headEnd type="none" w="med" len="med"/>
-                      <a:tailEnd type="none" w="med" len="med"/>
-                    </a:lnL>
-                    <a:lnR w="6350" cap="flat" cmpd="sng" algn="ctr">
-                      <a:solidFill>
-                        <a:srgbClr val="D1D9E0"/>
-                      </a:solidFill>
-                      <a:prstDash val="solid"/>
-                      <a:round/>
-                      <a:headEnd type="none" w="med" len="med"/>
-                      <a:tailEnd type="none" w="med" len="med"/>
-                    </a:lnR>
-                    <a:lnT w="6350" cap="flat" cmpd="sng" algn="ctr">
-                      <a:solidFill>
-                        <a:srgbClr val="D1D9E0"/>
-                      </a:solidFill>
-                      <a:prstDash val="solid"/>
-                      <a:round/>
-                      <a:headEnd type="none" w="med" len="med"/>
-                      <a:tailEnd type="none" w="med" len="med"/>
-                    </a:lnT>
-                    <a:lnB w="6350" cap="flat" cmpd="sng" algn="ctr">
-                      <a:solidFill>
-                        <a:srgbClr val="D1D9E0"/>
-                      </a:solidFill>
-                      <a:prstDash val="solid"/>
-                      <a:round/>
-                      <a:headEnd type="none" w="med" len="med"/>
-                      <a:tailEnd type="none" w="med" len="med"/>
-                    </a:lnB>
-                    <a:solidFill>
-                      <a:srgbClr val="1A2744"/>
-                    </a:solidFill>
-                  </a:tcPr>
-                </a:tc>
-                <a:tc>
-                  <a:txBody>
-                    <a:bodyPr/>
-                    <a:lstStyle/>
-                    <a:p>
-                      <a:pPr marL="0" indent="0">
-                        <a:buNone/>
-                      </a:pPr>
-                      <a:r>
-                        <a:rPr lang="en-US" sz="1200" b="1" dirty="0">
-                          <a:solidFill>
-                            <a:srgbClr val="FFFFFF"/>
-                          </a:solidFill>
-                          <a:latin typeface="Calibri" pitchFamily="34" charset="0"/>
-                          <a:ea typeface="Calibri" pitchFamily="34" charset="-122"/>
-                          <a:cs typeface="Calibri" pitchFamily="34" charset="-120"/>
-                        </a:rPr>
-                        <a:t>R²</a:t>
-                      </a:r>
-                      <a:endParaRPr lang="en-US" sz="1200" dirty="0">
-                        <a:latin typeface="Calibri" charset="0"/>
-                        <a:ea typeface="Calibri" charset="0"/>
-                        <a:cs typeface="Calibri" charset="0"/>
-                      </a:endParaRPr>
-                    </a:p>
-                  </a:txBody>
-                  <a:tcPr>
-                    <a:lnL w="6350" cap="flat" cmpd="sng" algn="ctr">
-                      <a:solidFill>
-                        <a:srgbClr val="D1D9E0"/>
-                      </a:solidFill>
-                      <a:prstDash val="solid"/>
-                      <a:round/>
-                      <a:headEnd type="none" w="med" len="med"/>
-                      <a:tailEnd type="none" w="med" len="med"/>
-                    </a:lnL>
-                    <a:lnR w="6350" cap="flat" cmpd="sng" algn="ctr">
-                      <a:solidFill>
-                        <a:srgbClr val="D1D9E0"/>
-                      </a:solidFill>
-                      <a:prstDash val="solid"/>
-                      <a:round/>
-                      <a:headEnd type="none" w="med" len="med"/>
-                      <a:tailEnd type="none" w="med" len="med"/>
-                    </a:lnR>
-                    <a:lnT w="6350" cap="flat" cmpd="sng" algn="ctr">
-                      <a:solidFill>
-                        <a:srgbClr val="D1D9E0"/>
-                      </a:solidFill>
-                      <a:prstDash val="solid"/>
-                      <a:round/>
-                      <a:headEnd type="none" w="med" len="med"/>
-                      <a:tailEnd type="none" w="med" len="med"/>
-                    </a:lnT>
-                    <a:lnB w="6350" cap="flat" cmpd="sng" algn="ctr">
-                      <a:solidFill>
-                        <a:srgbClr val="D1D9E0"/>
-                      </a:solidFill>
-                      <a:prstDash val="solid"/>
-                      <a:round/>
-                      <a:headEnd type="none" w="med" len="med"/>
-                      <a:tailEnd type="none" w="med" len="med"/>
-                    </a:lnB>
-                    <a:solidFill>
-                      <a:srgbClr val="1A2744"/>
-                    </a:solidFill>
-                  </a:tcPr>
-                </a:tc>
-                <a:tc>
-                  <a:txBody>
-                    <a:bodyPr/>
-                    <a:lstStyle/>
-                    <a:p>
-                      <a:pPr marL="0" indent="0">
-                        <a:buNone/>
-                      </a:pPr>
-                      <a:r>
-                        <a:rPr lang="en-US" sz="1200" b="1" dirty="0">
-                          <a:solidFill>
-                            <a:srgbClr val="FFFFFF"/>
-                          </a:solidFill>
-                          <a:latin typeface="Calibri" pitchFamily="34" charset="0"/>
-                          <a:ea typeface="Calibri" pitchFamily="34" charset="-122"/>
-                          <a:cs typeface="Calibri" pitchFamily="34" charset="-120"/>
-                        </a:rPr>
-                        <a:t>Valoración</a:t>
-                      </a:r>
-                      <a:endParaRPr lang="en-US" sz="1200" dirty="0">
-                        <a:latin typeface="Calibri" charset="0"/>
-                        <a:ea typeface="Calibri" charset="0"/>
-                        <a:cs typeface="Calibri" charset="0"/>
-                      </a:endParaRPr>
-                    </a:p>
-                  </a:txBody>
-                  <a:tcPr>
-                    <a:lnL w="6350" cap="flat" cmpd="sng" algn="ctr">
-                      <a:solidFill>
-                        <a:srgbClr val="D1D9E0"/>
-                      </a:solidFill>
-                      <a:prstDash val="solid"/>
-                      <a:round/>
-                      <a:headEnd type="none" w="med" len="med"/>
-                      <a:tailEnd type="none" w="med" len="med"/>
-                    </a:lnL>
-                    <a:lnR w="6350" cap="flat" cmpd="sng" algn="ctr">
-                      <a:solidFill>
-                        <a:srgbClr val="D1D9E0"/>
-                      </a:solidFill>
-                      <a:prstDash val="solid"/>
-                      <a:round/>
-                      <a:headEnd type="none" w="med" len="med"/>
-                      <a:tailEnd type="none" w="med" len="med"/>
-                    </a:lnR>
-                    <a:lnT w="6350" cap="flat" cmpd="sng" algn="ctr">
-                      <a:solidFill>
-                        <a:srgbClr val="D1D9E0"/>
-                      </a:solidFill>
-                      <a:prstDash val="solid"/>
-                      <a:round/>
-                      <a:headEnd type="none" w="med" len="med"/>
-                      <a:tailEnd type="none" w="med" len="med"/>
-                    </a:lnT>
-                    <a:lnB w="6350" cap="flat" cmpd="sng" algn="ctr">
-                      <a:solidFill>
-                        <a:srgbClr val="D1D9E0"/>
-                      </a:solidFill>
-                      <a:prstDash val="solid"/>
-                      <a:round/>
-                      <a:headEnd type="none" w="med" len="med"/>
-                      <a:tailEnd type="none" w="med" len="med"/>
-                    </a:lnB>
-                    <a:solidFill>
-                      <a:srgbClr val="1A2744"/>
-                    </a:solidFill>
-                  </a:tcPr>
-                </a:tc>
-                <a:extLst>
-                  <a:ext uri="{0D108BD9-81ED-4DB2-BD59-A6C34878D82A}">
-                    <a16:rowId xmlns:a16="http://schemas.microsoft.com/office/drawing/2014/main" val="10000"/>
-                  </a:ext>
-                </a:extLst>
-              </a:tr>
-              <a:tr h="402336">
-                <a:tc>
-                  <a:txBody>
-                    <a:bodyPr/>
-                    <a:lstStyle/>
-                    <a:p>
-                      <a:pPr marL="0" indent="0">
-                        <a:buNone/>
-                      </a:pPr>
-                      <a:r>
-                        <a:rPr lang="en-US" sz="1200" dirty="0">
-                          <a:solidFill>
-                            <a:srgbClr val="000000"/>
-                          </a:solidFill>
-                          <a:latin typeface="Calibri" pitchFamily="34" charset="0"/>
-                          <a:ea typeface="Calibri" pitchFamily="34" charset="-122"/>
-                          <a:cs typeface="Calibri" pitchFamily="34" charset="-120"/>
-                        </a:rPr>
-                        <a:t>Regresión Lineal</a:t>
-                      </a:r>
-                      <a:endParaRPr lang="en-US" sz="1200" dirty="0">
-                        <a:latin typeface="Calibri" charset="0"/>
-                        <a:ea typeface="Calibri" charset="0"/>
-                        <a:cs typeface="Calibri" charset="0"/>
-                      </a:endParaRPr>
-                    </a:p>
-                  </a:txBody>
-                  <a:tcPr>
-                    <a:lnL w="6350" cap="flat" cmpd="sng" algn="ctr">
-                      <a:solidFill>
-                        <a:srgbClr val="D1D9E0"/>
-                      </a:solidFill>
-                      <a:prstDash val="solid"/>
-                      <a:round/>
-                      <a:headEnd type="none" w="med" len="med"/>
-                      <a:tailEnd type="none" w="med" len="med"/>
-                    </a:lnL>
-                    <a:lnR w="6350" cap="flat" cmpd="sng" algn="ctr">
-                      <a:solidFill>
-                        <a:srgbClr val="D1D9E0"/>
-                      </a:solidFill>
-                      <a:prstDash val="solid"/>
-                      <a:round/>
-                      <a:headEnd type="none" w="med" len="med"/>
-                      <a:tailEnd type="none" w="med" len="med"/>
-                    </a:lnR>
-                    <a:lnT w="6350" cap="flat" cmpd="sng" algn="ctr">
-                      <a:solidFill>
-                        <a:srgbClr val="D1D9E0"/>
-                      </a:solidFill>
-                      <a:prstDash val="solid"/>
-                      <a:round/>
-                      <a:headEnd type="none" w="med" len="med"/>
-                      <a:tailEnd type="none" w="med" len="med"/>
-                    </a:lnT>
-                    <a:lnB w="6350" cap="flat" cmpd="sng" algn="ctr">
-                      <a:solidFill>
-                        <a:srgbClr val="D1D9E0"/>
-                      </a:solidFill>
-                      <a:prstDash val="solid"/>
-                      <a:round/>
-                      <a:headEnd type="none" w="med" len="med"/>
-                      <a:tailEnd type="none" w="med" len="med"/>
-                    </a:lnB>
-                  </a:tcPr>
-                </a:tc>
-                <a:tc>
-                  <a:txBody>
-                    <a:bodyPr/>
-                    <a:lstStyle/>
-                    <a:p>
-                      <a:pPr marL="0" indent="0">
-                        <a:buNone/>
-                      </a:pPr>
-                      <a:r>
-                        <a:rPr lang="en-US" sz="1200" dirty="0">
-                          <a:solidFill>
-                            <a:srgbClr val="000000"/>
-                          </a:solidFill>
-                          <a:latin typeface="Calibri" pitchFamily="34" charset="0"/>
-                          <a:ea typeface="Calibri" pitchFamily="34" charset="-122"/>
-                          <a:cs typeface="Calibri" pitchFamily="34" charset="-120"/>
-                        </a:rPr>
-                        <a:t>~450</a:t>
-                      </a:r>
-                      <a:endParaRPr lang="en-US" sz="1200" dirty="0">
-                        <a:latin typeface="Calibri" charset="0"/>
-                        <a:ea typeface="Calibri" charset="0"/>
-                        <a:cs typeface="Calibri" charset="0"/>
-                      </a:endParaRPr>
-                    </a:p>
-                  </a:txBody>
-                  <a:tcPr>
-                    <a:lnL w="6350" cap="flat" cmpd="sng" algn="ctr">
-                      <a:solidFill>
-                        <a:srgbClr val="D1D9E0"/>
-                      </a:solidFill>
-                      <a:prstDash val="solid"/>
-                      <a:round/>
-                      <a:headEnd type="none" w="med" len="med"/>
-                      <a:tailEnd type="none" w="med" len="med"/>
-                    </a:lnL>
-                    <a:lnR w="6350" cap="flat" cmpd="sng" algn="ctr">
-                      <a:solidFill>
-                        <a:srgbClr val="D1D9E0"/>
-                      </a:solidFill>
-                      <a:prstDash val="solid"/>
-                      <a:round/>
-                      <a:headEnd type="none" w="med" len="med"/>
-                      <a:tailEnd type="none" w="med" len="med"/>
-                    </a:lnR>
-                    <a:lnT w="6350" cap="flat" cmpd="sng" algn="ctr">
-                      <a:solidFill>
-                        <a:srgbClr val="D1D9E0"/>
-                      </a:solidFill>
-                      <a:prstDash val="solid"/>
-                      <a:round/>
-                      <a:headEnd type="none" w="med" len="med"/>
-                      <a:tailEnd type="none" w="med" len="med"/>
-                    </a:lnT>
-                    <a:lnB w="6350" cap="flat" cmpd="sng" algn="ctr">
-                      <a:solidFill>
-                        <a:srgbClr val="D1D9E0"/>
-                      </a:solidFill>
-                      <a:prstDash val="solid"/>
-                      <a:round/>
-                      <a:headEnd type="none" w="med" len="med"/>
-                      <a:tailEnd type="none" w="med" len="med"/>
-                    </a:lnB>
-                  </a:tcPr>
-                </a:tc>
-                <a:tc>
-                  <a:txBody>
-                    <a:bodyPr/>
-                    <a:lstStyle/>
-                    <a:p>
-                      <a:pPr marL="0" indent="0">
-                        <a:buNone/>
-                      </a:pPr>
-                      <a:r>
-                        <a:rPr lang="en-US" sz="1200" dirty="0">
-                          <a:solidFill>
-                            <a:srgbClr val="000000"/>
-                          </a:solidFill>
-                          <a:latin typeface="Calibri" pitchFamily="34" charset="0"/>
-                          <a:ea typeface="Calibri" pitchFamily="34" charset="-122"/>
-                          <a:cs typeface="Calibri" pitchFamily="34" charset="-120"/>
-                        </a:rPr>
-                        <a:t>~320</a:t>
-                      </a:r>
-                      <a:endParaRPr lang="en-US" sz="1200" dirty="0">
-                        <a:latin typeface="Calibri" charset="0"/>
-                        <a:ea typeface="Calibri" charset="0"/>
-                        <a:cs typeface="Calibri" charset="0"/>
-                      </a:endParaRPr>
-                    </a:p>
-                  </a:txBody>
-                  <a:tcPr>
-                    <a:lnL w="6350" cap="flat" cmpd="sng" algn="ctr">
-                      <a:solidFill>
-                        <a:srgbClr val="D1D9E0"/>
-                      </a:solidFill>
-                      <a:prstDash val="solid"/>
-                      <a:round/>
-                      <a:headEnd type="none" w="med" len="med"/>
-                      <a:tailEnd type="none" w="med" len="med"/>
-                    </a:lnL>
-                    <a:lnR w="6350" cap="flat" cmpd="sng" algn="ctr">
-                      <a:solidFill>
-                        <a:srgbClr val="D1D9E0"/>
-                      </a:solidFill>
-                      <a:prstDash val="solid"/>
-                      <a:round/>
-                      <a:headEnd type="none" w="med" len="med"/>
-                      <a:tailEnd type="none" w="med" len="med"/>
-                    </a:lnR>
-                    <a:lnT w="6350" cap="flat" cmpd="sng" algn="ctr">
-                      <a:solidFill>
-                        <a:srgbClr val="D1D9E0"/>
-                      </a:solidFill>
-                      <a:prstDash val="solid"/>
-                      <a:round/>
-                      <a:headEnd type="none" w="med" len="med"/>
-                      <a:tailEnd type="none" w="med" len="med"/>
-                    </a:lnT>
-                    <a:lnB w="6350" cap="flat" cmpd="sng" algn="ctr">
-                      <a:solidFill>
-                        <a:srgbClr val="D1D9E0"/>
-                      </a:solidFill>
-                      <a:prstDash val="solid"/>
-                      <a:round/>
-                      <a:headEnd type="none" w="med" len="med"/>
-                      <a:tailEnd type="none" w="med" len="med"/>
-                    </a:lnB>
-                  </a:tcPr>
-                </a:tc>
-                <a:tc>
-                  <a:txBody>
-                    <a:bodyPr/>
-                    <a:lstStyle/>
-                    <a:p>
-                      <a:pPr marL="0" indent="0">
-                        <a:buNone/>
-                      </a:pPr>
-                      <a:r>
-                        <a:rPr lang="en-US" sz="1200" dirty="0">
-                          <a:solidFill>
-                            <a:srgbClr val="000000"/>
-                          </a:solidFill>
-                          <a:latin typeface="Calibri" pitchFamily="34" charset="0"/>
-                          <a:ea typeface="Calibri" pitchFamily="34" charset="-122"/>
-                          <a:cs typeface="Calibri" pitchFamily="34" charset="-120"/>
-                        </a:rPr>
-                        <a:t>~0.60</a:t>
-                      </a:r>
-                      <a:endParaRPr lang="en-US" sz="1200" dirty="0">
-                        <a:latin typeface="Calibri" charset="0"/>
-                        <a:ea typeface="Calibri" charset="0"/>
-                        <a:cs typeface="Calibri" charset="0"/>
-                      </a:endParaRPr>
-                    </a:p>
-                  </a:txBody>
-                  <a:tcPr>
-                    <a:lnL w="6350" cap="flat" cmpd="sng" algn="ctr">
-                      <a:solidFill>
-                        <a:srgbClr val="D1D9E0"/>
-                      </a:solidFill>
-                      <a:prstDash val="solid"/>
-                      <a:round/>
-                      <a:headEnd type="none" w="med" len="med"/>
-                      <a:tailEnd type="none" w="med" len="med"/>
-                    </a:lnL>
-                    <a:lnR w="6350" cap="flat" cmpd="sng" algn="ctr">
-                      <a:solidFill>
-                        <a:srgbClr val="D1D9E0"/>
-                      </a:solidFill>
-                      <a:prstDash val="solid"/>
-                      <a:round/>
-                      <a:headEnd type="none" w="med" len="med"/>
-                      <a:tailEnd type="none" w="med" len="med"/>
-                    </a:lnR>
-                    <a:lnT w="6350" cap="flat" cmpd="sng" algn="ctr">
-                      <a:solidFill>
-                        <a:srgbClr val="D1D9E0"/>
-                      </a:solidFill>
-                      <a:prstDash val="solid"/>
-                      <a:round/>
-                      <a:headEnd type="none" w="med" len="med"/>
-                      <a:tailEnd type="none" w="med" len="med"/>
-                    </a:lnT>
-                    <a:lnB w="6350" cap="flat" cmpd="sng" algn="ctr">
-                      <a:solidFill>
-                        <a:srgbClr val="D1D9E0"/>
-                      </a:solidFill>
-                      <a:prstDash val="solid"/>
-                      <a:round/>
-                      <a:headEnd type="none" w="med" len="med"/>
-                      <a:tailEnd type="none" w="med" len="med"/>
-                    </a:lnB>
-                  </a:tcPr>
-                </a:tc>
-                <a:tc>
-                  <a:txBody>
-                    <a:bodyPr/>
-                    <a:lstStyle/>
-                    <a:p>
-                      <a:pPr marL="0" indent="0">
-                        <a:buNone/>
-                      </a:pPr>
-                      <a:r>
-                        <a:rPr lang="en-US" sz="1200" dirty="0">
-                          <a:solidFill>
-                            <a:srgbClr val="64748B"/>
-                          </a:solidFill>
-                          <a:latin typeface="Calibri" pitchFamily="34" charset="0"/>
-                          <a:ea typeface="Calibri" pitchFamily="34" charset="-122"/>
-                          <a:cs typeface="Calibri" pitchFamily="34" charset="-120"/>
-                        </a:rPr>
-                        <a:t>Modelo base</a:t>
-                      </a:r>
-                      <a:endParaRPr lang="en-US" sz="1200" dirty="0">
-                        <a:latin typeface="Calibri" charset="0"/>
-                        <a:ea typeface="Calibri" charset="0"/>
-                        <a:cs typeface="Calibri" charset="0"/>
-                      </a:endParaRPr>
-                    </a:p>
-                  </a:txBody>
-                  <a:tcPr>
-                    <a:lnL w="6350" cap="flat" cmpd="sng" algn="ctr">
-                      <a:solidFill>
-                        <a:srgbClr val="D1D9E0"/>
-                      </a:solidFill>
-                      <a:prstDash val="solid"/>
-                      <a:round/>
-                      <a:headEnd type="none" w="med" len="med"/>
-                      <a:tailEnd type="none" w="med" len="med"/>
-                    </a:lnL>
-                    <a:lnR w="6350" cap="flat" cmpd="sng" algn="ctr">
-                      <a:solidFill>
-                        <a:srgbClr val="D1D9E0"/>
-                      </a:solidFill>
-                      <a:prstDash val="solid"/>
-                      <a:round/>
-                      <a:headEnd type="none" w="med" len="med"/>
-                      <a:tailEnd type="none" w="med" len="med"/>
-                    </a:lnR>
-                    <a:lnT w="6350" cap="flat" cmpd="sng" algn="ctr">
-                      <a:solidFill>
-                        <a:srgbClr val="D1D9E0"/>
-                      </a:solidFill>
-                      <a:prstDash val="solid"/>
-                      <a:round/>
-                      <a:headEnd type="none" w="med" len="med"/>
-                      <a:tailEnd type="none" w="med" len="med"/>
-                    </a:lnT>
-                    <a:lnB w="6350" cap="flat" cmpd="sng" algn="ctr">
-                      <a:solidFill>
-                        <a:srgbClr val="D1D9E0"/>
-                      </a:solidFill>
-                      <a:prstDash val="solid"/>
-                      <a:round/>
-                      <a:headEnd type="none" w="med" len="med"/>
-                      <a:tailEnd type="none" w="med" len="med"/>
-                    </a:lnB>
-                  </a:tcPr>
-                </a:tc>
-                <a:extLst>
-                  <a:ext uri="{0D108BD9-81ED-4DB2-BD59-A6C34878D82A}">
-                    <a16:rowId xmlns:a16="http://schemas.microsoft.com/office/drawing/2014/main" val="10001"/>
-                  </a:ext>
-                </a:extLst>
-              </a:tr>
-              <a:tr h="402336">
-                <a:tc>
-                  <a:txBody>
-                    <a:bodyPr/>
-                    <a:lstStyle/>
-                    <a:p>
-                      <a:pPr marL="0" indent="0">
-                        <a:buNone/>
-                      </a:pPr>
-                      <a:r>
-                        <a:rPr lang="en-US" sz="1200" dirty="0">
-                          <a:solidFill>
-                            <a:srgbClr val="000000"/>
-                          </a:solidFill>
-                          <a:latin typeface="Calibri" pitchFamily="34" charset="0"/>
-                          <a:ea typeface="Calibri" pitchFamily="34" charset="-122"/>
-                          <a:cs typeface="Calibri" pitchFamily="34" charset="-120"/>
-                        </a:rPr>
-                        <a:t>Árbol de Decisión</a:t>
-                      </a:r>
-                      <a:endParaRPr lang="en-US" sz="1200" dirty="0">
-                        <a:latin typeface="Calibri" charset="0"/>
-                        <a:ea typeface="Calibri" charset="0"/>
-                        <a:cs typeface="Calibri" charset="0"/>
-                      </a:endParaRPr>
-                    </a:p>
-                  </a:txBody>
-                  <a:tcPr>
-                    <a:lnL w="6350" cap="flat" cmpd="sng" algn="ctr">
-                      <a:solidFill>
-                        <a:srgbClr val="D1D9E0"/>
-                      </a:solidFill>
-                      <a:prstDash val="solid"/>
-                      <a:round/>
-                      <a:headEnd type="none" w="med" len="med"/>
-                      <a:tailEnd type="none" w="med" len="med"/>
-                    </a:lnL>
-                    <a:lnR w="6350" cap="flat" cmpd="sng" algn="ctr">
-                      <a:solidFill>
-                        <a:srgbClr val="D1D9E0"/>
-                      </a:solidFill>
-                      <a:prstDash val="solid"/>
-                      <a:round/>
-                      <a:headEnd type="none" w="med" len="med"/>
-                      <a:tailEnd type="none" w="med" len="med"/>
-                    </a:lnR>
-                    <a:lnT w="6350" cap="flat" cmpd="sng" algn="ctr">
-                      <a:solidFill>
-                        <a:srgbClr val="D1D9E0"/>
-                      </a:solidFill>
-                      <a:prstDash val="solid"/>
-                      <a:round/>
-                      <a:headEnd type="none" w="med" len="med"/>
-                      <a:tailEnd type="none" w="med" len="med"/>
-                    </a:lnT>
-                    <a:lnB w="6350" cap="flat" cmpd="sng" algn="ctr">
-                      <a:solidFill>
-                        <a:srgbClr val="D1D9E0"/>
-                      </a:solidFill>
-                      <a:prstDash val="solid"/>
-                      <a:round/>
-                      <a:headEnd type="none" w="med" len="med"/>
-                      <a:tailEnd type="none" w="med" len="med"/>
-                    </a:lnB>
-                  </a:tcPr>
-                </a:tc>
-                <a:tc>
-                  <a:txBody>
-                    <a:bodyPr/>
-                    <a:lstStyle/>
-                    <a:p>
-                      <a:pPr marL="0" indent="0">
-                        <a:buNone/>
-                      </a:pPr>
-                      <a:r>
-                        <a:rPr lang="en-US" sz="1200" dirty="0">
-                          <a:solidFill>
-                            <a:srgbClr val="000000"/>
-                          </a:solidFill>
-                          <a:latin typeface="Calibri" pitchFamily="34" charset="0"/>
-                          <a:ea typeface="Calibri" pitchFamily="34" charset="-122"/>
-                          <a:cs typeface="Calibri" pitchFamily="34" charset="-120"/>
-                        </a:rPr>
-                        <a:t>~380</a:t>
-                      </a:r>
-                      <a:endParaRPr lang="en-US" sz="1200" dirty="0">
-                        <a:latin typeface="Calibri" charset="0"/>
-                        <a:ea typeface="Calibri" charset="0"/>
-                        <a:cs typeface="Calibri" charset="0"/>
-                      </a:endParaRPr>
-                    </a:p>
-                  </a:txBody>
-                  <a:tcPr>
-                    <a:lnL w="6350" cap="flat" cmpd="sng" algn="ctr">
-                      <a:solidFill>
-                        <a:srgbClr val="D1D9E0"/>
-                      </a:solidFill>
-                      <a:prstDash val="solid"/>
-                      <a:round/>
-                      <a:headEnd type="none" w="med" len="med"/>
-                      <a:tailEnd type="none" w="med" len="med"/>
-                    </a:lnL>
-                    <a:lnR w="6350" cap="flat" cmpd="sng" algn="ctr">
-                      <a:solidFill>
-                        <a:srgbClr val="D1D9E0"/>
-                      </a:solidFill>
-                      <a:prstDash val="solid"/>
-                      <a:round/>
-                      <a:headEnd type="none" w="med" len="med"/>
-                      <a:tailEnd type="none" w="med" len="med"/>
-                    </a:lnR>
-                    <a:lnT w="6350" cap="flat" cmpd="sng" algn="ctr">
-                      <a:solidFill>
-                        <a:srgbClr val="D1D9E0"/>
-                      </a:solidFill>
-                      <a:prstDash val="solid"/>
-                      <a:round/>
-                      <a:headEnd type="none" w="med" len="med"/>
-                      <a:tailEnd type="none" w="med" len="med"/>
-                    </a:lnT>
-                    <a:lnB w="6350" cap="flat" cmpd="sng" algn="ctr">
-                      <a:solidFill>
-                        <a:srgbClr val="D1D9E0"/>
-                      </a:solidFill>
-                      <a:prstDash val="solid"/>
-                      <a:round/>
-                      <a:headEnd type="none" w="med" len="med"/>
-                      <a:tailEnd type="none" w="med" len="med"/>
-                    </a:lnB>
-                  </a:tcPr>
-                </a:tc>
-                <a:tc>
-                  <a:txBody>
-                    <a:bodyPr/>
-                    <a:lstStyle/>
-                    <a:p>
-                      <a:pPr marL="0" indent="0">
-                        <a:buNone/>
-                      </a:pPr>
-                      <a:r>
-                        <a:rPr lang="en-US" sz="1200" dirty="0">
-                          <a:solidFill>
-                            <a:srgbClr val="000000"/>
-                          </a:solidFill>
-                          <a:latin typeface="Calibri" pitchFamily="34" charset="0"/>
-                          <a:ea typeface="Calibri" pitchFamily="34" charset="-122"/>
-                          <a:cs typeface="Calibri" pitchFamily="34" charset="-120"/>
-                        </a:rPr>
-                        <a:t>~270</a:t>
-                      </a:r>
-                      <a:endParaRPr lang="en-US" sz="1200" dirty="0">
-                        <a:latin typeface="Calibri" charset="0"/>
-                        <a:ea typeface="Calibri" charset="0"/>
-                        <a:cs typeface="Calibri" charset="0"/>
-                      </a:endParaRPr>
-                    </a:p>
-                  </a:txBody>
-                  <a:tcPr>
-                    <a:lnL w="6350" cap="flat" cmpd="sng" algn="ctr">
-                      <a:solidFill>
-                        <a:srgbClr val="D1D9E0"/>
-                      </a:solidFill>
-                      <a:prstDash val="solid"/>
-                      <a:round/>
-                      <a:headEnd type="none" w="med" len="med"/>
-                      <a:tailEnd type="none" w="med" len="med"/>
-                    </a:lnL>
-                    <a:lnR w="6350" cap="flat" cmpd="sng" algn="ctr">
-                      <a:solidFill>
-                        <a:srgbClr val="D1D9E0"/>
-                      </a:solidFill>
-                      <a:prstDash val="solid"/>
-                      <a:round/>
-                      <a:headEnd type="none" w="med" len="med"/>
-                      <a:tailEnd type="none" w="med" len="med"/>
-                    </a:lnR>
-                    <a:lnT w="6350" cap="flat" cmpd="sng" algn="ctr">
-                      <a:solidFill>
-                        <a:srgbClr val="D1D9E0"/>
-                      </a:solidFill>
-                      <a:prstDash val="solid"/>
-                      <a:round/>
-                      <a:headEnd type="none" w="med" len="med"/>
-                      <a:tailEnd type="none" w="med" len="med"/>
-                    </a:lnT>
-                    <a:lnB w="6350" cap="flat" cmpd="sng" algn="ctr">
-                      <a:solidFill>
-                        <a:srgbClr val="D1D9E0"/>
-                      </a:solidFill>
-                      <a:prstDash val="solid"/>
-                      <a:round/>
-                      <a:headEnd type="none" w="med" len="med"/>
-                      <a:tailEnd type="none" w="med" len="med"/>
-                    </a:lnB>
-                  </a:tcPr>
-                </a:tc>
-                <a:tc>
-                  <a:txBody>
-                    <a:bodyPr/>
-                    <a:lstStyle/>
-                    <a:p>
-                      <a:pPr marL="0" indent="0">
-                        <a:buNone/>
-                      </a:pPr>
-                      <a:r>
-                        <a:rPr lang="en-US" sz="1200" dirty="0">
-                          <a:solidFill>
-                            <a:srgbClr val="000000"/>
-                          </a:solidFill>
-                          <a:latin typeface="Calibri" pitchFamily="34" charset="0"/>
-                          <a:ea typeface="Calibri" pitchFamily="34" charset="-122"/>
-                          <a:cs typeface="Calibri" pitchFamily="34" charset="-120"/>
-                        </a:rPr>
-                        <a:t>~0.70</a:t>
-                      </a:r>
-                      <a:endParaRPr lang="en-US" sz="1200" dirty="0">
-                        <a:latin typeface="Calibri" charset="0"/>
-                        <a:ea typeface="Calibri" charset="0"/>
-                        <a:cs typeface="Calibri" charset="0"/>
-                      </a:endParaRPr>
-                    </a:p>
-                  </a:txBody>
-                  <a:tcPr>
-                    <a:lnL w="6350" cap="flat" cmpd="sng" algn="ctr">
-                      <a:solidFill>
-                        <a:srgbClr val="D1D9E0"/>
-                      </a:solidFill>
-                      <a:prstDash val="solid"/>
-                      <a:round/>
-                      <a:headEnd type="none" w="med" len="med"/>
-                      <a:tailEnd type="none" w="med" len="med"/>
-                    </a:lnL>
-                    <a:lnR w="6350" cap="flat" cmpd="sng" algn="ctr">
-                      <a:solidFill>
-                        <a:srgbClr val="D1D9E0"/>
-                      </a:solidFill>
-                      <a:prstDash val="solid"/>
-                      <a:round/>
-                      <a:headEnd type="none" w="med" len="med"/>
-                      <a:tailEnd type="none" w="med" len="med"/>
-                    </a:lnR>
-                    <a:lnT w="6350" cap="flat" cmpd="sng" algn="ctr">
-                      <a:solidFill>
-                        <a:srgbClr val="D1D9E0"/>
-                      </a:solidFill>
-                      <a:prstDash val="solid"/>
-                      <a:round/>
-                      <a:headEnd type="none" w="med" len="med"/>
-                      <a:tailEnd type="none" w="med" len="med"/>
-                    </a:lnT>
-                    <a:lnB w="6350" cap="flat" cmpd="sng" algn="ctr">
-                      <a:solidFill>
-                        <a:srgbClr val="D1D9E0"/>
-                      </a:solidFill>
-                      <a:prstDash val="solid"/>
-                      <a:round/>
-                      <a:headEnd type="none" w="med" len="med"/>
-                      <a:tailEnd type="none" w="med" len="med"/>
-                    </a:lnB>
-                  </a:tcPr>
-                </a:tc>
-                <a:tc>
-                  <a:txBody>
-                    <a:bodyPr/>
-                    <a:lstStyle/>
-                    <a:p>
-                      <a:pPr marL="0" indent="0">
-                        <a:buNone/>
-                      </a:pPr>
-                      <a:r>
-                        <a:rPr lang="en-US" sz="1200" dirty="0">
-                          <a:solidFill>
-                            <a:srgbClr val="0D7377"/>
-                          </a:solidFill>
-                          <a:latin typeface="Calibri" pitchFamily="34" charset="0"/>
-                          <a:ea typeface="Calibri" pitchFamily="34" charset="-122"/>
-                          <a:cs typeface="Calibri" pitchFamily="34" charset="-120"/>
-                        </a:rPr>
-                        <a:t>Mejora notable</a:t>
-                      </a:r>
-                      <a:endParaRPr lang="en-US" sz="1200" dirty="0">
-                        <a:latin typeface="Calibri" charset="0"/>
-                        <a:ea typeface="Calibri" charset="0"/>
-                        <a:cs typeface="Calibri" charset="0"/>
-                      </a:endParaRPr>
-                    </a:p>
-                  </a:txBody>
-                  <a:tcPr>
-                    <a:lnL w="6350" cap="flat" cmpd="sng" algn="ctr">
-                      <a:solidFill>
-                        <a:srgbClr val="D1D9E0"/>
-                      </a:solidFill>
-                      <a:prstDash val="solid"/>
-                      <a:round/>
-                      <a:headEnd type="none" w="med" len="med"/>
-                      <a:tailEnd type="none" w="med" len="med"/>
-                    </a:lnL>
-                    <a:lnR w="6350" cap="flat" cmpd="sng" algn="ctr">
-                      <a:solidFill>
-                        <a:srgbClr val="D1D9E0"/>
-                      </a:solidFill>
-                      <a:prstDash val="solid"/>
-                      <a:round/>
-                      <a:headEnd type="none" w="med" len="med"/>
-                      <a:tailEnd type="none" w="med" len="med"/>
-                    </a:lnR>
-                    <a:lnT w="6350" cap="flat" cmpd="sng" algn="ctr">
-                      <a:solidFill>
-                        <a:srgbClr val="D1D9E0"/>
-                      </a:solidFill>
-                      <a:prstDash val="solid"/>
-                      <a:round/>
-                      <a:headEnd type="none" w="med" len="med"/>
-                      <a:tailEnd type="none" w="med" len="med"/>
-                    </a:lnT>
-                    <a:lnB w="6350" cap="flat" cmpd="sng" algn="ctr">
-                      <a:solidFill>
-                        <a:srgbClr val="D1D9E0"/>
-                      </a:solidFill>
-                      <a:prstDash val="solid"/>
-                      <a:round/>
-                      <a:headEnd type="none" w="med" len="med"/>
-                      <a:tailEnd type="none" w="med" len="med"/>
-                    </a:lnB>
-                  </a:tcPr>
-                </a:tc>
-                <a:extLst>
-                  <a:ext uri="{0D108BD9-81ED-4DB2-BD59-A6C34878D82A}">
-                    <a16:rowId xmlns:a16="http://schemas.microsoft.com/office/drawing/2014/main" val="10002"/>
-                  </a:ext>
-                </a:extLst>
-              </a:tr>
-              <a:tr h="402336">
-                <a:tc>
-                  <a:txBody>
-                    <a:bodyPr/>
-                    <a:lstStyle/>
-                    <a:p>
-                      <a:pPr marL="0" indent="0">
-                        <a:buNone/>
-                      </a:pPr>
-                      <a:r>
-                        <a:rPr lang="en-US" sz="1200" b="1" dirty="0">
-                          <a:solidFill>
-                            <a:srgbClr val="000000"/>
-                          </a:solidFill>
-                          <a:latin typeface="Calibri" pitchFamily="34" charset="0"/>
-                          <a:ea typeface="Calibri" pitchFamily="34" charset="-122"/>
-                          <a:cs typeface="Calibri" pitchFamily="34" charset="-120"/>
-                        </a:rPr>
-                        <a:t>🏆 Random Forest</a:t>
-                      </a:r>
-                      <a:endParaRPr lang="en-US" sz="1200" dirty="0">
-                        <a:latin typeface="Calibri" charset="0"/>
-                        <a:ea typeface="Calibri" charset="0"/>
-                        <a:cs typeface="Calibri" charset="0"/>
-                      </a:endParaRPr>
-                    </a:p>
-                  </a:txBody>
-                  <a:tcPr>
-                    <a:lnL w="6350" cap="flat" cmpd="sng" algn="ctr">
-                      <a:solidFill>
-                        <a:srgbClr val="D1D9E0"/>
-                      </a:solidFill>
-                      <a:prstDash val="solid"/>
-                      <a:round/>
-                      <a:headEnd type="none" w="med" len="med"/>
-                      <a:tailEnd type="none" w="med" len="med"/>
-                    </a:lnL>
-                    <a:lnR w="6350" cap="flat" cmpd="sng" algn="ctr">
-                      <a:solidFill>
-                        <a:srgbClr val="D1D9E0"/>
-                      </a:solidFill>
-                      <a:prstDash val="solid"/>
-                      <a:round/>
-                      <a:headEnd type="none" w="med" len="med"/>
-                      <a:tailEnd type="none" w="med" len="med"/>
-                    </a:lnR>
-                    <a:lnT w="6350" cap="flat" cmpd="sng" algn="ctr">
-                      <a:solidFill>
-                        <a:srgbClr val="D1D9E0"/>
-                      </a:solidFill>
-                      <a:prstDash val="solid"/>
-                      <a:round/>
-                      <a:headEnd type="none" w="med" len="med"/>
-                      <a:tailEnd type="none" w="med" len="med"/>
-                    </a:lnT>
-                    <a:lnB w="6350" cap="flat" cmpd="sng" algn="ctr">
-                      <a:solidFill>
-                        <a:srgbClr val="D1D9E0"/>
-                      </a:solidFill>
-                      <a:prstDash val="solid"/>
-                      <a:round/>
-                      <a:headEnd type="none" w="med" len="med"/>
-                      <a:tailEnd type="none" w="med" len="med"/>
-                    </a:lnB>
-                    <a:solidFill>
-                      <a:srgbClr val="E8F5E9"/>
-                    </a:solidFill>
-                  </a:tcPr>
-                </a:tc>
-                <a:tc>
-                  <a:txBody>
-                    <a:bodyPr/>
-                    <a:lstStyle/>
-                    <a:p>
-                      <a:pPr marL="0" indent="0">
-                        <a:buNone/>
-                      </a:pPr>
-                      <a:r>
-                        <a:rPr lang="en-US" sz="1200" b="1" dirty="0">
-                          <a:solidFill>
-                            <a:srgbClr val="000000"/>
-                          </a:solidFill>
-                          <a:latin typeface="Calibri" pitchFamily="34" charset="0"/>
-                          <a:ea typeface="Calibri" pitchFamily="34" charset="-122"/>
-                          <a:cs typeface="Calibri" pitchFamily="34" charset="-120"/>
-                        </a:rPr>
-                        <a:t>~310</a:t>
-                      </a:r>
-                      <a:endParaRPr lang="en-US" sz="1200" dirty="0">
-                        <a:latin typeface="Calibri" charset="0"/>
-                        <a:ea typeface="Calibri" charset="0"/>
-                        <a:cs typeface="Calibri" charset="0"/>
-                      </a:endParaRPr>
-                    </a:p>
-                  </a:txBody>
-                  <a:tcPr>
-                    <a:lnL w="6350" cap="flat" cmpd="sng" algn="ctr">
-                      <a:solidFill>
-                        <a:srgbClr val="D1D9E0"/>
-                      </a:solidFill>
-                      <a:prstDash val="solid"/>
-                      <a:round/>
-                      <a:headEnd type="none" w="med" len="med"/>
-                      <a:tailEnd type="none" w="med" len="med"/>
-                    </a:lnL>
-                    <a:lnR w="6350" cap="flat" cmpd="sng" algn="ctr">
-                      <a:solidFill>
-                        <a:srgbClr val="D1D9E0"/>
-                      </a:solidFill>
-                      <a:prstDash val="solid"/>
-                      <a:round/>
-                      <a:headEnd type="none" w="med" len="med"/>
-                      <a:tailEnd type="none" w="med" len="med"/>
-                    </a:lnR>
-                    <a:lnT w="6350" cap="flat" cmpd="sng" algn="ctr">
-                      <a:solidFill>
-                        <a:srgbClr val="D1D9E0"/>
-                      </a:solidFill>
-                      <a:prstDash val="solid"/>
-                      <a:round/>
-                      <a:headEnd type="none" w="med" len="med"/>
-                      <a:tailEnd type="none" w="med" len="med"/>
-                    </a:lnT>
-                    <a:lnB w="6350" cap="flat" cmpd="sng" algn="ctr">
-                      <a:solidFill>
-                        <a:srgbClr val="D1D9E0"/>
-                      </a:solidFill>
-                      <a:prstDash val="solid"/>
-                      <a:round/>
-                      <a:headEnd type="none" w="med" len="med"/>
-                      <a:tailEnd type="none" w="med" len="med"/>
-                    </a:lnB>
-                    <a:solidFill>
-                      <a:srgbClr val="E8F5E9"/>
-                    </a:solidFill>
-                  </a:tcPr>
-                </a:tc>
-                <a:tc>
-                  <a:txBody>
-                    <a:bodyPr/>
-                    <a:lstStyle/>
-                    <a:p>
-                      <a:pPr marL="0" indent="0">
-                        <a:buNone/>
-                      </a:pPr>
-                      <a:r>
-                        <a:rPr lang="en-US" sz="1200" b="1" dirty="0">
-                          <a:solidFill>
-                            <a:srgbClr val="000000"/>
-                          </a:solidFill>
-                          <a:latin typeface="Calibri" pitchFamily="34" charset="0"/>
-                          <a:ea typeface="Calibri" pitchFamily="34" charset="-122"/>
-                          <a:cs typeface="Calibri" pitchFamily="34" charset="-120"/>
-                        </a:rPr>
-                        <a:t>~210</a:t>
-                      </a:r>
-                      <a:endParaRPr lang="en-US" sz="1200" dirty="0">
-                        <a:latin typeface="Calibri" charset="0"/>
-                        <a:ea typeface="Calibri" charset="0"/>
-                        <a:cs typeface="Calibri" charset="0"/>
-                      </a:endParaRPr>
-                    </a:p>
-                  </a:txBody>
-                  <a:tcPr>
-                    <a:lnL w="6350" cap="flat" cmpd="sng" algn="ctr">
-                      <a:solidFill>
-                        <a:srgbClr val="D1D9E0"/>
-                      </a:solidFill>
-                      <a:prstDash val="solid"/>
-                      <a:round/>
-                      <a:headEnd type="none" w="med" len="med"/>
-                      <a:tailEnd type="none" w="med" len="med"/>
-                    </a:lnL>
-                    <a:lnR w="6350" cap="flat" cmpd="sng" algn="ctr">
-                      <a:solidFill>
-                        <a:srgbClr val="D1D9E0"/>
-                      </a:solidFill>
-                      <a:prstDash val="solid"/>
-                      <a:round/>
-                      <a:headEnd type="none" w="med" len="med"/>
-                      <a:tailEnd type="none" w="med" len="med"/>
-                    </a:lnR>
-                    <a:lnT w="6350" cap="flat" cmpd="sng" algn="ctr">
-                      <a:solidFill>
-                        <a:srgbClr val="D1D9E0"/>
-                      </a:solidFill>
-                      <a:prstDash val="solid"/>
-                      <a:round/>
-                      <a:headEnd type="none" w="med" len="med"/>
-                      <a:tailEnd type="none" w="med" len="med"/>
-                    </a:lnT>
-                    <a:lnB w="6350" cap="flat" cmpd="sng" algn="ctr">
-                      <a:solidFill>
-                        <a:srgbClr val="D1D9E0"/>
-                      </a:solidFill>
-                      <a:prstDash val="solid"/>
-                      <a:round/>
-                      <a:headEnd type="none" w="med" len="med"/>
-                      <a:tailEnd type="none" w="med" len="med"/>
-                    </a:lnB>
-                    <a:solidFill>
-                      <a:srgbClr val="E8F5E9"/>
-                    </a:solidFill>
-                  </a:tcPr>
-                </a:tc>
-                <a:tc>
-                  <a:txBody>
-                    <a:bodyPr/>
-                    <a:lstStyle/>
-                    <a:p>
-                      <a:pPr marL="0" indent="0">
-                        <a:buNone/>
-                      </a:pPr>
-                      <a:r>
-                        <a:rPr lang="en-US" sz="1200" b="1" dirty="0">
-                          <a:solidFill>
-                            <a:srgbClr val="000000"/>
-                          </a:solidFill>
-                          <a:latin typeface="Calibri" pitchFamily="34" charset="0"/>
-                          <a:ea typeface="Calibri" pitchFamily="34" charset="-122"/>
-                          <a:cs typeface="Calibri" pitchFamily="34" charset="-120"/>
-                        </a:rPr>
-                        <a:t>~0.82</a:t>
-                      </a:r>
-                      <a:endParaRPr lang="en-US" sz="1200" dirty="0">
-                        <a:latin typeface="Calibri" charset="0"/>
-                        <a:ea typeface="Calibri" charset="0"/>
-                        <a:cs typeface="Calibri" charset="0"/>
-                      </a:endParaRPr>
-                    </a:p>
-                  </a:txBody>
-                  <a:tcPr>
-                    <a:lnL w="6350" cap="flat" cmpd="sng" algn="ctr">
-                      <a:solidFill>
-                        <a:srgbClr val="D1D9E0"/>
-                      </a:solidFill>
-                      <a:prstDash val="solid"/>
-                      <a:round/>
-                      <a:headEnd type="none" w="med" len="med"/>
-                      <a:tailEnd type="none" w="med" len="med"/>
-                    </a:lnL>
-                    <a:lnR w="6350" cap="flat" cmpd="sng" algn="ctr">
-                      <a:solidFill>
-                        <a:srgbClr val="D1D9E0"/>
-                      </a:solidFill>
-                      <a:prstDash val="solid"/>
-                      <a:round/>
-                      <a:headEnd type="none" w="med" len="med"/>
-                      <a:tailEnd type="none" w="med" len="med"/>
-                    </a:lnR>
-                    <a:lnT w="6350" cap="flat" cmpd="sng" algn="ctr">
-                      <a:solidFill>
-                        <a:srgbClr val="D1D9E0"/>
-                      </a:solidFill>
-                      <a:prstDash val="solid"/>
-                      <a:round/>
-                      <a:headEnd type="none" w="med" len="med"/>
-                      <a:tailEnd type="none" w="med" len="med"/>
-                    </a:lnT>
-                    <a:lnB w="6350" cap="flat" cmpd="sng" algn="ctr">
-                      <a:solidFill>
-                        <a:srgbClr val="D1D9E0"/>
-                      </a:solidFill>
-                      <a:prstDash val="solid"/>
-                      <a:round/>
-                      <a:headEnd type="none" w="med" len="med"/>
-                      <a:tailEnd type="none" w="med" len="med"/>
-                    </a:lnB>
-                    <a:solidFill>
-                      <a:srgbClr val="E8F5E9"/>
-                    </a:solidFill>
-                  </a:tcPr>
-                </a:tc>
-                <a:tc>
-                  <a:txBody>
-                    <a:bodyPr/>
-                    <a:lstStyle/>
-                    <a:p>
-                      <a:pPr marL="0" indent="0">
-                        <a:buNone/>
-                      </a:pPr>
-                      <a:r>
-                        <a:rPr lang="en-US" sz="1200" b="1" dirty="0">
-                          <a:solidFill>
-                            <a:srgbClr val="0D7377"/>
-                          </a:solidFill>
-                          <a:latin typeface="Calibri" pitchFamily="34" charset="0"/>
-                          <a:ea typeface="Calibri" pitchFamily="34" charset="-122"/>
-                          <a:cs typeface="Calibri" pitchFamily="34" charset="-120"/>
-                        </a:rPr>
-                        <a:t>✅ Mejor modelo</a:t>
-                      </a:r>
-                      <a:endParaRPr lang="en-US" sz="1200" dirty="0">
-                        <a:latin typeface="Calibri" charset="0"/>
-                        <a:ea typeface="Calibri" charset="0"/>
-                        <a:cs typeface="Calibri" charset="0"/>
-                      </a:endParaRPr>
-                    </a:p>
-                  </a:txBody>
-                  <a:tcPr>
-                    <a:lnL w="6350" cap="flat" cmpd="sng" algn="ctr">
-                      <a:solidFill>
-                        <a:srgbClr val="D1D9E0"/>
-                      </a:solidFill>
-                      <a:prstDash val="solid"/>
-                      <a:round/>
-                      <a:headEnd type="none" w="med" len="med"/>
-                      <a:tailEnd type="none" w="med" len="med"/>
-                    </a:lnL>
-                    <a:lnR w="6350" cap="flat" cmpd="sng" algn="ctr">
-                      <a:solidFill>
-                        <a:srgbClr val="D1D9E0"/>
-                      </a:solidFill>
-                      <a:prstDash val="solid"/>
-                      <a:round/>
-                      <a:headEnd type="none" w="med" len="med"/>
-                      <a:tailEnd type="none" w="med" len="med"/>
-                    </a:lnR>
-                    <a:lnT w="6350" cap="flat" cmpd="sng" algn="ctr">
-                      <a:solidFill>
-                        <a:srgbClr val="D1D9E0"/>
-                      </a:solidFill>
-                      <a:prstDash val="solid"/>
-                      <a:round/>
-                      <a:headEnd type="none" w="med" len="med"/>
-                      <a:tailEnd type="none" w="med" len="med"/>
-                    </a:lnT>
-                    <a:lnB w="6350" cap="flat" cmpd="sng" algn="ctr">
-                      <a:solidFill>
-                        <a:srgbClr val="D1D9E0"/>
-                      </a:solidFill>
-                      <a:prstDash val="solid"/>
-                      <a:round/>
-                      <a:headEnd type="none" w="med" len="med"/>
-                      <a:tailEnd type="none" w="med" len="med"/>
-                    </a:lnB>
-                    <a:solidFill>
-                      <a:srgbClr val="E8F5E9"/>
-                    </a:solidFill>
-                  </a:tcPr>
-                </a:tc>
-                <a:extLst>
-                  <a:ext uri="{0D108BD9-81ED-4DB2-BD59-A6C34878D82A}">
-                    <a16:rowId xmlns:a16="http://schemas.microsoft.com/office/drawing/2014/main" val="10003"/>
-                  </a:ext>
-                </a:extLst>
-              </a:tr>
-            </a:tbl>
-          </a:graphicData>
-        </a:graphic>
-      </p:graphicFrame>
-      <p:sp>
-        <p:nvSpPr>
-          <p:cNvPr id="5" name="Text 2">
-            <a:extLst>
-              <a:ext uri="{FF2B5EF4-FFF2-40B4-BE49-F238E27FC236}">
-                <a16:creationId xmlns:a16="http://schemas.microsoft.com/office/drawing/2014/main" id="{2A3869A1-1200-775F-F1B5-801BA46787D8}"/>
-              </a:ext>
-            </a:extLst>
-          </p:cNvPr>
-          <p:cNvSpPr/>
-          <p:nvPr/>
-        </p:nvSpPr>
-        <p:spPr>
-          <a:xfrm>
-            <a:off x="457200" y="3063240"/>
-            <a:ext cx="8229600" cy="365760"/>
-          </a:xfrm>
-          <a:prstGeom prst="rect">
-            <a:avLst/>
-          </a:prstGeom>
-          <a:noFill/>
-          <a:ln/>
-        </p:spPr>
-        <p:txBody>
-          <a:bodyPr wrap="square" rtlCol="0" anchor="ctr"/>
-          <a:lstStyle/>
-          <a:p>
-            <a:pPr marL="0" indent="0">
-              <a:buNone/>
-            </a:pPr>
-            <a:r>
-              <a:rPr lang="en-US" sz="1400" b="1" dirty="0">
-                <a:solidFill>
-                  <a:srgbClr val="1A2744"/>
-                </a:solidFill>
-                <a:latin typeface="Calibri" pitchFamily="34" charset="0"/>
-                <a:ea typeface="Calibri" pitchFamily="34" charset="-122"/>
-                <a:cs typeface="Calibri" pitchFamily="34" charset="-120"/>
-              </a:rPr>
-              <a:t>Top Features — Random Forest</a:t>
-            </a:r>
-            <a:endParaRPr lang="en-US" sz="1400" dirty="0"/>
-          </a:p>
-        </p:txBody>
-      </p:sp>
-      <p:sp>
-        <p:nvSpPr>
-          <p:cNvPr id="6" name="Text 3">
-            <a:extLst>
-              <a:ext uri="{FF2B5EF4-FFF2-40B4-BE49-F238E27FC236}">
-                <a16:creationId xmlns:a16="http://schemas.microsoft.com/office/drawing/2014/main" id="{2E05D144-4F72-0639-6186-A845F05FE00E}"/>
-              </a:ext>
-            </a:extLst>
-          </p:cNvPr>
-          <p:cNvSpPr/>
-          <p:nvPr/>
-        </p:nvSpPr>
-        <p:spPr>
-          <a:xfrm>
-            <a:off x="457200" y="3520440"/>
-            <a:ext cx="2011680" cy="246888"/>
-          </a:xfrm>
-          <a:prstGeom prst="rect">
-            <a:avLst/>
-          </a:prstGeom>
-          <a:noFill/>
-          <a:ln/>
-        </p:spPr>
-        <p:txBody>
-          <a:bodyPr wrap="square" rtlCol="0" anchor="ctr"/>
-          <a:lstStyle/>
-          <a:p>
-            <a:pPr marL="0" indent="0">
-              <a:buNone/>
-            </a:pPr>
-            <a:r>
-              <a:rPr lang="en-US" sz="1000" dirty="0">
-                <a:solidFill>
-                  <a:srgbClr val="1E293B"/>
-                </a:solidFill>
-                <a:latin typeface="Calibri" pitchFamily="34" charset="0"/>
-                <a:ea typeface="Calibri" pitchFamily="34" charset="-122"/>
-                <a:cs typeface="Calibri" pitchFamily="34" charset="-120"/>
-              </a:rPr>
-              <a:t>Latitud / Longitud</a:t>
-            </a:r>
-            <a:endParaRPr lang="en-US" sz="1000" dirty="0"/>
-          </a:p>
-        </p:txBody>
-      </p:sp>
-      <p:sp>
-        <p:nvSpPr>
-          <p:cNvPr id="7" name="Shape 4">
-            <a:extLst>
-              <a:ext uri="{FF2B5EF4-FFF2-40B4-BE49-F238E27FC236}">
-                <a16:creationId xmlns:a16="http://schemas.microsoft.com/office/drawing/2014/main" id="{1F05F4BF-7E7F-1C0B-B9D1-79B4C164EB7C}"/>
-              </a:ext>
-            </a:extLst>
-          </p:cNvPr>
-          <p:cNvSpPr/>
-          <p:nvPr/>
-        </p:nvSpPr>
-        <p:spPr>
-          <a:xfrm>
-            <a:off x="2514600" y="3557016"/>
-            <a:ext cx="2194560" cy="182880"/>
-          </a:xfrm>
-          <a:prstGeom prst="rect">
-            <a:avLst/>
-          </a:prstGeom>
-          <a:solidFill>
-            <a:srgbClr val="0D7377"/>
-          </a:solidFill>
-          <a:ln w="12700">
-            <a:solidFill>
-              <a:srgbClr val="0D7377"/>
-            </a:solidFill>
-            <a:prstDash val="solid"/>
-          </a:ln>
-        </p:spPr>
-        <p:txBody>
-          <a:bodyPr/>
-          <a:lstStyle/>
-          <a:p>
-            <a:endParaRPr lang="es-ES"/>
-          </a:p>
-        </p:txBody>
-      </p:sp>
-      <p:sp>
-        <p:nvSpPr>
-          <p:cNvPr id="4" name="Text 5">
-            <a:extLst>
-              <a:ext uri="{FF2B5EF4-FFF2-40B4-BE49-F238E27FC236}">
-                <a16:creationId xmlns:a16="http://schemas.microsoft.com/office/drawing/2014/main" id="{D177492D-4DDA-FEBB-295E-63D0B0E4CF83}"/>
-              </a:ext>
-            </a:extLst>
-          </p:cNvPr>
-          <p:cNvSpPr/>
-          <p:nvPr/>
-        </p:nvSpPr>
-        <p:spPr>
-          <a:xfrm>
-            <a:off x="4800600" y="3520440"/>
-            <a:ext cx="457200" cy="246888"/>
-          </a:xfrm>
-          <a:prstGeom prst="rect">
-            <a:avLst/>
-          </a:prstGeom>
-          <a:noFill/>
-          <a:ln/>
-        </p:spPr>
-        <p:txBody>
-          <a:bodyPr wrap="square" rtlCol="0" anchor="ctr"/>
-          <a:lstStyle/>
-          <a:p>
-            <a:pPr marL="0" indent="0">
-              <a:buNone/>
-            </a:pPr>
-            <a:r>
-              <a:rPr lang="en-US" sz="1000" dirty="0">
-                <a:solidFill>
-                  <a:srgbClr val="64748B"/>
-                </a:solidFill>
-                <a:latin typeface="Calibri" pitchFamily="34" charset="0"/>
-                <a:ea typeface="Calibri" pitchFamily="34" charset="-122"/>
-                <a:cs typeface="Calibri" pitchFamily="34" charset="-120"/>
-              </a:rPr>
-              <a:t>32%</a:t>
-            </a:r>
-            <a:endParaRPr lang="en-US" sz="1000" dirty="0"/>
-          </a:p>
-        </p:txBody>
-      </p:sp>
-      <p:sp>
-        <p:nvSpPr>
-          <p:cNvPr id="9" name="Text 6">
-            <a:extLst>
-              <a:ext uri="{FF2B5EF4-FFF2-40B4-BE49-F238E27FC236}">
-                <a16:creationId xmlns:a16="http://schemas.microsoft.com/office/drawing/2014/main" id="{D33A4400-D1A0-29A0-64E5-FC7A26B218F6}"/>
-              </a:ext>
-            </a:extLst>
-          </p:cNvPr>
-          <p:cNvSpPr/>
-          <p:nvPr/>
-        </p:nvSpPr>
-        <p:spPr>
-          <a:xfrm>
-            <a:off x="457200" y="3813048"/>
-            <a:ext cx="2011680" cy="246888"/>
-          </a:xfrm>
-          <a:prstGeom prst="rect">
-            <a:avLst/>
-          </a:prstGeom>
-          <a:noFill/>
-          <a:ln/>
-        </p:spPr>
-        <p:txBody>
-          <a:bodyPr wrap="square" rtlCol="0" anchor="ctr"/>
-          <a:lstStyle/>
-          <a:p>
-            <a:pPr marL="0" indent="0">
-              <a:buNone/>
-            </a:pPr>
-            <a:r>
-              <a:rPr lang="en-US" sz="1000" dirty="0">
-                <a:solidFill>
-                  <a:srgbClr val="1E293B"/>
-                </a:solidFill>
-                <a:latin typeface="Calibri" pitchFamily="34" charset="0"/>
-                <a:ea typeface="Calibri" pitchFamily="34" charset="-122"/>
-                <a:cs typeface="Calibri" pitchFamily="34" charset="-120"/>
-              </a:rPr>
-              <a:t>Superficie</a:t>
-            </a:r>
-            <a:endParaRPr lang="en-US" sz="1000" dirty="0"/>
-          </a:p>
-        </p:txBody>
-      </p:sp>
-      <p:sp>
-        <p:nvSpPr>
-          <p:cNvPr id="10" name="Shape 7">
-            <a:extLst>
-              <a:ext uri="{FF2B5EF4-FFF2-40B4-BE49-F238E27FC236}">
-                <a16:creationId xmlns:a16="http://schemas.microsoft.com/office/drawing/2014/main" id="{B10DD300-F64A-FF19-8AD0-823AA6036979}"/>
-              </a:ext>
-            </a:extLst>
-          </p:cNvPr>
-          <p:cNvSpPr/>
-          <p:nvPr/>
-        </p:nvSpPr>
-        <p:spPr>
-          <a:xfrm>
-            <a:off x="2514600" y="3849624"/>
-            <a:ext cx="1714500" cy="182880"/>
-          </a:xfrm>
-          <a:prstGeom prst="rect">
-            <a:avLst/>
-          </a:prstGeom>
-          <a:solidFill>
-            <a:srgbClr val="0D7377"/>
-          </a:solidFill>
-          <a:ln w="12700">
-            <a:solidFill>
-              <a:srgbClr val="0D7377"/>
-            </a:solidFill>
-            <a:prstDash val="solid"/>
-          </a:ln>
-        </p:spPr>
-        <p:txBody>
-          <a:bodyPr/>
-          <a:lstStyle/>
-          <a:p>
-            <a:endParaRPr lang="es-ES"/>
-          </a:p>
-        </p:txBody>
-      </p:sp>
-      <p:sp>
-        <p:nvSpPr>
-          <p:cNvPr id="11" name="Text 8">
-            <a:extLst>
-              <a:ext uri="{FF2B5EF4-FFF2-40B4-BE49-F238E27FC236}">
-                <a16:creationId xmlns:a16="http://schemas.microsoft.com/office/drawing/2014/main" id="{23A689D9-1E10-1BF5-88BF-D3C0014F5F97}"/>
-              </a:ext>
-            </a:extLst>
-          </p:cNvPr>
-          <p:cNvSpPr/>
-          <p:nvPr/>
-        </p:nvSpPr>
-        <p:spPr>
-          <a:xfrm>
-            <a:off x="4320540" y="3813048"/>
-            <a:ext cx="457200" cy="246888"/>
-          </a:xfrm>
-          <a:prstGeom prst="rect">
-            <a:avLst/>
-          </a:prstGeom>
-          <a:noFill/>
-          <a:ln/>
-        </p:spPr>
-        <p:txBody>
-          <a:bodyPr wrap="square" rtlCol="0" anchor="ctr"/>
-          <a:lstStyle/>
-          <a:p>
-            <a:pPr marL="0" indent="0">
-              <a:buNone/>
-            </a:pPr>
-            <a:r>
-              <a:rPr lang="en-US" sz="1000" dirty="0">
-                <a:solidFill>
-                  <a:srgbClr val="64748B"/>
-                </a:solidFill>
-                <a:latin typeface="Calibri" pitchFamily="34" charset="0"/>
-                <a:ea typeface="Calibri" pitchFamily="34" charset="-122"/>
-                <a:cs typeface="Calibri" pitchFamily="34" charset="-120"/>
-              </a:rPr>
-              <a:t>25%</a:t>
-            </a:r>
-            <a:endParaRPr lang="en-US" sz="1000" dirty="0"/>
-          </a:p>
-        </p:txBody>
-      </p:sp>
-      <p:sp>
-        <p:nvSpPr>
-          <p:cNvPr id="12" name="Text 9">
-            <a:extLst>
-              <a:ext uri="{FF2B5EF4-FFF2-40B4-BE49-F238E27FC236}">
-                <a16:creationId xmlns:a16="http://schemas.microsoft.com/office/drawing/2014/main" id="{C14FCE1C-6641-4CB3-AFC9-04A41F1804FB}"/>
-              </a:ext>
-            </a:extLst>
-          </p:cNvPr>
-          <p:cNvSpPr/>
-          <p:nvPr/>
-        </p:nvSpPr>
-        <p:spPr>
-          <a:xfrm>
-            <a:off x="457200" y="4105656"/>
-            <a:ext cx="2011680" cy="246888"/>
-          </a:xfrm>
-          <a:prstGeom prst="rect">
-            <a:avLst/>
-          </a:prstGeom>
-          <a:noFill/>
-          <a:ln/>
-        </p:spPr>
-        <p:txBody>
-          <a:bodyPr wrap="square" rtlCol="0" anchor="ctr"/>
-          <a:lstStyle/>
-          <a:p>
-            <a:pPr marL="0" indent="0">
-              <a:buNone/>
-            </a:pPr>
-            <a:r>
-              <a:rPr lang="en-US" sz="1000" dirty="0">
-                <a:solidFill>
-                  <a:srgbClr val="1E293B"/>
-                </a:solidFill>
-                <a:latin typeface="Calibri" pitchFamily="34" charset="0"/>
-                <a:ea typeface="Calibri" pitchFamily="34" charset="-122"/>
-                <a:cs typeface="Calibri" pitchFamily="34" charset="-120"/>
-              </a:rPr>
-              <a:t>Barrio (OHE)</a:t>
-            </a:r>
-            <a:endParaRPr lang="en-US" sz="1000" dirty="0"/>
-          </a:p>
-        </p:txBody>
-      </p:sp>
-      <p:sp>
-        <p:nvSpPr>
-          <p:cNvPr id="13" name="Shape 10">
-            <a:extLst>
-              <a:ext uri="{FF2B5EF4-FFF2-40B4-BE49-F238E27FC236}">
-                <a16:creationId xmlns:a16="http://schemas.microsoft.com/office/drawing/2014/main" id="{A415AD2F-B4D5-D59E-0EFD-07FA93AC01A2}"/>
-              </a:ext>
-            </a:extLst>
-          </p:cNvPr>
-          <p:cNvSpPr/>
-          <p:nvPr/>
-        </p:nvSpPr>
-        <p:spPr>
-          <a:xfrm>
-            <a:off x="2514600" y="4142232"/>
-            <a:ext cx="1234440" cy="182880"/>
-          </a:xfrm>
-          <a:prstGeom prst="rect">
-            <a:avLst/>
-          </a:prstGeom>
-          <a:solidFill>
-            <a:srgbClr val="E07B39"/>
-          </a:solidFill>
-          <a:ln w="12700">
-            <a:solidFill>
-              <a:srgbClr val="E07B39"/>
-            </a:solidFill>
-            <a:prstDash val="solid"/>
-          </a:ln>
-        </p:spPr>
-        <p:txBody>
-          <a:bodyPr/>
-          <a:lstStyle/>
-          <a:p>
-            <a:endParaRPr lang="es-ES"/>
-          </a:p>
-        </p:txBody>
-      </p:sp>
-      <p:sp>
-        <p:nvSpPr>
-          <p:cNvPr id="14" name="Text 11">
-            <a:extLst>
-              <a:ext uri="{FF2B5EF4-FFF2-40B4-BE49-F238E27FC236}">
-                <a16:creationId xmlns:a16="http://schemas.microsoft.com/office/drawing/2014/main" id="{1308897B-42D8-92D3-A6DB-4C453DE53073}"/>
-              </a:ext>
-            </a:extLst>
-          </p:cNvPr>
-          <p:cNvSpPr/>
-          <p:nvPr/>
-        </p:nvSpPr>
-        <p:spPr>
-          <a:xfrm>
-            <a:off x="3840480" y="4105656"/>
-            <a:ext cx="457200" cy="246888"/>
-          </a:xfrm>
-          <a:prstGeom prst="rect">
-            <a:avLst/>
-          </a:prstGeom>
-          <a:noFill/>
-          <a:ln/>
-        </p:spPr>
-        <p:txBody>
-          <a:bodyPr wrap="square" rtlCol="0" anchor="ctr"/>
-          <a:lstStyle/>
-          <a:p>
-            <a:pPr marL="0" indent="0">
-              <a:buNone/>
-            </a:pPr>
-            <a:r>
-              <a:rPr lang="en-US" sz="1000" dirty="0">
-                <a:solidFill>
-                  <a:srgbClr val="64748B"/>
-                </a:solidFill>
-                <a:latin typeface="Calibri" pitchFamily="34" charset="0"/>
-                <a:ea typeface="Calibri" pitchFamily="34" charset="-122"/>
-                <a:cs typeface="Calibri" pitchFamily="34" charset="-120"/>
-              </a:rPr>
-              <a:t>18%</a:t>
-            </a:r>
-            <a:endParaRPr lang="en-US" sz="1000" dirty="0"/>
-          </a:p>
-        </p:txBody>
-      </p:sp>
-      <p:sp>
-        <p:nvSpPr>
-          <p:cNvPr id="15" name="Text 12">
-            <a:extLst>
-              <a:ext uri="{FF2B5EF4-FFF2-40B4-BE49-F238E27FC236}">
-                <a16:creationId xmlns:a16="http://schemas.microsoft.com/office/drawing/2014/main" id="{D708B6BB-9713-6A9A-7EDB-C607C554A94B}"/>
-              </a:ext>
-            </a:extLst>
-          </p:cNvPr>
-          <p:cNvSpPr/>
-          <p:nvPr/>
-        </p:nvSpPr>
-        <p:spPr>
-          <a:xfrm>
-            <a:off x="457200" y="4398264"/>
-            <a:ext cx="2011680" cy="246888"/>
-          </a:xfrm>
-          <a:prstGeom prst="rect">
-            <a:avLst/>
-          </a:prstGeom>
-          <a:noFill/>
-          <a:ln/>
-        </p:spPr>
-        <p:txBody>
-          <a:bodyPr wrap="square" rtlCol="0" anchor="ctr"/>
-          <a:lstStyle/>
-          <a:p>
-            <a:pPr marL="0" indent="0">
-              <a:buNone/>
-            </a:pPr>
-            <a:r>
-              <a:rPr lang="en-US" sz="1000" dirty="0">
-                <a:solidFill>
-                  <a:srgbClr val="1E293B"/>
-                </a:solidFill>
-                <a:latin typeface="Calibri" pitchFamily="34" charset="0"/>
-                <a:ea typeface="Calibri" pitchFamily="34" charset="-122"/>
-                <a:cs typeface="Calibri" pitchFamily="34" charset="-120"/>
-              </a:rPr>
-              <a:t>Baños</a:t>
-            </a:r>
-            <a:endParaRPr lang="en-US" sz="1000" dirty="0"/>
-          </a:p>
-        </p:txBody>
-      </p:sp>
-      <p:sp>
-        <p:nvSpPr>
-          <p:cNvPr id="16" name="Shape 13">
-            <a:extLst>
-              <a:ext uri="{FF2B5EF4-FFF2-40B4-BE49-F238E27FC236}">
-                <a16:creationId xmlns:a16="http://schemas.microsoft.com/office/drawing/2014/main" id="{561C803A-DF42-8F55-AEBA-0C9AFEA86541}"/>
-              </a:ext>
-            </a:extLst>
-          </p:cNvPr>
-          <p:cNvSpPr/>
-          <p:nvPr/>
-        </p:nvSpPr>
-        <p:spPr>
-          <a:xfrm>
-            <a:off x="2514600" y="4434840"/>
-            <a:ext cx="822960" cy="182880"/>
-          </a:xfrm>
-          <a:prstGeom prst="rect">
-            <a:avLst/>
-          </a:prstGeom>
-          <a:solidFill>
-            <a:srgbClr val="E07B39"/>
-          </a:solidFill>
-          <a:ln w="12700">
-            <a:solidFill>
-              <a:srgbClr val="E07B39"/>
-            </a:solidFill>
-            <a:prstDash val="solid"/>
-          </a:ln>
-        </p:spPr>
-        <p:txBody>
-          <a:bodyPr/>
-          <a:lstStyle/>
-          <a:p>
-            <a:endParaRPr lang="es-ES"/>
-          </a:p>
-        </p:txBody>
-      </p:sp>
-      <p:sp>
-        <p:nvSpPr>
-          <p:cNvPr id="17" name="Text 14">
-            <a:extLst>
-              <a:ext uri="{FF2B5EF4-FFF2-40B4-BE49-F238E27FC236}">
-                <a16:creationId xmlns:a16="http://schemas.microsoft.com/office/drawing/2014/main" id="{A464375A-CDB3-3DE6-5646-E64CFF1B63D5}"/>
-              </a:ext>
-            </a:extLst>
-          </p:cNvPr>
-          <p:cNvSpPr/>
-          <p:nvPr/>
-        </p:nvSpPr>
-        <p:spPr>
-          <a:xfrm>
-            <a:off x="3429000" y="4398264"/>
-            <a:ext cx="457200" cy="246888"/>
-          </a:xfrm>
-          <a:prstGeom prst="rect">
-            <a:avLst/>
-          </a:prstGeom>
-          <a:noFill/>
-          <a:ln/>
-        </p:spPr>
-        <p:txBody>
-          <a:bodyPr wrap="square" rtlCol="0" anchor="ctr"/>
-          <a:lstStyle/>
-          <a:p>
-            <a:pPr marL="0" indent="0">
-              <a:buNone/>
-            </a:pPr>
-            <a:r>
-              <a:rPr lang="en-US" sz="1000" dirty="0">
-                <a:solidFill>
-                  <a:srgbClr val="64748B"/>
-                </a:solidFill>
-                <a:latin typeface="Calibri" pitchFamily="34" charset="0"/>
-                <a:ea typeface="Calibri" pitchFamily="34" charset="-122"/>
-                <a:cs typeface="Calibri" pitchFamily="34" charset="-120"/>
-              </a:rPr>
-              <a:t>12%</a:t>
-            </a:r>
-            <a:endParaRPr lang="en-US" sz="1000" dirty="0"/>
-          </a:p>
-        </p:txBody>
-      </p:sp>
-      <p:sp>
-        <p:nvSpPr>
-          <p:cNvPr id="18" name="Text 15">
-            <a:extLst>
-              <a:ext uri="{FF2B5EF4-FFF2-40B4-BE49-F238E27FC236}">
-                <a16:creationId xmlns:a16="http://schemas.microsoft.com/office/drawing/2014/main" id="{AE95EA2F-BF99-0BB8-608C-FB0AE3187FD5}"/>
-              </a:ext>
-            </a:extLst>
-          </p:cNvPr>
-          <p:cNvSpPr/>
-          <p:nvPr/>
-        </p:nvSpPr>
-        <p:spPr>
-          <a:xfrm>
-            <a:off x="457200" y="4690872"/>
-            <a:ext cx="2011680" cy="246888"/>
-          </a:xfrm>
-          <a:prstGeom prst="rect">
-            <a:avLst/>
-          </a:prstGeom>
-          <a:noFill/>
-          <a:ln/>
-        </p:spPr>
-        <p:txBody>
-          <a:bodyPr wrap="square" rtlCol="0" anchor="ctr"/>
-          <a:lstStyle/>
-          <a:p>
-            <a:pPr marL="0" indent="0">
-              <a:buNone/>
-            </a:pPr>
-            <a:r>
-              <a:rPr lang="en-US" sz="1000" dirty="0">
-                <a:solidFill>
-                  <a:srgbClr val="1E293B"/>
-                </a:solidFill>
-                <a:latin typeface="Calibri" pitchFamily="34" charset="0"/>
-                <a:ea typeface="Calibri" pitchFamily="34" charset="-122"/>
-                <a:cs typeface="Calibri" pitchFamily="34" charset="-120"/>
-              </a:rPr>
-              <a:t>Dormitorios</a:t>
-            </a:r>
-            <a:endParaRPr lang="en-US" sz="1000" dirty="0"/>
-          </a:p>
-        </p:txBody>
-      </p:sp>
-      <p:sp>
-        <p:nvSpPr>
-          <p:cNvPr id="19" name="Shape 16">
-            <a:extLst>
-              <a:ext uri="{FF2B5EF4-FFF2-40B4-BE49-F238E27FC236}">
-                <a16:creationId xmlns:a16="http://schemas.microsoft.com/office/drawing/2014/main" id="{0AFE9B3E-5430-DE6F-8CA7-F292F453D2EC}"/>
-              </a:ext>
-            </a:extLst>
-          </p:cNvPr>
-          <p:cNvSpPr/>
-          <p:nvPr/>
-        </p:nvSpPr>
-        <p:spPr>
-          <a:xfrm>
-            <a:off x="2514600" y="4727448"/>
-            <a:ext cx="548640" cy="182880"/>
-          </a:xfrm>
-          <a:prstGeom prst="rect">
-            <a:avLst/>
-          </a:prstGeom>
-          <a:solidFill>
-            <a:srgbClr val="64748B"/>
-          </a:solidFill>
-          <a:ln w="12700">
-            <a:solidFill>
-              <a:srgbClr val="64748B"/>
-            </a:solidFill>
-            <a:prstDash val="solid"/>
-          </a:ln>
-        </p:spPr>
-        <p:txBody>
-          <a:bodyPr/>
-          <a:lstStyle/>
-          <a:p>
-            <a:endParaRPr lang="es-ES"/>
-          </a:p>
-        </p:txBody>
-      </p:sp>
-      <p:sp>
-        <p:nvSpPr>
-          <p:cNvPr id="20" name="Text 17">
-            <a:extLst>
-              <a:ext uri="{FF2B5EF4-FFF2-40B4-BE49-F238E27FC236}">
-                <a16:creationId xmlns:a16="http://schemas.microsoft.com/office/drawing/2014/main" id="{D13B263F-6F51-2D54-A86F-39C639FAF93F}"/>
-              </a:ext>
-            </a:extLst>
-          </p:cNvPr>
-          <p:cNvSpPr/>
-          <p:nvPr/>
-        </p:nvSpPr>
-        <p:spPr>
-          <a:xfrm>
-            <a:off x="3154680" y="4690872"/>
-            <a:ext cx="457200" cy="246888"/>
-          </a:xfrm>
-          <a:prstGeom prst="rect">
-            <a:avLst/>
-          </a:prstGeom>
-          <a:noFill/>
-          <a:ln/>
-        </p:spPr>
-        <p:txBody>
-          <a:bodyPr wrap="square" rtlCol="0" anchor="ctr"/>
-          <a:lstStyle/>
-          <a:p>
-            <a:pPr marL="0" indent="0">
-              <a:buNone/>
-            </a:pPr>
-            <a:r>
-              <a:rPr lang="en-US" sz="1000" dirty="0">
-                <a:solidFill>
-                  <a:srgbClr val="64748B"/>
-                </a:solidFill>
-                <a:latin typeface="Calibri" pitchFamily="34" charset="0"/>
-                <a:ea typeface="Calibri" pitchFamily="34" charset="-122"/>
-                <a:cs typeface="Calibri" pitchFamily="34" charset="-120"/>
-              </a:rPr>
-              <a:t>8%</a:t>
-            </a:r>
-            <a:endParaRPr lang="en-US" sz="1000" dirty="0"/>
-          </a:p>
-        </p:txBody>
-      </p:sp>
-    </p:spTree>
-    <p:extLst>
-      <p:ext uri="{BB962C8B-B14F-4D97-AF65-F5344CB8AC3E}">
-        <p14:creationId xmlns:p14="http://schemas.microsoft.com/office/powerpoint/2010/main" val="3707589325"/>
-      </p:ext>
-    </p:extLst>
   </p:cSld>
   <p:clrMapOvr>
     <a:masterClrMapping/>
